--- a/納品レポート/ホテル別レポート/comfort_era_higashikanda_口コミ分析レポート.pptx
+++ b/納品レポート/ホテル別レポート/comfort_era_higashikanda_口コミ分析レポート.pptx
@@ -217,10 +217,10 @@
                   <c:v>9.81</c:v>
                 </c:pt>
                 <c:pt idx="3">
-                  <c:v>8.76</c:v>
+                  <c:v>8.75</c:v>
                 </c:pt>
                 <c:pt idx="4">
-                  <c:v>8.18</c:v>
+                  <c:v>8.17</c:v>
                 </c:pt>
                 <c:pt idx="5">
                   <c:v>8</c:v>
@@ -566,10 +566,10 @@
               <c:numCache>
                 <c:ptCount val="3"/>
                 <c:pt idx="0">
-                  <c:v>95</c:v>
+                  <c:v>97</c:v>
                 </c:pt>
                 <c:pt idx="1">
-                  <c:v>12</c:v>
+                  <c:v>13</c:v>
                 </c:pt>
                 <c:pt idx="2">
                   <c:v>5</c:v>
@@ -823,16 +823,16 @@
                 <c:formatCode>General</c:formatCode>
                 <c:ptCount val="9"/>
                 <c:pt idx="0">
-                  <c:v>65</c:v>
+                  <c:v>66</c:v>
                 </c:pt>
                 <c:pt idx="1">
                   <c:v>17</c:v>
                 </c:pt>
                 <c:pt idx="2">
-                  <c:v>13</c:v>
+                  <c:v>14</c:v>
                 </c:pt>
                 <c:pt idx="3">
-                  <c:v>7</c:v>
+                  <c:v>8</c:v>
                 </c:pt>
                 <c:pt idx="4">
                   <c:v>4</c:v>
@@ -2798,7 +2798,7 @@
                 <a:ea typeface="Arial" pitchFamily="34" charset="-122"/>
                 <a:cs typeface="Arial" pitchFamily="34" charset="-120"/>
               </a:rPr>
-              <a:t>レビュー総数：112件（6サイト）</a:t>
+              <a:t>レビュー総数：115件（6サイト）</a:t>
             </a:r>
             <a:endParaRPr lang="en-US" sz="1000" dirty="0"/>
           </a:p>
@@ -2818,7 +2818,7 @@
                 <a:ea typeface="Arial" pitchFamily="34" charset="-122"/>
                 <a:cs typeface="Arial" pitchFamily="34" charset="-120"/>
               </a:rPr>
-              <a:t>作成日：2026年3月17日</a:t>
+              <a:t>作成日：2026年3月18日</a:t>
             </a:r>
             <a:endParaRPr lang="en-US" sz="1000" dirty="0"/>
           </a:p>
@@ -3364,7 +3364,7 @@
                           <a:ea typeface="Arial" pitchFamily="34" charset="-122"/>
                           <a:cs typeface="Arial" pitchFamily="34" charset="-120"/>
                         </a:rPr>
-                        <a:t>8.93点</a:t>
+                        <a:t>8.91点</a:t>
                       </a:r>
                       <a:endParaRPr lang="en-US" sz="1000" dirty="0">
                         <a:latin typeface="Arial" charset="0"/>
@@ -3638,7 +3638,7 @@
                           <a:ea typeface="Arial" pitchFamily="34" charset="-122"/>
                           <a:cs typeface="Arial" pitchFamily="34" charset="-120"/>
                         </a:rPr>
-                        <a:t>84.8%</a:t>
+                        <a:t>84.3%</a:t>
                       </a:r>
                       <a:endParaRPr lang="en-US" sz="1000" dirty="0">
                         <a:latin typeface="Arial" charset="0"/>
@@ -3706,7 +3706,7 @@
                           <a:ea typeface="Arial" pitchFamily="34" charset="-122"/>
                           <a:cs typeface="Arial" pitchFamily="34" charset="-120"/>
                         </a:rPr>
-                        <a:t>90%以上</a:t>
+                        <a:t>89%以上</a:t>
                       </a:r>
                       <a:endParaRPr lang="en-US" sz="1000" dirty="0">
                         <a:latin typeface="Arial" charset="0"/>
@@ -3912,7 +3912,7 @@
                           <a:ea typeface="Arial" pitchFamily="34" charset="-122"/>
                           <a:cs typeface="Arial" pitchFamily="34" charset="-120"/>
                         </a:rPr>
-                        <a:t>4.5%</a:t>
+                        <a:t>4.3%</a:t>
                       </a:r>
                       <a:endParaRPr lang="en-US" sz="1000" dirty="0">
                         <a:latin typeface="Arial" charset="0"/>
@@ -3980,7 +3980,7 @@
                           <a:ea typeface="Arial" pitchFamily="34" charset="-122"/>
                           <a:cs typeface="Arial" pitchFamily="34" charset="-120"/>
                         </a:rPr>
-                        <a:t>2%以下</a:t>
+                        <a:t>1%以下</a:t>
                       </a:r>
                       <a:endParaRPr lang="en-US" sz="1000" dirty="0">
                         <a:latin typeface="Arial" charset="0"/>
@@ -4734,7 +4734,7 @@
                           <a:ea typeface="Arial" pitchFamily="34" charset="-122"/>
                           <a:cs typeface="Arial" pitchFamily="34" charset="-120"/>
                         </a:rPr>
-                        <a:t>約18件/期間</a:t>
+                        <a:t>約19件/期間</a:t>
                       </a:r>
                       <a:endParaRPr lang="en-US" sz="1000" dirty="0">
                         <a:latin typeface="Arial" charset="0"/>
@@ -5373,7 +5373,7 @@
                 <a:ea typeface="Arial" pitchFamily="34" charset="-122"/>
                 <a:cs typeface="Arial" pitchFamily="34" charset="-120"/>
               </a:rPr>
-              <a:t>8.93</a:t>
+              <a:t>8.91</a:t>
             </a:r>
             <a:endParaRPr lang="en-US" sz="3200" dirty="0"/>
           </a:p>
@@ -5498,7 +5498,7 @@
                 <a:ea typeface="Arial" pitchFamily="34" charset="-122"/>
                 <a:cs typeface="Arial" pitchFamily="34" charset="-120"/>
               </a:rPr>
-              <a:t>84.8%</a:t>
+              <a:t>84.3%</a:t>
             </a:r>
             <a:endParaRPr lang="en-US" sz="3200" dirty="0"/>
           </a:p>
@@ -5623,7 +5623,7 @@
                 <a:ea typeface="Arial" pitchFamily="34" charset="-122"/>
                 <a:cs typeface="Arial" pitchFamily="34" charset="-120"/>
               </a:rPr>
-              <a:t>4.5%</a:t>
+              <a:t>4.3%</a:t>
             </a:r>
             <a:endParaRPr lang="en-US" sz="3200" dirty="0"/>
           </a:p>
@@ -5748,7 +5748,7 @@
                 <a:ea typeface="Arial" pitchFamily="34" charset="-122"/>
                 <a:cs typeface="Arial" pitchFamily="34" charset="-120"/>
               </a:rPr>
-              <a:t>112件</a:t>
+              <a:t>115件</a:t>
             </a:r>
             <a:endParaRPr lang="en-US" sz="3200" dirty="0"/>
           </a:p>
@@ -5896,7 +5896,7 @@
                 <a:ea typeface="Arial" pitchFamily="34" charset="-122"/>
                 <a:cs typeface="Arial" pitchFamily="34" charset="-120"/>
               </a:rPr>
-              <a:t>  駅まで少し歩かなければならないので、立地は少し不便です</a:t>
+              <a:t>  立地は非常に便利で、地下鉄とJRの複数の路線が交差する場所に位置し、階下にはセブンイレブンがあります</a:t>
             </a:r>
             <a:endParaRPr lang="en-US" sz="1100" dirty="0"/>
           </a:p>
@@ -5936,7 +5936,7 @@
                 <a:ea typeface="Arial" pitchFamily="34" charset="-122"/>
                 <a:cs typeface="Arial" pitchFamily="34" charset="-120"/>
               </a:rPr>
-              <a:t>  何か必要なことがあっても、スタッフは全く助けてくれません</a:t>
+              <a:t>  The staff were also very friendly</a:t>
             </a:r>
             <a:endParaRPr lang="en-US" sz="1100" dirty="0"/>
           </a:p>
@@ -6124,7 +6124,7 @@
                 <a:ea typeface="Arial" pitchFamily="34" charset="-122"/>
                 <a:cs typeface="Arial" pitchFamily="34" charset="-120"/>
               </a:rPr>
-              <a:t>  This was my second visit to this hotel</a:t>
+              <a:t>  The hotel was lovely and spacious</a:t>
             </a:r>
             <a:endParaRPr lang="en-US" sz="1100" dirty="0"/>
           </a:p>
@@ -6557,7 +6557,7 @@
                 <a:ea typeface="Arial" pitchFamily="34" charset="-122"/>
                 <a:cs typeface="Arial" pitchFamily="34" charset="-120"/>
               </a:rPr>
-              <a:t>8.93</a:t>
+              <a:t>8.91</a:t>
             </a:r>
             <a:endParaRPr lang="en-US" sz="3200" dirty="0"/>
           </a:p>
@@ -6682,7 +6682,7 @@
                 <a:ea typeface="Arial" pitchFamily="34" charset="-122"/>
                 <a:cs typeface="Arial" pitchFamily="34" charset="-120"/>
               </a:rPr>
-              <a:t>84.8%</a:t>
+              <a:t>84.3%</a:t>
             </a:r>
             <a:endParaRPr lang="en-US" sz="3200" dirty="0"/>
           </a:p>
@@ -6807,7 +6807,7 @@
                 <a:ea typeface="Arial" pitchFamily="34" charset="-122"/>
                 <a:cs typeface="Arial" pitchFamily="34" charset="-120"/>
               </a:rPr>
-              <a:t>4.5%</a:t>
+              <a:t>4.3%</a:t>
             </a:r>
             <a:endParaRPr lang="en-US" sz="3200" dirty="0"/>
           </a:p>
@@ -6932,7 +6932,7 @@
                 <a:ea typeface="Arial" pitchFamily="34" charset="-122"/>
                 <a:cs typeface="Arial" pitchFamily="34" charset="-120"/>
               </a:rPr>
-              <a:t>112件</a:t>
+              <a:t>115件</a:t>
             </a:r>
             <a:endParaRPr lang="en-US" sz="3200" dirty="0"/>
           </a:p>
@@ -8937,7 +8937,7 @@
                           <a:ea typeface="Arial" pitchFamily="34" charset="-122"/>
                           <a:cs typeface="Arial" pitchFamily="34" charset="-120"/>
                         </a:rPr>
-                        <a:t>59</a:t>
+                        <a:t>61</a:t>
                       </a:r>
                       <a:endParaRPr lang="en-US" sz="900" dirty="0">
                         <a:latin typeface="Arial" charset="0"/>
@@ -9005,7 +9005,7 @@
                           <a:ea typeface="Arial" pitchFamily="34" charset="-122"/>
                           <a:cs typeface="Arial" pitchFamily="34" charset="-120"/>
                         </a:rPr>
-                        <a:t>8.76</a:t>
+                        <a:t>8.75</a:t>
                       </a:r>
                       <a:endParaRPr lang="en-US" sz="900" dirty="0">
                         <a:latin typeface="Arial" charset="0"/>
@@ -9141,7 +9141,7 @@
                           <a:ea typeface="Arial" pitchFamily="34" charset="-122"/>
                           <a:cs typeface="Arial" pitchFamily="34" charset="-120"/>
                         </a:rPr>
-                        <a:t>8.76</a:t>
+                        <a:t>8.75</a:t>
                       </a:r>
                       <a:endParaRPr lang="en-US" sz="900" dirty="0">
                         <a:latin typeface="Arial" charset="0"/>
@@ -9279,7 +9279,7 @@
                           <a:ea typeface="Arial" pitchFamily="34" charset="-122"/>
                           <a:cs typeface="Arial" pitchFamily="34" charset="-120"/>
                         </a:rPr>
-                        <a:t>22</a:t>
+                        <a:t>23</a:t>
                       </a:r>
                       <a:endParaRPr lang="en-US" sz="900" dirty="0">
                         <a:latin typeface="Arial" charset="0"/>
@@ -9483,7 +9483,7 @@
                           <a:ea typeface="Arial" pitchFamily="34" charset="-122"/>
                           <a:cs typeface="Arial" pitchFamily="34" charset="-120"/>
                         </a:rPr>
-                        <a:t>8.18</a:t>
+                        <a:t>8.17</a:t>
                       </a:r>
                       <a:endParaRPr lang="en-US" sz="900" dirty="0">
                         <a:latin typeface="Arial" charset="0"/>
@@ -10233,7 +10233,7 @@
                 <a:ea typeface="Arial" pitchFamily="34" charset="-122"/>
                 <a:cs typeface="Arial" pitchFamily="34" charset="-120"/>
               </a:rPr>
-              <a:t>95件（84.8%）</a:t>
+              <a:t>97件（84.3%）</a:t>
             </a:r>
             <a:endParaRPr lang="en-US" sz="1100" dirty="0"/>
           </a:p>
@@ -10331,7 +10331,7 @@
                 <a:ea typeface="Arial" pitchFamily="34" charset="-122"/>
                 <a:cs typeface="Arial" pitchFamily="34" charset="-120"/>
               </a:rPr>
-              <a:t>12件（10.7%）</a:t>
+              <a:t>13件（11.3%）</a:t>
             </a:r>
             <a:endParaRPr lang="en-US" sz="1100" dirty="0"/>
           </a:p>
@@ -10429,7 +10429,7 @@
                 <a:ea typeface="Arial" pitchFamily="34" charset="-122"/>
                 <a:cs typeface="Arial" pitchFamily="34" charset="-120"/>
               </a:rPr>
-              <a:t>5件（4.5%）</a:t>
+              <a:t>5件（4.3%）</a:t>
             </a:r>
             <a:endParaRPr lang="en-US" sz="1100" dirty="0"/>
           </a:p>
@@ -10841,7 +10841,7 @@
                 <a:ea typeface="Arial" pitchFamily="34" charset="-122"/>
                 <a:cs typeface="Arial" pitchFamily="34" charset="-120"/>
               </a:rPr>
-              <a:t>駅まで少し歩かなければならないので、立地は少し不便です</a:t>
+              <a:t>立地は非常に便利で、地下鉄とJRの複数の路線が交差する場所に位置し、階下にはセブンイレブンがあります</a:t>
             </a:r>
             <a:endParaRPr lang="en-US" sz="900" dirty="0"/>
           </a:p>
@@ -10880,7 +10880,7 @@
                 <a:ea typeface="Arial" pitchFamily="34" charset="-122"/>
                 <a:cs typeface="Arial" pitchFamily="34" charset="-120"/>
               </a:rPr>
-              <a:t>「ホテルの立地、サービス、設備はどれも素晴らしかったです」</a:t>
+              <a:t>「The location was great, in a quiet neighbourhood where yo...」</a:t>
             </a:r>
             <a:endParaRPr lang="en-US" sz="900" dirty="0"/>
           </a:p>
@@ -11064,7 +11064,7 @@
                 <a:ea typeface="Arial" pitchFamily="34" charset="-122"/>
                 <a:cs typeface="Arial" pitchFamily="34" charset="-120"/>
               </a:rPr>
-              <a:t>何か必要なことがあっても、スタッフは全く助けてくれません</a:t>
+              <a:t>The staff were also very friendly</a:t>
             </a:r>
             <a:endParaRPr lang="en-US" sz="900" dirty="0"/>
           </a:p>
@@ -11103,7 +11103,7 @@
                 <a:ea typeface="Arial" pitchFamily="34" charset="-122"/>
                 <a:cs typeface="Arial" pitchFamily="34" charset="-120"/>
               </a:rPr>
-              <a:t>「The staff is really nice」</a:t>
+              <a:t>「何か必要なことがあっても、スタッフは全く助けてくれません」</a:t>
             </a:r>
             <a:endParaRPr lang="en-US" sz="900" dirty="0"/>
           </a:p>
@@ -11432,7 +11432,7 @@
                 <a:ea typeface="Arial" pitchFamily="34" charset="-122"/>
                 <a:cs typeface="Arial" pitchFamily="34" charset="-120"/>
               </a:rPr>
-              <a:t>10件+</a:t>
+              <a:t>20件+</a:t>
             </a:r>
             <a:endParaRPr lang="en-US" sz="900" dirty="0"/>
           </a:p>
@@ -11510,7 +11510,7 @@
                 <a:ea typeface="Arial" pitchFamily="34" charset="-122"/>
                 <a:cs typeface="Arial" pitchFamily="34" charset="-120"/>
               </a:rPr>
-              <a:t>The staff were really nice, breakfast is abundant and tas...</a:t>
+              <a:t>ホテルでは無料の朝食を提供しており、豪華ではありませんが必要なものはすべて揃っています</a:t>
             </a:r>
             <a:endParaRPr lang="en-US" sz="900" dirty="0"/>
           </a:p>
@@ -11549,7 +11549,7 @@
                 <a:ea typeface="Arial" pitchFamily="34" charset="-122"/>
                 <a:cs typeface="Arial" pitchFamily="34" charset="-120"/>
               </a:rPr>
-              <a:t>「朝食には、白いパンだけでなく、食物繊維の多いパンも出してくれたらよかったのに」</a:t>
+              <a:t>「The staff were really nice, breakfast is abundant and tas...」</a:t>
             </a:r>
             <a:endParaRPr lang="en-US" sz="900" dirty="0"/>
           </a:p>
@@ -11655,7 +11655,7 @@
                 <a:ea typeface="Arial" pitchFamily="34" charset="-122"/>
                 <a:cs typeface="Arial" pitchFamily="34" charset="-120"/>
               </a:rPr>
-              <a:t>10件+</a:t>
+              <a:t>20件+</a:t>
             </a:r>
             <a:endParaRPr lang="en-US" sz="900" dirty="0"/>
           </a:p>
@@ -11733,7 +11733,7 @@
                 <a:ea typeface="Arial" pitchFamily="34" charset="-122"/>
                 <a:cs typeface="Arial" pitchFamily="34" charset="-120"/>
               </a:rPr>
-              <a:t>タオルやその他のアメニティは毎日交換され、「お休みください」モードにしていたにもかかわらず、着替え用のバッグも用意...</a:t>
+              <a:t>The bed and pillows were great</a:t>
             </a:r>
             <a:endParaRPr lang="en-US" sz="900" dirty="0"/>
           </a:p>
@@ -11772,7 +11772,7 @@
                 <a:ea typeface="Arial" pitchFamily="34" charset="-122"/>
                 <a:cs typeface="Arial" pitchFamily="34" charset="-120"/>
               </a:rPr>
-              <a:t>「The staff were really nice, breakfast is abundant and tas...」</a:t>
+              <a:t>「タオルやその他のアメニティは毎日交換され、「お休みください」モードにしていたにもかかわらず、着替え用のバッグも用意...」</a:t>
             </a:r>
             <a:endParaRPr lang="en-US" sz="900" dirty="0"/>
           </a:p>
@@ -11878,7 +11878,7 @@
                 <a:ea typeface="Arial" pitchFamily="34" charset="-122"/>
                 <a:cs typeface="Arial" pitchFamily="34" charset="-120"/>
               </a:rPr>
-              <a:t>8件</a:t>
+              <a:t>9件</a:t>
             </a:r>
             <a:endParaRPr lang="en-US" sz="900" dirty="0"/>
           </a:p>
@@ -11956,7 +11956,7 @@
                 <a:ea typeface="Arial" pitchFamily="34" charset="-122"/>
                 <a:cs typeface="Arial" pitchFamily="34" charset="-120"/>
               </a:rPr>
-              <a:t>The bathroom in clean and big enough</a:t>
+              <a:t>The hotel was lovely and spacious</a:t>
             </a:r>
             <a:endParaRPr lang="en-US" sz="900" dirty="0"/>
           </a:p>
@@ -11995,7 +11995,7 @@
                 <a:ea typeface="Arial" pitchFamily="34" charset="-122"/>
                 <a:cs typeface="Arial" pitchFamily="34" charset="-120"/>
               </a:rPr>
-              <a:t>「1階には、ライブラリーと無料のドリンクが楽しめる広いラウンジエリアがあります」</a:t>
+              <a:t>「The bathroom in clean and big enough」</a:t>
             </a:r>
             <a:endParaRPr lang="en-US" sz="900" dirty="0"/>
           </a:p>
@@ -12685,7 +12685,7 @@
                           <a:ea typeface="Arial" pitchFamily="34" charset="-122"/>
                           <a:cs typeface="Arial" pitchFamily="34" charset="-120"/>
                         </a:rPr>
-                        <a:t>This was my second visit to this hotel</a:t>
+                        <a:t>The hotel was lovely and spacious</a:t>
                       </a:r>
                       <a:endParaRPr lang="en-US" sz="900" dirty="0">
                         <a:latin typeface="Arial" charset="0"/>
@@ -12753,7 +12753,7 @@
                           <a:ea typeface="Arial" pitchFamily="34" charset="-122"/>
                           <a:cs typeface="Arial" pitchFamily="34" charset="-120"/>
                         </a:rPr>
-                        <a:t>18件</a:t>
+                        <a:t>19件</a:t>
                       </a:r>
                       <a:endParaRPr lang="en-US" sz="900" dirty="0">
                         <a:latin typeface="Arial" charset="0"/>
@@ -13027,7 +13027,7 @@
                           <a:ea typeface="Arial" pitchFamily="34" charset="-122"/>
                           <a:cs typeface="Arial" pitchFamily="34" charset="-120"/>
                         </a:rPr>
-                        <a:t>8件</a:t>
+                        <a:t>7件</a:t>
                       </a:r>
                       <a:endParaRPr lang="en-US" sz="900" dirty="0">
                         <a:latin typeface="Arial" charset="0"/>

--- a/納品レポート/ホテル別レポート/comfort_era_higashikanda_口コミ分析レポート.pptx
+++ b/納品レポート/ホテル別レポート/comfort_era_higashikanda_口コミ分析レポート.pptx
@@ -217,10 +217,10 @@
                   <c:v>9.81</c:v>
                 </c:pt>
                 <c:pt idx="3">
-                  <c:v>8.75</c:v>
+                  <c:v>8.8</c:v>
                 </c:pt>
                 <c:pt idx="4">
-                  <c:v>8.17</c:v>
+                  <c:v>8.24</c:v>
                 </c:pt>
                 <c:pt idx="5">
                   <c:v>8</c:v>
@@ -566,10 +566,10 @@
               <c:numCache>
                 <c:ptCount val="3"/>
                 <c:pt idx="0">
-                  <c:v>97</c:v>
+                  <c:v>100</c:v>
                 </c:pt>
                 <c:pt idx="1">
-                  <c:v>13</c:v>
+                  <c:v>12</c:v>
                 </c:pt>
                 <c:pt idx="2">
                   <c:v>5</c:v>
@@ -823,16 +823,16 @@
                 <c:formatCode>General</c:formatCode>
                 <c:ptCount val="9"/>
                 <c:pt idx="0">
-                  <c:v>66</c:v>
+                  <c:v>68</c:v>
                 </c:pt>
                 <c:pt idx="1">
                   <c:v>17</c:v>
                 </c:pt>
                 <c:pt idx="2">
-                  <c:v>14</c:v>
+                  <c:v>15</c:v>
                 </c:pt>
                 <c:pt idx="3">
-                  <c:v>8</c:v>
+                  <c:v>7</c:v>
                 </c:pt>
                 <c:pt idx="4">
                   <c:v>4</c:v>
@@ -2798,7 +2798,7 @@
                 <a:ea typeface="Arial" pitchFamily="34" charset="-122"/>
                 <a:cs typeface="Arial" pitchFamily="34" charset="-120"/>
               </a:rPr>
-              <a:t>レビュー総数：115件（6サイト）</a:t>
+              <a:t>レビュー総数：117件（6サイト）</a:t>
             </a:r>
             <a:endParaRPr lang="en-US" sz="1000" dirty="0"/>
           </a:p>
@@ -2818,7 +2818,7 @@
                 <a:ea typeface="Arial" pitchFamily="34" charset="-122"/>
                 <a:cs typeface="Arial" pitchFamily="34" charset="-120"/>
               </a:rPr>
-              <a:t>作成日：2026年3月18日</a:t>
+              <a:t>作成日：2026年3月19日</a:t>
             </a:r>
             <a:endParaRPr lang="en-US" sz="1000" dirty="0"/>
           </a:p>
@@ -3364,7 +3364,7 @@
                           <a:ea typeface="Arial" pitchFamily="34" charset="-122"/>
                           <a:cs typeface="Arial" pitchFamily="34" charset="-120"/>
                         </a:rPr>
-                        <a:t>8.91点</a:t>
+                        <a:t>8.94点</a:t>
                       </a:r>
                       <a:endParaRPr lang="en-US" sz="1000" dirty="0">
                         <a:latin typeface="Arial" charset="0"/>
@@ -3638,7 +3638,7 @@
                           <a:ea typeface="Arial" pitchFamily="34" charset="-122"/>
                           <a:cs typeface="Arial" pitchFamily="34" charset="-120"/>
                         </a:rPr>
-                        <a:t>84.3%</a:t>
+                        <a:t>85.5%</a:t>
                       </a:r>
                       <a:endParaRPr lang="en-US" sz="1000" dirty="0">
                         <a:latin typeface="Arial" charset="0"/>
@@ -3706,7 +3706,7 @@
                           <a:ea typeface="Arial" pitchFamily="34" charset="-122"/>
                           <a:cs typeface="Arial" pitchFamily="34" charset="-120"/>
                         </a:rPr>
-                        <a:t>89%以上</a:t>
+                        <a:t>91%以上</a:t>
                       </a:r>
                       <a:endParaRPr lang="en-US" sz="1000" dirty="0">
                         <a:latin typeface="Arial" charset="0"/>
@@ -5373,7 +5373,7 @@
                 <a:ea typeface="Arial" pitchFamily="34" charset="-122"/>
                 <a:cs typeface="Arial" pitchFamily="34" charset="-120"/>
               </a:rPr>
-              <a:t>8.91</a:t>
+              <a:t>8.94</a:t>
             </a:r>
             <a:endParaRPr lang="en-US" sz="3200" dirty="0"/>
           </a:p>
@@ -5498,7 +5498,7 @@
                 <a:ea typeface="Arial" pitchFamily="34" charset="-122"/>
                 <a:cs typeface="Arial" pitchFamily="34" charset="-120"/>
               </a:rPr>
-              <a:t>84.3%</a:t>
+              <a:t>85.5%</a:t>
             </a:r>
             <a:endParaRPr lang="en-US" sz="3200" dirty="0"/>
           </a:p>
@@ -5748,7 +5748,7 @@
                 <a:ea typeface="Arial" pitchFamily="34" charset="-122"/>
                 <a:cs typeface="Arial" pitchFamily="34" charset="-120"/>
               </a:rPr>
-              <a:t>115件</a:t>
+              <a:t>117件</a:t>
             </a:r>
             <a:endParaRPr lang="en-US" sz="3200" dirty="0"/>
           </a:p>
@@ -5976,7 +5976,7 @@
                 <a:ea typeface="Arial" pitchFamily="34" charset="-122"/>
                 <a:cs typeface="Arial" pitchFamily="34" charset="-120"/>
               </a:rPr>
-              <a:t>  The rooms are quite small (like everywhere in Japan), but...</a:t>
+              <a:t>  他の方同様に清潔感については非の打ちどころがありません</a:t>
             </a:r>
             <a:endParaRPr lang="en-US" sz="1100" dirty="0"/>
           </a:p>
@@ -6184,7 +6184,7 @@
                 <a:ea typeface="Arial" pitchFamily="34" charset="-122"/>
                 <a:cs typeface="Arial" pitchFamily="34" charset="-120"/>
               </a:rPr>
-              <a:t>対応・サービスの不満 </a:t>
+              <a:t>部屋の狭さ </a:t>
             </a:r>
             <a:endParaRPr lang="en-US" sz="1100" dirty="0"/>
           </a:p>
@@ -6204,7 +6204,7 @@
                 <a:ea typeface="Arial" pitchFamily="34" charset="-122"/>
                 <a:cs typeface="Arial" pitchFamily="34" charset="-120"/>
               </a:rPr>
-              <a:t>  室內不大但是設施齊全，該有的東西都有 工作人員服務態度特別好，前台也備有翻譯器 也可以嘗試一下自助早餐，東西不多但...</a:t>
+              <a:t>  The rooms are quite small (like everywhere in Japan), but...</a:t>
             </a:r>
             <a:endParaRPr lang="en-US" sz="1100" dirty="0"/>
           </a:p>
@@ -6557,7 +6557,7 @@
                 <a:ea typeface="Arial" pitchFamily="34" charset="-122"/>
                 <a:cs typeface="Arial" pitchFamily="34" charset="-120"/>
               </a:rPr>
-              <a:t>8.91</a:t>
+              <a:t>8.94</a:t>
             </a:r>
             <a:endParaRPr lang="en-US" sz="3200" dirty="0"/>
           </a:p>
@@ -6682,7 +6682,7 @@
                 <a:ea typeface="Arial" pitchFamily="34" charset="-122"/>
                 <a:cs typeface="Arial" pitchFamily="34" charset="-120"/>
               </a:rPr>
-              <a:t>84.3%</a:t>
+              <a:t>85.5%</a:t>
             </a:r>
             <a:endParaRPr lang="en-US" sz="3200" dirty="0"/>
           </a:p>
@@ -6932,7 +6932,7 @@
                 <a:ea typeface="Arial" pitchFamily="34" charset="-122"/>
                 <a:cs typeface="Arial" pitchFamily="34" charset="-120"/>
               </a:rPr>
-              <a:t>115件</a:t>
+              <a:t>117件</a:t>
             </a:r>
             <a:endParaRPr lang="en-US" sz="3200" dirty="0"/>
           </a:p>
@@ -9005,7 +9005,7 @@
                           <a:ea typeface="Arial" pitchFamily="34" charset="-122"/>
                           <a:cs typeface="Arial" pitchFamily="34" charset="-120"/>
                         </a:rPr>
-                        <a:t>8.75</a:t>
+                        <a:t>8.8</a:t>
                       </a:r>
                       <a:endParaRPr lang="en-US" sz="900" dirty="0">
                         <a:latin typeface="Arial" charset="0"/>
@@ -9141,7 +9141,7 @@
                           <a:ea typeface="Arial" pitchFamily="34" charset="-122"/>
                           <a:cs typeface="Arial" pitchFamily="34" charset="-120"/>
                         </a:rPr>
-                        <a:t>8.75</a:t>
+                        <a:t>8.8</a:t>
                       </a:r>
                       <a:endParaRPr lang="en-US" sz="900" dirty="0">
                         <a:latin typeface="Arial" charset="0"/>
@@ -9279,7 +9279,7 @@
                           <a:ea typeface="Arial" pitchFamily="34" charset="-122"/>
                           <a:cs typeface="Arial" pitchFamily="34" charset="-120"/>
                         </a:rPr>
-                        <a:t>23</a:t>
+                        <a:t>25</a:t>
                       </a:r>
                       <a:endParaRPr lang="en-US" sz="900" dirty="0">
                         <a:latin typeface="Arial" charset="0"/>
@@ -9347,7 +9347,7 @@
                           <a:ea typeface="Arial" pitchFamily="34" charset="-122"/>
                           <a:cs typeface="Arial" pitchFamily="34" charset="-120"/>
                         </a:rPr>
-                        <a:t>4.09</a:t>
+                        <a:t>4.12</a:t>
                       </a:r>
                       <a:endParaRPr lang="en-US" sz="900" dirty="0">
                         <a:latin typeface="Arial" charset="0"/>
@@ -9483,7 +9483,7 @@
                           <a:ea typeface="Arial" pitchFamily="34" charset="-122"/>
                           <a:cs typeface="Arial" pitchFamily="34" charset="-120"/>
                         </a:rPr>
-                        <a:t>8.17</a:t>
+                        <a:t>8.24</a:t>
                       </a:r>
                       <a:endParaRPr lang="en-US" sz="900" dirty="0">
                         <a:latin typeface="Arial" charset="0"/>
@@ -10233,7 +10233,7 @@
                 <a:ea typeface="Arial" pitchFamily="34" charset="-122"/>
                 <a:cs typeface="Arial" pitchFamily="34" charset="-120"/>
               </a:rPr>
-              <a:t>97件（84.3%）</a:t>
+              <a:t>100件（85.5%）</a:t>
             </a:r>
             <a:endParaRPr lang="en-US" sz="1100" dirty="0"/>
           </a:p>
@@ -10331,7 +10331,7 @@
                 <a:ea typeface="Arial" pitchFamily="34" charset="-122"/>
                 <a:cs typeface="Arial" pitchFamily="34" charset="-120"/>
               </a:rPr>
-              <a:t>13件（11.3%）</a:t>
+              <a:t>12件（10.3%）</a:t>
             </a:r>
             <a:endParaRPr lang="en-US" sz="1100" dirty="0"/>
           </a:p>
@@ -11287,7 +11287,7 @@
                 <a:ea typeface="Arial" pitchFamily="34" charset="-122"/>
                 <a:cs typeface="Arial" pitchFamily="34" charset="-120"/>
               </a:rPr>
-              <a:t>The rooms are quite small (like everywhere in Japan), but...</a:t>
+              <a:t>他の方同様に清潔感については非の打ちどころがありません</a:t>
             </a:r>
             <a:endParaRPr lang="en-US" sz="900" dirty="0"/>
           </a:p>
@@ -11326,7 +11326,7 @@
                 <a:ea typeface="Arial" pitchFamily="34" charset="-122"/>
                 <a:cs typeface="Arial" pitchFamily="34" charset="-120"/>
               </a:rPr>
-              <a:t>「部屋は広々としていて、サービスも行き届いていて、しかも静かでした」</a:t>
+              <a:t>「The rooms are quite small (like everywhere in Japan), but...」</a:t>
             </a:r>
             <a:endParaRPr lang="en-US" sz="900" dirty="0"/>
           </a:p>
@@ -11549,7 +11549,7 @@
                 <a:ea typeface="Arial" pitchFamily="34" charset="-122"/>
                 <a:cs typeface="Arial" pitchFamily="34" charset="-120"/>
               </a:rPr>
-              <a:t>「The staff were really nice, breakfast is abundant and tas...」</a:t>
+              <a:t>「ホテルでは無料の朝食を提供しています」</a:t>
             </a:r>
             <a:endParaRPr lang="en-US" sz="900" dirty="0"/>
           </a:p>
@@ -13027,7 +13027,7 @@
                           <a:ea typeface="Arial" pitchFamily="34" charset="-122"/>
                           <a:cs typeface="Arial" pitchFamily="34" charset="-120"/>
                         </a:rPr>
-                        <a:t>7件</a:t>
+                        <a:t>8件</a:t>
                       </a:r>
                       <a:endParaRPr lang="en-US" sz="900" dirty="0">
                         <a:latin typeface="Arial" charset="0"/>
@@ -13165,7 +13165,7 @@
                           <a:ea typeface="Arial" pitchFamily="34" charset="-122"/>
                           <a:cs typeface="Arial" pitchFamily="34" charset="-120"/>
                         </a:rPr>
-                        <a:t>対応・サービスの不満</a:t>
+                        <a:t>部屋の狭さ</a:t>
                       </a:r>
                       <a:endParaRPr lang="en-US" sz="900" dirty="0">
                         <a:latin typeface="Arial" charset="0"/>
@@ -13233,7 +13233,7 @@
                           <a:ea typeface="Arial" pitchFamily="34" charset="-122"/>
                           <a:cs typeface="Arial" pitchFamily="34" charset="-120"/>
                         </a:rPr>
-                        <a:t>室內不大但是設施齊全，該有的東西都有 工作人員服務態度特別好，前台也備有翻譯器 也可以嘗試一下自助早餐，東西不多但...</a:t>
+                        <a:t>The rooms are quite small (like everywhere in Japan), but...</a:t>
                       </a:r>
                       <a:endParaRPr lang="en-US" sz="900" dirty="0">
                         <a:latin typeface="Arial" charset="0"/>
@@ -13301,7 +13301,7 @@
                           <a:ea typeface="Arial" pitchFamily="34" charset="-122"/>
                           <a:cs typeface="Arial" pitchFamily="34" charset="-120"/>
                         </a:rPr>
-                        <a:t>6件</a:t>
+                        <a:t>5件</a:t>
                       </a:r>
                       <a:endParaRPr lang="en-US" sz="900" dirty="0">
                         <a:latin typeface="Arial" charset="0"/>
@@ -13439,7 +13439,7 @@
                           <a:ea typeface="Arial" pitchFamily="34" charset="-122"/>
                           <a:cs typeface="Arial" pitchFamily="34" charset="-120"/>
                         </a:rPr>
-                        <a:t>部屋の狭さ</a:t>
+                        <a:t>対応・サービスの不満</a:t>
                       </a:r>
                       <a:endParaRPr lang="en-US" sz="900" dirty="0">
                         <a:latin typeface="Arial" charset="0"/>
@@ -13507,7 +13507,7 @@
                           <a:ea typeface="Arial" pitchFamily="34" charset="-122"/>
                           <a:cs typeface="Arial" pitchFamily="34" charset="-120"/>
                         </a:rPr>
-                        <a:t>The rooms are quite small (like everywhere in Japan), but...</a:t>
+                        <a:t>室內不大但是設施齊全，該有的東西都有 工作人員服務態度特別好，前台也備有翻譯器 也可以嘗試一下自助早餐，東西不多但...</a:t>
                       </a:r>
                       <a:endParaRPr lang="en-US" sz="900" dirty="0">
                         <a:latin typeface="Arial" charset="0"/>
@@ -13901,6 +13901,280 @@
                   </a:tcPr>
                 </a:tc>
               </a:tr>
+              <a:tr h="320040">
+                <a:tc>
+                  <a:txBody>
+                    <a:bodyPr/>
+                    <a:lstStyle/>
+                    <a:p>
+                      <a:pPr algn="ctr" indent="0" marL="0">
+                        <a:buNone/>
+                      </a:pPr>
+                      <a:r>
+                        <a:rPr lang="en-US" sz="1200" b="1" dirty="0">
+                          <a:solidFill>
+                            <a:srgbClr val="94A3B8"/>
+                          </a:solidFill>
+                          <a:latin typeface="Arial" pitchFamily="34" charset="0"/>
+                          <a:ea typeface="Arial" pitchFamily="34" charset="-122"/>
+                          <a:cs typeface="Arial" pitchFamily="34" charset="-120"/>
+                        </a:rPr>
+                        <a:t>C</a:t>
+                      </a:r>
+                      <a:endParaRPr lang="en-US" sz="1200" dirty="0">
+                        <a:latin typeface="Arial" charset="0"/>
+                        <a:ea typeface="Arial" charset="0"/>
+                        <a:cs typeface="Arial" charset="0"/>
+                      </a:endParaRPr>
+                    </a:p>
+                  </a:txBody>
+                  <a:tcPr marL="91440" marR="91440" marT="45720" marB="45720">
+                    <a:lnL w="6350" cap="flat" cmpd="sng" algn="ctr">
+                      <a:solidFill>
+                        <a:srgbClr val="CBD5E1"/>
+                      </a:solidFill>
+                      <a:prstDash val="solid"/>
+                      <a:round/>
+                      <a:headEnd type="none" w="med" len="med"/>
+                      <a:tailEnd type="none" w="med" len="med"/>
+                    </a:lnL>
+                    <a:lnR w="6350" cap="flat" cmpd="sng" algn="ctr">
+                      <a:solidFill>
+                        <a:srgbClr val="CBD5E1"/>
+                      </a:solidFill>
+                      <a:prstDash val="solid"/>
+                      <a:round/>
+                      <a:headEnd type="none" w="med" len="med"/>
+                      <a:tailEnd type="none" w="med" len="med"/>
+                    </a:lnR>
+                    <a:lnT w="6350" cap="flat" cmpd="sng" algn="ctr">
+                      <a:solidFill>
+                        <a:srgbClr val="CBD5E1"/>
+                      </a:solidFill>
+                      <a:prstDash val="solid"/>
+                      <a:round/>
+                      <a:headEnd type="none" w="med" len="med"/>
+                      <a:tailEnd type="none" w="med" len="med"/>
+                    </a:lnT>
+                    <a:lnB w="6350" cap="flat" cmpd="sng" algn="ctr">
+                      <a:solidFill>
+                        <a:srgbClr val="CBD5E1"/>
+                      </a:solidFill>
+                      <a:prstDash val="solid"/>
+                      <a:round/>
+                      <a:headEnd type="none" w="med" len="med"/>
+                      <a:tailEnd type="none" w="med" len="med"/>
+                    </a:lnB>
+                    <a:solidFill>
+                      <a:srgbClr val="FFFFFF"/>
+                    </a:solidFill>
+                  </a:tcPr>
+                </a:tc>
+                <a:tc>
+                  <a:txBody>
+                    <a:bodyPr/>
+                    <a:lstStyle/>
+                    <a:p>
+                      <a:pPr indent="0" marL="0">
+                        <a:buNone/>
+                      </a:pPr>
+                      <a:r>
+                        <a:rPr lang="en-US" sz="900" b="1" dirty="0">
+                          <a:solidFill>
+                            <a:srgbClr val="334155"/>
+                          </a:solidFill>
+                          <a:latin typeface="Arial" pitchFamily="34" charset="0"/>
+                          <a:ea typeface="Arial" pitchFamily="34" charset="-122"/>
+                          <a:cs typeface="Arial" pitchFamily="34" charset="-120"/>
+                        </a:rPr>
+                        <a:t>臭い・匂い</a:t>
+                      </a:r>
+                      <a:endParaRPr lang="en-US" sz="900" dirty="0">
+                        <a:latin typeface="Arial" charset="0"/>
+                        <a:ea typeface="Arial" charset="0"/>
+                        <a:cs typeface="Arial" charset="0"/>
+                      </a:endParaRPr>
+                    </a:p>
+                  </a:txBody>
+                  <a:tcPr marL="91440" marR="91440" marT="45720" marB="45720">
+                    <a:lnL w="6350" cap="flat" cmpd="sng" algn="ctr">
+                      <a:solidFill>
+                        <a:srgbClr val="CBD5E1"/>
+                      </a:solidFill>
+                      <a:prstDash val="solid"/>
+                      <a:round/>
+                      <a:headEnd type="none" w="med" len="med"/>
+                      <a:tailEnd type="none" w="med" len="med"/>
+                    </a:lnL>
+                    <a:lnR w="6350" cap="flat" cmpd="sng" algn="ctr">
+                      <a:solidFill>
+                        <a:srgbClr val="CBD5E1"/>
+                      </a:solidFill>
+                      <a:prstDash val="solid"/>
+                      <a:round/>
+                      <a:headEnd type="none" w="med" len="med"/>
+                      <a:tailEnd type="none" w="med" len="med"/>
+                    </a:lnR>
+                    <a:lnT w="6350" cap="flat" cmpd="sng" algn="ctr">
+                      <a:solidFill>
+                        <a:srgbClr val="CBD5E1"/>
+                      </a:solidFill>
+                      <a:prstDash val="solid"/>
+                      <a:round/>
+                      <a:headEnd type="none" w="med" len="med"/>
+                      <a:tailEnd type="none" w="med" len="med"/>
+                    </a:lnT>
+                    <a:lnB w="6350" cap="flat" cmpd="sng" algn="ctr">
+                      <a:solidFill>
+                        <a:srgbClr val="CBD5E1"/>
+                      </a:solidFill>
+                      <a:prstDash val="solid"/>
+                      <a:round/>
+                      <a:headEnd type="none" w="med" len="med"/>
+                      <a:tailEnd type="none" w="med" len="med"/>
+                    </a:lnB>
+                    <a:solidFill>
+                      <a:srgbClr val="FFFFFF"/>
+                    </a:solidFill>
+                  </a:tcPr>
+                </a:tc>
+                <a:tc>
+                  <a:txBody>
+                    <a:bodyPr/>
+                    <a:lstStyle/>
+                    <a:p>
+                      <a:pPr indent="0" marL="0">
+                        <a:buNone/>
+                      </a:pPr>
+                      <a:r>
+                        <a:rPr lang="en-US" sz="900" dirty="0">
+                          <a:solidFill>
+                            <a:srgbClr val="64748B"/>
+                          </a:solidFill>
+                          <a:latin typeface="Arial" pitchFamily="34" charset="0"/>
+                          <a:ea typeface="Arial" pitchFamily="34" charset="-122"/>
+                          <a:cs typeface="Arial" pitchFamily="34" charset="-120"/>
+                        </a:rPr>
+                        <a:t>大手チェーン店ではタバコ臭かったり何かしらの不具合に見舞われますが、ここにはありませんでした</a:t>
+                      </a:r>
+                      <a:endParaRPr lang="en-US" sz="900" dirty="0">
+                        <a:latin typeface="Arial" charset="0"/>
+                        <a:ea typeface="Arial" charset="0"/>
+                        <a:cs typeface="Arial" charset="0"/>
+                      </a:endParaRPr>
+                    </a:p>
+                  </a:txBody>
+                  <a:tcPr marL="91440" marR="91440" marT="45720" marB="45720">
+                    <a:lnL w="6350" cap="flat" cmpd="sng" algn="ctr">
+                      <a:solidFill>
+                        <a:srgbClr val="CBD5E1"/>
+                      </a:solidFill>
+                      <a:prstDash val="solid"/>
+                      <a:round/>
+                      <a:headEnd type="none" w="med" len="med"/>
+                      <a:tailEnd type="none" w="med" len="med"/>
+                    </a:lnL>
+                    <a:lnR w="6350" cap="flat" cmpd="sng" algn="ctr">
+                      <a:solidFill>
+                        <a:srgbClr val="CBD5E1"/>
+                      </a:solidFill>
+                      <a:prstDash val="solid"/>
+                      <a:round/>
+                      <a:headEnd type="none" w="med" len="med"/>
+                      <a:tailEnd type="none" w="med" len="med"/>
+                    </a:lnR>
+                    <a:lnT w="6350" cap="flat" cmpd="sng" algn="ctr">
+                      <a:solidFill>
+                        <a:srgbClr val="CBD5E1"/>
+                      </a:solidFill>
+                      <a:prstDash val="solid"/>
+                      <a:round/>
+                      <a:headEnd type="none" w="med" len="med"/>
+                      <a:tailEnd type="none" w="med" len="med"/>
+                    </a:lnT>
+                    <a:lnB w="6350" cap="flat" cmpd="sng" algn="ctr">
+                      <a:solidFill>
+                        <a:srgbClr val="CBD5E1"/>
+                      </a:solidFill>
+                      <a:prstDash val="solid"/>
+                      <a:round/>
+                      <a:headEnd type="none" w="med" len="med"/>
+                      <a:tailEnd type="none" w="med" len="med"/>
+                    </a:lnB>
+                    <a:solidFill>
+                      <a:srgbClr val="FFFFFF"/>
+                    </a:solidFill>
+                  </a:tcPr>
+                </a:tc>
+                <a:tc>
+                  <a:txBody>
+                    <a:bodyPr/>
+                    <a:lstStyle/>
+                    <a:p>
+                      <a:pPr algn="ctr" indent="0" marL="0">
+                        <a:buNone/>
+                      </a:pPr>
+                      <a:r>
+                        <a:rPr lang="en-US" sz="900" dirty="0">
+                          <a:solidFill>
+                            <a:srgbClr val="334155"/>
+                          </a:solidFill>
+                          <a:latin typeface="Arial" pitchFamily="34" charset="0"/>
+                          <a:ea typeface="Arial" pitchFamily="34" charset="-122"/>
+                          <a:cs typeface="Arial" pitchFamily="34" charset="-120"/>
+                        </a:rPr>
+                        <a:t>1件</a:t>
+                      </a:r>
+                      <a:endParaRPr lang="en-US" sz="900" dirty="0">
+                        <a:latin typeface="Arial" charset="0"/>
+                        <a:ea typeface="Arial" charset="0"/>
+                        <a:cs typeface="Arial" charset="0"/>
+                      </a:endParaRPr>
+                    </a:p>
+                  </a:txBody>
+                  <a:tcPr marL="91440" marR="91440" marT="45720" marB="45720">
+                    <a:lnL w="6350" cap="flat" cmpd="sng" algn="ctr">
+                      <a:solidFill>
+                        <a:srgbClr val="CBD5E1"/>
+                      </a:solidFill>
+                      <a:prstDash val="solid"/>
+                      <a:round/>
+                      <a:headEnd type="none" w="med" len="med"/>
+                      <a:tailEnd type="none" w="med" len="med"/>
+                    </a:lnL>
+                    <a:lnR w="6350" cap="flat" cmpd="sng" algn="ctr">
+                      <a:solidFill>
+                        <a:srgbClr val="CBD5E1"/>
+                      </a:solidFill>
+                      <a:prstDash val="solid"/>
+                      <a:round/>
+                      <a:headEnd type="none" w="med" len="med"/>
+                      <a:tailEnd type="none" w="med" len="med"/>
+                    </a:lnR>
+                    <a:lnT w="6350" cap="flat" cmpd="sng" algn="ctr">
+                      <a:solidFill>
+                        <a:srgbClr val="CBD5E1"/>
+                      </a:solidFill>
+                      <a:prstDash val="solid"/>
+                      <a:round/>
+                      <a:headEnd type="none" w="med" len="med"/>
+                      <a:tailEnd type="none" w="med" len="med"/>
+                    </a:lnT>
+                    <a:lnB w="6350" cap="flat" cmpd="sng" algn="ctr">
+                      <a:solidFill>
+                        <a:srgbClr val="CBD5E1"/>
+                      </a:solidFill>
+                      <a:prstDash val="solid"/>
+                      <a:round/>
+                      <a:headEnd type="none" w="med" len="med"/>
+                      <a:tailEnd type="none" w="med" len="med"/>
+                    </a:lnB>
+                    <a:solidFill>
+                      <a:srgbClr val="FFFFFF"/>
+                    </a:solidFill>
+                  </a:tcPr>
+                </a:tc>
+              </a:tr>
             </a:tbl>
           </a:graphicData>
         </a:graphic>
@@ -14389,6 +14663,177 @@
                 <a:ea typeface="Arial" pitchFamily="34" charset="-122"/>
                 <a:cs typeface="Arial" pitchFamily="34" charset="-120"/>
               </a:rPr>
+              <a:t>客室の消臭対策の強化</a:t>
+            </a:r>
+            <a:endParaRPr lang="en-US" sz="1200" dirty="0"/>
+          </a:p>
+        </p:txBody>
+      </p:sp>
+      <p:sp>
+        <p:nvSpPr>
+          <p:cNvPr id="9" name="Text 7"/>
+          <p:cNvSpPr/>
+          <p:nvPr/>
+        </p:nvSpPr>
+        <p:spPr>
+          <a:xfrm>
+            <a:off x="594360" y="1600200"/>
+            <a:ext cx="3657600" cy="1188720"/>
+          </a:xfrm>
+          <a:prstGeom prst="rect">
+            <a:avLst/>
+          </a:prstGeom>
+          <a:noFill/>
+          <a:ln/>
+        </p:spPr>
+        <p:txBody>
+          <a:bodyPr wrap="square" lIns="0" tIns="0" rIns="0" bIns="0" rtlCol="0" anchor="ctr"/>
+          <a:lstStyle/>
+          <a:p>
+            <a:pPr marL="342900" indent="-342900">
+              <a:spcAft>
+                <a:spcPts val="300"/>
+              </a:spcAft>
+              <a:buSzPct val="100000"/>
+              <a:buChar char="•"/>
+            </a:pPr>
+            <a:r>
+              <a:rPr lang="en-US" sz="900" dirty="0">
+                <a:solidFill>
+                  <a:srgbClr val="334155"/>
+                </a:solidFill>
+                <a:latin typeface="Arial" pitchFamily="34" charset="0"/>
+                <a:ea typeface="Arial" pitchFamily="34" charset="-122"/>
+                <a:cs typeface="Arial" pitchFamily="34" charset="-120"/>
+              </a:rPr>
+              <a:t>チェックアウト後の換気・消臭スプレー処理の徹底</a:t>
+            </a:r>
+            <a:endParaRPr lang="en-US" sz="900" dirty="0"/>
+          </a:p>
+          <a:p>
+            <a:pPr marL="342900" indent="-342900">
+              <a:spcAft>
+                <a:spcPts val="300"/>
+              </a:spcAft>
+              <a:buSzPct val="100000"/>
+              <a:buChar char="•"/>
+            </a:pPr>
+            <a:r>
+              <a:rPr lang="en-US" sz="900" dirty="0">
+                <a:solidFill>
+                  <a:srgbClr val="334155"/>
+                </a:solidFill>
+                <a:latin typeface="Arial" pitchFamily="34" charset="0"/>
+                <a:ea typeface="Arial" pitchFamily="34" charset="-122"/>
+                <a:cs typeface="Arial" pitchFamily="34" charset="-120"/>
+              </a:rPr>
+              <a:t>定期的な脱臭剤の設置と交換フローの確立</a:t>
+            </a:r>
+            <a:endParaRPr lang="en-US" sz="900" dirty="0"/>
+          </a:p>
+          <a:p>
+            <a:pPr marL="342900" indent="-342900">
+              <a:spcAft>
+                <a:spcPts val="300"/>
+              </a:spcAft>
+              <a:buSzPct val="100000"/>
+              <a:buChar char="•"/>
+            </a:pPr>
+            <a:r>
+              <a:rPr lang="en-US" sz="900" dirty="0">
+                <a:solidFill>
+                  <a:srgbClr val="334155"/>
+                </a:solidFill>
+                <a:latin typeface="Arial" pitchFamily="34" charset="0"/>
+                <a:ea typeface="Arial" pitchFamily="34" charset="-122"/>
+                <a:cs typeface="Arial" pitchFamily="34" charset="-120"/>
+              </a:rPr>
+              <a:t>喫煙・臭いに関するクレーム発生時の即座対応マニュアル作成</a:t>
+            </a:r>
+            <a:endParaRPr lang="en-US" sz="900" dirty="0"/>
+          </a:p>
+        </p:txBody>
+      </p:sp>
+      <p:sp>
+        <p:nvSpPr>
+          <p:cNvPr id="10" name="Shape 8"/>
+          <p:cNvSpPr/>
+          <p:nvPr/>
+        </p:nvSpPr>
+        <p:spPr>
+          <a:xfrm>
+            <a:off x="4663440" y="1234440"/>
+            <a:ext cx="3977640" cy="1600200"/>
+          </a:xfrm>
+          <a:prstGeom prst="rect">
+            <a:avLst/>
+          </a:prstGeom>
+          <a:solidFill>
+            <a:srgbClr val="FFFFFF"/>
+          </a:solidFill>
+          <a:ln/>
+          <a:effectLst>
+            <a:outerShdw sx="100000" sy="100000" kx="0" ky="0" algn="bl" rotWithShape="0" blurRad="50800" dist="25400" dir="8100000">
+              <a:srgbClr val="000000">
+                <a:alpha val="10000"/>
+              </a:srgbClr>
+            </a:outerShdw>
+          </a:effectLst>
+        </p:spPr>
+      </p:sp>
+      <p:sp>
+        <p:nvSpPr>
+          <p:cNvPr id="11" name="Shape 9"/>
+          <p:cNvSpPr/>
+          <p:nvPr/>
+        </p:nvSpPr>
+        <p:spPr>
+          <a:xfrm>
+            <a:off x="4663440" y="1234440"/>
+            <a:ext cx="54864" cy="1600200"/>
+          </a:xfrm>
+          <a:prstGeom prst="rect">
+            <a:avLst/>
+          </a:prstGeom>
+          <a:solidFill>
+            <a:srgbClr val="3B7DD8"/>
+          </a:solidFill>
+          <a:ln/>
+        </p:spPr>
+      </p:sp>
+      <p:sp>
+        <p:nvSpPr>
+          <p:cNvPr id="12" name="Text 10"/>
+          <p:cNvSpPr/>
+          <p:nvPr/>
+        </p:nvSpPr>
+        <p:spPr>
+          <a:xfrm>
+            <a:off x="4800600" y="1280160"/>
+            <a:ext cx="3657600" cy="320040"/>
+          </a:xfrm>
+          <a:prstGeom prst="rect">
+            <a:avLst/>
+          </a:prstGeom>
+          <a:noFill/>
+          <a:ln/>
+        </p:spPr>
+        <p:txBody>
+          <a:bodyPr wrap="square" lIns="0" tIns="0" rIns="0" bIns="0" rtlCol="0" anchor="ctr"/>
+          <a:lstStyle/>
+          <a:p>
+            <a:pPr indent="0" marL="0">
+              <a:buNone/>
+            </a:pPr>
+            <a:r>
+              <a:rPr lang="en-US" sz="1200" b="1" dirty="0">
+                <a:solidFill>
+                  <a:srgbClr val="1A2744"/>
+                </a:solidFill>
+                <a:latin typeface="Arial" pitchFamily="34" charset="0"/>
+                <a:ea typeface="Arial" pitchFamily="34" charset="-122"/>
+                <a:cs typeface="Arial" pitchFamily="34" charset="-120"/>
+              </a:rPr>
               <a:t>エアコン・空調の定期点検強化</a:t>
             </a:r>
             <a:endParaRPr lang="en-US" sz="1200" dirty="0"/>
@@ -14397,13 +14842,13 @@
       </p:sp>
       <p:sp>
         <p:nvSpPr>
-          <p:cNvPr id="9" name="Text 7"/>
-          <p:cNvSpPr/>
-          <p:nvPr/>
-        </p:nvSpPr>
-        <p:spPr>
-          <a:xfrm>
-            <a:off x="594360" y="1600200"/>
+          <p:cNvPr id="13" name="Text 11"/>
+          <p:cNvSpPr/>
+          <p:nvPr/>
+        </p:nvSpPr>
+        <p:spPr>
+          <a:xfrm>
+            <a:off x="4800600" y="1600200"/>
             <a:ext cx="3657600" cy="1188720"/>
           </a:xfrm>
           <a:prstGeom prst="rect">
@@ -14482,13 +14927,13 @@
       </p:sp>
       <p:sp>
         <p:nvSpPr>
-          <p:cNvPr id="10" name="Shape 8"/>
-          <p:cNvSpPr/>
-          <p:nvPr/>
-        </p:nvSpPr>
-        <p:spPr>
-          <a:xfrm>
-            <a:off x="4663440" y="1234440"/>
+          <p:cNvPr id="14" name="Shape 12"/>
+          <p:cNvSpPr/>
+          <p:nvPr/>
+        </p:nvSpPr>
+        <p:spPr>
+          <a:xfrm>
+            <a:off x="457200" y="3017520"/>
             <a:ext cx="3977640" cy="1600200"/>
           </a:xfrm>
           <a:prstGeom prst="rect">
@@ -14509,13 +14954,13 @@
       </p:sp>
       <p:sp>
         <p:nvSpPr>
-          <p:cNvPr id="11" name="Shape 9"/>
-          <p:cNvSpPr/>
-          <p:nvPr/>
-        </p:nvSpPr>
-        <p:spPr>
-          <a:xfrm>
-            <a:off x="4663440" y="1234440"/>
+          <p:cNvPr id="15" name="Shape 13"/>
+          <p:cNvSpPr/>
+          <p:nvPr/>
+        </p:nvSpPr>
+        <p:spPr>
+          <a:xfrm>
+            <a:off x="457200" y="3017520"/>
             <a:ext cx="54864" cy="1600200"/>
           </a:xfrm>
           <a:prstGeom prst="rect">
@@ -14529,13 +14974,13 @@
       </p:sp>
       <p:sp>
         <p:nvSpPr>
-          <p:cNvPr id="12" name="Text 10"/>
-          <p:cNvSpPr/>
-          <p:nvPr/>
-        </p:nvSpPr>
-        <p:spPr>
-          <a:xfrm>
-            <a:off x="4800600" y="1280160"/>
+          <p:cNvPr id="16" name="Text 14"/>
+          <p:cNvSpPr/>
+          <p:nvPr/>
+        </p:nvSpPr>
+        <p:spPr>
+          <a:xfrm>
+            <a:off x="594360" y="3063240"/>
             <a:ext cx="3657600" cy="320040"/>
           </a:xfrm>
           <a:prstGeom prst="rect">
@@ -14568,13 +15013,13 @@
       </p:sp>
       <p:sp>
         <p:nvSpPr>
-          <p:cNvPr id="13" name="Text 11"/>
-          <p:cNvSpPr/>
-          <p:nvPr/>
-        </p:nvSpPr>
-        <p:spPr>
-          <a:xfrm>
-            <a:off x="4800600" y="1600200"/>
+          <p:cNvPr id="17" name="Text 15"/>
+          <p:cNvSpPr/>
+          <p:nvPr/>
+        </p:nvSpPr>
+        <p:spPr>
+          <a:xfrm>
+            <a:off x="594360" y="3383280"/>
             <a:ext cx="3657600" cy="1188720"/>
           </a:xfrm>
           <a:prstGeom prst="rect">
@@ -14646,177 +15091,6 @@
                 <a:cs typeface="Arial" pitchFamily="34" charset="-120"/>
               </a:rPr>
               <a:t>定期的なCS研修の実施</a:t>
-            </a:r>
-            <a:endParaRPr lang="en-US" sz="900" dirty="0"/>
-          </a:p>
-        </p:txBody>
-      </p:sp>
-      <p:sp>
-        <p:nvSpPr>
-          <p:cNvPr id="14" name="Shape 12"/>
-          <p:cNvSpPr/>
-          <p:nvPr/>
-        </p:nvSpPr>
-        <p:spPr>
-          <a:xfrm>
-            <a:off x="457200" y="3017520"/>
-            <a:ext cx="3977640" cy="1600200"/>
-          </a:xfrm>
-          <a:prstGeom prst="rect">
-            <a:avLst/>
-          </a:prstGeom>
-          <a:solidFill>
-            <a:srgbClr val="FFFFFF"/>
-          </a:solidFill>
-          <a:ln/>
-          <a:effectLst>
-            <a:outerShdw sx="100000" sy="100000" kx="0" ky="0" algn="bl" rotWithShape="0" blurRad="50800" dist="25400" dir="8100000">
-              <a:srgbClr val="000000">
-                <a:alpha val="10000"/>
-              </a:srgbClr>
-            </a:outerShdw>
-          </a:effectLst>
-        </p:spPr>
-      </p:sp>
-      <p:sp>
-        <p:nvSpPr>
-          <p:cNvPr id="15" name="Shape 13"/>
-          <p:cNvSpPr/>
-          <p:nvPr/>
-        </p:nvSpPr>
-        <p:spPr>
-          <a:xfrm>
-            <a:off x="457200" y="3017520"/>
-            <a:ext cx="54864" cy="1600200"/>
-          </a:xfrm>
-          <a:prstGeom prst="rect">
-            <a:avLst/>
-          </a:prstGeom>
-          <a:solidFill>
-            <a:srgbClr val="3B7DD8"/>
-          </a:solidFill>
-          <a:ln/>
-        </p:spPr>
-      </p:sp>
-      <p:sp>
-        <p:nvSpPr>
-          <p:cNvPr id="16" name="Text 14"/>
-          <p:cNvSpPr/>
-          <p:nvPr/>
-        </p:nvSpPr>
-        <p:spPr>
-          <a:xfrm>
-            <a:off x="594360" y="3063240"/>
-            <a:ext cx="3657600" cy="320040"/>
-          </a:xfrm>
-          <a:prstGeom prst="rect">
-            <a:avLst/>
-          </a:prstGeom>
-          <a:noFill/>
-          <a:ln/>
-        </p:spPr>
-        <p:txBody>
-          <a:bodyPr wrap="square" lIns="0" tIns="0" rIns="0" bIns="0" rtlCol="0" anchor="ctr"/>
-          <a:lstStyle/>
-          <a:p>
-            <a:pPr indent="0" marL="0">
-              <a:buNone/>
-            </a:pPr>
-            <a:r>
-              <a:rPr lang="en-US" sz="1200" b="1" dirty="0">
-                <a:solidFill>
-                  <a:srgbClr val="1A2744"/>
-                </a:solidFill>
-                <a:latin typeface="Arial" pitchFamily="34" charset="0"/>
-                <a:ea typeface="Arial" pitchFamily="34" charset="-122"/>
-                <a:cs typeface="Arial" pitchFamily="34" charset="-120"/>
-              </a:rPr>
-              <a:t>ゲストコミュニケーションの強化</a:t>
-            </a:r>
-            <a:endParaRPr lang="en-US" sz="1200" dirty="0"/>
-          </a:p>
-        </p:txBody>
-      </p:sp>
-      <p:sp>
-        <p:nvSpPr>
-          <p:cNvPr id="17" name="Text 15"/>
-          <p:cNvSpPr/>
-          <p:nvPr/>
-        </p:nvSpPr>
-        <p:spPr>
-          <a:xfrm>
-            <a:off x="594360" y="3383280"/>
-            <a:ext cx="3657600" cy="1188720"/>
-          </a:xfrm>
-          <a:prstGeom prst="rect">
-            <a:avLst/>
-          </a:prstGeom>
-          <a:noFill/>
-          <a:ln/>
-        </p:spPr>
-        <p:txBody>
-          <a:bodyPr wrap="square" lIns="0" tIns="0" rIns="0" bIns="0" rtlCol="0" anchor="ctr"/>
-          <a:lstStyle/>
-          <a:p>
-            <a:pPr marL="342900" indent="-342900">
-              <a:spcAft>
-                <a:spcPts val="300"/>
-              </a:spcAft>
-              <a:buSzPct val="100000"/>
-              <a:buChar char="•"/>
-            </a:pPr>
-            <a:r>
-              <a:rPr lang="en-US" sz="900" dirty="0">
-                <a:solidFill>
-                  <a:srgbClr val="334155"/>
-                </a:solidFill>
-                <a:latin typeface="Arial" pitchFamily="34" charset="0"/>
-                <a:ea typeface="Arial" pitchFamily="34" charset="-122"/>
-                <a:cs typeface="Arial" pitchFamily="34" charset="-120"/>
-              </a:rPr>
-              <a:t>チェックイン時の挨拶・案内の標準化</a:t>
-            </a:r>
-            <a:endParaRPr lang="en-US" sz="900" dirty="0"/>
-          </a:p>
-          <a:p>
-            <a:pPr marL="342900" indent="-342900">
-              <a:spcAft>
-                <a:spcPts val="300"/>
-              </a:spcAft>
-              <a:buSzPct val="100000"/>
-              <a:buChar char="•"/>
-            </a:pPr>
-            <a:r>
-              <a:rPr lang="en-US" sz="900" dirty="0">
-                <a:solidFill>
-                  <a:srgbClr val="334155"/>
-                </a:solidFill>
-                <a:latin typeface="Arial" pitchFamily="34" charset="0"/>
-                <a:ea typeface="Arial" pitchFamily="34" charset="-122"/>
-                <a:cs typeface="Arial" pitchFamily="34" charset="-120"/>
-              </a:rPr>
-              <a:t>チェックアウト時の簡易アンケート実施</a:t>
-            </a:r>
-            <a:endParaRPr lang="en-US" sz="900" dirty="0"/>
-          </a:p>
-          <a:p>
-            <a:pPr marL="342900" indent="-342900">
-              <a:spcAft>
-                <a:spcPts val="300"/>
-              </a:spcAft>
-              <a:buSzPct val="100000"/>
-              <a:buChar char="•"/>
-            </a:pPr>
-            <a:r>
-              <a:rPr lang="en-US" sz="900" dirty="0">
-                <a:solidFill>
-                  <a:srgbClr val="334155"/>
-                </a:solidFill>
-                <a:latin typeface="Arial" pitchFamily="34" charset="0"/>
-                <a:ea typeface="Arial" pitchFamily="34" charset="-122"/>
-                <a:cs typeface="Arial" pitchFamily="34" charset="-120"/>
-              </a:rPr>
-              <a:t>リピーターへの感謝メッセージの導入</a:t>
             </a:r>
             <a:endParaRPr lang="en-US" sz="900" dirty="0"/>
           </a:p>

--- a/納品レポート/ホテル別レポート/comfort_era_higashikanda_口コミ分析レポート.pptx
+++ b/納品レポート/ホテル別レポート/comfort_era_higashikanda_口コミ分析レポート.pptx
@@ -217,7 +217,7 @@
                   <c:v>9.81</c:v>
                 </c:pt>
                 <c:pt idx="3">
-                  <c:v>8.8</c:v>
+                  <c:v>8.84</c:v>
                 </c:pt>
                 <c:pt idx="4">
                   <c:v>8.24</c:v>
@@ -823,13 +823,13 @@
                 <c:formatCode>General</c:formatCode>
                 <c:ptCount val="9"/>
                 <c:pt idx="0">
-                  <c:v>68</c:v>
+                  <c:v>69</c:v>
                 </c:pt>
                 <c:pt idx="1">
                   <c:v>17</c:v>
                 </c:pt>
                 <c:pt idx="2">
-                  <c:v>15</c:v>
+                  <c:v>14</c:v>
                 </c:pt>
                 <c:pt idx="3">
                   <c:v>7</c:v>
@@ -2818,7 +2818,7 @@
                 <a:ea typeface="Arial" pitchFamily="34" charset="-122"/>
                 <a:cs typeface="Arial" pitchFamily="34" charset="-120"/>
               </a:rPr>
-              <a:t>作成日：2026年3月19日</a:t>
+              <a:t>作成日：2026年3月20日</a:t>
             </a:r>
             <a:endParaRPr lang="en-US" sz="1000" dirty="0"/>
           </a:p>
@@ -3364,7 +3364,7 @@
                           <a:ea typeface="Arial" pitchFamily="34" charset="-122"/>
                           <a:cs typeface="Arial" pitchFamily="34" charset="-120"/>
                         </a:rPr>
-                        <a:t>8.94点</a:t>
+                        <a:t>8.96点</a:t>
                       </a:r>
                       <a:endParaRPr lang="en-US" sz="1000" dirty="0">
                         <a:latin typeface="Arial" charset="0"/>
@@ -3432,7 +3432,7 @@
                           <a:ea typeface="Arial" pitchFamily="34" charset="-122"/>
                           <a:cs typeface="Arial" pitchFamily="34" charset="-120"/>
                         </a:rPr>
-                        <a:t>9.2点以上</a:t>
+                        <a:t>9.3点以上</a:t>
                       </a:r>
                       <a:endParaRPr lang="en-US" sz="1000" dirty="0">
                         <a:latin typeface="Arial" charset="0"/>
@@ -5373,7 +5373,7 @@
                 <a:ea typeface="Arial" pitchFamily="34" charset="-122"/>
                 <a:cs typeface="Arial" pitchFamily="34" charset="-120"/>
               </a:rPr>
-              <a:t>8.94</a:t>
+              <a:t>8.96</a:t>
             </a:r>
             <a:endParaRPr lang="en-US" sz="3200" dirty="0"/>
           </a:p>
@@ -6124,7 +6124,7 @@
                 <a:ea typeface="Arial" pitchFamily="34" charset="-122"/>
                 <a:cs typeface="Arial" pitchFamily="34" charset="-120"/>
               </a:rPr>
-              <a:t>  The hotel was lovely and spacious</a:t>
+              <a:t>  Ci ha piaciuto tutto</a:t>
             </a:r>
             <a:endParaRPr lang="en-US" sz="1100" dirty="0"/>
           </a:p>
@@ -6557,7 +6557,7 @@
                 <a:ea typeface="Arial" pitchFamily="34" charset="-122"/>
                 <a:cs typeface="Arial" pitchFamily="34" charset="-120"/>
               </a:rPr>
-              <a:t>8.94</a:t>
+              <a:t>8.96</a:t>
             </a:r>
             <a:endParaRPr lang="en-US" sz="3200" dirty="0"/>
           </a:p>
@@ -9005,7 +9005,7 @@
                           <a:ea typeface="Arial" pitchFamily="34" charset="-122"/>
                           <a:cs typeface="Arial" pitchFamily="34" charset="-120"/>
                         </a:rPr>
-                        <a:t>8.8</a:t>
+                        <a:t>8.84</a:t>
                       </a:r>
                       <a:endParaRPr lang="en-US" sz="900" dirty="0">
                         <a:latin typeface="Arial" charset="0"/>
@@ -9141,7 +9141,7 @@
                           <a:ea typeface="Arial" pitchFamily="34" charset="-122"/>
                           <a:cs typeface="Arial" pitchFamily="34" charset="-120"/>
                         </a:rPr>
-                        <a:t>8.8</a:t>
+                        <a:t>8.84</a:t>
                       </a:r>
                       <a:endParaRPr lang="en-US" sz="900" dirty="0">
                         <a:latin typeface="Arial" charset="0"/>
@@ -12685,7 +12685,7 @@
                           <a:ea typeface="Arial" pitchFamily="34" charset="-122"/>
                           <a:cs typeface="Arial" pitchFamily="34" charset="-120"/>
                         </a:rPr>
-                        <a:t>The hotel was lovely and spacious</a:t>
+                        <a:t>Ci ha piaciuto tutto</a:t>
                       </a:r>
                       <a:endParaRPr lang="en-US" sz="900" dirty="0">
                         <a:latin typeface="Arial" charset="0"/>

--- a/納品レポート/ホテル別レポート/comfort_era_higashikanda_口コミ分析レポート.pptx
+++ b/納品レポート/ホテル別レポート/comfort_era_higashikanda_口コミ分析レポート.pptx
@@ -192,10 +192,10 @@
                     <c:v>Booking.com</c:v>
                   </c:pt>
                   <c:pt idx="4">
-                    <c:v>Google</c:v>
+                    <c:v>楽天トラベル</c:v>
                   </c:pt>
                   <c:pt idx="5">
-                    <c:v>楽天トラベル</c:v>
+                    <c:v>Google</c:v>
                   </c:pt>
                 </c:lvl>
               </c:multiLvlStrCache>
@@ -214,16 +214,16 @@
                   <c:v>10</c:v>
                 </c:pt>
                 <c:pt idx="2">
-                  <c:v>9.81</c:v>
+                  <c:v>9.89</c:v>
                 </c:pt>
                 <c:pt idx="3">
-                  <c:v>8.84</c:v>
+                  <c:v>8.89</c:v>
                 </c:pt>
                 <c:pt idx="4">
-                  <c:v>8.24</c:v>
+                  <c:v>8</c:v>
                 </c:pt>
                 <c:pt idx="5">
-                  <c:v>8</c:v>
+                  <c:v>7.92</c:v>
                 </c:pt>
               </c:numCache>
             </c:numRef>
@@ -566,13 +566,13 @@
               <c:numCache>
                 <c:ptCount val="3"/>
                 <c:pt idx="0">
-                  <c:v>100</c:v>
+                  <c:v>102</c:v>
                 </c:pt>
                 <c:pt idx="1">
-                  <c:v>12</c:v>
+                  <c:v>11</c:v>
                 </c:pt>
                 <c:pt idx="2">
-                  <c:v>5</c:v>
+                  <c:v>6</c:v>
                 </c:pt>
               </c:numCache>
             </c:numRef>
@@ -823,7 +823,7 @@
                 <c:formatCode>General</c:formatCode>
                 <c:ptCount val="9"/>
                 <c:pt idx="0">
-                  <c:v>69</c:v>
+                  <c:v>71</c:v>
                 </c:pt>
                 <c:pt idx="1">
                   <c:v>17</c:v>
@@ -835,7 +835,7 @@
                   <c:v>7</c:v>
                 </c:pt>
                 <c:pt idx="4">
-                  <c:v>4</c:v>
+                  <c:v>3</c:v>
                 </c:pt>
                 <c:pt idx="5">
                   <c:v>1</c:v>
@@ -847,7 +847,7 @@
                   <c:v>1</c:v>
                 </c:pt>
                 <c:pt idx="8">
-                  <c:v>2</c:v>
+                  <c:v>3</c:v>
                 </c:pt>
               </c:numCache>
             </c:numRef>
@@ -2798,7 +2798,7 @@
                 <a:ea typeface="Arial" pitchFamily="34" charset="-122"/>
                 <a:cs typeface="Arial" pitchFamily="34" charset="-120"/>
               </a:rPr>
-              <a:t>レビュー総数：117件（6サイト）</a:t>
+              <a:t>レビュー総数：119件（6サイト）</a:t>
             </a:r>
             <a:endParaRPr lang="en-US" sz="1000" dirty="0"/>
           </a:p>
@@ -2818,7 +2818,7 @@
                 <a:ea typeface="Arial" pitchFamily="34" charset="-122"/>
                 <a:cs typeface="Arial" pitchFamily="34" charset="-120"/>
               </a:rPr>
-              <a:t>作成日：2026年3月20日</a:t>
+              <a:t>作成日：2026年3月21日</a:t>
             </a:r>
             <a:endParaRPr lang="en-US" sz="1000" dirty="0"/>
           </a:p>
@@ -3364,7 +3364,7 @@
                           <a:ea typeface="Arial" pitchFamily="34" charset="-122"/>
                           <a:cs typeface="Arial" pitchFamily="34" charset="-120"/>
                         </a:rPr>
-                        <a:t>8.96点</a:t>
+                        <a:t>8.94点</a:t>
                       </a:r>
                       <a:endParaRPr lang="en-US" sz="1000" dirty="0">
                         <a:latin typeface="Arial" charset="0"/>
@@ -3432,7 +3432,7 @@
                           <a:ea typeface="Arial" pitchFamily="34" charset="-122"/>
                           <a:cs typeface="Arial" pitchFamily="34" charset="-120"/>
                         </a:rPr>
-                        <a:t>9.3点以上</a:t>
+                        <a:t>9.2点以上</a:t>
                       </a:r>
                       <a:endParaRPr lang="en-US" sz="1000" dirty="0">
                         <a:latin typeface="Arial" charset="0"/>
@@ -3638,7 +3638,7 @@
                           <a:ea typeface="Arial" pitchFamily="34" charset="-122"/>
                           <a:cs typeface="Arial" pitchFamily="34" charset="-120"/>
                         </a:rPr>
-                        <a:t>85.5%</a:t>
+                        <a:t>85.7%</a:t>
                       </a:r>
                       <a:endParaRPr lang="en-US" sz="1000" dirty="0">
                         <a:latin typeface="Arial" charset="0"/>
@@ -3912,7 +3912,7 @@
                           <a:ea typeface="Arial" pitchFamily="34" charset="-122"/>
                           <a:cs typeface="Arial" pitchFamily="34" charset="-120"/>
                         </a:rPr>
-                        <a:t>4.3%</a:t>
+                        <a:t>5.0%</a:t>
                       </a:r>
                       <a:endParaRPr lang="en-US" sz="1000" dirty="0">
                         <a:latin typeface="Arial" charset="0"/>
@@ -3980,7 +3980,7 @@
                           <a:ea typeface="Arial" pitchFamily="34" charset="-122"/>
                           <a:cs typeface="Arial" pitchFamily="34" charset="-120"/>
                         </a:rPr>
-                        <a:t>1%以下</a:t>
+                        <a:t>2%以下</a:t>
                       </a:r>
                       <a:endParaRPr lang="en-US" sz="1000" dirty="0">
                         <a:latin typeface="Arial" charset="0"/>
@@ -4118,7 +4118,7 @@
                           <a:ea typeface="Arial" pitchFamily="34" charset="-122"/>
                           <a:cs typeface="Arial" pitchFamily="34" charset="-120"/>
                         </a:rPr>
-                        <a:t>楽天トラベル平均評価</a:t>
+                        <a:t>Google平均評価</a:t>
                       </a:r>
                       <a:endParaRPr lang="en-US" sz="1000" dirty="0">
                         <a:latin typeface="Arial" charset="0"/>
@@ -4186,7 +4186,7 @@
                           <a:ea typeface="Arial" pitchFamily="34" charset="-122"/>
                           <a:cs typeface="Arial" pitchFamily="34" charset="-120"/>
                         </a:rPr>
-                        <a:t>8.0点</a:t>
+                        <a:t>7.9点</a:t>
                       </a:r>
                       <a:endParaRPr lang="en-US" sz="1000" dirty="0">
                         <a:latin typeface="Arial" charset="0"/>
@@ -4254,7 +4254,7 @@
                           <a:ea typeface="Arial" pitchFamily="34" charset="-122"/>
                           <a:cs typeface="Arial" pitchFamily="34" charset="-120"/>
                         </a:rPr>
-                        <a:t>9.0点以上</a:t>
+                        <a:t>8.9点以上</a:t>
                       </a:r>
                       <a:endParaRPr lang="en-US" sz="1000" dirty="0">
                         <a:latin typeface="Arial" charset="0"/>
@@ -4734,7 +4734,7 @@
                           <a:ea typeface="Arial" pitchFamily="34" charset="-122"/>
                           <a:cs typeface="Arial" pitchFamily="34" charset="-120"/>
                         </a:rPr>
-                        <a:t>約19件/期間</a:t>
+                        <a:t>約20件/期間</a:t>
                       </a:r>
                       <a:endParaRPr lang="en-US" sz="1000" dirty="0">
                         <a:latin typeface="Arial" charset="0"/>
@@ -4802,7 +4802,7 @@
                           <a:ea typeface="Arial" pitchFamily="34" charset="-122"/>
                           <a:cs typeface="Arial" pitchFamily="34" charset="-120"/>
                         </a:rPr>
-                        <a:t>9件以下</a:t>
+                        <a:t>10件以下</a:t>
                       </a:r>
                       <a:endParaRPr lang="en-US" sz="1000" dirty="0">
                         <a:latin typeface="Arial" charset="0"/>
@@ -5373,7 +5373,7 @@
                 <a:ea typeface="Arial" pitchFamily="34" charset="-122"/>
                 <a:cs typeface="Arial" pitchFamily="34" charset="-120"/>
               </a:rPr>
-              <a:t>8.96</a:t>
+              <a:t>8.94</a:t>
             </a:r>
             <a:endParaRPr lang="en-US" sz="3200" dirty="0"/>
           </a:p>
@@ -5498,7 +5498,7 @@
                 <a:ea typeface="Arial" pitchFamily="34" charset="-122"/>
                 <a:cs typeface="Arial" pitchFamily="34" charset="-120"/>
               </a:rPr>
-              <a:t>85.5%</a:t>
+              <a:t>85.7%</a:t>
             </a:r>
             <a:endParaRPr lang="en-US" sz="3200" dirty="0"/>
           </a:p>
@@ -5623,7 +5623,7 @@
                 <a:ea typeface="Arial" pitchFamily="34" charset="-122"/>
                 <a:cs typeface="Arial" pitchFamily="34" charset="-120"/>
               </a:rPr>
-              <a:t>4.3%</a:t>
+              <a:t>5.0%</a:t>
             </a:r>
             <a:endParaRPr lang="en-US" sz="3200" dirty="0"/>
           </a:p>
@@ -5748,7 +5748,7 @@
                 <a:ea typeface="Arial" pitchFamily="34" charset="-122"/>
                 <a:cs typeface="Arial" pitchFamily="34" charset="-120"/>
               </a:rPr>
-              <a:t>117件</a:t>
+              <a:t>119件</a:t>
             </a:r>
             <a:endParaRPr lang="en-US" sz="3200" dirty="0"/>
           </a:p>
@@ -5896,7 +5896,7 @@
                 <a:ea typeface="Arial" pitchFamily="34" charset="-122"/>
                 <a:cs typeface="Arial" pitchFamily="34" charset="-120"/>
               </a:rPr>
-              <a:t>  立地は非常に便利で、地下鉄とJRの複数の路線が交差する場所に位置し、階下にはセブンイレブンがあります</a:t>
+              <a:t>  部屋は清潔で、ベッドも広く、地下鉄の駅にも近かった</a:t>
             </a:r>
             <a:endParaRPr lang="en-US" sz="1100" dirty="0"/>
           </a:p>
@@ -5936,7 +5936,7 @@
                 <a:ea typeface="Arial" pitchFamily="34" charset="-122"/>
                 <a:cs typeface="Arial" pitchFamily="34" charset="-120"/>
               </a:rPr>
-              <a:t>  The staff were also very friendly</a:t>
+              <a:t>  ホテルの従業員は親切で礼儀正しかった</a:t>
             </a:r>
             <a:endParaRPr lang="en-US" sz="1100" dirty="0"/>
           </a:p>
@@ -5976,7 +5976,7 @@
                 <a:ea typeface="Arial" pitchFamily="34" charset="-122"/>
                 <a:cs typeface="Arial" pitchFamily="34" charset="-120"/>
               </a:rPr>
-              <a:t>  他の方同様に清潔感については非の打ちどころがありません</a:t>
+              <a:t>  部屋は清潔で、ベッドも広く、地下鉄の駅にも近かった</a:t>
             </a:r>
             <a:endParaRPr lang="en-US" sz="1100" dirty="0"/>
           </a:p>
@@ -6124,7 +6124,7 @@
                 <a:ea typeface="Arial" pitchFamily="34" charset="-122"/>
                 <a:cs typeface="Arial" pitchFamily="34" charset="-120"/>
               </a:rPr>
-              <a:t>  Ci ha piaciuto tutto</a:t>
+              <a:t>  Hotel employees were kind and polite</a:t>
             </a:r>
             <a:endParaRPr lang="en-US" sz="1100" dirty="0"/>
           </a:p>
@@ -6184,7 +6184,7 @@
                 <a:ea typeface="Arial" pitchFamily="34" charset="-122"/>
                 <a:cs typeface="Arial" pitchFamily="34" charset="-120"/>
               </a:rPr>
-              <a:t>部屋の狭さ </a:t>
+              <a:t>対応・サービスの不満 </a:t>
             </a:r>
             <a:endParaRPr lang="en-US" sz="1100" dirty="0"/>
           </a:p>
@@ -6204,7 +6204,7 @@
                 <a:ea typeface="Arial" pitchFamily="34" charset="-122"/>
                 <a:cs typeface="Arial" pitchFamily="34" charset="-120"/>
               </a:rPr>
-              <a:t>  The rooms are quite small (like everywhere in Japan), but...</a:t>
+              <a:t>  サービスは最悪」  数日間滞在しましたが、残念ながら非常に不快な印象を受けました</a:t>
             </a:r>
             <a:endParaRPr lang="en-US" sz="1100" dirty="0"/>
           </a:p>
@@ -6557,7 +6557,7 @@
                 <a:ea typeface="Arial" pitchFamily="34" charset="-122"/>
                 <a:cs typeface="Arial" pitchFamily="34" charset="-120"/>
               </a:rPr>
-              <a:t>8.96</a:t>
+              <a:t>8.94</a:t>
             </a:r>
             <a:endParaRPr lang="en-US" sz="3200" dirty="0"/>
           </a:p>
@@ -6682,7 +6682,7 @@
                 <a:ea typeface="Arial" pitchFamily="34" charset="-122"/>
                 <a:cs typeface="Arial" pitchFamily="34" charset="-120"/>
               </a:rPr>
-              <a:t>85.5%</a:t>
+              <a:t>85.7%</a:t>
             </a:r>
             <a:endParaRPr lang="en-US" sz="3200" dirty="0"/>
           </a:p>
@@ -6807,7 +6807,7 @@
                 <a:ea typeface="Arial" pitchFamily="34" charset="-122"/>
                 <a:cs typeface="Arial" pitchFamily="34" charset="-120"/>
               </a:rPr>
-              <a:t>4.3%</a:t>
+              <a:t>5.0%</a:t>
             </a:r>
             <a:endParaRPr lang="en-US" sz="3200" dirty="0"/>
           </a:p>
@@ -6932,7 +6932,7 @@
                 <a:ea typeface="Arial" pitchFamily="34" charset="-122"/>
                 <a:cs typeface="Arial" pitchFamily="34" charset="-120"/>
               </a:rPr>
-              <a:t>117件</a:t>
+              <a:t>119件</a:t>
             </a:r>
             <a:endParaRPr lang="en-US" sz="3200" dirty="0"/>
           </a:p>
@@ -7402,7 +7402,7 @@
                 <a:ea typeface="Arial" pitchFamily="34" charset="-122"/>
                 <a:cs typeface="Arial" pitchFamily="34" charset="-120"/>
               </a:rPr>
-              <a:t>楽天トラベル(8.0)が相対的に低い。口コミ返信の強化が急務</a:t>
+              <a:t>Google(7.9)が相対的に低い。口コミ返信の強化が急務</a:t>
             </a:r>
             <a:endParaRPr lang="en-US" sz="1100" dirty="0"/>
           </a:p>
@@ -8595,7 +8595,7 @@
                           <a:ea typeface="Arial" pitchFamily="34" charset="-122"/>
                           <a:cs typeface="Arial" pitchFamily="34" charset="-120"/>
                         </a:rPr>
-                        <a:t>27</a:t>
+                        <a:t>28</a:t>
                       </a:r>
                       <a:endParaRPr lang="en-US" sz="900" dirty="0">
                         <a:latin typeface="Arial" charset="0"/>
@@ -8663,7 +8663,7 @@
                           <a:ea typeface="Arial" pitchFamily="34" charset="-122"/>
                           <a:cs typeface="Arial" pitchFamily="34" charset="-120"/>
                         </a:rPr>
-                        <a:t>9.81</a:t>
+                        <a:t>9.89</a:t>
                       </a:r>
                       <a:endParaRPr lang="en-US" sz="900" dirty="0">
                         <a:latin typeface="Arial" charset="0"/>
@@ -8799,7 +8799,7 @@
                           <a:ea typeface="Arial" pitchFamily="34" charset="-122"/>
                           <a:cs typeface="Arial" pitchFamily="34" charset="-120"/>
                         </a:rPr>
-                        <a:t>9.81</a:t>
+                        <a:t>9.89</a:t>
                       </a:r>
                       <a:endParaRPr lang="en-US" sz="900" dirty="0">
                         <a:latin typeface="Arial" charset="0"/>
@@ -8937,7 +8937,7 @@
                           <a:ea typeface="Arial" pitchFamily="34" charset="-122"/>
                           <a:cs typeface="Arial" pitchFamily="34" charset="-120"/>
                         </a:rPr>
-                        <a:t>61</a:t>
+                        <a:t>62</a:t>
                       </a:r>
                       <a:endParaRPr lang="en-US" sz="900" dirty="0">
                         <a:latin typeface="Arial" charset="0"/>
@@ -9005,7 +9005,7 @@
                           <a:ea typeface="Arial" pitchFamily="34" charset="-122"/>
                           <a:cs typeface="Arial" pitchFamily="34" charset="-120"/>
                         </a:rPr>
-                        <a:t>8.84</a:t>
+                        <a:t>8.89</a:t>
                       </a:r>
                       <a:endParaRPr lang="en-US" sz="900" dirty="0">
                         <a:latin typeface="Arial" charset="0"/>
@@ -9141,7 +9141,7 @@
                           <a:ea typeface="Arial" pitchFamily="34" charset="-122"/>
                           <a:cs typeface="Arial" pitchFamily="34" charset="-120"/>
                         </a:rPr>
-                        <a:t>8.84</a:t>
+                        <a:t>8.89</a:t>
                       </a:r>
                       <a:endParaRPr lang="en-US" sz="900" dirty="0">
                         <a:latin typeface="Arial" charset="0"/>
@@ -9211,7 +9211,7 @@
                           <a:ea typeface="Arial" pitchFamily="34" charset="-122"/>
                           <a:cs typeface="Arial" pitchFamily="34" charset="-120"/>
                         </a:rPr>
-                        <a:t>Google</a:t>
+                        <a:t>楽天トラベル</a:t>
                       </a:r>
                       <a:endParaRPr lang="en-US" sz="900" dirty="0">
                         <a:latin typeface="Arial" charset="0"/>
@@ -9279,7 +9279,7 @@
                           <a:ea typeface="Arial" pitchFamily="34" charset="-122"/>
                           <a:cs typeface="Arial" pitchFamily="34" charset="-120"/>
                         </a:rPr>
-                        <a:t>25</a:t>
+                        <a:t>1</a:t>
                       </a:r>
                       <a:endParaRPr lang="en-US" sz="900" dirty="0">
                         <a:latin typeface="Arial" charset="0"/>
@@ -9347,7 +9347,7 @@
                           <a:ea typeface="Arial" pitchFamily="34" charset="-122"/>
                           <a:cs typeface="Arial" pitchFamily="34" charset="-120"/>
                         </a:rPr>
-                        <a:t>4.12</a:t>
+                        <a:t>4</a:t>
                       </a:r>
                       <a:endParaRPr lang="en-US" sz="900" dirty="0">
                         <a:latin typeface="Arial" charset="0"/>
@@ -9483,7 +9483,7 @@
                           <a:ea typeface="Arial" pitchFamily="34" charset="-122"/>
                           <a:cs typeface="Arial" pitchFamily="34" charset="-120"/>
                         </a:rPr>
-                        <a:t>8.24</a:t>
+                        <a:t>8</a:t>
                       </a:r>
                       <a:endParaRPr lang="en-US" sz="900" dirty="0">
                         <a:latin typeface="Arial" charset="0"/>
@@ -9553,7 +9553,7 @@
                           <a:ea typeface="Arial" pitchFamily="34" charset="-122"/>
                           <a:cs typeface="Arial" pitchFamily="34" charset="-120"/>
                         </a:rPr>
-                        <a:t>楽天トラベル</a:t>
+                        <a:t>Google</a:t>
                       </a:r>
                       <a:endParaRPr lang="en-US" sz="900" dirty="0">
                         <a:latin typeface="Arial" charset="0"/>
@@ -9621,7 +9621,7 @@
                           <a:ea typeface="Arial" pitchFamily="34" charset="-122"/>
                           <a:cs typeface="Arial" pitchFamily="34" charset="-120"/>
                         </a:rPr>
-                        <a:t>1</a:t>
+                        <a:t>25</a:t>
                       </a:r>
                       <a:endParaRPr lang="en-US" sz="900" dirty="0">
                         <a:latin typeface="Arial" charset="0"/>
@@ -9689,7 +9689,7 @@
                           <a:ea typeface="Arial" pitchFamily="34" charset="-122"/>
                           <a:cs typeface="Arial" pitchFamily="34" charset="-120"/>
                         </a:rPr>
-                        <a:t>4</a:t>
+                        <a:t>3.96</a:t>
                       </a:r>
                       <a:endParaRPr lang="en-US" sz="900" dirty="0">
                         <a:latin typeface="Arial" charset="0"/>
@@ -9825,7 +9825,7 @@
                           <a:ea typeface="Arial" pitchFamily="34" charset="-122"/>
                           <a:cs typeface="Arial" pitchFamily="34" charset="-120"/>
                         </a:rPr>
-                        <a:t>8</a:t>
+                        <a:t>7.92</a:t>
                       </a:r>
                       <a:endParaRPr lang="en-US" sz="900" dirty="0">
                         <a:latin typeface="Arial" charset="0"/>
@@ -10233,7 +10233,7 @@
                 <a:ea typeface="Arial" pitchFamily="34" charset="-122"/>
                 <a:cs typeface="Arial" pitchFamily="34" charset="-120"/>
               </a:rPr>
-              <a:t>100件（85.5%）</a:t>
+              <a:t>102件（85.7%）</a:t>
             </a:r>
             <a:endParaRPr lang="en-US" sz="1100" dirty="0"/>
           </a:p>
@@ -10331,7 +10331,7 @@
                 <a:ea typeface="Arial" pitchFamily="34" charset="-122"/>
                 <a:cs typeface="Arial" pitchFamily="34" charset="-120"/>
               </a:rPr>
-              <a:t>12件（10.3%）</a:t>
+              <a:t>11件（9.2%）</a:t>
             </a:r>
             <a:endParaRPr lang="en-US" sz="1100" dirty="0"/>
           </a:p>
@@ -10429,7 +10429,7 @@
                 <a:ea typeface="Arial" pitchFamily="34" charset="-122"/>
                 <a:cs typeface="Arial" pitchFamily="34" charset="-120"/>
               </a:rPr>
-              <a:t>5件（4.3%）</a:t>
+              <a:t>6件（5.0%）</a:t>
             </a:r>
             <a:endParaRPr lang="en-US" sz="1100" dirty="0"/>
           </a:p>
@@ -10841,7 +10841,7 @@
                 <a:ea typeface="Arial" pitchFamily="34" charset="-122"/>
                 <a:cs typeface="Arial" pitchFamily="34" charset="-120"/>
               </a:rPr>
-              <a:t>立地は非常に便利で、地下鉄とJRの複数の路線が交差する場所に位置し、階下にはセブンイレブンがあります</a:t>
+              <a:t>部屋は清潔で、ベッドも広く、地下鉄の駅にも近かった</a:t>
             </a:r>
             <a:endParaRPr lang="en-US" sz="900" dirty="0"/>
           </a:p>
@@ -10880,7 +10880,7 @@
                 <a:ea typeface="Arial" pitchFamily="34" charset="-122"/>
                 <a:cs typeface="Arial" pitchFamily="34" charset="-120"/>
               </a:rPr>
-              <a:t>「The location was great, in a quiet neighbourhood where yo...」</a:t>
+              <a:t>「立地の良さも台無しです」</a:t>
             </a:r>
             <a:endParaRPr lang="en-US" sz="900" dirty="0"/>
           </a:p>
@@ -11064,7 +11064,7 @@
                 <a:ea typeface="Arial" pitchFamily="34" charset="-122"/>
                 <a:cs typeface="Arial" pitchFamily="34" charset="-120"/>
               </a:rPr>
-              <a:t>The staff were also very friendly</a:t>
+              <a:t>ホテルの従業員は親切で礼儀正しかった</a:t>
             </a:r>
             <a:endParaRPr lang="en-US" sz="900" dirty="0"/>
           </a:p>
@@ -11103,7 +11103,7 @@
                 <a:ea typeface="Arial" pitchFamily="34" charset="-122"/>
                 <a:cs typeface="Arial" pitchFamily="34" charset="-120"/>
               </a:rPr>
-              <a:t>「何か必要なことがあっても、スタッフは全く助けてくれません」</a:t>
+              <a:t>「一番の問題は、スタッフの全くの無関心です」</a:t>
             </a:r>
             <a:endParaRPr lang="en-US" sz="900" dirty="0"/>
           </a:p>
@@ -11287,7 +11287,7 @@
                 <a:ea typeface="Arial" pitchFamily="34" charset="-122"/>
                 <a:cs typeface="Arial" pitchFamily="34" charset="-120"/>
               </a:rPr>
-              <a:t>他の方同様に清潔感については非の打ちどころがありません</a:t>
+              <a:t>部屋は清潔で、ベッドも広く、地下鉄の駅にも近かった</a:t>
             </a:r>
             <a:endParaRPr lang="en-US" sz="900" dirty="0"/>
           </a:p>
@@ -11326,7 +11326,7 @@
                 <a:ea typeface="Arial" pitchFamily="34" charset="-122"/>
                 <a:cs typeface="Arial" pitchFamily="34" charset="-120"/>
               </a:rPr>
-              <a:t>「The rooms are quite small (like everywhere in Japan), but...」</a:t>
+              <a:t>「他の方同様に清潔感については非の打ちどころがありません」</a:t>
             </a:r>
             <a:endParaRPr lang="en-US" sz="900" dirty="0"/>
           </a:p>
@@ -11471,6 +11471,229 @@
                 <a:ea typeface="Arial" pitchFamily="34" charset="-122"/>
                 <a:cs typeface="Arial" pitchFamily="34" charset="-120"/>
               </a:rPr>
+              <a:t>快適さ・設備</a:t>
+            </a:r>
+            <a:endParaRPr lang="en-US" sz="1300" dirty="0"/>
+          </a:p>
+        </p:txBody>
+      </p:sp>
+      <p:sp>
+        <p:nvSpPr>
+          <p:cNvPr id="31" name="Text 29"/>
+          <p:cNvSpPr/>
+          <p:nvPr/>
+        </p:nvSpPr>
+        <p:spPr>
+          <a:xfrm>
+            <a:off x="594360" y="3246120"/>
+            <a:ext cx="2377440" cy="365760"/>
+          </a:xfrm>
+          <a:prstGeom prst="rect">
+            <a:avLst/>
+          </a:prstGeom>
+          <a:noFill/>
+          <a:ln/>
+        </p:spPr>
+        <p:txBody>
+          <a:bodyPr wrap="square" lIns="0" tIns="0" rIns="0" bIns="0" rtlCol="0" anchor="ctr"/>
+          <a:lstStyle/>
+          <a:p>
+            <a:pPr indent="0" marL="0">
+              <a:buNone/>
+            </a:pPr>
+            <a:r>
+              <a:rPr lang="en-US" sz="900" dirty="0">
+                <a:solidFill>
+                  <a:srgbClr val="64748B"/>
+                </a:solidFill>
+                <a:latin typeface="Arial" pitchFamily="34" charset="0"/>
+                <a:ea typeface="Arial" pitchFamily="34" charset="-122"/>
+                <a:cs typeface="Arial" pitchFamily="34" charset="-120"/>
+              </a:rPr>
+              <a:t>部屋は清潔で、ベッドも広く、地下鉄の駅にも近かった</a:t>
+            </a:r>
+            <a:endParaRPr lang="en-US" sz="900" dirty="0"/>
+          </a:p>
+        </p:txBody>
+      </p:sp>
+      <p:sp>
+        <p:nvSpPr>
+          <p:cNvPr id="32" name="Text 30"/>
+          <p:cNvSpPr/>
+          <p:nvPr/>
+        </p:nvSpPr>
+        <p:spPr>
+          <a:xfrm>
+            <a:off x="594360" y="3657600"/>
+            <a:ext cx="2377440" cy="640080"/>
+          </a:xfrm>
+          <a:prstGeom prst="rect">
+            <a:avLst/>
+          </a:prstGeom>
+          <a:noFill/>
+          <a:ln/>
+        </p:spPr>
+        <p:txBody>
+          <a:bodyPr wrap="square" lIns="0" tIns="0" rIns="0" bIns="0" rtlCol="0" anchor="ctr"/>
+          <a:lstStyle/>
+          <a:p>
+            <a:pPr indent="0" marL="0">
+              <a:buNone/>
+            </a:pPr>
+            <a:r>
+              <a:rPr lang="en-US" sz="900" i="1" dirty="0">
+                <a:solidFill>
+                  <a:srgbClr val="3B7DD8"/>
+                </a:solidFill>
+                <a:latin typeface="Arial" pitchFamily="34" charset="0"/>
+                <a:ea typeface="Arial" pitchFamily="34" charset="-122"/>
+                <a:cs typeface="Arial" pitchFamily="34" charset="-120"/>
+              </a:rPr>
+              <a:t>「The bed and pillows were great」</a:t>
+            </a:r>
+            <a:endParaRPr lang="en-US" sz="900" dirty="0"/>
+          </a:p>
+        </p:txBody>
+      </p:sp>
+      <p:sp>
+        <p:nvSpPr>
+          <p:cNvPr id="33" name="Shape 31"/>
+          <p:cNvSpPr/>
+          <p:nvPr/>
+        </p:nvSpPr>
+        <p:spPr>
+          <a:xfrm>
+            <a:off x="3291840" y="2880360"/>
+            <a:ext cx="2651760" cy="1600200"/>
+          </a:xfrm>
+          <a:prstGeom prst="rect">
+            <a:avLst/>
+          </a:prstGeom>
+          <a:solidFill>
+            <a:srgbClr val="FFFFFF"/>
+          </a:solidFill>
+          <a:ln/>
+          <a:effectLst>
+            <a:outerShdw sx="100000" sy="100000" kx="0" ky="0" algn="bl" rotWithShape="0" blurRad="50800" dist="25400" dir="8100000">
+              <a:srgbClr val="000000">
+                <a:alpha val="10000"/>
+              </a:srgbClr>
+            </a:outerShdw>
+          </a:effectLst>
+        </p:spPr>
+      </p:sp>
+      <p:sp>
+        <p:nvSpPr>
+          <p:cNvPr id="34" name="Shape 32"/>
+          <p:cNvSpPr/>
+          <p:nvPr/>
+        </p:nvSpPr>
+        <p:spPr>
+          <a:xfrm>
+            <a:off x="3291840" y="2880360"/>
+            <a:ext cx="54864" cy="1600200"/>
+          </a:xfrm>
+          <a:prstGeom prst="rect">
+            <a:avLst/>
+          </a:prstGeom>
+          <a:solidFill>
+            <a:srgbClr val="16A34A"/>
+          </a:solidFill>
+          <a:ln/>
+        </p:spPr>
+      </p:sp>
+      <p:sp>
+        <p:nvSpPr>
+          <p:cNvPr id="35" name="Shape 33"/>
+          <p:cNvSpPr/>
+          <p:nvPr/>
+        </p:nvSpPr>
+        <p:spPr>
+          <a:xfrm>
+            <a:off x="5120640" y="2953512"/>
+            <a:ext cx="658368" cy="228600"/>
+          </a:xfrm>
+          <a:prstGeom prst="rect">
+            <a:avLst/>
+          </a:prstGeom>
+          <a:solidFill>
+            <a:srgbClr val="DCFCE7"/>
+          </a:solidFill>
+          <a:ln/>
+        </p:spPr>
+      </p:sp>
+      <p:sp>
+        <p:nvSpPr>
+          <p:cNvPr id="36" name="Text 34"/>
+          <p:cNvSpPr/>
+          <p:nvPr/>
+        </p:nvSpPr>
+        <p:spPr>
+          <a:xfrm>
+            <a:off x="5120640" y="2953512"/>
+            <a:ext cx="658368" cy="228600"/>
+          </a:xfrm>
+          <a:prstGeom prst="rect">
+            <a:avLst/>
+          </a:prstGeom>
+          <a:noFill/>
+          <a:ln/>
+        </p:spPr>
+        <p:txBody>
+          <a:bodyPr wrap="square" lIns="0" tIns="0" rIns="0" bIns="0" rtlCol="0" anchor="ctr"/>
+          <a:lstStyle/>
+          <a:p>
+            <a:pPr algn="ctr" indent="0" marL="0">
+              <a:buNone/>
+            </a:pPr>
+            <a:r>
+              <a:rPr lang="en-US" sz="900" b="1" dirty="0">
+                <a:solidFill>
+                  <a:srgbClr val="16A34A"/>
+                </a:solidFill>
+                <a:latin typeface="Arial" pitchFamily="34" charset="0"/>
+                <a:ea typeface="Arial" pitchFamily="34" charset="-122"/>
+                <a:cs typeface="Arial" pitchFamily="34" charset="-120"/>
+              </a:rPr>
+              <a:t>20件+</a:t>
+            </a:r>
+            <a:endParaRPr lang="en-US" sz="900" dirty="0"/>
+          </a:p>
+        </p:txBody>
+      </p:sp>
+      <p:sp>
+        <p:nvSpPr>
+          <p:cNvPr id="37" name="Text 35"/>
+          <p:cNvSpPr/>
+          <p:nvPr/>
+        </p:nvSpPr>
+        <p:spPr>
+          <a:xfrm>
+            <a:off x="3429000" y="2953512"/>
+            <a:ext cx="1645920" cy="274320"/>
+          </a:xfrm>
+          <a:prstGeom prst="rect">
+            <a:avLst/>
+          </a:prstGeom>
+          <a:noFill/>
+          <a:ln/>
+        </p:spPr>
+        <p:txBody>
+          <a:bodyPr wrap="square" lIns="0" tIns="0" rIns="0" bIns="0" rtlCol="0" anchor="ctr"/>
+          <a:lstStyle/>
+          <a:p>
+            <a:pPr indent="0" marL="0">
+              <a:buNone/>
+            </a:pPr>
+            <a:r>
+              <a:rPr lang="en-US" sz="1300" b="1" dirty="0">
+                <a:solidFill>
+                  <a:srgbClr val="1A2744"/>
+                </a:solidFill>
+                <a:latin typeface="Arial" pitchFamily="34" charset="0"/>
+                <a:ea typeface="Arial" pitchFamily="34" charset="-122"/>
+                <a:cs typeface="Arial" pitchFamily="34" charset="-120"/>
+              </a:rPr>
               <a:t>朝食</a:t>
             </a:r>
             <a:endParaRPr lang="en-US" sz="1300" dirty="0"/>
@@ -11479,13 +11702,13 @@
       </p:sp>
       <p:sp>
         <p:nvSpPr>
-          <p:cNvPr id="31" name="Text 29"/>
-          <p:cNvSpPr/>
-          <p:nvPr/>
-        </p:nvSpPr>
-        <p:spPr>
-          <a:xfrm>
-            <a:off x="594360" y="3246120"/>
+          <p:cNvPr id="38" name="Text 36"/>
+          <p:cNvSpPr/>
+          <p:nvPr/>
+        </p:nvSpPr>
+        <p:spPr>
+          <a:xfrm>
+            <a:off x="3429000" y="3246120"/>
             <a:ext cx="2377440" cy="365760"/>
           </a:xfrm>
           <a:prstGeom prst="rect">
@@ -11518,13 +11741,13 @@
       </p:sp>
       <p:sp>
         <p:nvSpPr>
-          <p:cNvPr id="32" name="Text 30"/>
-          <p:cNvSpPr/>
-          <p:nvPr/>
-        </p:nvSpPr>
-        <p:spPr>
-          <a:xfrm>
-            <a:off x="594360" y="3657600"/>
+          <p:cNvPr id="39" name="Text 37"/>
+          <p:cNvSpPr/>
+          <p:nvPr/>
+        </p:nvSpPr>
+        <p:spPr>
+          <a:xfrm>
+            <a:off x="3429000" y="3657600"/>
             <a:ext cx="2377440" cy="640080"/>
           </a:xfrm>
           <a:prstGeom prst="rect">
@@ -11550,229 +11773,6 @@
                 <a:cs typeface="Arial" pitchFamily="34" charset="-120"/>
               </a:rPr>
               <a:t>「ホテルでは無料の朝食を提供しています」</a:t>
-            </a:r>
-            <a:endParaRPr lang="en-US" sz="900" dirty="0"/>
-          </a:p>
-        </p:txBody>
-      </p:sp>
-      <p:sp>
-        <p:nvSpPr>
-          <p:cNvPr id="33" name="Shape 31"/>
-          <p:cNvSpPr/>
-          <p:nvPr/>
-        </p:nvSpPr>
-        <p:spPr>
-          <a:xfrm>
-            <a:off x="3291840" y="2880360"/>
-            <a:ext cx="2651760" cy="1600200"/>
-          </a:xfrm>
-          <a:prstGeom prst="rect">
-            <a:avLst/>
-          </a:prstGeom>
-          <a:solidFill>
-            <a:srgbClr val="FFFFFF"/>
-          </a:solidFill>
-          <a:ln/>
-          <a:effectLst>
-            <a:outerShdw sx="100000" sy="100000" kx="0" ky="0" algn="bl" rotWithShape="0" blurRad="50800" dist="25400" dir="8100000">
-              <a:srgbClr val="000000">
-                <a:alpha val="10000"/>
-              </a:srgbClr>
-            </a:outerShdw>
-          </a:effectLst>
-        </p:spPr>
-      </p:sp>
-      <p:sp>
-        <p:nvSpPr>
-          <p:cNvPr id="34" name="Shape 32"/>
-          <p:cNvSpPr/>
-          <p:nvPr/>
-        </p:nvSpPr>
-        <p:spPr>
-          <a:xfrm>
-            <a:off x="3291840" y="2880360"/>
-            <a:ext cx="54864" cy="1600200"/>
-          </a:xfrm>
-          <a:prstGeom prst="rect">
-            <a:avLst/>
-          </a:prstGeom>
-          <a:solidFill>
-            <a:srgbClr val="16A34A"/>
-          </a:solidFill>
-          <a:ln/>
-        </p:spPr>
-      </p:sp>
-      <p:sp>
-        <p:nvSpPr>
-          <p:cNvPr id="35" name="Shape 33"/>
-          <p:cNvSpPr/>
-          <p:nvPr/>
-        </p:nvSpPr>
-        <p:spPr>
-          <a:xfrm>
-            <a:off x="5120640" y="2953512"/>
-            <a:ext cx="658368" cy="228600"/>
-          </a:xfrm>
-          <a:prstGeom prst="rect">
-            <a:avLst/>
-          </a:prstGeom>
-          <a:solidFill>
-            <a:srgbClr val="DCFCE7"/>
-          </a:solidFill>
-          <a:ln/>
-        </p:spPr>
-      </p:sp>
-      <p:sp>
-        <p:nvSpPr>
-          <p:cNvPr id="36" name="Text 34"/>
-          <p:cNvSpPr/>
-          <p:nvPr/>
-        </p:nvSpPr>
-        <p:spPr>
-          <a:xfrm>
-            <a:off x="5120640" y="2953512"/>
-            <a:ext cx="658368" cy="228600"/>
-          </a:xfrm>
-          <a:prstGeom prst="rect">
-            <a:avLst/>
-          </a:prstGeom>
-          <a:noFill/>
-          <a:ln/>
-        </p:spPr>
-        <p:txBody>
-          <a:bodyPr wrap="square" lIns="0" tIns="0" rIns="0" bIns="0" rtlCol="0" anchor="ctr"/>
-          <a:lstStyle/>
-          <a:p>
-            <a:pPr algn="ctr" indent="0" marL="0">
-              <a:buNone/>
-            </a:pPr>
-            <a:r>
-              <a:rPr lang="en-US" sz="900" b="1" dirty="0">
-                <a:solidFill>
-                  <a:srgbClr val="16A34A"/>
-                </a:solidFill>
-                <a:latin typeface="Arial" pitchFamily="34" charset="0"/>
-                <a:ea typeface="Arial" pitchFamily="34" charset="-122"/>
-                <a:cs typeface="Arial" pitchFamily="34" charset="-120"/>
-              </a:rPr>
-              <a:t>20件+</a:t>
-            </a:r>
-            <a:endParaRPr lang="en-US" sz="900" dirty="0"/>
-          </a:p>
-        </p:txBody>
-      </p:sp>
-      <p:sp>
-        <p:nvSpPr>
-          <p:cNvPr id="37" name="Text 35"/>
-          <p:cNvSpPr/>
-          <p:nvPr/>
-        </p:nvSpPr>
-        <p:spPr>
-          <a:xfrm>
-            <a:off x="3429000" y="2953512"/>
-            <a:ext cx="1645920" cy="274320"/>
-          </a:xfrm>
-          <a:prstGeom prst="rect">
-            <a:avLst/>
-          </a:prstGeom>
-          <a:noFill/>
-          <a:ln/>
-        </p:spPr>
-        <p:txBody>
-          <a:bodyPr wrap="square" lIns="0" tIns="0" rIns="0" bIns="0" rtlCol="0" anchor="ctr"/>
-          <a:lstStyle/>
-          <a:p>
-            <a:pPr indent="0" marL="0">
-              <a:buNone/>
-            </a:pPr>
-            <a:r>
-              <a:rPr lang="en-US" sz="1300" b="1" dirty="0">
-                <a:solidFill>
-                  <a:srgbClr val="1A2744"/>
-                </a:solidFill>
-                <a:latin typeface="Arial" pitchFamily="34" charset="0"/>
-                <a:ea typeface="Arial" pitchFamily="34" charset="-122"/>
-                <a:cs typeface="Arial" pitchFamily="34" charset="-120"/>
-              </a:rPr>
-              <a:t>快適さ・設備</a:t>
-            </a:r>
-            <a:endParaRPr lang="en-US" sz="1300" dirty="0"/>
-          </a:p>
-        </p:txBody>
-      </p:sp>
-      <p:sp>
-        <p:nvSpPr>
-          <p:cNvPr id="38" name="Text 36"/>
-          <p:cNvSpPr/>
-          <p:nvPr/>
-        </p:nvSpPr>
-        <p:spPr>
-          <a:xfrm>
-            <a:off x="3429000" y="3246120"/>
-            <a:ext cx="2377440" cy="365760"/>
-          </a:xfrm>
-          <a:prstGeom prst="rect">
-            <a:avLst/>
-          </a:prstGeom>
-          <a:noFill/>
-          <a:ln/>
-        </p:spPr>
-        <p:txBody>
-          <a:bodyPr wrap="square" lIns="0" tIns="0" rIns="0" bIns="0" rtlCol="0" anchor="ctr"/>
-          <a:lstStyle/>
-          <a:p>
-            <a:pPr indent="0" marL="0">
-              <a:buNone/>
-            </a:pPr>
-            <a:r>
-              <a:rPr lang="en-US" sz="900" dirty="0">
-                <a:solidFill>
-                  <a:srgbClr val="64748B"/>
-                </a:solidFill>
-                <a:latin typeface="Arial" pitchFamily="34" charset="0"/>
-                <a:ea typeface="Arial" pitchFamily="34" charset="-122"/>
-                <a:cs typeface="Arial" pitchFamily="34" charset="-120"/>
-              </a:rPr>
-              <a:t>The bed and pillows were great</a:t>
-            </a:r>
-            <a:endParaRPr lang="en-US" sz="900" dirty="0"/>
-          </a:p>
-        </p:txBody>
-      </p:sp>
-      <p:sp>
-        <p:nvSpPr>
-          <p:cNvPr id="39" name="Text 37"/>
-          <p:cNvSpPr/>
-          <p:nvPr/>
-        </p:nvSpPr>
-        <p:spPr>
-          <a:xfrm>
-            <a:off x="3429000" y="3657600"/>
-            <a:ext cx="2377440" cy="640080"/>
-          </a:xfrm>
-          <a:prstGeom prst="rect">
-            <a:avLst/>
-          </a:prstGeom>
-          <a:noFill/>
-          <a:ln/>
-        </p:spPr>
-        <p:txBody>
-          <a:bodyPr wrap="square" lIns="0" tIns="0" rIns="0" bIns="0" rtlCol="0" anchor="ctr"/>
-          <a:lstStyle/>
-          <a:p>
-            <a:pPr indent="0" marL="0">
-              <a:buNone/>
-            </a:pPr>
-            <a:r>
-              <a:rPr lang="en-US" sz="900" i="1" dirty="0">
-                <a:solidFill>
-                  <a:srgbClr val="3B7DD8"/>
-                </a:solidFill>
-                <a:latin typeface="Arial" pitchFamily="34" charset="0"/>
-                <a:ea typeface="Arial" pitchFamily="34" charset="-122"/>
-                <a:cs typeface="Arial" pitchFamily="34" charset="-120"/>
-              </a:rPr>
-              <a:t>「タオルやその他のアメニティは毎日交換され、「お休みください」モードにしていたにもかかわらず、着替え用のバッグも用意...」</a:t>
             </a:r>
             <a:endParaRPr lang="en-US" sz="900" dirty="0"/>
           </a:p>
@@ -12685,7 +12685,7 @@
                           <a:ea typeface="Arial" pitchFamily="34" charset="-122"/>
                           <a:cs typeface="Arial" pitchFamily="34" charset="-120"/>
                         </a:rPr>
-                        <a:t>Ci ha piaciuto tutto</a:t>
+                        <a:t>Hotel employees were kind and polite</a:t>
                       </a:r>
                       <a:endParaRPr lang="en-US" sz="900" dirty="0">
                         <a:latin typeface="Arial" charset="0"/>
@@ -12753,7 +12753,7 @@
                           <a:ea typeface="Arial" pitchFamily="34" charset="-122"/>
                           <a:cs typeface="Arial" pitchFamily="34" charset="-120"/>
                         </a:rPr>
-                        <a:t>19件</a:t>
+                        <a:t>20件</a:t>
                       </a:r>
                       <a:endParaRPr lang="en-US" sz="900" dirty="0">
                         <a:latin typeface="Arial" charset="0"/>
@@ -13027,7 +13027,7 @@
                           <a:ea typeface="Arial" pitchFamily="34" charset="-122"/>
                           <a:cs typeface="Arial" pitchFamily="34" charset="-120"/>
                         </a:rPr>
-                        <a:t>8件</a:t>
+                        <a:t>7件</a:t>
                       </a:r>
                       <a:endParaRPr lang="en-US" sz="900" dirty="0">
                         <a:latin typeface="Arial" charset="0"/>
@@ -13165,7 +13165,7 @@
                           <a:ea typeface="Arial" pitchFamily="34" charset="-122"/>
                           <a:cs typeface="Arial" pitchFamily="34" charset="-120"/>
                         </a:rPr>
-                        <a:t>部屋の狭さ</a:t>
+                        <a:t>対応・サービスの不満</a:t>
                       </a:r>
                       <a:endParaRPr lang="en-US" sz="900" dirty="0">
                         <a:latin typeface="Arial" charset="0"/>
@@ -13233,7 +13233,7 @@
                           <a:ea typeface="Arial" pitchFamily="34" charset="-122"/>
                           <a:cs typeface="Arial" pitchFamily="34" charset="-120"/>
                         </a:rPr>
-                        <a:t>The rooms are quite small (like everywhere in Japan), but...</a:t>
+                        <a:t>サービスは最悪」  数日間滞在しましたが、残念ながら非常に不快な印象を受けました</a:t>
                       </a:r>
                       <a:endParaRPr lang="en-US" sz="900" dirty="0">
                         <a:latin typeface="Arial" charset="0"/>
@@ -13301,7 +13301,7 @@
                           <a:ea typeface="Arial" pitchFamily="34" charset="-122"/>
                           <a:cs typeface="Arial" pitchFamily="34" charset="-120"/>
                         </a:rPr>
-                        <a:t>5件</a:t>
+                        <a:t>6件</a:t>
                       </a:r>
                       <a:endParaRPr lang="en-US" sz="900" dirty="0">
                         <a:latin typeface="Arial" charset="0"/>
@@ -13439,7 +13439,7 @@
                           <a:ea typeface="Arial" pitchFamily="34" charset="-122"/>
                           <a:cs typeface="Arial" pitchFamily="34" charset="-120"/>
                         </a:rPr>
-                        <a:t>対応・サービスの不満</a:t>
+                        <a:t>部屋の狭さ</a:t>
                       </a:r>
                       <a:endParaRPr lang="en-US" sz="900" dirty="0">
                         <a:latin typeface="Arial" charset="0"/>
@@ -13507,7 +13507,7 @@
                           <a:ea typeface="Arial" pitchFamily="34" charset="-122"/>
                           <a:cs typeface="Arial" pitchFamily="34" charset="-120"/>
                         </a:rPr>
-                        <a:t>室內不大但是設施齊全，該有的東西都有 工作人員服務態度特別好，前台也備有翻譯器 也可以嘗試一下自助早餐，東西不多但...</a:t>
+                        <a:t>The rooms are quite small (like everywhere in Japan), but...</a:t>
                       </a:r>
                       <a:endParaRPr lang="en-US" sz="900" dirty="0">
                         <a:latin typeface="Arial" charset="0"/>

--- a/納品レポート/ホテル別レポート/comfort_era_higashikanda_口コミ分析レポート.pptx
+++ b/納品レポート/ホテル別レポート/comfort_era_higashikanda_口コミ分析レポート.pptx
@@ -217,7 +217,7 @@
                   <c:v>9.89</c:v>
                 </c:pt>
                 <c:pt idx="3">
-                  <c:v>8.89</c:v>
+                  <c:v>8.92</c:v>
                 </c:pt>
                 <c:pt idx="4">
                   <c:v>8</c:v>
@@ -566,7 +566,7 @@
               <c:numCache>
                 <c:ptCount val="3"/>
                 <c:pt idx="0">
-                  <c:v>102</c:v>
+                  <c:v>104</c:v>
                 </c:pt>
                 <c:pt idx="1">
                   <c:v>11</c:v>
@@ -823,13 +823,13 @@
                 <c:formatCode>General</c:formatCode>
                 <c:ptCount val="9"/>
                 <c:pt idx="0">
-                  <c:v>71</c:v>
+                  <c:v>73</c:v>
                 </c:pt>
                 <c:pt idx="1">
-                  <c:v>17</c:v>
+                  <c:v>16</c:v>
                 </c:pt>
                 <c:pt idx="2">
-                  <c:v>14</c:v>
+                  <c:v>15</c:v>
                 </c:pt>
                 <c:pt idx="3">
                   <c:v>7</c:v>
@@ -2798,7 +2798,7 @@
                 <a:ea typeface="Arial" pitchFamily="34" charset="-122"/>
                 <a:cs typeface="Arial" pitchFamily="34" charset="-120"/>
               </a:rPr>
-              <a:t>レビュー総数：119件（6サイト）</a:t>
+              <a:t>レビュー総数：121件（6サイト）</a:t>
             </a:r>
             <a:endParaRPr lang="en-US" sz="1000" dirty="0"/>
           </a:p>
@@ -2818,7 +2818,7 @@
                 <a:ea typeface="Arial" pitchFamily="34" charset="-122"/>
                 <a:cs typeface="Arial" pitchFamily="34" charset="-120"/>
               </a:rPr>
-              <a:t>作成日：2026年3月21日</a:t>
+              <a:t>作成日：2026年3月23日</a:t>
             </a:r>
             <a:endParaRPr lang="en-US" sz="1000" dirty="0"/>
           </a:p>
@@ -3364,7 +3364,7 @@
                           <a:ea typeface="Arial" pitchFamily="34" charset="-122"/>
                           <a:cs typeface="Arial" pitchFamily="34" charset="-120"/>
                         </a:rPr>
-                        <a:t>8.94点</a:t>
+                        <a:t>8.95点</a:t>
                       </a:r>
                       <a:endParaRPr lang="en-US" sz="1000" dirty="0">
                         <a:latin typeface="Arial" charset="0"/>
@@ -3432,7 +3432,7 @@
                           <a:ea typeface="Arial" pitchFamily="34" charset="-122"/>
                           <a:cs typeface="Arial" pitchFamily="34" charset="-120"/>
                         </a:rPr>
-                        <a:t>9.2点以上</a:t>
+                        <a:t>9.3点以上</a:t>
                       </a:r>
                       <a:endParaRPr lang="en-US" sz="1000" dirty="0">
                         <a:latin typeface="Arial" charset="0"/>
@@ -3638,7 +3638,7 @@
                           <a:ea typeface="Arial" pitchFamily="34" charset="-122"/>
                           <a:cs typeface="Arial" pitchFamily="34" charset="-120"/>
                         </a:rPr>
-                        <a:t>85.7%</a:t>
+                        <a:t>86.0%</a:t>
                       </a:r>
                       <a:endParaRPr lang="en-US" sz="1000" dirty="0">
                         <a:latin typeface="Arial" charset="0"/>
@@ -4734,7 +4734,7 @@
                           <a:ea typeface="Arial" pitchFamily="34" charset="-122"/>
                           <a:cs typeface="Arial" pitchFamily="34" charset="-120"/>
                         </a:rPr>
-                        <a:t>約20件/期間</a:t>
+                        <a:t>約22件/期間</a:t>
                       </a:r>
                       <a:endParaRPr lang="en-US" sz="1000" dirty="0">
                         <a:latin typeface="Arial" charset="0"/>
@@ -4802,7 +4802,7 @@
                           <a:ea typeface="Arial" pitchFamily="34" charset="-122"/>
                           <a:cs typeface="Arial" pitchFamily="34" charset="-120"/>
                         </a:rPr>
-                        <a:t>10件以下</a:t>
+                        <a:t>11件以下</a:t>
                       </a:r>
                       <a:endParaRPr lang="en-US" sz="1000" dirty="0">
                         <a:latin typeface="Arial" charset="0"/>
@@ -5373,7 +5373,7 @@
                 <a:ea typeface="Arial" pitchFamily="34" charset="-122"/>
                 <a:cs typeface="Arial" pitchFamily="34" charset="-120"/>
               </a:rPr>
-              <a:t>8.94</a:t>
+              <a:t>8.95</a:t>
             </a:r>
             <a:endParaRPr lang="en-US" sz="3200" dirty="0"/>
           </a:p>
@@ -5498,7 +5498,7 @@
                 <a:ea typeface="Arial" pitchFamily="34" charset="-122"/>
                 <a:cs typeface="Arial" pitchFamily="34" charset="-120"/>
               </a:rPr>
-              <a:t>85.7%</a:t>
+              <a:t>86.0%</a:t>
             </a:r>
             <a:endParaRPr lang="en-US" sz="3200" dirty="0"/>
           </a:p>
@@ -5748,7 +5748,7 @@
                 <a:ea typeface="Arial" pitchFamily="34" charset="-122"/>
                 <a:cs typeface="Arial" pitchFamily="34" charset="-120"/>
               </a:rPr>
-              <a:t>119件</a:t>
+              <a:t>121件</a:t>
             </a:r>
             <a:endParaRPr lang="en-US" sz="3200" dirty="0"/>
           </a:p>
@@ -5896,7 +5896,7 @@
                 <a:ea typeface="Arial" pitchFamily="34" charset="-122"/>
                 <a:cs typeface="Arial" pitchFamily="34" charset="-120"/>
               </a:rPr>
-              <a:t>  部屋は清潔で、ベッドも広く、地下鉄の駅にも近かった</a:t>
+              <a:t>  荷物の預かりもありましたが、クローク内ではなく外に置いて網掛けされるようでしたので近くの駅のロッカーを使用しました</a:t>
             </a:r>
             <a:endParaRPr lang="en-US" sz="1100" dirty="0"/>
           </a:p>
@@ -5936,7 +5936,7 @@
                 <a:ea typeface="Arial" pitchFamily="34" charset="-122"/>
                 <a:cs typeface="Arial" pitchFamily="34" charset="-120"/>
               </a:rPr>
-              <a:t>  ホテルの従業員は親切で礼儀正しかった</a:t>
+              <a:t>  Lo staff è gentilissimo</a:t>
             </a:r>
             <a:endParaRPr lang="en-US" sz="1100" dirty="0"/>
           </a:p>
@@ -5976,7 +5976,7 @@
                 <a:ea typeface="Arial" pitchFamily="34" charset="-122"/>
                 <a:cs typeface="Arial" pitchFamily="34" charset="-120"/>
               </a:rPr>
-              <a:t>  部屋は清潔で、ベッドも広く、地下鉄の駅にも近かった</a:t>
+              <a:t>  室内やバストイレも綺麗でしたので気持ちよく利用できました</a:t>
             </a:r>
             <a:endParaRPr lang="en-US" sz="1100" dirty="0"/>
           </a:p>
@@ -6124,7 +6124,7 @@
                 <a:ea typeface="Arial" pitchFamily="34" charset="-122"/>
                 <a:cs typeface="Arial" pitchFamily="34" charset="-120"/>
               </a:rPr>
-              <a:t>  Hotel employees were kind and polite</a:t>
+              <a:t>  Las instalaciones, la habitación muy confortable, el pers...</a:t>
             </a:r>
             <a:endParaRPr lang="en-US" sz="1100" dirty="0"/>
           </a:p>
@@ -6164,7 +6164,7 @@
                 <a:ea typeface="Arial" pitchFamily="34" charset="-122"/>
                 <a:cs typeface="Arial" pitchFamily="34" charset="-120"/>
               </a:rPr>
-              <a:t>  The bathroom in clean and big enough</a:t>
+              <a:t>  室内やバストイレも綺麗でしたので気持ちよく利用できました</a:t>
             </a:r>
             <a:endParaRPr lang="en-US" sz="1100" dirty="0"/>
           </a:p>
@@ -6557,7 +6557,7 @@
                 <a:ea typeface="Arial" pitchFamily="34" charset="-122"/>
                 <a:cs typeface="Arial" pitchFamily="34" charset="-120"/>
               </a:rPr>
-              <a:t>8.94</a:t>
+              <a:t>8.95</a:t>
             </a:r>
             <a:endParaRPr lang="en-US" sz="3200" dirty="0"/>
           </a:p>
@@ -6682,7 +6682,7 @@
                 <a:ea typeface="Arial" pitchFamily="34" charset="-122"/>
                 <a:cs typeface="Arial" pitchFamily="34" charset="-120"/>
               </a:rPr>
-              <a:t>85.7%</a:t>
+              <a:t>86.0%</a:t>
             </a:r>
             <a:endParaRPr lang="en-US" sz="3200" dirty="0"/>
           </a:p>
@@ -6932,7 +6932,7 @@
                 <a:ea typeface="Arial" pitchFamily="34" charset="-122"/>
                 <a:cs typeface="Arial" pitchFamily="34" charset="-120"/>
               </a:rPr>
-              <a:t>119件</a:t>
+              <a:t>121件</a:t>
             </a:r>
             <a:endParaRPr lang="en-US" sz="3200" dirty="0"/>
           </a:p>
@@ -8937,7 +8937,7 @@
                           <a:ea typeface="Arial" pitchFamily="34" charset="-122"/>
                           <a:cs typeface="Arial" pitchFamily="34" charset="-120"/>
                         </a:rPr>
-                        <a:t>62</a:t>
+                        <a:t>63</a:t>
                       </a:r>
                       <a:endParaRPr lang="en-US" sz="900" dirty="0">
                         <a:latin typeface="Arial" charset="0"/>
@@ -9005,7 +9005,7 @@
                           <a:ea typeface="Arial" pitchFamily="34" charset="-122"/>
                           <a:cs typeface="Arial" pitchFamily="34" charset="-120"/>
                         </a:rPr>
-                        <a:t>8.89</a:t>
+                        <a:t>8.92</a:t>
                       </a:r>
                       <a:endParaRPr lang="en-US" sz="900" dirty="0">
                         <a:latin typeface="Arial" charset="0"/>
@@ -9141,7 +9141,7 @@
                           <a:ea typeface="Arial" pitchFamily="34" charset="-122"/>
                           <a:cs typeface="Arial" pitchFamily="34" charset="-120"/>
                         </a:rPr>
-                        <a:t>8.89</a:t>
+                        <a:t>8.92</a:t>
                       </a:r>
                       <a:endParaRPr lang="en-US" sz="900" dirty="0">
                         <a:latin typeface="Arial" charset="0"/>
@@ -9279,7 +9279,7 @@
                           <a:ea typeface="Arial" pitchFamily="34" charset="-122"/>
                           <a:cs typeface="Arial" pitchFamily="34" charset="-120"/>
                         </a:rPr>
-                        <a:t>1</a:t>
+                        <a:t>2</a:t>
                       </a:r>
                       <a:endParaRPr lang="en-US" sz="900" dirty="0">
                         <a:latin typeface="Arial" charset="0"/>
@@ -10233,7 +10233,7 @@
                 <a:ea typeface="Arial" pitchFamily="34" charset="-122"/>
                 <a:cs typeface="Arial" pitchFamily="34" charset="-120"/>
               </a:rPr>
-              <a:t>102件（85.7%）</a:t>
+              <a:t>104件（86.0%）</a:t>
             </a:r>
             <a:endParaRPr lang="en-US" sz="1100" dirty="0"/>
           </a:p>
@@ -10331,7 +10331,7 @@
                 <a:ea typeface="Arial" pitchFamily="34" charset="-122"/>
                 <a:cs typeface="Arial" pitchFamily="34" charset="-120"/>
               </a:rPr>
-              <a:t>11件（9.2%）</a:t>
+              <a:t>11件（9.1%）</a:t>
             </a:r>
             <a:endParaRPr lang="en-US" sz="1100" dirty="0"/>
           </a:p>
@@ -10841,7 +10841,7 @@
                 <a:ea typeface="Arial" pitchFamily="34" charset="-122"/>
                 <a:cs typeface="Arial" pitchFamily="34" charset="-120"/>
               </a:rPr>
-              <a:t>部屋は清潔で、ベッドも広く、地下鉄の駅にも近かった</a:t>
+              <a:t>荷物の預かりもありましたが、クローク内ではなく外に置いて網掛けされるようでしたので近くの駅のロッカーを使用しました</a:t>
             </a:r>
             <a:endParaRPr lang="en-US" sz="900" dirty="0"/>
           </a:p>
@@ -10880,7 +10880,7 @@
                 <a:ea typeface="Arial" pitchFamily="34" charset="-122"/>
                 <a:cs typeface="Arial" pitchFamily="34" charset="-120"/>
               </a:rPr>
-              <a:t>「立地の良さも台無しです」</a:t>
+              <a:t>「近くに小さなレストランがいくつかあり、多くの鉄道駅や地下鉄駅にも近いです」</a:t>
             </a:r>
             <a:endParaRPr lang="en-US" sz="900" dirty="0"/>
           </a:p>
@@ -11064,7 +11064,7 @@
                 <a:ea typeface="Arial" pitchFamily="34" charset="-122"/>
                 <a:cs typeface="Arial" pitchFamily="34" charset="-120"/>
               </a:rPr>
-              <a:t>ホテルの従業員は親切で礼儀正しかった</a:t>
+              <a:t>Lo staff è gentilissimo</a:t>
             </a:r>
             <a:endParaRPr lang="en-US" sz="900" dirty="0"/>
           </a:p>
@@ -11103,7 +11103,7 @@
                 <a:ea typeface="Arial" pitchFamily="34" charset="-122"/>
                 <a:cs typeface="Arial" pitchFamily="34" charset="-120"/>
               </a:rPr>
-              <a:t>「一番の問題は、スタッフの全くの無関心です」</a:t>
+              <a:t>「ホテルの従業員は親切で礼儀正しかった」</a:t>
             </a:r>
             <a:endParaRPr lang="en-US" sz="900" dirty="0"/>
           </a:p>
@@ -11287,7 +11287,7 @@
                 <a:ea typeface="Arial" pitchFamily="34" charset="-122"/>
                 <a:cs typeface="Arial" pitchFamily="34" charset="-120"/>
               </a:rPr>
-              <a:t>部屋は清潔で、ベッドも広く、地下鉄の駅にも近かった</a:t>
+              <a:t>室内やバストイレも綺麗でしたので気持ちよく利用できました</a:t>
             </a:r>
             <a:endParaRPr lang="en-US" sz="900" dirty="0"/>
           </a:p>
@@ -11326,7 +11326,7 @@
                 <a:ea typeface="Arial" pitchFamily="34" charset="-122"/>
                 <a:cs typeface="Arial" pitchFamily="34" charset="-120"/>
               </a:rPr>
-              <a:t>「他の方同様に清潔感については非の打ちどころがありません」</a:t>
+              <a:t>「部屋は清潔で、ベッドも広く、地下鉄の駅にも近かった」</a:t>
             </a:r>
             <a:endParaRPr lang="en-US" sz="900" dirty="0"/>
           </a:p>
@@ -11471,6 +11471,229 @@
                 <a:ea typeface="Arial" pitchFamily="34" charset="-122"/>
                 <a:cs typeface="Arial" pitchFamily="34" charset="-120"/>
               </a:rPr>
+              <a:t>朝食</a:t>
+            </a:r>
+            <a:endParaRPr lang="en-US" sz="1300" dirty="0"/>
+          </a:p>
+        </p:txBody>
+      </p:sp>
+      <p:sp>
+        <p:nvSpPr>
+          <p:cNvPr id="31" name="Text 29"/>
+          <p:cNvSpPr/>
+          <p:nvPr/>
+        </p:nvSpPr>
+        <p:spPr>
+          <a:xfrm>
+            <a:off x="594360" y="3246120"/>
+            <a:ext cx="2377440" cy="365760"/>
+          </a:xfrm>
+          <a:prstGeom prst="rect">
+            <a:avLst/>
+          </a:prstGeom>
+          <a:noFill/>
+          <a:ln/>
+        </p:spPr>
+        <p:txBody>
+          <a:bodyPr wrap="square" lIns="0" tIns="0" rIns="0" bIns="0" rtlCol="0" anchor="ctr"/>
+          <a:lstStyle/>
+          <a:p>
+            <a:pPr indent="0" marL="0">
+              <a:buNone/>
+            </a:pPr>
+            <a:r>
+              <a:rPr lang="en-US" sz="900" dirty="0">
+                <a:solidFill>
+                  <a:srgbClr val="64748B"/>
+                </a:solidFill>
+                <a:latin typeface="Arial" pitchFamily="34" charset="0"/>
+                <a:ea typeface="Arial" pitchFamily="34" charset="-122"/>
+                <a:cs typeface="Arial" pitchFamily="34" charset="-120"/>
+              </a:rPr>
+              <a:t>朝食は和食と洋食がバランスよく提供されました</a:t>
+            </a:r>
+            <a:endParaRPr lang="en-US" sz="900" dirty="0"/>
+          </a:p>
+        </p:txBody>
+      </p:sp>
+      <p:sp>
+        <p:nvSpPr>
+          <p:cNvPr id="32" name="Text 30"/>
+          <p:cNvSpPr/>
+          <p:nvPr/>
+        </p:nvSpPr>
+        <p:spPr>
+          <a:xfrm>
+            <a:off x="594360" y="3657600"/>
+            <a:ext cx="2377440" cy="640080"/>
+          </a:xfrm>
+          <a:prstGeom prst="rect">
+            <a:avLst/>
+          </a:prstGeom>
+          <a:noFill/>
+          <a:ln/>
+        </p:spPr>
+        <p:txBody>
+          <a:bodyPr wrap="square" lIns="0" tIns="0" rIns="0" bIns="0" rtlCol="0" anchor="ctr"/>
+          <a:lstStyle/>
+          <a:p>
+            <a:pPr indent="0" marL="0">
+              <a:buNone/>
+            </a:pPr>
+            <a:r>
+              <a:rPr lang="en-US" sz="900" i="1" dirty="0">
+                <a:solidFill>
+                  <a:srgbClr val="3B7DD8"/>
+                </a:solidFill>
+                <a:latin typeface="Arial" pitchFamily="34" charset="0"/>
+                <a:ea typeface="Arial" pitchFamily="34" charset="-122"/>
+                <a:cs typeface="Arial" pitchFamily="34" charset="-120"/>
+              </a:rPr>
+              <a:t>「ホテルでは無料の朝食を提供しており、豪華ではありませんが必要なものはすべて揃っています」</a:t>
+            </a:r>
+            <a:endParaRPr lang="en-US" sz="900" dirty="0"/>
+          </a:p>
+        </p:txBody>
+      </p:sp>
+      <p:sp>
+        <p:nvSpPr>
+          <p:cNvPr id="33" name="Shape 31"/>
+          <p:cNvSpPr/>
+          <p:nvPr/>
+        </p:nvSpPr>
+        <p:spPr>
+          <a:xfrm>
+            <a:off x="3291840" y="2880360"/>
+            <a:ext cx="2651760" cy="1600200"/>
+          </a:xfrm>
+          <a:prstGeom prst="rect">
+            <a:avLst/>
+          </a:prstGeom>
+          <a:solidFill>
+            <a:srgbClr val="FFFFFF"/>
+          </a:solidFill>
+          <a:ln/>
+          <a:effectLst>
+            <a:outerShdw sx="100000" sy="100000" kx="0" ky="0" algn="bl" rotWithShape="0" blurRad="50800" dist="25400" dir="8100000">
+              <a:srgbClr val="000000">
+                <a:alpha val="10000"/>
+              </a:srgbClr>
+            </a:outerShdw>
+          </a:effectLst>
+        </p:spPr>
+      </p:sp>
+      <p:sp>
+        <p:nvSpPr>
+          <p:cNvPr id="34" name="Shape 32"/>
+          <p:cNvSpPr/>
+          <p:nvPr/>
+        </p:nvSpPr>
+        <p:spPr>
+          <a:xfrm>
+            <a:off x="3291840" y="2880360"/>
+            <a:ext cx="54864" cy="1600200"/>
+          </a:xfrm>
+          <a:prstGeom prst="rect">
+            <a:avLst/>
+          </a:prstGeom>
+          <a:solidFill>
+            <a:srgbClr val="16A34A"/>
+          </a:solidFill>
+          <a:ln/>
+        </p:spPr>
+      </p:sp>
+      <p:sp>
+        <p:nvSpPr>
+          <p:cNvPr id="35" name="Shape 33"/>
+          <p:cNvSpPr/>
+          <p:nvPr/>
+        </p:nvSpPr>
+        <p:spPr>
+          <a:xfrm>
+            <a:off x="5120640" y="2953512"/>
+            <a:ext cx="658368" cy="228600"/>
+          </a:xfrm>
+          <a:prstGeom prst="rect">
+            <a:avLst/>
+          </a:prstGeom>
+          <a:solidFill>
+            <a:srgbClr val="DCFCE7"/>
+          </a:solidFill>
+          <a:ln/>
+        </p:spPr>
+      </p:sp>
+      <p:sp>
+        <p:nvSpPr>
+          <p:cNvPr id="36" name="Text 34"/>
+          <p:cNvSpPr/>
+          <p:nvPr/>
+        </p:nvSpPr>
+        <p:spPr>
+          <a:xfrm>
+            <a:off x="5120640" y="2953512"/>
+            <a:ext cx="658368" cy="228600"/>
+          </a:xfrm>
+          <a:prstGeom prst="rect">
+            <a:avLst/>
+          </a:prstGeom>
+          <a:noFill/>
+          <a:ln/>
+        </p:spPr>
+        <p:txBody>
+          <a:bodyPr wrap="square" lIns="0" tIns="0" rIns="0" bIns="0" rtlCol="0" anchor="ctr"/>
+          <a:lstStyle/>
+          <a:p>
+            <a:pPr algn="ctr" indent="0" marL="0">
+              <a:buNone/>
+            </a:pPr>
+            <a:r>
+              <a:rPr lang="en-US" sz="900" b="1" dirty="0">
+                <a:solidFill>
+                  <a:srgbClr val="16A34A"/>
+                </a:solidFill>
+                <a:latin typeface="Arial" pitchFamily="34" charset="0"/>
+                <a:ea typeface="Arial" pitchFamily="34" charset="-122"/>
+                <a:cs typeface="Arial" pitchFamily="34" charset="-120"/>
+              </a:rPr>
+              <a:t>20件+</a:t>
+            </a:r>
+            <a:endParaRPr lang="en-US" sz="900" dirty="0"/>
+          </a:p>
+        </p:txBody>
+      </p:sp>
+      <p:sp>
+        <p:nvSpPr>
+          <p:cNvPr id="37" name="Text 35"/>
+          <p:cNvSpPr/>
+          <p:nvPr/>
+        </p:nvSpPr>
+        <p:spPr>
+          <a:xfrm>
+            <a:off x="3429000" y="2953512"/>
+            <a:ext cx="1645920" cy="274320"/>
+          </a:xfrm>
+          <a:prstGeom prst="rect">
+            <a:avLst/>
+          </a:prstGeom>
+          <a:noFill/>
+          <a:ln/>
+        </p:spPr>
+        <p:txBody>
+          <a:bodyPr wrap="square" lIns="0" tIns="0" rIns="0" bIns="0" rtlCol="0" anchor="ctr"/>
+          <a:lstStyle/>
+          <a:p>
+            <a:pPr indent="0" marL="0">
+              <a:buNone/>
+            </a:pPr>
+            <a:r>
+              <a:rPr lang="en-US" sz="1300" b="1" dirty="0">
+                <a:solidFill>
+                  <a:srgbClr val="1A2744"/>
+                </a:solidFill>
+                <a:latin typeface="Arial" pitchFamily="34" charset="0"/>
+                <a:ea typeface="Arial" pitchFamily="34" charset="-122"/>
+                <a:cs typeface="Arial" pitchFamily="34" charset="-120"/>
+              </a:rPr>
               <a:t>快適さ・設備</a:t>
             </a:r>
             <a:endParaRPr lang="en-US" sz="1300" dirty="0"/>
@@ -11479,13 +11702,13 @@
       </p:sp>
       <p:sp>
         <p:nvSpPr>
-          <p:cNvPr id="31" name="Text 29"/>
-          <p:cNvSpPr/>
-          <p:nvPr/>
-        </p:nvSpPr>
-        <p:spPr>
-          <a:xfrm>
-            <a:off x="594360" y="3246120"/>
+          <p:cNvPr id="38" name="Text 36"/>
+          <p:cNvSpPr/>
+          <p:nvPr/>
+        </p:nvSpPr>
+        <p:spPr>
+          <a:xfrm>
+            <a:off x="3429000" y="3246120"/>
             <a:ext cx="2377440" cy="365760"/>
           </a:xfrm>
           <a:prstGeom prst="rect">
@@ -11518,13 +11741,13 @@
       </p:sp>
       <p:sp>
         <p:nvSpPr>
-          <p:cNvPr id="32" name="Text 30"/>
-          <p:cNvSpPr/>
-          <p:nvPr/>
-        </p:nvSpPr>
-        <p:spPr>
-          <a:xfrm>
-            <a:off x="594360" y="3657600"/>
+          <p:cNvPr id="39" name="Text 37"/>
+          <p:cNvSpPr/>
+          <p:nvPr/>
+        </p:nvSpPr>
+        <p:spPr>
+          <a:xfrm>
+            <a:off x="3429000" y="3657600"/>
             <a:ext cx="2377440" cy="640080"/>
           </a:xfrm>
           <a:prstGeom prst="rect">
@@ -11557,13 +11780,13 @@
       </p:sp>
       <p:sp>
         <p:nvSpPr>
-          <p:cNvPr id="33" name="Shape 31"/>
-          <p:cNvSpPr/>
-          <p:nvPr/>
-        </p:nvSpPr>
-        <p:spPr>
-          <a:xfrm>
-            <a:off x="3291840" y="2880360"/>
+          <p:cNvPr id="40" name="Shape 38"/>
+          <p:cNvSpPr/>
+          <p:nvPr/>
+        </p:nvSpPr>
+        <p:spPr>
+          <a:xfrm>
+            <a:off x="6126480" y="2880360"/>
             <a:ext cx="2651760" cy="1600200"/>
           </a:xfrm>
           <a:prstGeom prst="rect">
@@ -11584,13 +11807,13 @@
       </p:sp>
       <p:sp>
         <p:nvSpPr>
-          <p:cNvPr id="34" name="Shape 32"/>
-          <p:cNvSpPr/>
-          <p:nvPr/>
-        </p:nvSpPr>
-        <p:spPr>
-          <a:xfrm>
-            <a:off x="3291840" y="2880360"/>
+          <p:cNvPr id="41" name="Shape 39"/>
+          <p:cNvSpPr/>
+          <p:nvPr/>
+        </p:nvSpPr>
+        <p:spPr>
+          <a:xfrm>
+            <a:off x="6126480" y="2880360"/>
             <a:ext cx="54864" cy="1600200"/>
           </a:xfrm>
           <a:prstGeom prst="rect">
@@ -11604,13 +11827,13 @@
       </p:sp>
       <p:sp>
         <p:nvSpPr>
-          <p:cNvPr id="35" name="Shape 33"/>
-          <p:cNvSpPr/>
-          <p:nvPr/>
-        </p:nvSpPr>
-        <p:spPr>
-          <a:xfrm>
-            <a:off x="5120640" y="2953512"/>
+          <p:cNvPr id="42" name="Shape 40"/>
+          <p:cNvSpPr/>
+          <p:nvPr/>
+        </p:nvSpPr>
+        <p:spPr>
+          <a:xfrm>
+            <a:off x="7955280" y="2953512"/>
             <a:ext cx="658368" cy="228600"/>
           </a:xfrm>
           <a:prstGeom prst="rect">
@@ -11624,13 +11847,13 @@
       </p:sp>
       <p:sp>
         <p:nvSpPr>
-          <p:cNvPr id="36" name="Text 34"/>
-          <p:cNvSpPr/>
-          <p:nvPr/>
-        </p:nvSpPr>
-        <p:spPr>
-          <a:xfrm>
-            <a:off x="5120640" y="2953512"/>
+          <p:cNvPr id="43" name="Text 41"/>
+          <p:cNvSpPr/>
+          <p:nvPr/>
+        </p:nvSpPr>
+        <p:spPr>
+          <a:xfrm>
+            <a:off x="7955280" y="2953512"/>
             <a:ext cx="658368" cy="228600"/>
           </a:xfrm>
           <a:prstGeom prst="rect">
@@ -11655,230 +11878,7 @@
                 <a:ea typeface="Arial" pitchFamily="34" charset="-122"/>
                 <a:cs typeface="Arial" pitchFamily="34" charset="-120"/>
               </a:rPr>
-              <a:t>20件+</a:t>
-            </a:r>
-            <a:endParaRPr lang="en-US" sz="900" dirty="0"/>
-          </a:p>
-        </p:txBody>
-      </p:sp>
-      <p:sp>
-        <p:nvSpPr>
-          <p:cNvPr id="37" name="Text 35"/>
-          <p:cNvSpPr/>
-          <p:nvPr/>
-        </p:nvSpPr>
-        <p:spPr>
-          <a:xfrm>
-            <a:off x="3429000" y="2953512"/>
-            <a:ext cx="1645920" cy="274320"/>
-          </a:xfrm>
-          <a:prstGeom prst="rect">
-            <a:avLst/>
-          </a:prstGeom>
-          <a:noFill/>
-          <a:ln/>
-        </p:spPr>
-        <p:txBody>
-          <a:bodyPr wrap="square" lIns="0" tIns="0" rIns="0" bIns="0" rtlCol="0" anchor="ctr"/>
-          <a:lstStyle/>
-          <a:p>
-            <a:pPr indent="0" marL="0">
-              <a:buNone/>
-            </a:pPr>
-            <a:r>
-              <a:rPr lang="en-US" sz="1300" b="1" dirty="0">
-                <a:solidFill>
-                  <a:srgbClr val="1A2744"/>
-                </a:solidFill>
-                <a:latin typeface="Arial" pitchFamily="34" charset="0"/>
-                <a:ea typeface="Arial" pitchFamily="34" charset="-122"/>
-                <a:cs typeface="Arial" pitchFamily="34" charset="-120"/>
-              </a:rPr>
-              <a:t>朝食</a:t>
-            </a:r>
-            <a:endParaRPr lang="en-US" sz="1300" dirty="0"/>
-          </a:p>
-        </p:txBody>
-      </p:sp>
-      <p:sp>
-        <p:nvSpPr>
-          <p:cNvPr id="38" name="Text 36"/>
-          <p:cNvSpPr/>
-          <p:nvPr/>
-        </p:nvSpPr>
-        <p:spPr>
-          <a:xfrm>
-            <a:off x="3429000" y="3246120"/>
-            <a:ext cx="2377440" cy="365760"/>
-          </a:xfrm>
-          <a:prstGeom prst="rect">
-            <a:avLst/>
-          </a:prstGeom>
-          <a:noFill/>
-          <a:ln/>
-        </p:spPr>
-        <p:txBody>
-          <a:bodyPr wrap="square" lIns="0" tIns="0" rIns="0" bIns="0" rtlCol="0" anchor="ctr"/>
-          <a:lstStyle/>
-          <a:p>
-            <a:pPr indent="0" marL="0">
-              <a:buNone/>
-            </a:pPr>
-            <a:r>
-              <a:rPr lang="en-US" sz="900" dirty="0">
-                <a:solidFill>
-                  <a:srgbClr val="64748B"/>
-                </a:solidFill>
-                <a:latin typeface="Arial" pitchFamily="34" charset="0"/>
-                <a:ea typeface="Arial" pitchFamily="34" charset="-122"/>
-                <a:cs typeface="Arial" pitchFamily="34" charset="-120"/>
-              </a:rPr>
-              <a:t>ホテルでは無料の朝食を提供しており、豪華ではありませんが必要なものはすべて揃っています</a:t>
-            </a:r>
-            <a:endParaRPr lang="en-US" sz="900" dirty="0"/>
-          </a:p>
-        </p:txBody>
-      </p:sp>
-      <p:sp>
-        <p:nvSpPr>
-          <p:cNvPr id="39" name="Text 37"/>
-          <p:cNvSpPr/>
-          <p:nvPr/>
-        </p:nvSpPr>
-        <p:spPr>
-          <a:xfrm>
-            <a:off x="3429000" y="3657600"/>
-            <a:ext cx="2377440" cy="640080"/>
-          </a:xfrm>
-          <a:prstGeom prst="rect">
-            <a:avLst/>
-          </a:prstGeom>
-          <a:noFill/>
-          <a:ln/>
-        </p:spPr>
-        <p:txBody>
-          <a:bodyPr wrap="square" lIns="0" tIns="0" rIns="0" bIns="0" rtlCol="0" anchor="ctr"/>
-          <a:lstStyle/>
-          <a:p>
-            <a:pPr indent="0" marL="0">
-              <a:buNone/>
-            </a:pPr>
-            <a:r>
-              <a:rPr lang="en-US" sz="900" i="1" dirty="0">
-                <a:solidFill>
-                  <a:srgbClr val="3B7DD8"/>
-                </a:solidFill>
-                <a:latin typeface="Arial" pitchFamily="34" charset="0"/>
-                <a:ea typeface="Arial" pitchFamily="34" charset="-122"/>
-                <a:cs typeface="Arial" pitchFamily="34" charset="-120"/>
-              </a:rPr>
-              <a:t>「ホテルでは無料の朝食を提供しています」</a:t>
-            </a:r>
-            <a:endParaRPr lang="en-US" sz="900" dirty="0"/>
-          </a:p>
-        </p:txBody>
-      </p:sp>
-      <p:sp>
-        <p:nvSpPr>
-          <p:cNvPr id="40" name="Shape 38"/>
-          <p:cNvSpPr/>
-          <p:nvPr/>
-        </p:nvSpPr>
-        <p:spPr>
-          <a:xfrm>
-            <a:off x="6126480" y="2880360"/>
-            <a:ext cx="2651760" cy="1600200"/>
-          </a:xfrm>
-          <a:prstGeom prst="rect">
-            <a:avLst/>
-          </a:prstGeom>
-          <a:solidFill>
-            <a:srgbClr val="FFFFFF"/>
-          </a:solidFill>
-          <a:ln/>
-          <a:effectLst>
-            <a:outerShdw sx="100000" sy="100000" kx="0" ky="0" algn="bl" rotWithShape="0" blurRad="50800" dist="25400" dir="8100000">
-              <a:srgbClr val="000000">
-                <a:alpha val="10000"/>
-              </a:srgbClr>
-            </a:outerShdw>
-          </a:effectLst>
-        </p:spPr>
-      </p:sp>
-      <p:sp>
-        <p:nvSpPr>
-          <p:cNvPr id="41" name="Shape 39"/>
-          <p:cNvSpPr/>
-          <p:nvPr/>
-        </p:nvSpPr>
-        <p:spPr>
-          <a:xfrm>
-            <a:off x="6126480" y="2880360"/>
-            <a:ext cx="54864" cy="1600200"/>
-          </a:xfrm>
-          <a:prstGeom prst="rect">
-            <a:avLst/>
-          </a:prstGeom>
-          <a:solidFill>
-            <a:srgbClr val="16A34A"/>
-          </a:solidFill>
-          <a:ln/>
-        </p:spPr>
-      </p:sp>
-      <p:sp>
-        <p:nvSpPr>
-          <p:cNvPr id="42" name="Shape 40"/>
-          <p:cNvSpPr/>
-          <p:nvPr/>
-        </p:nvSpPr>
-        <p:spPr>
-          <a:xfrm>
-            <a:off x="7955280" y="2953512"/>
-            <a:ext cx="658368" cy="228600"/>
-          </a:xfrm>
-          <a:prstGeom prst="rect">
-            <a:avLst/>
-          </a:prstGeom>
-          <a:solidFill>
-            <a:srgbClr val="DCFCE7"/>
-          </a:solidFill>
-          <a:ln/>
-        </p:spPr>
-      </p:sp>
-      <p:sp>
-        <p:nvSpPr>
-          <p:cNvPr id="43" name="Text 41"/>
-          <p:cNvSpPr/>
-          <p:nvPr/>
-        </p:nvSpPr>
-        <p:spPr>
-          <a:xfrm>
-            <a:off x="7955280" y="2953512"/>
-            <a:ext cx="658368" cy="228600"/>
-          </a:xfrm>
-          <a:prstGeom prst="rect">
-            <a:avLst/>
-          </a:prstGeom>
-          <a:noFill/>
-          <a:ln/>
-        </p:spPr>
-        <p:txBody>
-          <a:bodyPr wrap="square" lIns="0" tIns="0" rIns="0" bIns="0" rtlCol="0" anchor="ctr"/>
-          <a:lstStyle/>
-          <a:p>
-            <a:pPr algn="ctr" indent="0" marL="0">
-              <a:buNone/>
-            </a:pPr>
-            <a:r>
-              <a:rPr lang="en-US" sz="900" b="1" dirty="0">
-                <a:solidFill>
-                  <a:srgbClr val="16A34A"/>
-                </a:solidFill>
-                <a:latin typeface="Arial" pitchFamily="34" charset="0"/>
-                <a:ea typeface="Arial" pitchFamily="34" charset="-122"/>
-                <a:cs typeface="Arial" pitchFamily="34" charset="-120"/>
-              </a:rPr>
-              <a:t>9件</a:t>
+              <a:t>10件+</a:t>
             </a:r>
             <a:endParaRPr lang="en-US" sz="900" dirty="0"/>
           </a:p>
@@ -11956,7 +11956,7 @@
                 <a:ea typeface="Arial" pitchFamily="34" charset="-122"/>
                 <a:cs typeface="Arial" pitchFamily="34" charset="-120"/>
               </a:rPr>
-              <a:t>The hotel was lovely and spacious</a:t>
+              <a:t>広めの客室（クイーンエコノミー）には、大きなスーツケース2個が楽に収まります</a:t>
             </a:r>
             <a:endParaRPr lang="en-US" sz="900" dirty="0"/>
           </a:p>
@@ -11995,7 +11995,7 @@
                 <a:ea typeface="Arial" pitchFamily="34" charset="-122"/>
                 <a:cs typeface="Arial" pitchFamily="34" charset="-120"/>
               </a:rPr>
-              <a:t>「The bathroom in clean and big enough」</a:t>
+              <a:t>「The hotel was lovely and spacious」</a:t>
             </a:r>
             <a:endParaRPr lang="en-US" sz="900" dirty="0"/>
           </a:p>
@@ -12685,7 +12685,7 @@
                           <a:ea typeface="Arial" pitchFamily="34" charset="-122"/>
                           <a:cs typeface="Arial" pitchFamily="34" charset="-120"/>
                         </a:rPr>
-                        <a:t>Hotel employees were kind and polite</a:t>
+                        <a:t>Las instalaciones, la habitación muy confortable, el pers...</a:t>
                       </a:r>
                       <a:endParaRPr lang="en-US" sz="900" dirty="0">
                         <a:latin typeface="Arial" charset="0"/>
@@ -12753,7 +12753,7 @@
                           <a:ea typeface="Arial" pitchFamily="34" charset="-122"/>
                           <a:cs typeface="Arial" pitchFamily="34" charset="-120"/>
                         </a:rPr>
-                        <a:t>20件</a:t>
+                        <a:t>22件</a:t>
                       </a:r>
                       <a:endParaRPr lang="en-US" sz="900" dirty="0">
                         <a:latin typeface="Arial" charset="0"/>
@@ -12959,7 +12959,7 @@
                           <a:ea typeface="Arial" pitchFamily="34" charset="-122"/>
                           <a:cs typeface="Arial" pitchFamily="34" charset="-120"/>
                         </a:rPr>
-                        <a:t>The bathroom in clean and big enough</a:t>
+                        <a:t>室内やバストイレも綺麗でしたので気持ちよく利用できました</a:t>
                       </a:r>
                       <a:endParaRPr lang="en-US" sz="900" dirty="0">
                         <a:latin typeface="Arial" charset="0"/>
@@ -13027,7 +13027,7 @@
                           <a:ea typeface="Arial" pitchFamily="34" charset="-122"/>
                           <a:cs typeface="Arial" pitchFamily="34" charset="-120"/>
                         </a:rPr>
-                        <a:t>7件</a:t>
+                        <a:t>10件</a:t>
                       </a:r>
                       <a:endParaRPr lang="en-US" sz="900" dirty="0">
                         <a:latin typeface="Arial" charset="0"/>
@@ -14175,6 +14175,280 @@
                   </a:tcPr>
                 </a:tc>
               </a:tr>
+              <a:tr h="320040">
+                <a:tc>
+                  <a:txBody>
+                    <a:bodyPr/>
+                    <a:lstStyle/>
+                    <a:p>
+                      <a:pPr algn="ctr" indent="0" marL="0">
+                        <a:buNone/>
+                      </a:pPr>
+                      <a:r>
+                        <a:rPr lang="en-US" sz="1200" b="1" dirty="0">
+                          <a:solidFill>
+                            <a:srgbClr val="94A3B8"/>
+                          </a:solidFill>
+                          <a:latin typeface="Arial" pitchFamily="34" charset="0"/>
+                          <a:ea typeface="Arial" pitchFamily="34" charset="-122"/>
+                          <a:cs typeface="Arial" pitchFamily="34" charset="-120"/>
+                        </a:rPr>
+                        <a:t>C</a:t>
+                      </a:r>
+                      <a:endParaRPr lang="en-US" sz="1200" dirty="0">
+                        <a:latin typeface="Arial" charset="0"/>
+                        <a:ea typeface="Arial" charset="0"/>
+                        <a:cs typeface="Arial" charset="0"/>
+                      </a:endParaRPr>
+                    </a:p>
+                  </a:txBody>
+                  <a:tcPr marL="91440" marR="91440" marT="45720" marB="45720">
+                    <a:lnL w="6350" cap="flat" cmpd="sng" algn="ctr">
+                      <a:solidFill>
+                        <a:srgbClr val="CBD5E1"/>
+                      </a:solidFill>
+                      <a:prstDash val="solid"/>
+                      <a:round/>
+                      <a:headEnd type="none" w="med" len="med"/>
+                      <a:tailEnd type="none" w="med" len="med"/>
+                    </a:lnL>
+                    <a:lnR w="6350" cap="flat" cmpd="sng" algn="ctr">
+                      <a:solidFill>
+                        <a:srgbClr val="CBD5E1"/>
+                      </a:solidFill>
+                      <a:prstDash val="solid"/>
+                      <a:round/>
+                      <a:headEnd type="none" w="med" len="med"/>
+                      <a:tailEnd type="none" w="med" len="med"/>
+                    </a:lnR>
+                    <a:lnT w="6350" cap="flat" cmpd="sng" algn="ctr">
+                      <a:solidFill>
+                        <a:srgbClr val="CBD5E1"/>
+                      </a:solidFill>
+                      <a:prstDash val="solid"/>
+                      <a:round/>
+                      <a:headEnd type="none" w="med" len="med"/>
+                      <a:tailEnd type="none" w="med" len="med"/>
+                    </a:lnT>
+                    <a:lnB w="6350" cap="flat" cmpd="sng" algn="ctr">
+                      <a:solidFill>
+                        <a:srgbClr val="CBD5E1"/>
+                      </a:solidFill>
+                      <a:prstDash val="solid"/>
+                      <a:round/>
+                      <a:headEnd type="none" w="med" len="med"/>
+                      <a:tailEnd type="none" w="med" len="med"/>
+                    </a:lnB>
+                    <a:solidFill>
+                      <a:srgbClr val="E8EFF8"/>
+                    </a:solidFill>
+                  </a:tcPr>
+                </a:tc>
+                <a:tc>
+                  <a:txBody>
+                    <a:bodyPr/>
+                    <a:lstStyle/>
+                    <a:p>
+                      <a:pPr indent="0" marL="0">
+                        <a:buNone/>
+                      </a:pPr>
+                      <a:r>
+                        <a:rPr lang="en-US" sz="900" b="1" dirty="0">
+                          <a:solidFill>
+                            <a:srgbClr val="334155"/>
+                          </a:solidFill>
+                          <a:latin typeface="Arial" pitchFamily="34" charset="0"/>
+                          <a:ea typeface="Arial" pitchFamily="34" charset="-122"/>
+                          <a:cs typeface="Arial" pitchFamily="34" charset="-120"/>
+                        </a:rPr>
+                        <a:t>清掃不備</a:t>
+                      </a:r>
+                      <a:endParaRPr lang="en-US" sz="900" dirty="0">
+                        <a:latin typeface="Arial" charset="0"/>
+                        <a:ea typeface="Arial" charset="0"/>
+                        <a:cs typeface="Arial" charset="0"/>
+                      </a:endParaRPr>
+                    </a:p>
+                  </a:txBody>
+                  <a:tcPr marL="91440" marR="91440" marT="45720" marB="45720">
+                    <a:lnL w="6350" cap="flat" cmpd="sng" algn="ctr">
+                      <a:solidFill>
+                        <a:srgbClr val="CBD5E1"/>
+                      </a:solidFill>
+                      <a:prstDash val="solid"/>
+                      <a:round/>
+                      <a:headEnd type="none" w="med" len="med"/>
+                      <a:tailEnd type="none" w="med" len="med"/>
+                    </a:lnL>
+                    <a:lnR w="6350" cap="flat" cmpd="sng" algn="ctr">
+                      <a:solidFill>
+                        <a:srgbClr val="CBD5E1"/>
+                      </a:solidFill>
+                      <a:prstDash val="solid"/>
+                      <a:round/>
+                      <a:headEnd type="none" w="med" len="med"/>
+                      <a:tailEnd type="none" w="med" len="med"/>
+                    </a:lnR>
+                    <a:lnT w="6350" cap="flat" cmpd="sng" algn="ctr">
+                      <a:solidFill>
+                        <a:srgbClr val="CBD5E1"/>
+                      </a:solidFill>
+                      <a:prstDash val="solid"/>
+                      <a:round/>
+                      <a:headEnd type="none" w="med" len="med"/>
+                      <a:tailEnd type="none" w="med" len="med"/>
+                    </a:lnT>
+                    <a:lnB w="6350" cap="flat" cmpd="sng" algn="ctr">
+                      <a:solidFill>
+                        <a:srgbClr val="CBD5E1"/>
+                      </a:solidFill>
+                      <a:prstDash val="solid"/>
+                      <a:round/>
+                      <a:headEnd type="none" w="med" len="med"/>
+                      <a:tailEnd type="none" w="med" len="med"/>
+                    </a:lnB>
+                    <a:solidFill>
+                      <a:srgbClr val="E8EFF8"/>
+                    </a:solidFill>
+                  </a:tcPr>
+                </a:tc>
+                <a:tc>
+                  <a:txBody>
+                    <a:bodyPr/>
+                    <a:lstStyle/>
+                    <a:p>
+                      <a:pPr indent="0" marL="0">
+                        <a:buNone/>
+                      </a:pPr>
+                      <a:r>
+                        <a:rPr lang="en-US" sz="900" dirty="0">
+                          <a:solidFill>
+                            <a:srgbClr val="64748B"/>
+                          </a:solidFill>
+                          <a:latin typeface="Arial" pitchFamily="34" charset="0"/>
+                          <a:ea typeface="Arial" pitchFamily="34" charset="-122"/>
+                          <a:cs typeface="Arial" pitchFamily="34" charset="-120"/>
+                        </a:rPr>
+                        <a:t>Alcune cose sono un po datate e sarebbero da cambiare (te...</a:t>
+                      </a:r>
+                      <a:endParaRPr lang="en-US" sz="900" dirty="0">
+                        <a:latin typeface="Arial" charset="0"/>
+                        <a:ea typeface="Arial" charset="0"/>
+                        <a:cs typeface="Arial" charset="0"/>
+                      </a:endParaRPr>
+                    </a:p>
+                  </a:txBody>
+                  <a:tcPr marL="91440" marR="91440" marT="45720" marB="45720">
+                    <a:lnL w="6350" cap="flat" cmpd="sng" algn="ctr">
+                      <a:solidFill>
+                        <a:srgbClr val="CBD5E1"/>
+                      </a:solidFill>
+                      <a:prstDash val="solid"/>
+                      <a:round/>
+                      <a:headEnd type="none" w="med" len="med"/>
+                      <a:tailEnd type="none" w="med" len="med"/>
+                    </a:lnL>
+                    <a:lnR w="6350" cap="flat" cmpd="sng" algn="ctr">
+                      <a:solidFill>
+                        <a:srgbClr val="CBD5E1"/>
+                      </a:solidFill>
+                      <a:prstDash val="solid"/>
+                      <a:round/>
+                      <a:headEnd type="none" w="med" len="med"/>
+                      <a:tailEnd type="none" w="med" len="med"/>
+                    </a:lnR>
+                    <a:lnT w="6350" cap="flat" cmpd="sng" algn="ctr">
+                      <a:solidFill>
+                        <a:srgbClr val="CBD5E1"/>
+                      </a:solidFill>
+                      <a:prstDash val="solid"/>
+                      <a:round/>
+                      <a:headEnd type="none" w="med" len="med"/>
+                      <a:tailEnd type="none" w="med" len="med"/>
+                    </a:lnT>
+                    <a:lnB w="6350" cap="flat" cmpd="sng" algn="ctr">
+                      <a:solidFill>
+                        <a:srgbClr val="CBD5E1"/>
+                      </a:solidFill>
+                      <a:prstDash val="solid"/>
+                      <a:round/>
+                      <a:headEnd type="none" w="med" len="med"/>
+                      <a:tailEnd type="none" w="med" len="med"/>
+                    </a:lnB>
+                    <a:solidFill>
+                      <a:srgbClr val="E8EFF8"/>
+                    </a:solidFill>
+                  </a:tcPr>
+                </a:tc>
+                <a:tc>
+                  <a:txBody>
+                    <a:bodyPr/>
+                    <a:lstStyle/>
+                    <a:p>
+                      <a:pPr algn="ctr" indent="0" marL="0">
+                        <a:buNone/>
+                      </a:pPr>
+                      <a:r>
+                        <a:rPr lang="en-US" sz="900" dirty="0">
+                          <a:solidFill>
+                            <a:srgbClr val="334155"/>
+                          </a:solidFill>
+                          <a:latin typeface="Arial" pitchFamily="34" charset="0"/>
+                          <a:ea typeface="Arial" pitchFamily="34" charset="-122"/>
+                          <a:cs typeface="Arial" pitchFamily="34" charset="-120"/>
+                        </a:rPr>
+                        <a:t>1件</a:t>
+                      </a:r>
+                      <a:endParaRPr lang="en-US" sz="900" dirty="0">
+                        <a:latin typeface="Arial" charset="0"/>
+                        <a:ea typeface="Arial" charset="0"/>
+                        <a:cs typeface="Arial" charset="0"/>
+                      </a:endParaRPr>
+                    </a:p>
+                  </a:txBody>
+                  <a:tcPr marL="91440" marR="91440" marT="45720" marB="45720">
+                    <a:lnL w="6350" cap="flat" cmpd="sng" algn="ctr">
+                      <a:solidFill>
+                        <a:srgbClr val="CBD5E1"/>
+                      </a:solidFill>
+                      <a:prstDash val="solid"/>
+                      <a:round/>
+                      <a:headEnd type="none" w="med" len="med"/>
+                      <a:tailEnd type="none" w="med" len="med"/>
+                    </a:lnL>
+                    <a:lnR w="6350" cap="flat" cmpd="sng" algn="ctr">
+                      <a:solidFill>
+                        <a:srgbClr val="CBD5E1"/>
+                      </a:solidFill>
+                      <a:prstDash val="solid"/>
+                      <a:round/>
+                      <a:headEnd type="none" w="med" len="med"/>
+                      <a:tailEnd type="none" w="med" len="med"/>
+                    </a:lnR>
+                    <a:lnT w="6350" cap="flat" cmpd="sng" algn="ctr">
+                      <a:solidFill>
+                        <a:srgbClr val="CBD5E1"/>
+                      </a:solidFill>
+                      <a:prstDash val="solid"/>
+                      <a:round/>
+                      <a:headEnd type="none" w="med" len="med"/>
+                      <a:tailEnd type="none" w="med" len="med"/>
+                    </a:lnT>
+                    <a:lnB w="6350" cap="flat" cmpd="sng" algn="ctr">
+                      <a:solidFill>
+                        <a:srgbClr val="CBD5E1"/>
+                      </a:solidFill>
+                      <a:prstDash val="solid"/>
+                      <a:round/>
+                      <a:headEnd type="none" w="med" len="med"/>
+                      <a:tailEnd type="none" w="med" len="med"/>
+                    </a:lnB>
+                    <a:solidFill>
+                      <a:srgbClr val="E8EFF8"/>
+                    </a:solidFill>
+                  </a:tcPr>
+                </a:tc>
+              </a:tr>
             </a:tbl>
           </a:graphicData>
         </a:graphic>
@@ -14834,6 +15108,177 @@
                 <a:ea typeface="Arial" pitchFamily="34" charset="-122"/>
                 <a:cs typeface="Arial" pitchFamily="34" charset="-120"/>
               </a:rPr>
+              <a:t>清掃品質の向上</a:t>
+            </a:r>
+            <a:endParaRPr lang="en-US" sz="1200" dirty="0"/>
+          </a:p>
+        </p:txBody>
+      </p:sp>
+      <p:sp>
+        <p:nvSpPr>
+          <p:cNvPr id="13" name="Text 11"/>
+          <p:cNvSpPr/>
+          <p:nvPr/>
+        </p:nvSpPr>
+        <p:spPr>
+          <a:xfrm>
+            <a:off x="4800600" y="1600200"/>
+            <a:ext cx="3657600" cy="1188720"/>
+          </a:xfrm>
+          <a:prstGeom prst="rect">
+            <a:avLst/>
+          </a:prstGeom>
+          <a:noFill/>
+          <a:ln/>
+        </p:spPr>
+        <p:txBody>
+          <a:bodyPr wrap="square" lIns="0" tIns="0" rIns="0" bIns="0" rtlCol="0" anchor="ctr"/>
+          <a:lstStyle/>
+          <a:p>
+            <a:pPr marL="342900" indent="-342900">
+              <a:spcAft>
+                <a:spcPts val="300"/>
+              </a:spcAft>
+              <a:buSzPct val="100000"/>
+              <a:buChar char="•"/>
+            </a:pPr>
+            <a:r>
+              <a:rPr lang="en-US" sz="900" dirty="0">
+                <a:solidFill>
+                  <a:srgbClr val="334155"/>
+                </a:solidFill>
+                <a:latin typeface="Arial" pitchFamily="34" charset="0"/>
+                <a:ea typeface="Arial" pitchFamily="34" charset="-122"/>
+                <a:cs typeface="Arial" pitchFamily="34" charset="-120"/>
+              </a:rPr>
+              <a:t>清掃チェックリストの見直しと強化（ベッド下・隅の重点確認）</a:t>
+            </a:r>
+            <a:endParaRPr lang="en-US" sz="900" dirty="0"/>
+          </a:p>
+          <a:p>
+            <a:pPr marL="342900" indent="-342900">
+              <a:spcAft>
+                <a:spcPts val="300"/>
+              </a:spcAft>
+              <a:buSzPct val="100000"/>
+              <a:buChar char="•"/>
+            </a:pPr>
+            <a:r>
+              <a:rPr lang="en-US" sz="900" dirty="0">
+                <a:solidFill>
+                  <a:srgbClr val="334155"/>
+                </a:solidFill>
+                <a:latin typeface="Arial" pitchFamily="34" charset="0"/>
+                <a:ea typeface="Arial" pitchFamily="34" charset="-122"/>
+                <a:cs typeface="Arial" pitchFamily="34" charset="-120"/>
+              </a:rPr>
+              <a:t>清掃後のダブルチェック体制の導入</a:t>
+            </a:r>
+            <a:endParaRPr lang="en-US" sz="900" dirty="0"/>
+          </a:p>
+          <a:p>
+            <a:pPr marL="342900" indent="-342900">
+              <a:spcAft>
+                <a:spcPts val="300"/>
+              </a:spcAft>
+              <a:buSzPct val="100000"/>
+              <a:buChar char="•"/>
+            </a:pPr>
+            <a:r>
+              <a:rPr lang="en-US" sz="900" dirty="0">
+                <a:solidFill>
+                  <a:srgbClr val="334155"/>
+                </a:solidFill>
+                <a:latin typeface="Arial" pitchFamily="34" charset="0"/>
+                <a:ea typeface="Arial" pitchFamily="34" charset="-122"/>
+                <a:cs typeface="Arial" pitchFamily="34" charset="-120"/>
+              </a:rPr>
+              <a:t>清掃スタッフへの再研修実施</a:t>
+            </a:r>
+            <a:endParaRPr lang="en-US" sz="900" dirty="0"/>
+          </a:p>
+        </p:txBody>
+      </p:sp>
+      <p:sp>
+        <p:nvSpPr>
+          <p:cNvPr id="14" name="Shape 12"/>
+          <p:cNvSpPr/>
+          <p:nvPr/>
+        </p:nvSpPr>
+        <p:spPr>
+          <a:xfrm>
+            <a:off x="457200" y="3017520"/>
+            <a:ext cx="3977640" cy="1600200"/>
+          </a:xfrm>
+          <a:prstGeom prst="rect">
+            <a:avLst/>
+          </a:prstGeom>
+          <a:solidFill>
+            <a:srgbClr val="FFFFFF"/>
+          </a:solidFill>
+          <a:ln/>
+          <a:effectLst>
+            <a:outerShdw sx="100000" sy="100000" kx="0" ky="0" algn="bl" rotWithShape="0" blurRad="50800" dist="25400" dir="8100000">
+              <a:srgbClr val="000000">
+                <a:alpha val="10000"/>
+              </a:srgbClr>
+            </a:outerShdw>
+          </a:effectLst>
+        </p:spPr>
+      </p:sp>
+      <p:sp>
+        <p:nvSpPr>
+          <p:cNvPr id="15" name="Shape 13"/>
+          <p:cNvSpPr/>
+          <p:nvPr/>
+        </p:nvSpPr>
+        <p:spPr>
+          <a:xfrm>
+            <a:off x="457200" y="3017520"/>
+            <a:ext cx="54864" cy="1600200"/>
+          </a:xfrm>
+          <a:prstGeom prst="rect">
+            <a:avLst/>
+          </a:prstGeom>
+          <a:solidFill>
+            <a:srgbClr val="3B7DD8"/>
+          </a:solidFill>
+          <a:ln/>
+        </p:spPr>
+      </p:sp>
+      <p:sp>
+        <p:nvSpPr>
+          <p:cNvPr id="16" name="Text 14"/>
+          <p:cNvSpPr/>
+          <p:nvPr/>
+        </p:nvSpPr>
+        <p:spPr>
+          <a:xfrm>
+            <a:off x="594360" y="3063240"/>
+            <a:ext cx="3657600" cy="320040"/>
+          </a:xfrm>
+          <a:prstGeom prst="rect">
+            <a:avLst/>
+          </a:prstGeom>
+          <a:noFill/>
+          <a:ln/>
+        </p:spPr>
+        <p:txBody>
+          <a:bodyPr wrap="square" lIns="0" tIns="0" rIns="0" bIns="0" rtlCol="0" anchor="ctr"/>
+          <a:lstStyle/>
+          <a:p>
+            <a:pPr indent="0" marL="0">
+              <a:buNone/>
+            </a:pPr>
+            <a:r>
+              <a:rPr lang="en-US" sz="1200" b="1" dirty="0">
+                <a:solidFill>
+                  <a:srgbClr val="1A2744"/>
+                </a:solidFill>
+                <a:latin typeface="Arial" pitchFamily="34" charset="0"/>
+                <a:ea typeface="Arial" pitchFamily="34" charset="-122"/>
+                <a:cs typeface="Arial" pitchFamily="34" charset="-120"/>
+              </a:rPr>
               <a:t>エアコン・空調の定期点検強化</a:t>
             </a:r>
             <a:endParaRPr lang="en-US" sz="1200" dirty="0"/>
@@ -14842,13 +15287,13 @@
       </p:sp>
       <p:sp>
         <p:nvSpPr>
-          <p:cNvPr id="13" name="Text 11"/>
-          <p:cNvSpPr/>
-          <p:nvPr/>
-        </p:nvSpPr>
-        <p:spPr>
-          <a:xfrm>
-            <a:off x="4800600" y="1600200"/>
+          <p:cNvPr id="17" name="Text 15"/>
+          <p:cNvSpPr/>
+          <p:nvPr/>
+        </p:nvSpPr>
+        <p:spPr>
+          <a:xfrm>
+            <a:off x="594360" y="3383280"/>
             <a:ext cx="3657600" cy="1188720"/>
           </a:xfrm>
           <a:prstGeom prst="rect">
@@ -14927,13 +15372,13 @@
       </p:sp>
       <p:sp>
         <p:nvSpPr>
-          <p:cNvPr id="14" name="Shape 12"/>
-          <p:cNvSpPr/>
-          <p:nvPr/>
-        </p:nvSpPr>
-        <p:spPr>
-          <a:xfrm>
-            <a:off x="457200" y="3017520"/>
+          <p:cNvPr id="18" name="Shape 16"/>
+          <p:cNvSpPr/>
+          <p:nvPr/>
+        </p:nvSpPr>
+        <p:spPr>
+          <a:xfrm>
+            <a:off x="4663440" y="3017520"/>
             <a:ext cx="3977640" cy="1600200"/>
           </a:xfrm>
           <a:prstGeom prst="rect">
@@ -14954,13 +15399,13 @@
       </p:sp>
       <p:sp>
         <p:nvSpPr>
-          <p:cNvPr id="15" name="Shape 13"/>
-          <p:cNvSpPr/>
-          <p:nvPr/>
-        </p:nvSpPr>
-        <p:spPr>
-          <a:xfrm>
-            <a:off x="457200" y="3017520"/>
+          <p:cNvPr id="19" name="Shape 17"/>
+          <p:cNvSpPr/>
+          <p:nvPr/>
+        </p:nvSpPr>
+        <p:spPr>
+          <a:xfrm>
+            <a:off x="4663440" y="3017520"/>
             <a:ext cx="54864" cy="1600200"/>
           </a:xfrm>
           <a:prstGeom prst="rect">
@@ -14974,13 +15419,13 @@
       </p:sp>
       <p:sp>
         <p:nvSpPr>
-          <p:cNvPr id="16" name="Text 14"/>
-          <p:cNvSpPr/>
-          <p:nvPr/>
-        </p:nvSpPr>
-        <p:spPr>
-          <a:xfrm>
-            <a:off x="594360" y="3063240"/>
+          <p:cNvPr id="20" name="Text 18"/>
+          <p:cNvSpPr/>
+          <p:nvPr/>
+        </p:nvSpPr>
+        <p:spPr>
+          <a:xfrm>
+            <a:off x="4800600" y="3063240"/>
             <a:ext cx="3657600" cy="320040"/>
           </a:xfrm>
           <a:prstGeom prst="rect">
@@ -15013,13 +15458,13 @@
       </p:sp>
       <p:sp>
         <p:nvSpPr>
-          <p:cNvPr id="17" name="Text 15"/>
-          <p:cNvSpPr/>
-          <p:nvPr/>
-        </p:nvSpPr>
-        <p:spPr>
-          <a:xfrm>
-            <a:off x="594360" y="3383280"/>
+          <p:cNvPr id="21" name="Text 19"/>
+          <p:cNvSpPr/>
+          <p:nvPr/>
+        </p:nvSpPr>
+        <p:spPr>
+          <a:xfrm>
+            <a:off x="4800600" y="3383280"/>
             <a:ext cx="3657600" cy="1188720"/>
           </a:xfrm>
           <a:prstGeom prst="rect">
@@ -15098,7 +15543,7 @@
       </p:sp>
       <p:sp>
         <p:nvSpPr>
-          <p:cNvPr id="18" name="Shape 16"/>
+          <p:cNvPr id="22" name="Shape 20"/>
           <p:cNvSpPr/>
           <p:nvPr/>
         </p:nvSpPr>
@@ -15118,7 +15563,7 @@
       </p:sp>
       <p:sp>
         <p:nvSpPr>
-          <p:cNvPr id="19" name="Text 17"/>
+          <p:cNvPr id="23" name="Text 21"/>
           <p:cNvSpPr/>
           <p:nvPr/>
         </p:nvSpPr>
@@ -15157,7 +15602,7 @@
       </p:sp>
       <p:sp>
         <p:nvSpPr>
-          <p:cNvPr id="20" name="Text 18"/>
+          <p:cNvPr id="24" name="Text 22"/>
           <p:cNvSpPr/>
           <p:nvPr/>
         </p:nvSpPr>

--- a/納品レポート/ホテル別レポート/comfort_era_higashikanda_口コミ分析レポート.pptx
+++ b/納品レポート/ホテル別レポート/comfort_era_higashikanda_口コミ分析レポート.pptx
@@ -223,7 +223,7 @@
                   <c:v>8</c:v>
                 </c:pt>
                 <c:pt idx="5">
-                  <c:v>7.92</c:v>
+                  <c:v>7.75</c:v>
                 </c:pt>
               </c:numCache>
             </c:numRef>
@@ -566,7 +566,7 @@
               <c:numCache>
                 <c:ptCount val="3"/>
                 <c:pt idx="0">
-                  <c:v>104</c:v>
+                  <c:v>106</c:v>
                 </c:pt>
                 <c:pt idx="1">
                   <c:v>11</c:v>
@@ -823,13 +823,13 @@
                 <c:formatCode>General</c:formatCode>
                 <c:ptCount val="9"/>
                 <c:pt idx="0">
-                  <c:v>73</c:v>
+                  <c:v>72</c:v>
                 </c:pt>
                 <c:pt idx="1">
                   <c:v>16</c:v>
                 </c:pt>
                 <c:pt idx="2">
-                  <c:v>15</c:v>
+                  <c:v>18</c:v>
                 </c:pt>
                 <c:pt idx="3">
                   <c:v>7</c:v>
@@ -2798,7 +2798,7 @@
                 <a:ea typeface="Arial" pitchFamily="34" charset="-122"/>
                 <a:cs typeface="Arial" pitchFamily="34" charset="-120"/>
               </a:rPr>
-              <a:t>レビュー総数：121件（6サイト）</a:t>
+              <a:t>レビュー総数：123件（6サイト）</a:t>
             </a:r>
             <a:endParaRPr lang="en-US" sz="1000" dirty="0"/>
           </a:p>
@@ -2818,7 +2818,7 @@
                 <a:ea typeface="Arial" pitchFamily="34" charset="-122"/>
                 <a:cs typeface="Arial" pitchFamily="34" charset="-120"/>
               </a:rPr>
-              <a:t>作成日：2026年3月23日</a:t>
+              <a:t>作成日：2026年3月24日</a:t>
             </a:r>
             <a:endParaRPr lang="en-US" sz="1000" dirty="0"/>
           </a:p>
@@ -3364,7 +3364,7 @@
                           <a:ea typeface="Arial" pitchFamily="34" charset="-122"/>
                           <a:cs typeface="Arial" pitchFamily="34" charset="-120"/>
                         </a:rPr>
-                        <a:t>8.95点</a:t>
+                        <a:t>8.92点</a:t>
                       </a:r>
                       <a:endParaRPr lang="en-US" sz="1000" dirty="0">
                         <a:latin typeface="Arial" charset="0"/>
@@ -3432,7 +3432,7 @@
                           <a:ea typeface="Arial" pitchFamily="34" charset="-122"/>
                           <a:cs typeface="Arial" pitchFamily="34" charset="-120"/>
                         </a:rPr>
-                        <a:t>9.3点以上</a:t>
+                        <a:t>9.2点以上</a:t>
                       </a:r>
                       <a:endParaRPr lang="en-US" sz="1000" dirty="0">
                         <a:latin typeface="Arial" charset="0"/>
@@ -3638,7 +3638,7 @@
                           <a:ea typeface="Arial" pitchFamily="34" charset="-122"/>
                           <a:cs typeface="Arial" pitchFamily="34" charset="-120"/>
                         </a:rPr>
-                        <a:t>86.0%</a:t>
+                        <a:t>86.2%</a:t>
                       </a:r>
                       <a:endParaRPr lang="en-US" sz="1000" dirty="0">
                         <a:latin typeface="Arial" charset="0"/>
@@ -3912,7 +3912,7 @@
                           <a:ea typeface="Arial" pitchFamily="34" charset="-122"/>
                           <a:cs typeface="Arial" pitchFamily="34" charset="-120"/>
                         </a:rPr>
-                        <a:t>5.0%</a:t>
+                        <a:t>4.9%</a:t>
                       </a:r>
                       <a:endParaRPr lang="en-US" sz="1000" dirty="0">
                         <a:latin typeface="Arial" charset="0"/>
@@ -4186,7 +4186,7 @@
                           <a:ea typeface="Arial" pitchFamily="34" charset="-122"/>
                           <a:cs typeface="Arial" pitchFamily="34" charset="-120"/>
                         </a:rPr>
-                        <a:t>7.9点</a:t>
+                        <a:t>7.8点</a:t>
                       </a:r>
                       <a:endParaRPr lang="en-US" sz="1000" dirty="0">
                         <a:latin typeface="Arial" charset="0"/>
@@ -4254,7 +4254,7 @@
                           <a:ea typeface="Arial" pitchFamily="34" charset="-122"/>
                           <a:cs typeface="Arial" pitchFamily="34" charset="-120"/>
                         </a:rPr>
-                        <a:t>8.9点以上</a:t>
+                        <a:t>8.8点以上</a:t>
                       </a:r>
                       <a:endParaRPr lang="en-US" sz="1000" dirty="0">
                         <a:latin typeface="Arial" charset="0"/>
@@ -5373,7 +5373,7 @@
                 <a:ea typeface="Arial" pitchFamily="34" charset="-122"/>
                 <a:cs typeface="Arial" pitchFamily="34" charset="-120"/>
               </a:rPr>
-              <a:t>8.95</a:t>
+              <a:t>8.92</a:t>
             </a:r>
             <a:endParaRPr lang="en-US" sz="3200" dirty="0"/>
           </a:p>
@@ -5498,7 +5498,7 @@
                 <a:ea typeface="Arial" pitchFamily="34" charset="-122"/>
                 <a:cs typeface="Arial" pitchFamily="34" charset="-120"/>
               </a:rPr>
-              <a:t>86.0%</a:t>
+              <a:t>86.2%</a:t>
             </a:r>
             <a:endParaRPr lang="en-US" sz="3200" dirty="0"/>
           </a:p>
@@ -5623,7 +5623,7 @@
                 <a:ea typeface="Arial" pitchFamily="34" charset="-122"/>
                 <a:cs typeface="Arial" pitchFamily="34" charset="-120"/>
               </a:rPr>
-              <a:t>5.0%</a:t>
+              <a:t>4.9%</a:t>
             </a:r>
             <a:endParaRPr lang="en-US" sz="3200" dirty="0"/>
           </a:p>
@@ -5748,7 +5748,7 @@
                 <a:ea typeface="Arial" pitchFamily="34" charset="-122"/>
                 <a:cs typeface="Arial" pitchFamily="34" charset="-120"/>
               </a:rPr>
-              <a:t>121件</a:t>
+              <a:t>123件</a:t>
             </a:r>
             <a:endParaRPr lang="en-US" sz="3200" dirty="0"/>
           </a:p>
@@ -5896,7 +5896,7 @@
                 <a:ea typeface="Arial" pitchFamily="34" charset="-122"/>
                 <a:cs typeface="Arial" pitchFamily="34" charset="-120"/>
               </a:rPr>
-              <a:t>  荷物の預かりもありましたが、クローク内ではなく外に置いて網掛けされるようでしたので近くの駅のロッカーを使用しました</a:t>
+              <a:t>  駅からのアクセスがよかったです</a:t>
             </a:r>
             <a:endParaRPr lang="en-US" sz="1100" dirty="0"/>
           </a:p>
@@ -5976,7 +5976,7 @@
                 <a:ea typeface="Arial" pitchFamily="34" charset="-122"/>
                 <a:cs typeface="Arial" pitchFamily="34" charset="-120"/>
               </a:rPr>
-              <a:t>  室内やバストイレも綺麗でしたので気持ちよく利用できました</a:t>
+              <a:t>  清掃も行き届いており、快適に過ごせました</a:t>
             </a:r>
             <a:endParaRPr lang="en-US" sz="1100" dirty="0"/>
           </a:p>
@@ -6124,7 +6124,7 @@
                 <a:ea typeface="Arial" pitchFamily="34" charset="-122"/>
                 <a:cs typeface="Arial" pitchFamily="34" charset="-120"/>
               </a:rPr>
-              <a:t>  Las instalaciones, la habitación muy confortable, el pers...</a:t>
+              <a:t>  La cercanía a estaciones de tren, a sitios para comer, co...</a:t>
             </a:r>
             <a:endParaRPr lang="en-US" sz="1100" dirty="0"/>
           </a:p>
@@ -6164,7 +6164,7 @@
                 <a:ea typeface="Arial" pitchFamily="34" charset="-122"/>
                 <a:cs typeface="Arial" pitchFamily="34" charset="-120"/>
               </a:rPr>
-              <a:t>  室内やバストイレも綺麗でしたので気持ちよく利用できました</a:t>
+              <a:t>  14時から17時までにチェックインすると人形焼が無料でもらえます🆓 ラウンジは広くウェルカムドリンクが飲み放題で...</a:t>
             </a:r>
             <a:endParaRPr lang="en-US" sz="1100" dirty="0"/>
           </a:p>
@@ -6184,7 +6184,7 @@
                 <a:ea typeface="Arial" pitchFamily="34" charset="-122"/>
                 <a:cs typeface="Arial" pitchFamily="34" charset="-120"/>
               </a:rPr>
-              <a:t>対応・サービスの不満 </a:t>
+              <a:t>部屋の狭さ </a:t>
             </a:r>
             <a:endParaRPr lang="en-US" sz="1100" dirty="0"/>
           </a:p>
@@ -6204,7 +6204,7 @@
                 <a:ea typeface="Arial" pitchFamily="34" charset="-122"/>
                 <a:cs typeface="Arial" pitchFamily="34" charset="-120"/>
               </a:rPr>
-              <a:t>  サービスは最悪」  数日間滞在しましたが、残念ながら非常に不快な印象を受けました</a:t>
+              <a:t>  欧米人で、アメリカのホテルのような快適さに慣れている方にとっては、特に窮屈に感じるかもしれません</a:t>
             </a:r>
             <a:endParaRPr lang="en-US" sz="1100" dirty="0"/>
           </a:p>
@@ -6557,7 +6557,7 @@
                 <a:ea typeface="Arial" pitchFamily="34" charset="-122"/>
                 <a:cs typeface="Arial" pitchFamily="34" charset="-120"/>
               </a:rPr>
-              <a:t>8.95</a:t>
+              <a:t>8.92</a:t>
             </a:r>
             <a:endParaRPr lang="en-US" sz="3200" dirty="0"/>
           </a:p>
@@ -6682,7 +6682,7 @@
                 <a:ea typeface="Arial" pitchFamily="34" charset="-122"/>
                 <a:cs typeface="Arial" pitchFamily="34" charset="-120"/>
               </a:rPr>
-              <a:t>86.0%</a:t>
+              <a:t>86.2%</a:t>
             </a:r>
             <a:endParaRPr lang="en-US" sz="3200" dirty="0"/>
           </a:p>
@@ -6807,7 +6807,7 @@
                 <a:ea typeface="Arial" pitchFamily="34" charset="-122"/>
                 <a:cs typeface="Arial" pitchFamily="34" charset="-120"/>
               </a:rPr>
-              <a:t>5.0%</a:t>
+              <a:t>4.9%</a:t>
             </a:r>
             <a:endParaRPr lang="en-US" sz="3200" dirty="0"/>
           </a:p>
@@ -6932,7 +6932,7 @@
                 <a:ea typeface="Arial" pitchFamily="34" charset="-122"/>
                 <a:cs typeface="Arial" pitchFamily="34" charset="-120"/>
               </a:rPr>
-              <a:t>121件</a:t>
+              <a:t>123件</a:t>
             </a:r>
             <a:endParaRPr lang="en-US" sz="3200" dirty="0"/>
           </a:p>
@@ -7402,7 +7402,7 @@
                 <a:ea typeface="Arial" pitchFamily="34" charset="-122"/>
                 <a:cs typeface="Arial" pitchFamily="34" charset="-120"/>
               </a:rPr>
-              <a:t>Google(7.9)が相対的に低い。口コミ返信の強化が急務</a:t>
+              <a:t>Google(7.8)が相対的に低い。口コミ返信の強化が急務</a:t>
             </a:r>
             <a:endParaRPr lang="en-US" sz="1100" dirty="0"/>
           </a:p>
@@ -8937,7 +8937,7 @@
                           <a:ea typeface="Arial" pitchFamily="34" charset="-122"/>
                           <a:cs typeface="Arial" pitchFamily="34" charset="-120"/>
                         </a:rPr>
-                        <a:t>63</a:t>
+                        <a:t>65</a:t>
                       </a:r>
                       <a:endParaRPr lang="en-US" sz="900" dirty="0">
                         <a:latin typeface="Arial" charset="0"/>
@@ -9279,7 +9279,7 @@
                           <a:ea typeface="Arial" pitchFamily="34" charset="-122"/>
                           <a:cs typeface="Arial" pitchFamily="34" charset="-120"/>
                         </a:rPr>
-                        <a:t>2</a:t>
+                        <a:t>3</a:t>
                       </a:r>
                       <a:endParaRPr lang="en-US" sz="900" dirty="0">
                         <a:latin typeface="Arial" charset="0"/>
@@ -9621,7 +9621,7 @@
                           <a:ea typeface="Arial" pitchFamily="34" charset="-122"/>
                           <a:cs typeface="Arial" pitchFamily="34" charset="-120"/>
                         </a:rPr>
-                        <a:t>25</a:t>
+                        <a:t>24</a:t>
                       </a:r>
                       <a:endParaRPr lang="en-US" sz="900" dirty="0">
                         <a:latin typeface="Arial" charset="0"/>
@@ -9689,7 +9689,7 @@
                           <a:ea typeface="Arial" pitchFamily="34" charset="-122"/>
                           <a:cs typeface="Arial" pitchFamily="34" charset="-120"/>
                         </a:rPr>
-                        <a:t>3.96</a:t>
+                        <a:t>3.88</a:t>
                       </a:r>
                       <a:endParaRPr lang="en-US" sz="900" dirty="0">
                         <a:latin typeface="Arial" charset="0"/>
@@ -9825,7 +9825,7 @@
                           <a:ea typeface="Arial" pitchFamily="34" charset="-122"/>
                           <a:cs typeface="Arial" pitchFamily="34" charset="-120"/>
                         </a:rPr>
-                        <a:t>7.92</a:t>
+                        <a:t>7.75</a:t>
                       </a:r>
                       <a:endParaRPr lang="en-US" sz="900" dirty="0">
                         <a:latin typeface="Arial" charset="0"/>
@@ -10233,7 +10233,7 @@
                 <a:ea typeface="Arial" pitchFamily="34" charset="-122"/>
                 <a:cs typeface="Arial" pitchFamily="34" charset="-120"/>
               </a:rPr>
-              <a:t>104件（86.0%）</a:t>
+              <a:t>106件（86.2%）</a:t>
             </a:r>
             <a:endParaRPr lang="en-US" sz="1100" dirty="0"/>
           </a:p>
@@ -10331,7 +10331,7 @@
                 <a:ea typeface="Arial" pitchFamily="34" charset="-122"/>
                 <a:cs typeface="Arial" pitchFamily="34" charset="-120"/>
               </a:rPr>
-              <a:t>11件（9.1%）</a:t>
+              <a:t>11件（8.9%）</a:t>
             </a:r>
             <a:endParaRPr lang="en-US" sz="1100" dirty="0"/>
           </a:p>
@@ -10429,7 +10429,7 @@
                 <a:ea typeface="Arial" pitchFamily="34" charset="-122"/>
                 <a:cs typeface="Arial" pitchFamily="34" charset="-120"/>
               </a:rPr>
-              <a:t>6件（5.0%）</a:t>
+              <a:t>6件（4.9%）</a:t>
             </a:r>
             <a:endParaRPr lang="en-US" sz="1100" dirty="0"/>
           </a:p>
@@ -10841,7 +10841,7 @@
                 <a:ea typeface="Arial" pitchFamily="34" charset="-122"/>
                 <a:cs typeface="Arial" pitchFamily="34" charset="-120"/>
               </a:rPr>
-              <a:t>荷物の預かりもありましたが、クローク内ではなく外に置いて網掛けされるようでしたので近くの駅のロッカーを使用しました</a:t>
+              <a:t>駅からのアクセスがよかったです</a:t>
             </a:r>
             <a:endParaRPr lang="en-US" sz="900" dirty="0"/>
           </a:p>
@@ -10880,7 +10880,7 @@
                 <a:ea typeface="Arial" pitchFamily="34" charset="-122"/>
                 <a:cs typeface="Arial" pitchFamily="34" charset="-120"/>
               </a:rPr>
-              <a:t>「近くに小さなレストランがいくつかあり、多くの鉄道駅や地下鉄駅にも近いです」</a:t>
+              <a:t>「秋葉原も近いです」</a:t>
             </a:r>
             <a:endParaRPr lang="en-US" sz="900" dirty="0"/>
           </a:p>
@@ -11287,7 +11287,7 @@
                 <a:ea typeface="Arial" pitchFamily="34" charset="-122"/>
                 <a:cs typeface="Arial" pitchFamily="34" charset="-120"/>
               </a:rPr>
-              <a:t>室内やバストイレも綺麗でしたので気持ちよく利用できました</a:t>
+              <a:t>清掃も行き届いており、快適に過ごせました</a:t>
             </a:r>
             <a:endParaRPr lang="en-US" sz="900" dirty="0"/>
           </a:p>
@@ -11326,7 +11326,7 @@
                 <a:ea typeface="Arial" pitchFamily="34" charset="-122"/>
                 <a:cs typeface="Arial" pitchFamily="34" charset="-120"/>
               </a:rPr>
-              <a:t>「部屋は清潔で、ベッドも広く、地下鉄の駅にも近かった」</a:t>
+              <a:t>「室内やバストイレも綺麗でしたので気持ちよく利用できました」</a:t>
             </a:r>
             <a:endParaRPr lang="en-US" sz="900" dirty="0"/>
           </a:p>
@@ -11510,7 +11510,7 @@
                 <a:ea typeface="Arial" pitchFamily="34" charset="-122"/>
                 <a:cs typeface="Arial" pitchFamily="34" charset="-120"/>
               </a:rPr>
-              <a:t>朝食は和食と洋食がバランスよく提供されました</a:t>
+              <a:t>パンケーキ自動製作機は面白いし美味しいです🥞 グリーンズの株主優待が利用できます</a:t>
             </a:r>
             <a:endParaRPr lang="en-US" sz="900" dirty="0"/>
           </a:p>
@@ -11549,7 +11549,7 @@
                 <a:ea typeface="Arial" pitchFamily="34" charset="-122"/>
                 <a:cs typeface="Arial" pitchFamily="34" charset="-120"/>
               </a:rPr>
-              <a:t>「ホテルでは無料の朝食を提供しており、豪華ではありませんが必要なものはすべて揃っています」</a:t>
+              <a:t>「朝食は和食と洋食がバランスよく提供されました」</a:t>
             </a:r>
             <a:endParaRPr lang="en-US" sz="900" dirty="0"/>
           </a:p>
@@ -11733,7 +11733,7 @@
                 <a:ea typeface="Arial" pitchFamily="34" charset="-122"/>
                 <a:cs typeface="Arial" pitchFamily="34" charset="-120"/>
               </a:rPr>
-              <a:t>部屋は清潔で、ベッドも広く、地下鉄の駅にも近かった</a:t>
+              <a:t>清掃も行き届いており、快適に過ごせました</a:t>
             </a:r>
             <a:endParaRPr lang="en-US" sz="900" dirty="0"/>
           </a:p>
@@ -11772,7 +11772,7 @@
                 <a:ea typeface="Arial" pitchFamily="34" charset="-122"/>
                 <a:cs typeface="Arial" pitchFamily="34" charset="-120"/>
               </a:rPr>
-              <a:t>「The bed and pillows were great」</a:t>
+              <a:t>「ベッドはあまり快適ではありません」</a:t>
             </a:r>
             <a:endParaRPr lang="en-US" sz="900" dirty="0"/>
           </a:p>
@@ -11956,7 +11956,7 @@
                 <a:ea typeface="Arial" pitchFamily="34" charset="-122"/>
                 <a:cs typeface="Arial" pitchFamily="34" charset="-120"/>
               </a:rPr>
-              <a:t>広めの客室（クイーンエコノミー）には、大きなスーツケース2個が楽に収まります</a:t>
+              <a:t>14時から17時までにチェックインすると人形焼が無料でもらえます🆓 ラウンジは広くウェルカムドリンクが飲み放題で...</a:t>
             </a:r>
             <a:endParaRPr lang="en-US" sz="900" dirty="0"/>
           </a:p>
@@ -11995,7 +11995,7 @@
                 <a:ea typeface="Arial" pitchFamily="34" charset="-122"/>
                 <a:cs typeface="Arial" pitchFamily="34" charset="-120"/>
               </a:rPr>
-              <a:t>「The hotel was lovely and spacious」</a:t>
+              <a:t>「広めの客室（クイーンエコノミー）には、大きなスーツケース2個が楽に収まります」</a:t>
             </a:r>
             <a:endParaRPr lang="en-US" sz="900" dirty="0"/>
           </a:p>
@@ -12685,7 +12685,7 @@
                           <a:ea typeface="Arial" pitchFamily="34" charset="-122"/>
                           <a:cs typeface="Arial" pitchFamily="34" charset="-120"/>
                         </a:rPr>
-                        <a:t>Las instalaciones, la habitación muy confortable, el pers...</a:t>
+                        <a:t>La cercanía a estaciones de tren, a sitios para comer, co...</a:t>
                       </a:r>
                       <a:endParaRPr lang="en-US" sz="900" dirty="0">
                         <a:latin typeface="Arial" charset="0"/>
@@ -12959,7 +12959,7 @@
                           <a:ea typeface="Arial" pitchFamily="34" charset="-122"/>
                           <a:cs typeface="Arial" pitchFamily="34" charset="-120"/>
                         </a:rPr>
-                        <a:t>室内やバストイレも綺麗でしたので気持ちよく利用できました</a:t>
+                        <a:t>14時から17時までにチェックインすると人形焼が無料でもらえます🆓 ラウンジは広くウェルカムドリンクが飲み放題で...</a:t>
                       </a:r>
                       <a:endParaRPr lang="en-US" sz="900" dirty="0">
                         <a:latin typeface="Arial" charset="0"/>
@@ -13027,7 +13027,7 @@
                           <a:ea typeface="Arial" pitchFamily="34" charset="-122"/>
                           <a:cs typeface="Arial" pitchFamily="34" charset="-120"/>
                         </a:rPr>
-                        <a:t>10件</a:t>
+                        <a:t>11件</a:t>
                       </a:r>
                       <a:endParaRPr lang="en-US" sz="900" dirty="0">
                         <a:latin typeface="Arial" charset="0"/>
@@ -13165,7 +13165,7 @@
                           <a:ea typeface="Arial" pitchFamily="34" charset="-122"/>
                           <a:cs typeface="Arial" pitchFamily="34" charset="-120"/>
                         </a:rPr>
-                        <a:t>対応・サービスの不満</a:t>
+                        <a:t>部屋の狭さ</a:t>
                       </a:r>
                       <a:endParaRPr lang="en-US" sz="900" dirty="0">
                         <a:latin typeface="Arial" charset="0"/>
@@ -13233,7 +13233,7 @@
                           <a:ea typeface="Arial" pitchFamily="34" charset="-122"/>
                           <a:cs typeface="Arial" pitchFamily="34" charset="-120"/>
                         </a:rPr>
-                        <a:t>サービスは最悪」  数日間滞在しましたが、残念ながら非常に不快な印象を受けました</a:t>
+                        <a:t>欧米人で、アメリカのホテルのような快適さに慣れている方にとっては、特に窮屈に感じるかもしれません</a:t>
                       </a:r>
                       <a:endParaRPr lang="en-US" sz="900" dirty="0">
                         <a:latin typeface="Arial" charset="0"/>
@@ -13439,7 +13439,7 @@
                           <a:ea typeface="Arial" pitchFamily="34" charset="-122"/>
                           <a:cs typeface="Arial" pitchFamily="34" charset="-120"/>
                         </a:rPr>
-                        <a:t>部屋の狭さ</a:t>
+                        <a:t>対応・サービスの不満</a:t>
                       </a:r>
                       <a:endParaRPr lang="en-US" sz="900" dirty="0">
                         <a:latin typeface="Arial" charset="0"/>
@@ -13507,7 +13507,7 @@
                           <a:ea typeface="Arial" pitchFamily="34" charset="-122"/>
                           <a:cs typeface="Arial" pitchFamily="34" charset="-120"/>
                         </a:rPr>
-                        <a:t>The rooms are quite small (like everywhere in Japan), but...</a:t>
+                        <a:t>サービスは最悪」  数日間滞在しましたが、残念ながら非常に不快な印象を受けました</a:t>
                       </a:r>
                       <a:endParaRPr lang="en-US" sz="900" dirty="0">
                         <a:latin typeface="Arial" charset="0"/>
@@ -13575,7 +13575,7 @@
                           <a:ea typeface="Arial" pitchFamily="34" charset="-122"/>
                           <a:cs typeface="Arial" pitchFamily="34" charset="-120"/>
                         </a:rPr>
-                        <a:t>5件</a:t>
+                        <a:t>6件</a:t>
                       </a:r>
                       <a:endParaRPr lang="en-US" sz="900" dirty="0">
                         <a:latin typeface="Arial" charset="0"/>

--- a/納品レポート/ホテル別レポート/comfort_era_higashikanda_口コミ分析レポート.pptx
+++ b/納品レポート/ホテル別レポート/comfort_era_higashikanda_口コミ分析レポート.pptx
@@ -2818,7 +2818,7 @@
                 <a:ea typeface="Arial" pitchFamily="34" charset="-122"/>
                 <a:cs typeface="Arial" pitchFamily="34" charset="-120"/>
               </a:rPr>
-              <a:t>作成日：2026年3月24日</a:t>
+              <a:t>作成日：2026年3月25日</a:t>
             </a:r>
             <a:endParaRPr lang="en-US" sz="1000" dirty="0"/>
           </a:p>
@@ -5896,7 +5896,7 @@
                 <a:ea typeface="Arial" pitchFamily="34" charset="-122"/>
                 <a:cs typeface="Arial" pitchFamily="34" charset="-120"/>
               </a:rPr>
-              <a:t>  駅からのアクセスがよかったです</a:t>
+              <a:t>  สงบ สะดวก สบาย สะอาด 静かで、便利で、快適で、清潔</a:t>
             </a:r>
             <a:endParaRPr lang="en-US" sz="1100" dirty="0"/>
           </a:p>
@@ -5936,7 +5936,7 @@
                 <a:ea typeface="Arial" pitchFamily="34" charset="-122"/>
                 <a:cs typeface="Arial" pitchFamily="34" charset="-120"/>
               </a:rPr>
-              <a:t>  Lo staff è gentilissimo</a:t>
+              <a:t>  鉄道駅からは少し離れており、地下鉄駅まで徒歩約10分かかりますが、部屋は清潔で、スタッフは笑顔で丁寧に対応してくれます</a:t>
             </a:r>
             <a:endParaRPr lang="en-US" sz="1100" dirty="0"/>
           </a:p>
@@ -5976,7 +5976,7 @@
                 <a:ea typeface="Arial" pitchFamily="34" charset="-122"/>
                 <a:cs typeface="Arial" pitchFamily="34" charset="-120"/>
               </a:rPr>
-              <a:t>  清掃も行き届いており、快適に過ごせました</a:t>
+              <a:t>  สงบ สะดวก สบาย สะอาด 静かで、便利で、快適で、清潔</a:t>
             </a:r>
             <a:endParaRPr lang="en-US" sz="1100" dirty="0"/>
           </a:p>
@@ -10841,7 +10841,7 @@
                 <a:ea typeface="Arial" pitchFamily="34" charset="-122"/>
                 <a:cs typeface="Arial" pitchFamily="34" charset="-120"/>
               </a:rPr>
-              <a:t>駅からのアクセスがよかったです</a:t>
+              <a:t>สงบ สะดวก สบาย สะอาด 静かで、便利で、快適で、清潔</a:t>
             </a:r>
             <a:endParaRPr lang="en-US" sz="900" dirty="0"/>
           </a:p>
@@ -10880,7 +10880,7 @@
                 <a:ea typeface="Arial" pitchFamily="34" charset="-122"/>
                 <a:cs typeface="Arial" pitchFamily="34" charset="-120"/>
               </a:rPr>
-              <a:t>「秋葉原も近いです」</a:t>
+              <a:t>「鉄道駅からは少し離れており、地下鉄駅まで徒歩約10分かかりますが、部屋は清潔で、スタッフは笑顔で丁寧に対応してくれます」</a:t>
             </a:r>
             <a:endParaRPr lang="en-US" sz="900" dirty="0"/>
           </a:p>
@@ -11064,7 +11064,7 @@
                 <a:ea typeface="Arial" pitchFamily="34" charset="-122"/>
                 <a:cs typeface="Arial" pitchFamily="34" charset="-120"/>
               </a:rPr>
-              <a:t>Lo staff è gentilissimo</a:t>
+              <a:t>鉄道駅からは少し離れており、地下鉄駅まで徒歩約10分かかりますが、部屋は清潔で、スタッフは笑顔で丁寧に対応してくれます</a:t>
             </a:r>
             <a:endParaRPr lang="en-US" sz="900" dirty="0"/>
           </a:p>
@@ -11103,7 +11103,7 @@
                 <a:ea typeface="Arial" pitchFamily="34" charset="-122"/>
                 <a:cs typeface="Arial" pitchFamily="34" charset="-120"/>
               </a:rPr>
-              <a:t>「ホテルの従業員は親切で礼儀正しかった」</a:t>
+              <a:t>「Lo staff è gentilissimo」</a:t>
             </a:r>
             <a:endParaRPr lang="en-US" sz="900" dirty="0"/>
           </a:p>
@@ -11287,7 +11287,7 @@
                 <a:ea typeface="Arial" pitchFamily="34" charset="-122"/>
                 <a:cs typeface="Arial" pitchFamily="34" charset="-120"/>
               </a:rPr>
-              <a:t>清掃も行き届いており、快適に過ごせました</a:t>
+              <a:t>สงบ สะดวก สบาย สะอาด 静かで、便利で、快適で、清潔</a:t>
             </a:r>
             <a:endParaRPr lang="en-US" sz="900" dirty="0"/>
           </a:p>
@@ -11326,7 +11326,7 @@
                 <a:ea typeface="Arial" pitchFamily="34" charset="-122"/>
                 <a:cs typeface="Arial" pitchFamily="34" charset="-120"/>
               </a:rPr>
-              <a:t>「室内やバストイレも綺麗でしたので気持ちよく利用できました」</a:t>
+              <a:t>「雖然酒店位置唔算十分方便鐵路，要行大約10 分鐘先到地鐵站，但房間清潔，職員有禮貌笑容，大堂都有野飲同nuts供應...」</a:t>
             </a:r>
             <a:endParaRPr lang="en-US" sz="900" dirty="0"/>
           </a:p>
@@ -11733,7 +11733,7 @@
                 <a:ea typeface="Arial" pitchFamily="34" charset="-122"/>
                 <a:cs typeface="Arial" pitchFamily="34" charset="-120"/>
               </a:rPr>
-              <a:t>清掃も行き届いており、快適に過ごせました</a:t>
+              <a:t>สงบ สะดวก สบาย สะอาด 静かで、便利で、快適で、清潔</a:t>
             </a:r>
             <a:endParaRPr lang="en-US" sz="900" dirty="0"/>
           </a:p>
@@ -11772,7 +11772,7 @@
                 <a:ea typeface="Arial" pitchFamily="34" charset="-122"/>
                 <a:cs typeface="Arial" pitchFamily="34" charset="-120"/>
               </a:rPr>
-              <a:t>「ベッドはあまり快適ではありません」</a:t>
+              <a:t>「清掃も行き届いており、快適に過ごせました」</a:t>
             </a:r>
             <a:endParaRPr lang="en-US" sz="900" dirty="0"/>
           </a:p>
@@ -13027,7 +13027,7 @@
                           <a:ea typeface="Arial" pitchFamily="34" charset="-122"/>
                           <a:cs typeface="Arial" pitchFamily="34" charset="-120"/>
                         </a:rPr>
-                        <a:t>11件</a:t>
+                        <a:t>9件</a:t>
                       </a:r>
                       <a:endParaRPr lang="en-US" sz="900" dirty="0">
                         <a:latin typeface="Arial" charset="0"/>

--- a/納品レポート/ホテル別レポート/comfort_era_higashikanda_口コミ分析レポート.pptx
+++ b/納品レポート/ホテル別レポート/comfort_era_higashikanda_口コミ分析レポート.pptx
@@ -214,7 +214,7 @@
                   <c:v>10</c:v>
                 </c:pt>
                 <c:pt idx="2">
-                  <c:v>9.89</c:v>
+                  <c:v>9.79</c:v>
                 </c:pt>
                 <c:pt idx="3">
                   <c:v>8.92</c:v>
@@ -223,7 +223,7 @@
                   <c:v>8</c:v>
                 </c:pt>
                 <c:pt idx="5">
-                  <c:v>7.75</c:v>
+                  <c:v>7.65</c:v>
                 </c:pt>
               </c:numCache>
             </c:numRef>
@@ -566,10 +566,10 @@
               <c:numCache>
                 <c:ptCount val="3"/>
                 <c:pt idx="0">
-                  <c:v>106</c:v>
+                  <c:v>105</c:v>
                 </c:pt>
                 <c:pt idx="1">
-                  <c:v>11</c:v>
+                  <c:v>12</c:v>
                 </c:pt>
                 <c:pt idx="2">
                   <c:v>6</c:v>
@@ -823,7 +823,7 @@
                 <c:formatCode>General</c:formatCode>
                 <c:ptCount val="9"/>
                 <c:pt idx="0">
-                  <c:v>72</c:v>
+                  <c:v>71</c:v>
                 </c:pt>
                 <c:pt idx="1">
                   <c:v>16</c:v>
@@ -832,7 +832,7 @@
                   <c:v>18</c:v>
                 </c:pt>
                 <c:pt idx="3">
-                  <c:v>7</c:v>
+                  <c:v>8</c:v>
                 </c:pt>
                 <c:pt idx="4">
                   <c:v>3</c:v>
@@ -2818,7 +2818,7 @@
                 <a:ea typeface="Arial" pitchFamily="34" charset="-122"/>
                 <a:cs typeface="Arial" pitchFamily="34" charset="-120"/>
               </a:rPr>
-              <a:t>作成日：2026年3月25日</a:t>
+              <a:t>作成日：2026年3月26日</a:t>
             </a:r>
             <a:endParaRPr lang="en-US" sz="1000" dirty="0"/>
           </a:p>
@@ -3364,7 +3364,7 @@
                           <a:ea typeface="Arial" pitchFamily="34" charset="-122"/>
                           <a:cs typeface="Arial" pitchFamily="34" charset="-120"/>
                         </a:rPr>
-                        <a:t>8.92点</a:t>
+                        <a:t>8.89点</a:t>
                       </a:r>
                       <a:endParaRPr lang="en-US" sz="1000" dirty="0">
                         <a:latin typeface="Arial" charset="0"/>
@@ -3638,7 +3638,7 @@
                           <a:ea typeface="Arial" pitchFamily="34" charset="-122"/>
                           <a:cs typeface="Arial" pitchFamily="34" charset="-120"/>
                         </a:rPr>
-                        <a:t>86.2%</a:t>
+                        <a:t>85.4%</a:t>
                       </a:r>
                       <a:endParaRPr lang="en-US" sz="1000" dirty="0">
                         <a:latin typeface="Arial" charset="0"/>
@@ -3706,7 +3706,7 @@
                           <a:ea typeface="Arial" pitchFamily="34" charset="-122"/>
                           <a:cs typeface="Arial" pitchFamily="34" charset="-120"/>
                         </a:rPr>
-                        <a:t>91%以上</a:t>
+                        <a:t>90%以上</a:t>
                       </a:r>
                       <a:endParaRPr lang="en-US" sz="1000" dirty="0">
                         <a:latin typeface="Arial" charset="0"/>
@@ -4186,7 +4186,7 @@
                           <a:ea typeface="Arial" pitchFamily="34" charset="-122"/>
                           <a:cs typeface="Arial" pitchFamily="34" charset="-120"/>
                         </a:rPr>
-                        <a:t>7.8点</a:t>
+                        <a:t>7.7点</a:t>
                       </a:r>
                       <a:endParaRPr lang="en-US" sz="1000" dirty="0">
                         <a:latin typeface="Arial" charset="0"/>
@@ -4254,7 +4254,7 @@
                           <a:ea typeface="Arial" pitchFamily="34" charset="-122"/>
                           <a:cs typeface="Arial" pitchFamily="34" charset="-120"/>
                         </a:rPr>
-                        <a:t>8.8点以上</a:t>
+                        <a:t>8.7点以上</a:t>
                       </a:r>
                       <a:endParaRPr lang="en-US" sz="1000" dirty="0">
                         <a:latin typeface="Arial" charset="0"/>
@@ -5373,7 +5373,7 @@
                 <a:ea typeface="Arial" pitchFamily="34" charset="-122"/>
                 <a:cs typeface="Arial" pitchFamily="34" charset="-120"/>
               </a:rPr>
-              <a:t>8.92</a:t>
+              <a:t>8.89</a:t>
             </a:r>
             <a:endParaRPr lang="en-US" sz="3200" dirty="0"/>
           </a:p>
@@ -5498,7 +5498,7 @@
                 <a:ea typeface="Arial" pitchFamily="34" charset="-122"/>
                 <a:cs typeface="Arial" pitchFamily="34" charset="-120"/>
               </a:rPr>
-              <a:t>86.2%</a:t>
+              <a:t>85.4%</a:t>
             </a:r>
             <a:endParaRPr lang="en-US" sz="3200" dirty="0"/>
           </a:p>
@@ -5896,7 +5896,7 @@
                 <a:ea typeface="Arial" pitchFamily="34" charset="-122"/>
                 <a:cs typeface="Arial" pitchFamily="34" charset="-120"/>
               </a:rPr>
-              <a:t>  สงบ สะดวก สบาย สะอาด 静かで、便利で、快適で、清潔</a:t>
+              <a:t>  荷物預かり所は使いやすく便利でした</a:t>
             </a:r>
             <a:endParaRPr lang="en-US" sz="1100" dirty="0"/>
           </a:p>
@@ -5936,7 +5936,7 @@
                 <a:ea typeface="Arial" pitchFamily="34" charset="-122"/>
                 <a:cs typeface="Arial" pitchFamily="34" charset="-120"/>
               </a:rPr>
-              <a:t>  鉄道駅からは少し離れており、地下鉄駅まで徒歩約10分かかりますが、部屋は清潔で、スタッフは笑顔で丁寧に対応してくれます</a:t>
+              <a:t>  部屋は東京での数泊の滞在にはちょうど良く、スタッフはとても親切でフレンドリーでした</a:t>
             </a:r>
             <a:endParaRPr lang="en-US" sz="1100" dirty="0"/>
           </a:p>
@@ -6184,7 +6184,7 @@
                 <a:ea typeface="Arial" pitchFamily="34" charset="-122"/>
                 <a:cs typeface="Arial" pitchFamily="34" charset="-120"/>
               </a:rPr>
-              <a:t>部屋の狭さ </a:t>
+              <a:t>対応・サービスの不満 </a:t>
             </a:r>
             <a:endParaRPr lang="en-US" sz="1100" dirty="0"/>
           </a:p>
@@ -6204,7 +6204,7 @@
                 <a:ea typeface="Arial" pitchFamily="34" charset="-122"/>
                 <a:cs typeface="Arial" pitchFamily="34" charset="-120"/>
               </a:rPr>
-              <a:t>  欧米人で、アメリカのホテルのような快適さに慣れている方にとっては、特に窮屈に感じるかもしれません</a:t>
+              <a:t>  サービスは最悪」  数日間滞在しましたが、残念ながら非常に不快な印象を受けました</a:t>
             </a:r>
             <a:endParaRPr lang="en-US" sz="1100" dirty="0"/>
           </a:p>
@@ -6557,7 +6557,7 @@
                 <a:ea typeface="Arial" pitchFamily="34" charset="-122"/>
                 <a:cs typeface="Arial" pitchFamily="34" charset="-120"/>
               </a:rPr>
-              <a:t>8.92</a:t>
+              <a:t>8.89</a:t>
             </a:r>
             <a:endParaRPr lang="en-US" sz="3200" dirty="0"/>
           </a:p>
@@ -6682,7 +6682,7 @@
                 <a:ea typeface="Arial" pitchFamily="34" charset="-122"/>
                 <a:cs typeface="Arial" pitchFamily="34" charset="-120"/>
               </a:rPr>
-              <a:t>86.2%</a:t>
+              <a:t>85.4%</a:t>
             </a:r>
             <a:endParaRPr lang="en-US" sz="3200" dirty="0"/>
           </a:p>
@@ -7402,7 +7402,7 @@
                 <a:ea typeface="Arial" pitchFamily="34" charset="-122"/>
                 <a:cs typeface="Arial" pitchFamily="34" charset="-120"/>
               </a:rPr>
-              <a:t>Google(7.8)が相対的に低い。口コミ返信の強化が急務</a:t>
+              <a:t>Google(7.7)が相対的に低い。口コミ返信の強化が急務</a:t>
             </a:r>
             <a:endParaRPr lang="en-US" sz="1100" dirty="0"/>
           </a:p>
@@ -8595,7 +8595,7 @@
                           <a:ea typeface="Arial" pitchFamily="34" charset="-122"/>
                           <a:cs typeface="Arial" pitchFamily="34" charset="-120"/>
                         </a:rPr>
-                        <a:t>28</a:t>
+                        <a:t>29</a:t>
                       </a:r>
                       <a:endParaRPr lang="en-US" sz="900" dirty="0">
                         <a:latin typeface="Arial" charset="0"/>
@@ -8663,7 +8663,7 @@
                           <a:ea typeface="Arial" pitchFamily="34" charset="-122"/>
                           <a:cs typeface="Arial" pitchFamily="34" charset="-120"/>
                         </a:rPr>
-                        <a:t>9.89</a:t>
+                        <a:t>9.79</a:t>
                       </a:r>
                       <a:endParaRPr lang="en-US" sz="900" dirty="0">
                         <a:latin typeface="Arial" charset="0"/>
@@ -8799,7 +8799,7 @@
                           <a:ea typeface="Arial" pitchFamily="34" charset="-122"/>
                           <a:cs typeface="Arial" pitchFamily="34" charset="-120"/>
                         </a:rPr>
-                        <a:t>9.89</a:t>
+                        <a:t>9.79</a:t>
                       </a:r>
                       <a:endParaRPr lang="en-US" sz="900" dirty="0">
                         <a:latin typeface="Arial" charset="0"/>
@@ -9621,7 +9621,7 @@
                           <a:ea typeface="Arial" pitchFamily="34" charset="-122"/>
                           <a:cs typeface="Arial" pitchFamily="34" charset="-120"/>
                         </a:rPr>
-                        <a:t>24</a:t>
+                        <a:t>23</a:t>
                       </a:r>
                       <a:endParaRPr lang="en-US" sz="900" dirty="0">
                         <a:latin typeface="Arial" charset="0"/>
@@ -9689,7 +9689,7 @@
                           <a:ea typeface="Arial" pitchFamily="34" charset="-122"/>
                           <a:cs typeface="Arial" pitchFamily="34" charset="-120"/>
                         </a:rPr>
-                        <a:t>3.88</a:t>
+                        <a:t>3.83</a:t>
                       </a:r>
                       <a:endParaRPr lang="en-US" sz="900" dirty="0">
                         <a:latin typeface="Arial" charset="0"/>
@@ -9825,7 +9825,7 @@
                           <a:ea typeface="Arial" pitchFamily="34" charset="-122"/>
                           <a:cs typeface="Arial" pitchFamily="34" charset="-120"/>
                         </a:rPr>
-                        <a:t>7.75</a:t>
+                        <a:t>7.65</a:t>
                       </a:r>
                       <a:endParaRPr lang="en-US" sz="900" dirty="0">
                         <a:latin typeface="Arial" charset="0"/>
@@ -10233,7 +10233,7 @@
                 <a:ea typeface="Arial" pitchFamily="34" charset="-122"/>
                 <a:cs typeface="Arial" pitchFamily="34" charset="-120"/>
               </a:rPr>
-              <a:t>106件（86.2%）</a:t>
+              <a:t>105件（85.4%）</a:t>
             </a:r>
             <a:endParaRPr lang="en-US" sz="1100" dirty="0"/>
           </a:p>
@@ -10331,7 +10331,7 @@
                 <a:ea typeface="Arial" pitchFamily="34" charset="-122"/>
                 <a:cs typeface="Arial" pitchFamily="34" charset="-120"/>
               </a:rPr>
-              <a:t>11件（8.9%）</a:t>
+              <a:t>12件（9.8%）</a:t>
             </a:r>
             <a:endParaRPr lang="en-US" sz="1100" dirty="0"/>
           </a:p>
@@ -10841,7 +10841,7 @@
                 <a:ea typeface="Arial" pitchFamily="34" charset="-122"/>
                 <a:cs typeface="Arial" pitchFamily="34" charset="-120"/>
               </a:rPr>
-              <a:t>สงบ สะดวก สบาย สะอาด 静かで、便利で、快適で、清潔</a:t>
+              <a:t>荷物預かり所は使いやすく便利でした</a:t>
             </a:r>
             <a:endParaRPr lang="en-US" sz="900" dirty="0"/>
           </a:p>
@@ -10880,7 +10880,7 @@
                 <a:ea typeface="Arial" pitchFamily="34" charset="-122"/>
                 <a:cs typeface="Arial" pitchFamily="34" charset="-120"/>
               </a:rPr>
-              <a:t>「鉄道駅からは少し離れており、地下鉄駅まで徒歩約10分かかりますが、部屋は清潔で、スタッフは笑顔で丁寧に対応してくれます」</a:t>
+              <a:t>「สงบ สะดวก สบาย สะอาด 静かで、便利で、快適で、清潔」</a:t>
             </a:r>
             <a:endParaRPr lang="en-US" sz="900" dirty="0"/>
           </a:p>
@@ -11064,7 +11064,7 @@
                 <a:ea typeface="Arial" pitchFamily="34" charset="-122"/>
                 <a:cs typeface="Arial" pitchFamily="34" charset="-120"/>
               </a:rPr>
-              <a:t>鉄道駅からは少し離れており、地下鉄駅まで徒歩約10分かかりますが、部屋は清潔で、スタッフは笑顔で丁寧に対応してくれます</a:t>
+              <a:t>部屋は東京での数泊の滞在にはちょうど良く、スタッフはとても親切でフレンドリーでした</a:t>
             </a:r>
             <a:endParaRPr lang="en-US" sz="900" dirty="0"/>
           </a:p>
@@ -11103,7 +11103,7 @@
                 <a:ea typeface="Arial" pitchFamily="34" charset="-122"/>
                 <a:cs typeface="Arial" pitchFamily="34" charset="-120"/>
               </a:rPr>
-              <a:t>「Lo staff è gentilissimo」</a:t>
+              <a:t>「鉄道駅からは少し離れていますが（地下鉄駅まで徒歩約10分）、部屋は清潔で、スタッフは笑顔で丁寧に対応してくれます」</a:t>
             </a:r>
             <a:endParaRPr lang="en-US" sz="900" dirty="0"/>
           </a:p>
@@ -13165,7 +13165,7 @@
                           <a:ea typeface="Arial" pitchFamily="34" charset="-122"/>
                           <a:cs typeface="Arial" pitchFamily="34" charset="-120"/>
                         </a:rPr>
-                        <a:t>部屋の狭さ</a:t>
+                        <a:t>対応・サービスの不満</a:t>
                       </a:r>
                       <a:endParaRPr lang="en-US" sz="900" dirty="0">
                         <a:latin typeface="Arial" charset="0"/>
@@ -13233,7 +13233,7 @@
                           <a:ea typeface="Arial" pitchFamily="34" charset="-122"/>
                           <a:cs typeface="Arial" pitchFamily="34" charset="-120"/>
                         </a:rPr>
-                        <a:t>欧米人で、アメリカのホテルのような快適さに慣れている方にとっては、特に窮屈に感じるかもしれません</a:t>
+                        <a:t>サービスは最悪」  数日間滞在しましたが、残念ながら非常に不快な印象を受けました</a:t>
                       </a:r>
                       <a:endParaRPr lang="en-US" sz="900" dirty="0">
                         <a:latin typeface="Arial" charset="0"/>
@@ -13439,7 +13439,7 @@
                           <a:ea typeface="Arial" pitchFamily="34" charset="-122"/>
                           <a:cs typeface="Arial" pitchFamily="34" charset="-120"/>
                         </a:rPr>
-                        <a:t>対応・サービスの不満</a:t>
+                        <a:t>部屋の狭さ</a:t>
                       </a:r>
                       <a:endParaRPr lang="en-US" sz="900" dirty="0">
                         <a:latin typeface="Arial" charset="0"/>
@@ -13507,7 +13507,7 @@
                           <a:ea typeface="Arial" pitchFamily="34" charset="-122"/>
                           <a:cs typeface="Arial" pitchFamily="34" charset="-120"/>
                         </a:rPr>
-                        <a:t>サービスは最悪」  数日間滞在しましたが、残念ながら非常に不快な印象を受けました</a:t>
+                        <a:t>The rooms are quite small (like everywhere in Japan), but...</a:t>
                       </a:r>
                       <a:endParaRPr lang="en-US" sz="900" dirty="0">
                         <a:latin typeface="Arial" charset="0"/>
@@ -13575,7 +13575,7 @@
                           <a:ea typeface="Arial" pitchFamily="34" charset="-122"/>
                           <a:cs typeface="Arial" pitchFamily="34" charset="-120"/>
                         </a:rPr>
-                        <a:t>6件</a:t>
+                        <a:t>5件</a:t>
                       </a:r>
                       <a:endParaRPr lang="en-US" sz="900" dirty="0">
                         <a:latin typeface="Arial" charset="0"/>
@@ -13781,7 +13781,7 @@
                           <a:ea typeface="Arial" pitchFamily="34" charset="-122"/>
                           <a:cs typeface="Arial" pitchFamily="34" charset="-120"/>
                         </a:rPr>
-                        <a:t>周辺はとても静かで、夜も騒音に悩まされることはありませんでした</a:t>
+                        <a:t>The luggage store was easy to use and convenient 最初の夜は隣室か...</a:t>
                       </a:r>
                       <a:endParaRPr lang="en-US" sz="900" dirty="0">
                         <a:latin typeface="Arial" charset="0"/>
@@ -13849,7 +13849,7 @@
                           <a:ea typeface="Arial" pitchFamily="34" charset="-122"/>
                           <a:cs typeface="Arial" pitchFamily="34" charset="-120"/>
                         </a:rPr>
-                        <a:t>2件</a:t>
+                        <a:t>3件</a:t>
                       </a:r>
                       <a:endParaRPr lang="en-US" sz="900" dirty="0">
                         <a:latin typeface="Arial" charset="0"/>

--- a/納品レポート/ホテル別レポート/comfort_era_higashikanda_口コミ分析レポート.pptx
+++ b/納品レポート/ホテル別レポート/comfort_era_higashikanda_口コミ分析レポート.pptx
@@ -217,7 +217,7 @@
                   <c:v>9.79</c:v>
                 </c:pt>
                 <c:pt idx="3">
-                  <c:v>8.92</c:v>
+                  <c:v>8.94</c:v>
                 </c:pt>
                 <c:pt idx="4">
                   <c:v>8</c:v>
@@ -566,10 +566,10 @@
               <c:numCache>
                 <c:ptCount val="3"/>
                 <c:pt idx="0">
-                  <c:v>105</c:v>
+                  <c:v>106</c:v>
                 </c:pt>
                 <c:pt idx="1">
-                  <c:v>12</c:v>
+                  <c:v>11</c:v>
                 </c:pt>
                 <c:pt idx="2">
                   <c:v>6</c:v>
@@ -829,10 +829,10 @@
                   <c:v>16</c:v>
                 </c:pt>
                 <c:pt idx="2">
-                  <c:v>18</c:v>
+                  <c:v>19</c:v>
                 </c:pt>
                 <c:pt idx="3">
-                  <c:v>8</c:v>
+                  <c:v>7</c:v>
                 </c:pt>
                 <c:pt idx="4">
                   <c:v>3</c:v>
@@ -2818,7 +2818,7 @@
                 <a:ea typeface="Arial" pitchFamily="34" charset="-122"/>
                 <a:cs typeface="Arial" pitchFamily="34" charset="-120"/>
               </a:rPr>
-              <a:t>作成日：2026年3月26日</a:t>
+              <a:t>作成日：2026年3月27日</a:t>
             </a:r>
             <a:endParaRPr lang="en-US" sz="1000" dirty="0"/>
           </a:p>
@@ -3364,7 +3364,7 @@
                           <a:ea typeface="Arial" pitchFamily="34" charset="-122"/>
                           <a:cs typeface="Arial" pitchFamily="34" charset="-120"/>
                         </a:rPr>
-                        <a:t>8.89点</a:t>
+                        <a:t>8.90点</a:t>
                       </a:r>
                       <a:endParaRPr lang="en-US" sz="1000" dirty="0">
                         <a:latin typeface="Arial" charset="0"/>
@@ -3638,7 +3638,7 @@
                           <a:ea typeface="Arial" pitchFamily="34" charset="-122"/>
                           <a:cs typeface="Arial" pitchFamily="34" charset="-120"/>
                         </a:rPr>
-                        <a:t>85.4%</a:t>
+                        <a:t>86.2%</a:t>
                       </a:r>
                       <a:endParaRPr lang="en-US" sz="1000" dirty="0">
                         <a:latin typeface="Arial" charset="0"/>
@@ -3706,7 +3706,7 @@
                           <a:ea typeface="Arial" pitchFamily="34" charset="-122"/>
                           <a:cs typeface="Arial" pitchFamily="34" charset="-120"/>
                         </a:rPr>
-                        <a:t>90%以上</a:t>
+                        <a:t>91%以上</a:t>
                       </a:r>
                       <a:endParaRPr lang="en-US" sz="1000" dirty="0">
                         <a:latin typeface="Arial" charset="0"/>
@@ -4734,7 +4734,7 @@
                           <a:ea typeface="Arial" pitchFamily="34" charset="-122"/>
                           <a:cs typeface="Arial" pitchFamily="34" charset="-120"/>
                         </a:rPr>
-                        <a:t>約22件/期間</a:t>
+                        <a:t>約21件/期間</a:t>
                       </a:r>
                       <a:endParaRPr lang="en-US" sz="1000" dirty="0">
                         <a:latin typeface="Arial" charset="0"/>
@@ -4802,7 +4802,7 @@
                           <a:ea typeface="Arial" pitchFamily="34" charset="-122"/>
                           <a:cs typeface="Arial" pitchFamily="34" charset="-120"/>
                         </a:rPr>
-                        <a:t>11件以下</a:t>
+                        <a:t>10件以下</a:t>
                       </a:r>
                       <a:endParaRPr lang="en-US" sz="1000" dirty="0">
                         <a:latin typeface="Arial" charset="0"/>
@@ -5373,7 +5373,7 @@
                 <a:ea typeface="Arial" pitchFamily="34" charset="-122"/>
                 <a:cs typeface="Arial" pitchFamily="34" charset="-120"/>
               </a:rPr>
-              <a:t>8.89</a:t>
+              <a:t>8.90</a:t>
             </a:r>
             <a:endParaRPr lang="en-US" sz="3200" dirty="0"/>
           </a:p>
@@ -5498,7 +5498,7 @@
                 <a:ea typeface="Arial" pitchFamily="34" charset="-122"/>
                 <a:cs typeface="Arial" pitchFamily="34" charset="-120"/>
               </a:rPr>
-              <a:t>85.4%</a:t>
+              <a:t>86.2%</a:t>
             </a:r>
             <a:endParaRPr lang="en-US" sz="3200" dirty="0"/>
           </a:p>
@@ -5896,7 +5896,7 @@
                 <a:ea typeface="Arial" pitchFamily="34" charset="-122"/>
                 <a:cs typeface="Arial" pitchFamily="34" charset="-120"/>
               </a:rPr>
-              <a:t>  荷物預かり所は使いやすく便利でした</a:t>
+              <a:t>  В остальном только положительные впечатления, доброжелате...</a:t>
             </a:r>
             <a:endParaRPr lang="en-US" sz="1100" dirty="0"/>
           </a:p>
@@ -5936,7 +5936,7 @@
                 <a:ea typeface="Arial" pitchFamily="34" charset="-122"/>
                 <a:cs typeface="Arial" pitchFamily="34" charset="-120"/>
               </a:rPr>
-              <a:t>  部屋は東京での数泊の滞在にはちょうど良く、スタッフはとても親切でフレンドリーでした</a:t>
+              <a:t>  スタッフは親切で、部屋もスーツケースを置くのに十分な広さだった（他の多くのホテルの部屋はもっと狭かった）</a:t>
             </a:r>
             <a:endParaRPr lang="en-US" sz="1100" dirty="0"/>
           </a:p>
@@ -6184,7 +6184,7 @@
                 <a:ea typeface="Arial" pitchFamily="34" charset="-122"/>
                 <a:cs typeface="Arial" pitchFamily="34" charset="-120"/>
               </a:rPr>
-              <a:t>対応・サービスの不満 </a:t>
+              <a:t>部屋の狭さ </a:t>
             </a:r>
             <a:endParaRPr lang="en-US" sz="1100" dirty="0"/>
           </a:p>
@@ -6204,7 +6204,7 @@
                 <a:ea typeface="Arial" pitchFamily="34" charset="-122"/>
                 <a:cs typeface="Arial" pitchFamily="34" charset="-120"/>
               </a:rPr>
-              <a:t>  サービスは最悪」  数日間滞在しましたが、残念ながら非常に不快な印象を受けました</a:t>
+              <a:t>  欧米人で、アメリカのホテルのような快適さに慣れている方にとっては、特に窮屈に感じるかもしれません</a:t>
             </a:r>
             <a:endParaRPr lang="en-US" sz="1100" dirty="0"/>
           </a:p>
@@ -6557,7 +6557,7 @@
                 <a:ea typeface="Arial" pitchFamily="34" charset="-122"/>
                 <a:cs typeface="Arial" pitchFamily="34" charset="-120"/>
               </a:rPr>
-              <a:t>8.89</a:t>
+              <a:t>8.90</a:t>
             </a:r>
             <a:endParaRPr lang="en-US" sz="3200" dirty="0"/>
           </a:p>
@@ -6682,7 +6682,7 @@
                 <a:ea typeface="Arial" pitchFamily="34" charset="-122"/>
                 <a:cs typeface="Arial" pitchFamily="34" charset="-120"/>
               </a:rPr>
-              <a:t>85.4%</a:t>
+              <a:t>86.2%</a:t>
             </a:r>
             <a:endParaRPr lang="en-US" sz="3200" dirty="0"/>
           </a:p>
@@ -9005,7 +9005,7 @@
                           <a:ea typeface="Arial" pitchFamily="34" charset="-122"/>
                           <a:cs typeface="Arial" pitchFamily="34" charset="-120"/>
                         </a:rPr>
-                        <a:t>8.92</a:t>
+                        <a:t>8.94</a:t>
                       </a:r>
                       <a:endParaRPr lang="en-US" sz="900" dirty="0">
                         <a:latin typeface="Arial" charset="0"/>
@@ -9141,7 +9141,7 @@
                           <a:ea typeface="Arial" pitchFamily="34" charset="-122"/>
                           <a:cs typeface="Arial" pitchFamily="34" charset="-120"/>
                         </a:rPr>
-                        <a:t>8.92</a:t>
+                        <a:t>8.94</a:t>
                       </a:r>
                       <a:endParaRPr lang="en-US" sz="900" dirty="0">
                         <a:latin typeface="Arial" charset="0"/>
@@ -10233,7 +10233,7 @@
                 <a:ea typeface="Arial" pitchFamily="34" charset="-122"/>
                 <a:cs typeface="Arial" pitchFamily="34" charset="-120"/>
               </a:rPr>
-              <a:t>105件（85.4%）</a:t>
+              <a:t>106件（86.2%）</a:t>
             </a:r>
             <a:endParaRPr lang="en-US" sz="1100" dirty="0"/>
           </a:p>
@@ -10331,7 +10331,7 @@
                 <a:ea typeface="Arial" pitchFamily="34" charset="-122"/>
                 <a:cs typeface="Arial" pitchFamily="34" charset="-120"/>
               </a:rPr>
-              <a:t>12件（9.8%）</a:t>
+              <a:t>11件（8.9%）</a:t>
             </a:r>
             <a:endParaRPr lang="en-US" sz="1100" dirty="0"/>
           </a:p>
@@ -10841,7 +10841,7 @@
                 <a:ea typeface="Arial" pitchFamily="34" charset="-122"/>
                 <a:cs typeface="Arial" pitchFamily="34" charset="-120"/>
               </a:rPr>
-              <a:t>荷物預かり所は使いやすく便利でした</a:t>
+              <a:t>В остальном только положительные впечатления, доброжелате...</a:t>
             </a:r>
             <a:endParaRPr lang="en-US" sz="900" dirty="0"/>
           </a:p>
@@ -10880,7 +10880,7 @@
                 <a:ea typeface="Arial" pitchFamily="34" charset="-122"/>
                 <a:cs typeface="Arial" pitchFamily="34" charset="-120"/>
               </a:rPr>
-              <a:t>「สงบ สะดวก สบาย สะอาด 静かで、便利で、快適で、清潔」</a:t>
+              <a:t>「朝食がおいしい　フロントが優しい 駅からすこし歩く 飲食店がまわりに少ない 駅からすこし歩く 飲食店がまわりに少ない」</a:t>
             </a:r>
             <a:endParaRPr lang="en-US" sz="900" dirty="0"/>
           </a:p>
@@ -11064,7 +11064,7 @@
                 <a:ea typeface="Arial" pitchFamily="34" charset="-122"/>
                 <a:cs typeface="Arial" pitchFamily="34" charset="-120"/>
               </a:rPr>
-              <a:t>部屋は東京での数泊の滞在にはちょうど良く、スタッフはとても親切でフレンドリーでした</a:t>
+              <a:t>スタッフは親切で、部屋もスーツケースを置くのに十分な広さだった（他の多くのホテルの部屋はもっと狭かった）</a:t>
             </a:r>
             <a:endParaRPr lang="en-US" sz="900" dirty="0"/>
           </a:p>
@@ -11103,7 +11103,7 @@
                 <a:ea typeface="Arial" pitchFamily="34" charset="-122"/>
                 <a:cs typeface="Arial" pitchFamily="34" charset="-120"/>
               </a:rPr>
-              <a:t>「鉄道駅からは少し離れていますが（地下鉄駅まで徒歩約10分）、部屋は清潔で、スタッフは笑顔で丁寧に対応してくれます」</a:t>
+              <a:t>「朝食がおいしい　フロントが優しい 駅からすこし歩く 飲食店がまわりに少ない 駅からすこし歩く 飲食店がまわりに少ない」</a:t>
             </a:r>
             <a:endParaRPr lang="en-US" sz="900" dirty="0"/>
           </a:p>
@@ -11510,7 +11510,7 @@
                 <a:ea typeface="Arial" pitchFamily="34" charset="-122"/>
                 <a:cs typeface="Arial" pitchFamily="34" charset="-120"/>
               </a:rPr>
-              <a:t>パンケーキ自動製作機は面白いし美味しいです🥞 グリーンズの株主優待が利用できます</a:t>
+              <a:t>難点は、朝食会場が常に混雑しているため、補充されるまで待たなければならないことだ</a:t>
             </a:r>
             <a:endParaRPr lang="en-US" sz="900" dirty="0"/>
           </a:p>
@@ -11549,7 +11549,7 @@
                 <a:ea typeface="Arial" pitchFamily="34" charset="-122"/>
                 <a:cs typeface="Arial" pitchFamily="34" charset="-120"/>
               </a:rPr>
-              <a:t>「朝食は和食と洋食がバランスよく提供されました」</a:t>
+              <a:t>「朝食がおいしい　フロントが優しい 駅からすこし歩く 飲食店がまわりに少ない 駅からすこし歩く 飲食店がまわりに少ない」</a:t>
             </a:r>
             <a:endParaRPr lang="en-US" sz="900" dirty="0"/>
           </a:p>
@@ -12753,7 +12753,7 @@
                           <a:ea typeface="Arial" pitchFamily="34" charset="-122"/>
                           <a:cs typeface="Arial" pitchFamily="34" charset="-120"/>
                         </a:rPr>
-                        <a:t>22件</a:t>
+                        <a:t>21件</a:t>
                       </a:r>
                       <a:endParaRPr lang="en-US" sz="900" dirty="0">
                         <a:latin typeface="Arial" charset="0"/>
@@ -13165,7 +13165,7 @@
                           <a:ea typeface="Arial" pitchFamily="34" charset="-122"/>
                           <a:cs typeface="Arial" pitchFamily="34" charset="-120"/>
                         </a:rPr>
-                        <a:t>対応・サービスの不満</a:t>
+                        <a:t>部屋の狭さ</a:t>
                       </a:r>
                       <a:endParaRPr lang="en-US" sz="900" dirty="0">
                         <a:latin typeface="Arial" charset="0"/>
@@ -13233,7 +13233,7 @@
                           <a:ea typeface="Arial" pitchFamily="34" charset="-122"/>
                           <a:cs typeface="Arial" pitchFamily="34" charset="-120"/>
                         </a:rPr>
-                        <a:t>サービスは最悪」  数日間滞在しましたが、残念ながら非常に不快な印象を受けました</a:t>
+                        <a:t>欧米人で、アメリカのホテルのような快適さに慣れている方にとっては、特に窮屈に感じるかもしれません</a:t>
                       </a:r>
                       <a:endParaRPr lang="en-US" sz="900" dirty="0">
                         <a:latin typeface="Arial" charset="0"/>
@@ -13439,7 +13439,7 @@
                           <a:ea typeface="Arial" pitchFamily="34" charset="-122"/>
                           <a:cs typeface="Arial" pitchFamily="34" charset="-120"/>
                         </a:rPr>
-                        <a:t>部屋の狭さ</a:t>
+                        <a:t>対応・サービスの不満</a:t>
                       </a:r>
                       <a:endParaRPr lang="en-US" sz="900" dirty="0">
                         <a:latin typeface="Arial" charset="0"/>
@@ -13507,7 +13507,7 @@
                           <a:ea typeface="Arial" pitchFamily="34" charset="-122"/>
                           <a:cs typeface="Arial" pitchFamily="34" charset="-120"/>
                         </a:rPr>
-                        <a:t>The rooms are quite small (like everywhere in Japan), but...</a:t>
+                        <a:t>サービスは最悪」  数日間滞在しましたが、残念ながら非常に不快な印象を受けました</a:t>
                       </a:r>
                       <a:endParaRPr lang="en-US" sz="900" dirty="0">
                         <a:latin typeface="Arial" charset="0"/>
@@ -13575,7 +13575,7 @@
                           <a:ea typeface="Arial" pitchFamily="34" charset="-122"/>
                           <a:cs typeface="Arial" pitchFamily="34" charset="-120"/>
                         </a:rPr>
-                        <a:t>5件</a:t>
+                        <a:t>6件</a:t>
                       </a:r>
                       <a:endParaRPr lang="en-US" sz="900" dirty="0">
                         <a:latin typeface="Arial" charset="0"/>

--- a/納品レポート/ホテル別レポート/comfort_era_higashikanda_口コミ分析レポート.pptx
+++ b/納品レポート/ホテル別レポート/comfort_era_higashikanda_口コミ分析レポート.pptx
@@ -217,7 +217,7 @@
                   <c:v>9.79</c:v>
                 </c:pt>
                 <c:pt idx="3">
-                  <c:v>8.94</c:v>
+                  <c:v>8.95</c:v>
                 </c:pt>
                 <c:pt idx="4">
                   <c:v>8</c:v>
@@ -2818,7 +2818,7 @@
                 <a:ea typeface="Arial" pitchFamily="34" charset="-122"/>
                 <a:cs typeface="Arial" pitchFamily="34" charset="-120"/>
               </a:rPr>
-              <a:t>作成日：2026年3月27日</a:t>
+              <a:t>作成日：2026年3月28日</a:t>
             </a:r>
             <a:endParaRPr lang="en-US" sz="1000" dirty="0"/>
           </a:p>
@@ -5896,7 +5896,7 @@
                 <a:ea typeface="Arial" pitchFamily="34" charset="-122"/>
                 <a:cs typeface="Arial" pitchFamily="34" charset="-120"/>
               </a:rPr>
-              <a:t>  В остальном только положительные впечатления, доброжелате...</a:t>
+              <a:t>  地下鉄の駅から徒歩6～8分ほどで、とても便利です</a:t>
             </a:r>
             <a:endParaRPr lang="en-US" sz="1100" dirty="0"/>
           </a:p>
@@ -5976,7 +5976,7 @@
                 <a:ea typeface="Arial" pitchFamily="34" charset="-122"/>
                 <a:cs typeface="Arial" pitchFamily="34" charset="-120"/>
               </a:rPr>
-              <a:t>  สงบ สะดวก สบาย สะอาด 静かで、便利で、快適で、清潔</a:t>
+              <a:t>  清潔で静かで快適でした</a:t>
             </a:r>
             <a:endParaRPr lang="en-US" sz="1100" dirty="0"/>
           </a:p>
@@ -8595,7 +8595,7 @@
                           <a:ea typeface="Arial" pitchFamily="34" charset="-122"/>
                           <a:cs typeface="Arial" pitchFamily="34" charset="-120"/>
                         </a:rPr>
-                        <a:t>29</a:t>
+                        <a:t>28</a:t>
                       </a:r>
                       <a:endParaRPr lang="en-US" sz="900" dirty="0">
                         <a:latin typeface="Arial" charset="0"/>
@@ -8937,7 +8937,7 @@
                           <a:ea typeface="Arial" pitchFamily="34" charset="-122"/>
                           <a:cs typeface="Arial" pitchFamily="34" charset="-120"/>
                         </a:rPr>
-                        <a:t>65</a:t>
+                        <a:t>66</a:t>
                       </a:r>
                       <a:endParaRPr lang="en-US" sz="900" dirty="0">
                         <a:latin typeface="Arial" charset="0"/>
@@ -9005,7 +9005,7 @@
                           <a:ea typeface="Arial" pitchFamily="34" charset="-122"/>
                           <a:cs typeface="Arial" pitchFamily="34" charset="-120"/>
                         </a:rPr>
-                        <a:t>8.94</a:t>
+                        <a:t>8.95</a:t>
                       </a:r>
                       <a:endParaRPr lang="en-US" sz="900" dirty="0">
                         <a:latin typeface="Arial" charset="0"/>
@@ -9141,7 +9141,7 @@
                           <a:ea typeface="Arial" pitchFamily="34" charset="-122"/>
                           <a:cs typeface="Arial" pitchFamily="34" charset="-120"/>
                         </a:rPr>
-                        <a:t>8.94</a:t>
+                        <a:t>8.95</a:t>
                       </a:r>
                       <a:endParaRPr lang="en-US" sz="900" dirty="0">
                         <a:latin typeface="Arial" charset="0"/>
@@ -10841,7 +10841,7 @@
                 <a:ea typeface="Arial" pitchFamily="34" charset="-122"/>
                 <a:cs typeface="Arial" pitchFamily="34" charset="-120"/>
               </a:rPr>
-              <a:t>В остальном только положительные впечатления, доброжелате...</a:t>
+              <a:t>地下鉄の駅から徒歩6～8分ほどで、とても便利です</a:t>
             </a:r>
             <a:endParaRPr lang="en-US" sz="900" dirty="0"/>
           </a:p>
@@ -10856,6 +10856,229 @@
         <p:spPr>
           <a:xfrm>
             <a:off x="594360" y="1828800"/>
+            <a:ext cx="2377440" cy="640080"/>
+          </a:xfrm>
+          <a:prstGeom prst="rect">
+            <a:avLst/>
+          </a:prstGeom>
+          <a:noFill/>
+          <a:ln/>
+        </p:spPr>
+        <p:txBody>
+          <a:bodyPr wrap="square" lIns="0" tIns="0" rIns="0" bIns="0" rtlCol="0" anchor="ctr"/>
+          <a:lstStyle/>
+          <a:p>
+            <a:pPr indent="0" marL="0">
+              <a:buNone/>
+            </a:pPr>
+            <a:r>
+              <a:rPr lang="en-US" sz="900" i="1" dirty="0">
+                <a:solidFill>
+                  <a:srgbClr val="3B7DD8"/>
+                </a:solidFill>
+                <a:latin typeface="Arial" pitchFamily="34" charset="0"/>
+                <a:ea typeface="Arial" pitchFamily="34" charset="-122"/>
+                <a:cs typeface="Arial" pitchFamily="34" charset="-120"/>
+              </a:rPr>
+              <a:t>「В остальном только положительные впечатления, доброжелате...」</a:t>
+            </a:r>
+            <a:endParaRPr lang="en-US" sz="900" dirty="0"/>
+          </a:p>
+        </p:txBody>
+      </p:sp>
+      <p:sp>
+        <p:nvSpPr>
+          <p:cNvPr id="12" name="Shape 10"/>
+          <p:cNvSpPr/>
+          <p:nvPr/>
+        </p:nvSpPr>
+        <p:spPr>
+          <a:xfrm>
+            <a:off x="3291840" y="1051560"/>
+            <a:ext cx="2651760" cy="1600200"/>
+          </a:xfrm>
+          <a:prstGeom prst="rect">
+            <a:avLst/>
+          </a:prstGeom>
+          <a:solidFill>
+            <a:srgbClr val="FFFFFF"/>
+          </a:solidFill>
+          <a:ln/>
+          <a:effectLst>
+            <a:outerShdw sx="100000" sy="100000" kx="0" ky="0" algn="bl" rotWithShape="0" blurRad="50800" dist="25400" dir="8100000">
+              <a:srgbClr val="000000">
+                <a:alpha val="10000"/>
+              </a:srgbClr>
+            </a:outerShdw>
+          </a:effectLst>
+        </p:spPr>
+      </p:sp>
+      <p:sp>
+        <p:nvSpPr>
+          <p:cNvPr id="13" name="Shape 11"/>
+          <p:cNvSpPr/>
+          <p:nvPr/>
+        </p:nvSpPr>
+        <p:spPr>
+          <a:xfrm>
+            <a:off x="3291840" y="1051560"/>
+            <a:ext cx="54864" cy="1600200"/>
+          </a:xfrm>
+          <a:prstGeom prst="rect">
+            <a:avLst/>
+          </a:prstGeom>
+          <a:solidFill>
+            <a:srgbClr val="16A34A"/>
+          </a:solidFill>
+          <a:ln/>
+        </p:spPr>
+      </p:sp>
+      <p:sp>
+        <p:nvSpPr>
+          <p:cNvPr id="14" name="Shape 12"/>
+          <p:cNvSpPr/>
+          <p:nvPr/>
+        </p:nvSpPr>
+        <p:spPr>
+          <a:xfrm>
+            <a:off x="5120640" y="1124712"/>
+            <a:ext cx="658368" cy="228600"/>
+          </a:xfrm>
+          <a:prstGeom prst="rect">
+            <a:avLst/>
+          </a:prstGeom>
+          <a:solidFill>
+            <a:srgbClr val="DCFCE7"/>
+          </a:solidFill>
+          <a:ln/>
+        </p:spPr>
+      </p:sp>
+      <p:sp>
+        <p:nvSpPr>
+          <p:cNvPr id="15" name="Text 13"/>
+          <p:cNvSpPr/>
+          <p:nvPr/>
+        </p:nvSpPr>
+        <p:spPr>
+          <a:xfrm>
+            <a:off x="5120640" y="1124712"/>
+            <a:ext cx="658368" cy="228600"/>
+          </a:xfrm>
+          <a:prstGeom prst="rect">
+            <a:avLst/>
+          </a:prstGeom>
+          <a:noFill/>
+          <a:ln/>
+        </p:spPr>
+        <p:txBody>
+          <a:bodyPr wrap="square" lIns="0" tIns="0" rIns="0" bIns="0" rtlCol="0" anchor="ctr"/>
+          <a:lstStyle/>
+          <a:p>
+            <a:pPr algn="ctr" indent="0" marL="0">
+              <a:buNone/>
+            </a:pPr>
+            <a:r>
+              <a:rPr lang="en-US" sz="900" b="1" dirty="0">
+                <a:solidFill>
+                  <a:srgbClr val="16A34A"/>
+                </a:solidFill>
+                <a:latin typeface="Arial" pitchFamily="34" charset="0"/>
+                <a:ea typeface="Arial" pitchFamily="34" charset="-122"/>
+                <a:cs typeface="Arial" pitchFamily="34" charset="-120"/>
+              </a:rPr>
+              <a:t>20件+</a:t>
+            </a:r>
+            <a:endParaRPr lang="en-US" sz="900" dirty="0"/>
+          </a:p>
+        </p:txBody>
+      </p:sp>
+      <p:sp>
+        <p:nvSpPr>
+          <p:cNvPr id="16" name="Text 14"/>
+          <p:cNvSpPr/>
+          <p:nvPr/>
+        </p:nvSpPr>
+        <p:spPr>
+          <a:xfrm>
+            <a:off x="3429000" y="1124712"/>
+            <a:ext cx="1645920" cy="274320"/>
+          </a:xfrm>
+          <a:prstGeom prst="rect">
+            <a:avLst/>
+          </a:prstGeom>
+          <a:noFill/>
+          <a:ln/>
+        </p:spPr>
+        <p:txBody>
+          <a:bodyPr wrap="square" lIns="0" tIns="0" rIns="0" bIns="0" rtlCol="0" anchor="ctr"/>
+          <a:lstStyle/>
+          <a:p>
+            <a:pPr indent="0" marL="0">
+              <a:buNone/>
+            </a:pPr>
+            <a:r>
+              <a:rPr lang="en-US" sz="1300" b="1" dirty="0">
+                <a:solidFill>
+                  <a:srgbClr val="1A2744"/>
+                </a:solidFill>
+                <a:latin typeface="Arial" pitchFamily="34" charset="0"/>
+                <a:ea typeface="Arial" pitchFamily="34" charset="-122"/>
+                <a:cs typeface="Arial" pitchFamily="34" charset="-120"/>
+              </a:rPr>
+              <a:t>スタッフの対応</a:t>
+            </a:r>
+            <a:endParaRPr lang="en-US" sz="1300" dirty="0"/>
+          </a:p>
+        </p:txBody>
+      </p:sp>
+      <p:sp>
+        <p:nvSpPr>
+          <p:cNvPr id="17" name="Text 15"/>
+          <p:cNvSpPr/>
+          <p:nvPr/>
+        </p:nvSpPr>
+        <p:spPr>
+          <a:xfrm>
+            <a:off x="3429000" y="1417320"/>
+            <a:ext cx="2377440" cy="365760"/>
+          </a:xfrm>
+          <a:prstGeom prst="rect">
+            <a:avLst/>
+          </a:prstGeom>
+          <a:noFill/>
+          <a:ln/>
+        </p:spPr>
+        <p:txBody>
+          <a:bodyPr wrap="square" lIns="0" tIns="0" rIns="0" bIns="0" rtlCol="0" anchor="ctr"/>
+          <a:lstStyle/>
+          <a:p>
+            <a:pPr indent="0" marL="0">
+              <a:buNone/>
+            </a:pPr>
+            <a:r>
+              <a:rPr lang="en-US" sz="900" dirty="0">
+                <a:solidFill>
+                  <a:srgbClr val="64748B"/>
+                </a:solidFill>
+                <a:latin typeface="Arial" pitchFamily="34" charset="0"/>
+                <a:ea typeface="Arial" pitchFamily="34" charset="-122"/>
+                <a:cs typeface="Arial" pitchFamily="34" charset="-120"/>
+              </a:rPr>
+              <a:t>スタッフは親切で、部屋もスーツケースを置くのに十分な広さだった（他の多くのホテルの部屋はもっと狭かった）</a:t>
+            </a:r>
+            <a:endParaRPr lang="en-US" sz="900" dirty="0"/>
+          </a:p>
+        </p:txBody>
+      </p:sp>
+      <p:sp>
+        <p:nvSpPr>
+          <p:cNvPr id="18" name="Text 16"/>
+          <p:cNvSpPr/>
+          <p:nvPr/>
+        </p:nvSpPr>
+        <p:spPr>
+          <a:xfrm>
+            <a:off x="3429000" y="1828800"/>
             <a:ext cx="2377440" cy="640080"/>
           </a:xfrm>
           <a:prstGeom prst="rect">
@@ -10888,13 +11111,13 @@
       </p:sp>
       <p:sp>
         <p:nvSpPr>
-          <p:cNvPr id="12" name="Shape 10"/>
-          <p:cNvSpPr/>
-          <p:nvPr/>
-        </p:nvSpPr>
-        <p:spPr>
-          <a:xfrm>
-            <a:off x="3291840" y="1051560"/>
+          <p:cNvPr id="19" name="Shape 17"/>
+          <p:cNvSpPr/>
+          <p:nvPr/>
+        </p:nvSpPr>
+        <p:spPr>
+          <a:xfrm>
+            <a:off x="6126480" y="1051560"/>
             <a:ext cx="2651760" cy="1600200"/>
           </a:xfrm>
           <a:prstGeom prst="rect">
@@ -10915,13 +11138,13 @@
       </p:sp>
       <p:sp>
         <p:nvSpPr>
-          <p:cNvPr id="13" name="Shape 11"/>
-          <p:cNvSpPr/>
-          <p:nvPr/>
-        </p:nvSpPr>
-        <p:spPr>
-          <a:xfrm>
-            <a:off x="3291840" y="1051560"/>
+          <p:cNvPr id="20" name="Shape 18"/>
+          <p:cNvSpPr/>
+          <p:nvPr/>
+        </p:nvSpPr>
+        <p:spPr>
+          <a:xfrm>
+            <a:off x="6126480" y="1051560"/>
             <a:ext cx="54864" cy="1600200"/>
           </a:xfrm>
           <a:prstGeom prst="rect">
@@ -10935,13 +11158,13 @@
       </p:sp>
       <p:sp>
         <p:nvSpPr>
-          <p:cNvPr id="14" name="Shape 12"/>
-          <p:cNvSpPr/>
-          <p:nvPr/>
-        </p:nvSpPr>
-        <p:spPr>
-          <a:xfrm>
-            <a:off x="5120640" y="1124712"/>
+          <p:cNvPr id="21" name="Shape 19"/>
+          <p:cNvSpPr/>
+          <p:nvPr/>
+        </p:nvSpPr>
+        <p:spPr>
+          <a:xfrm>
+            <a:off x="7955280" y="1124712"/>
             <a:ext cx="658368" cy="228600"/>
           </a:xfrm>
           <a:prstGeom prst="rect">
@@ -10955,13 +11178,13 @@
       </p:sp>
       <p:sp>
         <p:nvSpPr>
-          <p:cNvPr id="15" name="Text 13"/>
-          <p:cNvSpPr/>
-          <p:nvPr/>
-        </p:nvSpPr>
-        <p:spPr>
-          <a:xfrm>
-            <a:off x="5120640" y="1124712"/>
+          <p:cNvPr id="22" name="Text 20"/>
+          <p:cNvSpPr/>
+          <p:nvPr/>
+        </p:nvSpPr>
+        <p:spPr>
+          <a:xfrm>
+            <a:off x="7955280" y="1124712"/>
             <a:ext cx="658368" cy="228600"/>
           </a:xfrm>
           <a:prstGeom prst="rect">
@@ -10994,13 +11217,13 @@
       </p:sp>
       <p:sp>
         <p:nvSpPr>
-          <p:cNvPr id="16" name="Text 14"/>
-          <p:cNvSpPr/>
-          <p:nvPr/>
-        </p:nvSpPr>
-        <p:spPr>
-          <a:xfrm>
-            <a:off x="3429000" y="1124712"/>
+          <p:cNvPr id="23" name="Text 21"/>
+          <p:cNvSpPr/>
+          <p:nvPr/>
+        </p:nvSpPr>
+        <p:spPr>
+          <a:xfrm>
+            <a:off x="6263640" y="1124712"/>
             <a:ext cx="1645920" cy="274320"/>
           </a:xfrm>
           <a:prstGeom prst="rect">
@@ -11025,7 +11248,7 @@
                 <a:ea typeface="Arial" pitchFamily="34" charset="-122"/>
                 <a:cs typeface="Arial" pitchFamily="34" charset="-120"/>
               </a:rPr>
-              <a:t>スタッフの対応</a:t>
+              <a:t>清潔さ・清掃</a:t>
             </a:r>
             <a:endParaRPr lang="en-US" sz="1300" dirty="0"/>
           </a:p>
@@ -11033,13 +11256,13 @@
       </p:sp>
       <p:sp>
         <p:nvSpPr>
-          <p:cNvPr id="17" name="Text 15"/>
-          <p:cNvSpPr/>
-          <p:nvPr/>
-        </p:nvSpPr>
-        <p:spPr>
-          <a:xfrm>
-            <a:off x="3429000" y="1417320"/>
+          <p:cNvPr id="24" name="Text 22"/>
+          <p:cNvSpPr/>
+          <p:nvPr/>
+        </p:nvSpPr>
+        <p:spPr>
+          <a:xfrm>
+            <a:off x="6263640" y="1417320"/>
             <a:ext cx="2377440" cy="365760"/>
           </a:xfrm>
           <a:prstGeom prst="rect">
@@ -11064,7 +11287,7 @@
                 <a:ea typeface="Arial" pitchFamily="34" charset="-122"/>
                 <a:cs typeface="Arial" pitchFamily="34" charset="-120"/>
               </a:rPr>
-              <a:t>スタッフは親切で、部屋もスーツケースを置くのに十分な広さだった（他の多くのホテルの部屋はもっと狭かった）</a:t>
+              <a:t>清潔で静かで快適でした</a:t>
             </a:r>
             <a:endParaRPr lang="en-US" sz="900" dirty="0"/>
           </a:p>
@@ -11072,13 +11295,236 @@
       </p:sp>
       <p:sp>
         <p:nvSpPr>
-          <p:cNvPr id="18" name="Text 16"/>
-          <p:cNvSpPr/>
-          <p:nvPr/>
-        </p:nvSpPr>
-        <p:spPr>
-          <a:xfrm>
-            <a:off x="3429000" y="1828800"/>
+          <p:cNvPr id="25" name="Text 23"/>
+          <p:cNvSpPr/>
+          <p:nvPr/>
+        </p:nvSpPr>
+        <p:spPr>
+          <a:xfrm>
+            <a:off x="6263640" y="1828800"/>
+            <a:ext cx="2377440" cy="640080"/>
+          </a:xfrm>
+          <a:prstGeom prst="rect">
+            <a:avLst/>
+          </a:prstGeom>
+          <a:noFill/>
+          <a:ln/>
+        </p:spPr>
+        <p:txBody>
+          <a:bodyPr wrap="square" lIns="0" tIns="0" rIns="0" bIns="0" rtlCol="0" anchor="ctr"/>
+          <a:lstStyle/>
+          <a:p>
+            <a:pPr indent="0" marL="0">
+              <a:buNone/>
+            </a:pPr>
+            <a:r>
+              <a:rPr lang="en-US" sz="900" i="1" dirty="0">
+                <a:solidFill>
+                  <a:srgbClr val="3B7DD8"/>
+                </a:solidFill>
+                <a:latin typeface="Arial" pitchFamily="34" charset="0"/>
+                <a:ea typeface="Arial" pitchFamily="34" charset="-122"/>
+                <a:cs typeface="Arial" pitchFamily="34" charset="-120"/>
+              </a:rPr>
+              <a:t>「สงบ สะดวก สบาย สะอาด 静かで、便利で、快適で、清潔」</a:t>
+            </a:r>
+            <a:endParaRPr lang="en-US" sz="900" dirty="0"/>
+          </a:p>
+        </p:txBody>
+      </p:sp>
+      <p:sp>
+        <p:nvSpPr>
+          <p:cNvPr id="26" name="Shape 24"/>
+          <p:cNvSpPr/>
+          <p:nvPr/>
+        </p:nvSpPr>
+        <p:spPr>
+          <a:xfrm>
+            <a:off x="457200" y="2880360"/>
+            <a:ext cx="2651760" cy="1600200"/>
+          </a:xfrm>
+          <a:prstGeom prst="rect">
+            <a:avLst/>
+          </a:prstGeom>
+          <a:solidFill>
+            <a:srgbClr val="FFFFFF"/>
+          </a:solidFill>
+          <a:ln/>
+          <a:effectLst>
+            <a:outerShdw sx="100000" sy="100000" kx="0" ky="0" algn="bl" rotWithShape="0" blurRad="50800" dist="25400" dir="8100000">
+              <a:srgbClr val="000000">
+                <a:alpha val="10000"/>
+              </a:srgbClr>
+            </a:outerShdw>
+          </a:effectLst>
+        </p:spPr>
+      </p:sp>
+      <p:sp>
+        <p:nvSpPr>
+          <p:cNvPr id="27" name="Shape 25"/>
+          <p:cNvSpPr/>
+          <p:nvPr/>
+        </p:nvSpPr>
+        <p:spPr>
+          <a:xfrm>
+            <a:off x="457200" y="2880360"/>
+            <a:ext cx="54864" cy="1600200"/>
+          </a:xfrm>
+          <a:prstGeom prst="rect">
+            <a:avLst/>
+          </a:prstGeom>
+          <a:solidFill>
+            <a:srgbClr val="16A34A"/>
+          </a:solidFill>
+          <a:ln/>
+        </p:spPr>
+      </p:sp>
+      <p:sp>
+        <p:nvSpPr>
+          <p:cNvPr id="28" name="Shape 26"/>
+          <p:cNvSpPr/>
+          <p:nvPr/>
+        </p:nvSpPr>
+        <p:spPr>
+          <a:xfrm>
+            <a:off x="2286000" y="2953512"/>
+            <a:ext cx="658368" cy="228600"/>
+          </a:xfrm>
+          <a:prstGeom prst="rect">
+            <a:avLst/>
+          </a:prstGeom>
+          <a:solidFill>
+            <a:srgbClr val="DCFCE7"/>
+          </a:solidFill>
+          <a:ln/>
+        </p:spPr>
+      </p:sp>
+      <p:sp>
+        <p:nvSpPr>
+          <p:cNvPr id="29" name="Text 27"/>
+          <p:cNvSpPr/>
+          <p:nvPr/>
+        </p:nvSpPr>
+        <p:spPr>
+          <a:xfrm>
+            <a:off x="2286000" y="2953512"/>
+            <a:ext cx="658368" cy="228600"/>
+          </a:xfrm>
+          <a:prstGeom prst="rect">
+            <a:avLst/>
+          </a:prstGeom>
+          <a:noFill/>
+          <a:ln/>
+        </p:spPr>
+        <p:txBody>
+          <a:bodyPr wrap="square" lIns="0" tIns="0" rIns="0" bIns="0" rtlCol="0" anchor="ctr"/>
+          <a:lstStyle/>
+          <a:p>
+            <a:pPr algn="ctr" indent="0" marL="0">
+              <a:buNone/>
+            </a:pPr>
+            <a:r>
+              <a:rPr lang="en-US" sz="900" b="1" dirty="0">
+                <a:solidFill>
+                  <a:srgbClr val="16A34A"/>
+                </a:solidFill>
+                <a:latin typeface="Arial" pitchFamily="34" charset="0"/>
+                <a:ea typeface="Arial" pitchFamily="34" charset="-122"/>
+                <a:cs typeface="Arial" pitchFamily="34" charset="-120"/>
+              </a:rPr>
+              <a:t>20件+</a:t>
+            </a:r>
+            <a:endParaRPr lang="en-US" sz="900" dirty="0"/>
+          </a:p>
+        </p:txBody>
+      </p:sp>
+      <p:sp>
+        <p:nvSpPr>
+          <p:cNvPr id="30" name="Text 28"/>
+          <p:cNvSpPr/>
+          <p:nvPr/>
+        </p:nvSpPr>
+        <p:spPr>
+          <a:xfrm>
+            <a:off x="594360" y="2953512"/>
+            <a:ext cx="1645920" cy="274320"/>
+          </a:xfrm>
+          <a:prstGeom prst="rect">
+            <a:avLst/>
+          </a:prstGeom>
+          <a:noFill/>
+          <a:ln/>
+        </p:spPr>
+        <p:txBody>
+          <a:bodyPr wrap="square" lIns="0" tIns="0" rIns="0" bIns="0" rtlCol="0" anchor="ctr"/>
+          <a:lstStyle/>
+          <a:p>
+            <a:pPr indent="0" marL="0">
+              <a:buNone/>
+            </a:pPr>
+            <a:r>
+              <a:rPr lang="en-US" sz="1300" b="1" dirty="0">
+                <a:solidFill>
+                  <a:srgbClr val="1A2744"/>
+                </a:solidFill>
+                <a:latin typeface="Arial" pitchFamily="34" charset="0"/>
+                <a:ea typeface="Arial" pitchFamily="34" charset="-122"/>
+                <a:cs typeface="Arial" pitchFamily="34" charset="-120"/>
+              </a:rPr>
+              <a:t>朝食</a:t>
+            </a:r>
+            <a:endParaRPr lang="en-US" sz="1300" dirty="0"/>
+          </a:p>
+        </p:txBody>
+      </p:sp>
+      <p:sp>
+        <p:nvSpPr>
+          <p:cNvPr id="31" name="Text 29"/>
+          <p:cNvSpPr/>
+          <p:nvPr/>
+        </p:nvSpPr>
+        <p:spPr>
+          <a:xfrm>
+            <a:off x="594360" y="3246120"/>
+            <a:ext cx="2377440" cy="365760"/>
+          </a:xfrm>
+          <a:prstGeom prst="rect">
+            <a:avLst/>
+          </a:prstGeom>
+          <a:noFill/>
+          <a:ln/>
+        </p:spPr>
+        <p:txBody>
+          <a:bodyPr wrap="square" lIns="0" tIns="0" rIns="0" bIns="0" rtlCol="0" anchor="ctr"/>
+          <a:lstStyle/>
+          <a:p>
+            <a:pPr indent="0" marL="0">
+              <a:buNone/>
+            </a:pPr>
+            <a:r>
+              <a:rPr lang="en-US" sz="900" dirty="0">
+                <a:solidFill>
+                  <a:srgbClr val="64748B"/>
+                </a:solidFill>
+                <a:latin typeface="Arial" pitchFamily="34" charset="0"/>
+                <a:ea typeface="Arial" pitchFamily="34" charset="-122"/>
+                <a:cs typeface="Arial" pitchFamily="34" charset="-120"/>
+              </a:rPr>
+              <a:t>難点は、朝食会場が常に混雑しているため、補充されるまで待たなければならないことだ</a:t>
+            </a:r>
+            <a:endParaRPr lang="en-US" sz="900" dirty="0"/>
+          </a:p>
+        </p:txBody>
+      </p:sp>
+      <p:sp>
+        <p:nvSpPr>
+          <p:cNvPr id="32" name="Text 30"/>
+          <p:cNvSpPr/>
+          <p:nvPr/>
+        </p:nvSpPr>
+        <p:spPr>
+          <a:xfrm>
+            <a:off x="594360" y="3657600"/>
             <a:ext cx="2377440" cy="640080"/>
           </a:xfrm>
           <a:prstGeom prst="rect">
@@ -11111,13 +11557,13 @@
       </p:sp>
       <p:sp>
         <p:nvSpPr>
-          <p:cNvPr id="19" name="Shape 17"/>
-          <p:cNvSpPr/>
-          <p:nvPr/>
-        </p:nvSpPr>
-        <p:spPr>
-          <a:xfrm>
-            <a:off x="6126480" y="1051560"/>
+          <p:cNvPr id="33" name="Shape 31"/>
+          <p:cNvSpPr/>
+          <p:nvPr/>
+        </p:nvSpPr>
+        <p:spPr>
+          <a:xfrm>
+            <a:off x="3291840" y="2880360"/>
             <a:ext cx="2651760" cy="1600200"/>
           </a:xfrm>
           <a:prstGeom prst="rect">
@@ -11138,13 +11584,13 @@
       </p:sp>
       <p:sp>
         <p:nvSpPr>
-          <p:cNvPr id="20" name="Shape 18"/>
-          <p:cNvSpPr/>
-          <p:nvPr/>
-        </p:nvSpPr>
-        <p:spPr>
-          <a:xfrm>
-            <a:off x="6126480" y="1051560"/>
+          <p:cNvPr id="34" name="Shape 32"/>
+          <p:cNvSpPr/>
+          <p:nvPr/>
+        </p:nvSpPr>
+        <p:spPr>
+          <a:xfrm>
+            <a:off x="3291840" y="2880360"/>
             <a:ext cx="54864" cy="1600200"/>
           </a:xfrm>
           <a:prstGeom prst="rect">
@@ -11158,13 +11604,13 @@
       </p:sp>
       <p:sp>
         <p:nvSpPr>
-          <p:cNvPr id="21" name="Shape 19"/>
-          <p:cNvSpPr/>
-          <p:nvPr/>
-        </p:nvSpPr>
-        <p:spPr>
-          <a:xfrm>
-            <a:off x="7955280" y="1124712"/>
+          <p:cNvPr id="35" name="Shape 33"/>
+          <p:cNvSpPr/>
+          <p:nvPr/>
+        </p:nvSpPr>
+        <p:spPr>
+          <a:xfrm>
+            <a:off x="5120640" y="2953512"/>
             <a:ext cx="658368" cy="228600"/>
           </a:xfrm>
           <a:prstGeom prst="rect">
@@ -11178,13 +11624,13 @@
       </p:sp>
       <p:sp>
         <p:nvSpPr>
-          <p:cNvPr id="22" name="Text 20"/>
-          <p:cNvSpPr/>
-          <p:nvPr/>
-        </p:nvSpPr>
-        <p:spPr>
-          <a:xfrm>
-            <a:off x="7955280" y="1124712"/>
+          <p:cNvPr id="36" name="Text 34"/>
+          <p:cNvSpPr/>
+          <p:nvPr/>
+        </p:nvSpPr>
+        <p:spPr>
+          <a:xfrm>
+            <a:off x="5120640" y="2953512"/>
             <a:ext cx="658368" cy="228600"/>
           </a:xfrm>
           <a:prstGeom prst="rect">
@@ -11217,452 +11663,6 @@
       </p:sp>
       <p:sp>
         <p:nvSpPr>
-          <p:cNvPr id="23" name="Text 21"/>
-          <p:cNvSpPr/>
-          <p:nvPr/>
-        </p:nvSpPr>
-        <p:spPr>
-          <a:xfrm>
-            <a:off x="6263640" y="1124712"/>
-            <a:ext cx="1645920" cy="274320"/>
-          </a:xfrm>
-          <a:prstGeom prst="rect">
-            <a:avLst/>
-          </a:prstGeom>
-          <a:noFill/>
-          <a:ln/>
-        </p:spPr>
-        <p:txBody>
-          <a:bodyPr wrap="square" lIns="0" tIns="0" rIns="0" bIns="0" rtlCol="0" anchor="ctr"/>
-          <a:lstStyle/>
-          <a:p>
-            <a:pPr indent="0" marL="0">
-              <a:buNone/>
-            </a:pPr>
-            <a:r>
-              <a:rPr lang="en-US" sz="1300" b="1" dirty="0">
-                <a:solidFill>
-                  <a:srgbClr val="1A2744"/>
-                </a:solidFill>
-                <a:latin typeface="Arial" pitchFamily="34" charset="0"/>
-                <a:ea typeface="Arial" pitchFamily="34" charset="-122"/>
-                <a:cs typeface="Arial" pitchFamily="34" charset="-120"/>
-              </a:rPr>
-              <a:t>清潔さ・清掃</a:t>
-            </a:r>
-            <a:endParaRPr lang="en-US" sz="1300" dirty="0"/>
-          </a:p>
-        </p:txBody>
-      </p:sp>
-      <p:sp>
-        <p:nvSpPr>
-          <p:cNvPr id="24" name="Text 22"/>
-          <p:cNvSpPr/>
-          <p:nvPr/>
-        </p:nvSpPr>
-        <p:spPr>
-          <a:xfrm>
-            <a:off x="6263640" y="1417320"/>
-            <a:ext cx="2377440" cy="365760"/>
-          </a:xfrm>
-          <a:prstGeom prst="rect">
-            <a:avLst/>
-          </a:prstGeom>
-          <a:noFill/>
-          <a:ln/>
-        </p:spPr>
-        <p:txBody>
-          <a:bodyPr wrap="square" lIns="0" tIns="0" rIns="0" bIns="0" rtlCol="0" anchor="ctr"/>
-          <a:lstStyle/>
-          <a:p>
-            <a:pPr indent="0" marL="0">
-              <a:buNone/>
-            </a:pPr>
-            <a:r>
-              <a:rPr lang="en-US" sz="900" dirty="0">
-                <a:solidFill>
-                  <a:srgbClr val="64748B"/>
-                </a:solidFill>
-                <a:latin typeface="Arial" pitchFamily="34" charset="0"/>
-                <a:ea typeface="Arial" pitchFamily="34" charset="-122"/>
-                <a:cs typeface="Arial" pitchFamily="34" charset="-120"/>
-              </a:rPr>
-              <a:t>สงบ สะดวก สบาย สะอาด 静かで、便利で、快適で、清潔</a:t>
-            </a:r>
-            <a:endParaRPr lang="en-US" sz="900" dirty="0"/>
-          </a:p>
-        </p:txBody>
-      </p:sp>
-      <p:sp>
-        <p:nvSpPr>
-          <p:cNvPr id="25" name="Text 23"/>
-          <p:cNvSpPr/>
-          <p:nvPr/>
-        </p:nvSpPr>
-        <p:spPr>
-          <a:xfrm>
-            <a:off x="6263640" y="1828800"/>
-            <a:ext cx="2377440" cy="640080"/>
-          </a:xfrm>
-          <a:prstGeom prst="rect">
-            <a:avLst/>
-          </a:prstGeom>
-          <a:noFill/>
-          <a:ln/>
-        </p:spPr>
-        <p:txBody>
-          <a:bodyPr wrap="square" lIns="0" tIns="0" rIns="0" bIns="0" rtlCol="0" anchor="ctr"/>
-          <a:lstStyle/>
-          <a:p>
-            <a:pPr indent="0" marL="0">
-              <a:buNone/>
-            </a:pPr>
-            <a:r>
-              <a:rPr lang="en-US" sz="900" i="1" dirty="0">
-                <a:solidFill>
-                  <a:srgbClr val="3B7DD8"/>
-                </a:solidFill>
-                <a:latin typeface="Arial" pitchFamily="34" charset="0"/>
-                <a:ea typeface="Arial" pitchFamily="34" charset="-122"/>
-                <a:cs typeface="Arial" pitchFamily="34" charset="-120"/>
-              </a:rPr>
-              <a:t>「雖然酒店位置唔算十分方便鐵路，要行大約10 分鐘先到地鐵站，但房間清潔，職員有禮貌笑容，大堂都有野飲同nuts供應...」</a:t>
-            </a:r>
-            <a:endParaRPr lang="en-US" sz="900" dirty="0"/>
-          </a:p>
-        </p:txBody>
-      </p:sp>
-      <p:sp>
-        <p:nvSpPr>
-          <p:cNvPr id="26" name="Shape 24"/>
-          <p:cNvSpPr/>
-          <p:nvPr/>
-        </p:nvSpPr>
-        <p:spPr>
-          <a:xfrm>
-            <a:off x="457200" y="2880360"/>
-            <a:ext cx="2651760" cy="1600200"/>
-          </a:xfrm>
-          <a:prstGeom prst="rect">
-            <a:avLst/>
-          </a:prstGeom>
-          <a:solidFill>
-            <a:srgbClr val="FFFFFF"/>
-          </a:solidFill>
-          <a:ln/>
-          <a:effectLst>
-            <a:outerShdw sx="100000" sy="100000" kx="0" ky="0" algn="bl" rotWithShape="0" blurRad="50800" dist="25400" dir="8100000">
-              <a:srgbClr val="000000">
-                <a:alpha val="10000"/>
-              </a:srgbClr>
-            </a:outerShdw>
-          </a:effectLst>
-        </p:spPr>
-      </p:sp>
-      <p:sp>
-        <p:nvSpPr>
-          <p:cNvPr id="27" name="Shape 25"/>
-          <p:cNvSpPr/>
-          <p:nvPr/>
-        </p:nvSpPr>
-        <p:spPr>
-          <a:xfrm>
-            <a:off x="457200" y="2880360"/>
-            <a:ext cx="54864" cy="1600200"/>
-          </a:xfrm>
-          <a:prstGeom prst="rect">
-            <a:avLst/>
-          </a:prstGeom>
-          <a:solidFill>
-            <a:srgbClr val="16A34A"/>
-          </a:solidFill>
-          <a:ln/>
-        </p:spPr>
-      </p:sp>
-      <p:sp>
-        <p:nvSpPr>
-          <p:cNvPr id="28" name="Shape 26"/>
-          <p:cNvSpPr/>
-          <p:nvPr/>
-        </p:nvSpPr>
-        <p:spPr>
-          <a:xfrm>
-            <a:off x="2286000" y="2953512"/>
-            <a:ext cx="658368" cy="228600"/>
-          </a:xfrm>
-          <a:prstGeom prst="rect">
-            <a:avLst/>
-          </a:prstGeom>
-          <a:solidFill>
-            <a:srgbClr val="DCFCE7"/>
-          </a:solidFill>
-          <a:ln/>
-        </p:spPr>
-      </p:sp>
-      <p:sp>
-        <p:nvSpPr>
-          <p:cNvPr id="29" name="Text 27"/>
-          <p:cNvSpPr/>
-          <p:nvPr/>
-        </p:nvSpPr>
-        <p:spPr>
-          <a:xfrm>
-            <a:off x="2286000" y="2953512"/>
-            <a:ext cx="658368" cy="228600"/>
-          </a:xfrm>
-          <a:prstGeom prst="rect">
-            <a:avLst/>
-          </a:prstGeom>
-          <a:noFill/>
-          <a:ln/>
-        </p:spPr>
-        <p:txBody>
-          <a:bodyPr wrap="square" lIns="0" tIns="0" rIns="0" bIns="0" rtlCol="0" anchor="ctr"/>
-          <a:lstStyle/>
-          <a:p>
-            <a:pPr algn="ctr" indent="0" marL="0">
-              <a:buNone/>
-            </a:pPr>
-            <a:r>
-              <a:rPr lang="en-US" sz="900" b="1" dirty="0">
-                <a:solidFill>
-                  <a:srgbClr val="16A34A"/>
-                </a:solidFill>
-                <a:latin typeface="Arial" pitchFamily="34" charset="0"/>
-                <a:ea typeface="Arial" pitchFamily="34" charset="-122"/>
-                <a:cs typeface="Arial" pitchFamily="34" charset="-120"/>
-              </a:rPr>
-              <a:t>20件+</a:t>
-            </a:r>
-            <a:endParaRPr lang="en-US" sz="900" dirty="0"/>
-          </a:p>
-        </p:txBody>
-      </p:sp>
-      <p:sp>
-        <p:nvSpPr>
-          <p:cNvPr id="30" name="Text 28"/>
-          <p:cNvSpPr/>
-          <p:nvPr/>
-        </p:nvSpPr>
-        <p:spPr>
-          <a:xfrm>
-            <a:off x="594360" y="2953512"/>
-            <a:ext cx="1645920" cy="274320"/>
-          </a:xfrm>
-          <a:prstGeom prst="rect">
-            <a:avLst/>
-          </a:prstGeom>
-          <a:noFill/>
-          <a:ln/>
-        </p:spPr>
-        <p:txBody>
-          <a:bodyPr wrap="square" lIns="0" tIns="0" rIns="0" bIns="0" rtlCol="0" anchor="ctr"/>
-          <a:lstStyle/>
-          <a:p>
-            <a:pPr indent="0" marL="0">
-              <a:buNone/>
-            </a:pPr>
-            <a:r>
-              <a:rPr lang="en-US" sz="1300" b="1" dirty="0">
-                <a:solidFill>
-                  <a:srgbClr val="1A2744"/>
-                </a:solidFill>
-                <a:latin typeface="Arial" pitchFamily="34" charset="0"/>
-                <a:ea typeface="Arial" pitchFamily="34" charset="-122"/>
-                <a:cs typeface="Arial" pitchFamily="34" charset="-120"/>
-              </a:rPr>
-              <a:t>朝食</a:t>
-            </a:r>
-            <a:endParaRPr lang="en-US" sz="1300" dirty="0"/>
-          </a:p>
-        </p:txBody>
-      </p:sp>
-      <p:sp>
-        <p:nvSpPr>
-          <p:cNvPr id="31" name="Text 29"/>
-          <p:cNvSpPr/>
-          <p:nvPr/>
-        </p:nvSpPr>
-        <p:spPr>
-          <a:xfrm>
-            <a:off x="594360" y="3246120"/>
-            <a:ext cx="2377440" cy="365760"/>
-          </a:xfrm>
-          <a:prstGeom prst="rect">
-            <a:avLst/>
-          </a:prstGeom>
-          <a:noFill/>
-          <a:ln/>
-        </p:spPr>
-        <p:txBody>
-          <a:bodyPr wrap="square" lIns="0" tIns="0" rIns="0" bIns="0" rtlCol="0" anchor="ctr"/>
-          <a:lstStyle/>
-          <a:p>
-            <a:pPr indent="0" marL="0">
-              <a:buNone/>
-            </a:pPr>
-            <a:r>
-              <a:rPr lang="en-US" sz="900" dirty="0">
-                <a:solidFill>
-                  <a:srgbClr val="64748B"/>
-                </a:solidFill>
-                <a:latin typeface="Arial" pitchFamily="34" charset="0"/>
-                <a:ea typeface="Arial" pitchFamily="34" charset="-122"/>
-                <a:cs typeface="Arial" pitchFamily="34" charset="-120"/>
-              </a:rPr>
-              <a:t>難点は、朝食会場が常に混雑しているため、補充されるまで待たなければならないことだ</a:t>
-            </a:r>
-            <a:endParaRPr lang="en-US" sz="900" dirty="0"/>
-          </a:p>
-        </p:txBody>
-      </p:sp>
-      <p:sp>
-        <p:nvSpPr>
-          <p:cNvPr id="32" name="Text 30"/>
-          <p:cNvSpPr/>
-          <p:nvPr/>
-        </p:nvSpPr>
-        <p:spPr>
-          <a:xfrm>
-            <a:off x="594360" y="3657600"/>
-            <a:ext cx="2377440" cy="640080"/>
-          </a:xfrm>
-          <a:prstGeom prst="rect">
-            <a:avLst/>
-          </a:prstGeom>
-          <a:noFill/>
-          <a:ln/>
-        </p:spPr>
-        <p:txBody>
-          <a:bodyPr wrap="square" lIns="0" tIns="0" rIns="0" bIns="0" rtlCol="0" anchor="ctr"/>
-          <a:lstStyle/>
-          <a:p>
-            <a:pPr indent="0" marL="0">
-              <a:buNone/>
-            </a:pPr>
-            <a:r>
-              <a:rPr lang="en-US" sz="900" i="1" dirty="0">
-                <a:solidFill>
-                  <a:srgbClr val="3B7DD8"/>
-                </a:solidFill>
-                <a:latin typeface="Arial" pitchFamily="34" charset="0"/>
-                <a:ea typeface="Arial" pitchFamily="34" charset="-122"/>
-                <a:cs typeface="Arial" pitchFamily="34" charset="-120"/>
-              </a:rPr>
-              <a:t>「朝食がおいしい　フロントが優しい 駅からすこし歩く 飲食店がまわりに少ない 駅からすこし歩く 飲食店がまわりに少ない」</a:t>
-            </a:r>
-            <a:endParaRPr lang="en-US" sz="900" dirty="0"/>
-          </a:p>
-        </p:txBody>
-      </p:sp>
-      <p:sp>
-        <p:nvSpPr>
-          <p:cNvPr id="33" name="Shape 31"/>
-          <p:cNvSpPr/>
-          <p:nvPr/>
-        </p:nvSpPr>
-        <p:spPr>
-          <a:xfrm>
-            <a:off x="3291840" y="2880360"/>
-            <a:ext cx="2651760" cy="1600200"/>
-          </a:xfrm>
-          <a:prstGeom prst="rect">
-            <a:avLst/>
-          </a:prstGeom>
-          <a:solidFill>
-            <a:srgbClr val="FFFFFF"/>
-          </a:solidFill>
-          <a:ln/>
-          <a:effectLst>
-            <a:outerShdw sx="100000" sy="100000" kx="0" ky="0" algn="bl" rotWithShape="0" blurRad="50800" dist="25400" dir="8100000">
-              <a:srgbClr val="000000">
-                <a:alpha val="10000"/>
-              </a:srgbClr>
-            </a:outerShdw>
-          </a:effectLst>
-        </p:spPr>
-      </p:sp>
-      <p:sp>
-        <p:nvSpPr>
-          <p:cNvPr id="34" name="Shape 32"/>
-          <p:cNvSpPr/>
-          <p:nvPr/>
-        </p:nvSpPr>
-        <p:spPr>
-          <a:xfrm>
-            <a:off x="3291840" y="2880360"/>
-            <a:ext cx="54864" cy="1600200"/>
-          </a:xfrm>
-          <a:prstGeom prst="rect">
-            <a:avLst/>
-          </a:prstGeom>
-          <a:solidFill>
-            <a:srgbClr val="16A34A"/>
-          </a:solidFill>
-          <a:ln/>
-        </p:spPr>
-      </p:sp>
-      <p:sp>
-        <p:nvSpPr>
-          <p:cNvPr id="35" name="Shape 33"/>
-          <p:cNvSpPr/>
-          <p:nvPr/>
-        </p:nvSpPr>
-        <p:spPr>
-          <a:xfrm>
-            <a:off x="5120640" y="2953512"/>
-            <a:ext cx="658368" cy="228600"/>
-          </a:xfrm>
-          <a:prstGeom prst="rect">
-            <a:avLst/>
-          </a:prstGeom>
-          <a:solidFill>
-            <a:srgbClr val="DCFCE7"/>
-          </a:solidFill>
-          <a:ln/>
-        </p:spPr>
-      </p:sp>
-      <p:sp>
-        <p:nvSpPr>
-          <p:cNvPr id="36" name="Text 34"/>
-          <p:cNvSpPr/>
-          <p:nvPr/>
-        </p:nvSpPr>
-        <p:spPr>
-          <a:xfrm>
-            <a:off x="5120640" y="2953512"/>
-            <a:ext cx="658368" cy="228600"/>
-          </a:xfrm>
-          <a:prstGeom prst="rect">
-            <a:avLst/>
-          </a:prstGeom>
-          <a:noFill/>
-          <a:ln/>
-        </p:spPr>
-        <p:txBody>
-          <a:bodyPr wrap="square" lIns="0" tIns="0" rIns="0" bIns="0" rtlCol="0" anchor="ctr"/>
-          <a:lstStyle/>
-          <a:p>
-            <a:pPr algn="ctr" indent="0" marL="0">
-              <a:buNone/>
-            </a:pPr>
-            <a:r>
-              <a:rPr lang="en-US" sz="900" b="1" dirty="0">
-                <a:solidFill>
-                  <a:srgbClr val="16A34A"/>
-                </a:solidFill>
-                <a:latin typeface="Arial" pitchFamily="34" charset="0"/>
-                <a:ea typeface="Arial" pitchFamily="34" charset="-122"/>
-                <a:cs typeface="Arial" pitchFamily="34" charset="-120"/>
-              </a:rPr>
-              <a:t>20件+</a:t>
-            </a:r>
-            <a:endParaRPr lang="en-US" sz="900" dirty="0"/>
-          </a:p>
-        </p:txBody>
-      </p:sp>
-      <p:sp>
-        <p:nvSpPr>
           <p:cNvPr id="37" name="Text 35"/>
           <p:cNvSpPr/>
           <p:nvPr/>
@@ -11733,7 +11733,7 @@
                 <a:ea typeface="Arial" pitchFamily="34" charset="-122"/>
                 <a:cs typeface="Arial" pitchFamily="34" charset="-120"/>
               </a:rPr>
-              <a:t>สงบ สะดวก สบาย สะอาด 静かで、便利で、快適で、清潔</a:t>
+              <a:t>清潔で静かで快適でした</a:t>
             </a:r>
             <a:endParaRPr lang="en-US" sz="900" dirty="0"/>
           </a:p>
@@ -11772,7 +11772,7 @@
                 <a:ea typeface="Arial" pitchFamily="34" charset="-122"/>
                 <a:cs typeface="Arial" pitchFamily="34" charset="-120"/>
               </a:rPr>
-              <a:t>「清掃も行き届いており、快適に過ごせました」</a:t>
+              <a:t>「สงบ สะดวก สบาย สะอาด 静かで、便利で、快適で、清潔」</a:t>
             </a:r>
             <a:endParaRPr lang="en-US" sz="900" dirty="0"/>
           </a:p>
@@ -11878,7 +11878,7 @@
                 <a:ea typeface="Arial" pitchFamily="34" charset="-122"/>
                 <a:cs typeface="Arial" pitchFamily="34" charset="-120"/>
               </a:rPr>
-              <a:t>10件+</a:t>
+              <a:t>9件</a:t>
             </a:r>
             <a:endParaRPr lang="en-US" sz="900" dirty="0"/>
           </a:p>
@@ -13575,7 +13575,7 @@
                           <a:ea typeface="Arial" pitchFamily="34" charset="-122"/>
                           <a:cs typeface="Arial" pitchFamily="34" charset="-120"/>
                         </a:rPr>
-                        <a:t>6件</a:t>
+                        <a:t>5件</a:t>
                       </a:r>
                       <a:endParaRPr lang="en-US" sz="900" dirty="0">
                         <a:latin typeface="Arial" charset="0"/>

--- a/納品レポート/ホテル別レポート/comfort_era_higashikanda_口コミ分析レポート.pptx
+++ b/納品レポート/ホテル別レポート/comfort_era_higashikanda_口コミ分析レポート.pptx
@@ -283,13 +283,13 @@
                   <c:v>9.79</c:v>
                 </c:pt>
                 <c:pt idx="3">
-                  <c:v>8.95</c:v>
+                  <c:v>8.92</c:v>
                 </c:pt>
                 <c:pt idx="4">
                   <c:v>8</c:v>
                 </c:pt>
                 <c:pt idx="5">
-                  <c:v>7.65</c:v>
+                  <c:v>7.84</c:v>
                 </c:pt>
               </c:numCache>
             </c:numRef>
@@ -645,10 +645,10 @@
                   <c:v>71</c:v>
                 </c:pt>
                 <c:pt idx="1">
-                  <c:v>16</c:v>
+                  <c:v>17</c:v>
                 </c:pt>
                 <c:pt idx="2">
-                  <c:v>19</c:v>
+                  <c:v>20</c:v>
                 </c:pt>
                 <c:pt idx="3">
                   <c:v>7</c:v>
@@ -2554,7 +2554,7 @@
                 <a:ea typeface="Arial" pitchFamily="34" charset="-122"/>
                 <a:cs typeface="Arial" pitchFamily="34" charset="-120"/>
               </a:rPr>
-              <a:t>レビュー総数：123件</a:t>
+              <a:t>レビュー総数：125件</a:t>
             </a:r>
             <a:endParaRPr lang="en-US" sz="1000" dirty="0"/>
           </a:p>
@@ -2834,7 +2834,7 @@
                 <a:ea typeface="Arial" pitchFamily="34" charset="-122"/>
                 <a:cs typeface="Arial" pitchFamily="34" charset="-120"/>
               </a:rPr>
-              <a:t>コンフォートホテルERA東京東神田は全体平均8.90点（10pt換算）、高評価率86.2%を達成しています。本レポートで示した改善施策を段階的に実施することで、さらなる顧客満足度向上が期待できます。</a:t>
+              <a:t>コンフォートホテルERA東京東神田は全体平均8.90点（10pt換算）、高評価率86.4%を達成しています。本レポートで示した改善施策を段階的に実施することで、さらなる顧客満足度向上が期待できます。</a:t>
             </a:r>
             <a:endParaRPr lang="en-US" sz="1200" dirty="0"/>
           </a:p>
@@ -3389,7 +3389,7 @@
                 <a:ea typeface="Arial" pitchFamily="34" charset="-122"/>
                 <a:cs typeface="Arial" pitchFamily="34" charset="-120"/>
               </a:rPr>
-              <a:t>86.2%</a:t>
+              <a:t>86.4%</a:t>
             </a:r>
             <a:endParaRPr lang="en-US" sz="2800" dirty="0"/>
           </a:p>
@@ -3507,7 +3507,7 @@
                 <a:ea typeface="Arial" pitchFamily="34" charset="-122"/>
                 <a:cs typeface="Arial" pitchFamily="34" charset="-120"/>
               </a:rPr>
-              <a:t>4.9%</a:t>
+              <a:t>4.8%</a:t>
             </a:r>
             <a:endParaRPr lang="en-US" sz="2800" dirty="0"/>
           </a:p>
@@ -3625,7 +3625,7 @@
                 <a:ea typeface="Arial" pitchFamily="34" charset="-122"/>
                 <a:cs typeface="Arial" pitchFamily="34" charset="-120"/>
               </a:rPr>
-              <a:t>123件</a:t>
+              <a:t>125件</a:t>
             </a:r>
             <a:endParaRPr lang="en-US" sz="2800" dirty="0"/>
           </a:p>
@@ -5390,7 +5390,7 @@
                           <a:ea typeface="Arial" pitchFamily="34" charset="-122"/>
                           <a:cs typeface="Arial" pitchFamily="34" charset="-120"/>
                         </a:rPr>
-                        <a:t>66</a:t>
+                        <a:t>65</a:t>
                       </a:r>
                       <a:endParaRPr lang="en-US" sz="800" dirty="0">
                         <a:latin typeface="Arial" charset="0"/>
@@ -5458,7 +5458,7 @@
                           <a:ea typeface="Arial" pitchFamily="34" charset="-122"/>
                           <a:cs typeface="Arial" pitchFamily="34" charset="-120"/>
                         </a:rPr>
-                        <a:t>8.95/10</a:t>
+                        <a:t>8.92/10</a:t>
                       </a:r>
                       <a:endParaRPr lang="en-US" sz="800" dirty="0">
                         <a:latin typeface="Arial" charset="0"/>
@@ -5526,7 +5526,7 @@
                           <a:ea typeface="Arial" pitchFamily="34" charset="-122"/>
                           <a:cs typeface="Arial" pitchFamily="34" charset="-120"/>
                         </a:rPr>
-                        <a:t>8.95</a:t>
+                        <a:t>8.92</a:t>
                       </a:r>
                       <a:endParaRPr lang="en-US" sz="800" dirty="0">
                         <a:latin typeface="Arial" charset="0"/>
@@ -5732,7 +5732,7 @@
                           <a:ea typeface="Arial" pitchFamily="34" charset="-122"/>
                           <a:cs typeface="Arial" pitchFamily="34" charset="-120"/>
                         </a:rPr>
-                        <a:t>3</a:t>
+                        <a:t>4</a:t>
                       </a:r>
                       <a:endParaRPr lang="en-US" sz="800" dirty="0">
                         <a:latin typeface="Arial" charset="0"/>
@@ -6074,7 +6074,7 @@
                           <a:ea typeface="Arial" pitchFamily="34" charset="-122"/>
                           <a:cs typeface="Arial" pitchFamily="34" charset="-120"/>
                         </a:rPr>
-                        <a:t>23</a:t>
+                        <a:t>25</a:t>
                       </a:r>
                       <a:endParaRPr lang="en-US" sz="800" dirty="0">
                         <a:latin typeface="Arial" charset="0"/>
@@ -6142,7 +6142,7 @@
                           <a:ea typeface="Arial" pitchFamily="34" charset="-122"/>
                           <a:cs typeface="Arial" pitchFamily="34" charset="-120"/>
                         </a:rPr>
-                        <a:t>3.83/5</a:t>
+                        <a:t>3.92/5</a:t>
                       </a:r>
                       <a:endParaRPr lang="en-US" sz="800" dirty="0">
                         <a:latin typeface="Arial" charset="0"/>
@@ -6210,7 +6210,7 @@
                           <a:ea typeface="Arial" pitchFamily="34" charset="-122"/>
                           <a:cs typeface="Arial" pitchFamily="34" charset="-120"/>
                         </a:rPr>
-                        <a:t>7.65</a:t>
+                        <a:t>7.84</a:t>
                       </a:r>
                       <a:endParaRPr lang="en-US" sz="800" dirty="0">
                         <a:latin typeface="Arial" charset="0"/>
@@ -6663,7 +6663,7 @@
                 <a:ea typeface="Arial" pitchFamily="34" charset="-122"/>
                 <a:cs typeface="Arial" pitchFamily="34" charset="-120"/>
               </a:rPr>
-              <a:t>106件（86.2%）</a:t>
+              <a:t>108件（86.4%）</a:t>
             </a:r>
             <a:endParaRPr lang="en-US" sz="1600" dirty="0"/>
           </a:p>
@@ -6761,7 +6761,7 @@
                 <a:ea typeface="Arial" pitchFamily="34" charset="-122"/>
                 <a:cs typeface="Arial" pitchFamily="34" charset="-120"/>
               </a:rPr>
-              <a:t>11件（8.9%）</a:t>
+              <a:t>11件（8.8%）</a:t>
             </a:r>
             <a:endParaRPr lang="en-US" sz="1600" dirty="0"/>
           </a:p>
@@ -6859,7 +6859,7 @@
                 <a:ea typeface="Arial" pitchFamily="34" charset="-122"/>
                 <a:cs typeface="Arial" pitchFamily="34" charset="-120"/>
               </a:rPr>
-              <a:t>6件（4.9%）</a:t>
+              <a:t>6件（4.8%）</a:t>
             </a:r>
             <a:endParaRPr lang="en-US" sz="1600" dirty="0"/>
           </a:p>
@@ -7021,7 +7021,7 @@
                 <a:ea typeface="Arial" pitchFamily="34" charset="-122"/>
                 <a:cs typeface="Arial" pitchFamily="34" charset="-120"/>
               </a:rPr>
-              <a:t>高評価レビュー（8-10点: 106件）の分析から、主要な強みテーマを抽出しています。立地・アクセス、客室清潔感、スタッフ対応が高評価の中心的テーマです。</a:t>
+              <a:t>高評価レビュー（8-10点: 108件）の分析から、主要な強みテーマを抽出しています。立地・アクセス、客室清潔感、スタッフ対応が高評価の中心的テーマです。</a:t>
             </a:r>
             <a:endParaRPr lang="en-US" sz="1200" dirty="0"/>
           </a:p>
@@ -8078,7 +8078,7 @@
                 <a:ea typeface="Arial" pitchFamily="34" charset="-122"/>
                 <a:cs typeface="Arial" pitchFamily="34" charset="-120"/>
               </a:rPr>
-              <a:t>高評価率 86.2% → 目標 91.2%</a:t>
+              <a:t>高評価率 86.4% → 目標 91.4%</a:t>
             </a:r>
             <a:endParaRPr lang="en-US" sz="1200" dirty="0"/>
           </a:p>
@@ -8095,7 +8095,7 @@
                 <a:ea typeface="Arial" pitchFamily="34" charset="-122"/>
                 <a:cs typeface="Arial" pitchFamily="34" charset="-120"/>
               </a:rPr>
-              <a:t>低評価率 4.9% → 目標 2.9%</a:t>
+              <a:t>低評価率 4.8% → 目標 2.8%</a:t>
             </a:r>
             <a:endParaRPr lang="en-US" sz="1200" dirty="0"/>
           </a:p>

--- a/納品レポート/ホテル別レポート/comfort_era_higashikanda_口コミ分析レポート.pptx
+++ b/納品レポート/ホテル別レポート/comfort_era_higashikanda_口コミ分析レポート.pptx
@@ -280,13 +280,13 @@
                   <c:v>10</c:v>
                 </c:pt>
                 <c:pt idx="2">
-                  <c:v>9.79</c:v>
+                  <c:v>9.78</c:v>
                 </c:pt>
                 <c:pt idx="3">
-                  <c:v>8.92</c:v>
+                  <c:v>8.91</c:v>
                 </c:pt>
                 <c:pt idx="4">
-                  <c:v>8</c:v>
+                  <c:v>8.4</c:v>
                 </c:pt>
                 <c:pt idx="5">
                   <c:v>7.84</c:v>
@@ -645,10 +645,10 @@
                   <c:v>71</c:v>
                 </c:pt>
                 <c:pt idx="1">
-                  <c:v>17</c:v>
+                  <c:v>16</c:v>
                 </c:pt>
                 <c:pt idx="2">
-                  <c:v>20</c:v>
+                  <c:v>21</c:v>
                 </c:pt>
                 <c:pt idx="3">
                   <c:v>7</c:v>
@@ -2834,7 +2834,7 @@
                 <a:ea typeface="Arial" pitchFamily="34" charset="-122"/>
                 <a:cs typeface="Arial" pitchFamily="34" charset="-120"/>
               </a:rPr>
-              <a:t>コンフォートホテルERA東京東神田は全体平均8.90点（10pt換算）、高評価率86.4%を達成しています。本レポートで示した改善施策を段階的に実施することで、さらなる顧客満足度向上が期待できます。</a:t>
+              <a:t>コンフォートホテルERA東京東神田は全体平均8.89点（10pt換算）、高評価率86.4%を達成しています。本レポートで示した改善施策を段階的に実施することで、さらなる顧客満足度向上が期待できます。</a:t>
             </a:r>
             <a:endParaRPr lang="en-US" sz="1200" dirty="0"/>
           </a:p>
@@ -3271,7 +3271,7 @@
                 <a:ea typeface="Arial" pitchFamily="34" charset="-122"/>
                 <a:cs typeface="Arial" pitchFamily="34" charset="-120"/>
               </a:rPr>
-              <a:t>8.90</a:t>
+              <a:t>8.89</a:t>
             </a:r>
             <a:endParaRPr lang="en-US" sz="2800" dirty="0"/>
           </a:p>
@@ -5048,7 +5048,7 @@
                           <a:ea typeface="Arial" pitchFamily="34" charset="-122"/>
                           <a:cs typeface="Arial" pitchFamily="34" charset="-120"/>
                         </a:rPr>
-                        <a:t>28</a:t>
+                        <a:t>27</a:t>
                       </a:r>
                       <a:endParaRPr lang="en-US" sz="800" dirty="0">
                         <a:latin typeface="Arial" charset="0"/>
@@ -5116,7 +5116,7 @@
                           <a:ea typeface="Arial" pitchFamily="34" charset="-122"/>
                           <a:cs typeface="Arial" pitchFamily="34" charset="-120"/>
                         </a:rPr>
-                        <a:t>9.79/10</a:t>
+                        <a:t>9.78/10</a:t>
                       </a:r>
                       <a:endParaRPr lang="en-US" sz="800" dirty="0">
                         <a:latin typeface="Arial" charset="0"/>
@@ -5184,7 +5184,7 @@
                           <a:ea typeface="Arial" pitchFamily="34" charset="-122"/>
                           <a:cs typeface="Arial" pitchFamily="34" charset="-120"/>
                         </a:rPr>
-                        <a:t>9.79</a:t>
+                        <a:t>9.78</a:t>
                       </a:r>
                       <a:endParaRPr lang="en-US" sz="800" dirty="0">
                         <a:latin typeface="Arial" charset="0"/>
@@ -5458,7 +5458,7 @@
                           <a:ea typeface="Arial" pitchFamily="34" charset="-122"/>
                           <a:cs typeface="Arial" pitchFamily="34" charset="-120"/>
                         </a:rPr>
-                        <a:t>8.92/10</a:t>
+                        <a:t>8.91/10</a:t>
                       </a:r>
                       <a:endParaRPr lang="en-US" sz="800" dirty="0">
                         <a:latin typeface="Arial" charset="0"/>
@@ -5526,7 +5526,7 @@
                           <a:ea typeface="Arial" pitchFamily="34" charset="-122"/>
                           <a:cs typeface="Arial" pitchFamily="34" charset="-120"/>
                         </a:rPr>
-                        <a:t>8.92</a:t>
+                        <a:t>8.91</a:t>
                       </a:r>
                       <a:endParaRPr lang="en-US" sz="800" dirty="0">
                         <a:latin typeface="Arial" charset="0"/>
@@ -5732,7 +5732,7 @@
                           <a:ea typeface="Arial" pitchFamily="34" charset="-122"/>
                           <a:cs typeface="Arial" pitchFamily="34" charset="-120"/>
                         </a:rPr>
-                        <a:t>4</a:t>
+                        <a:t>5</a:t>
                       </a:r>
                       <a:endParaRPr lang="en-US" sz="800" dirty="0">
                         <a:latin typeface="Arial" charset="0"/>
@@ -5800,7 +5800,7 @@
                           <a:ea typeface="Arial" pitchFamily="34" charset="-122"/>
                           <a:cs typeface="Arial" pitchFamily="34" charset="-120"/>
                         </a:rPr>
-                        <a:t>4.00/5</a:t>
+                        <a:t>4.20/5</a:t>
                       </a:r>
                       <a:endParaRPr lang="en-US" sz="800" dirty="0">
                         <a:latin typeface="Arial" charset="0"/>
@@ -5868,7 +5868,7 @@
                           <a:ea typeface="Arial" pitchFamily="34" charset="-122"/>
                           <a:cs typeface="Arial" pitchFamily="34" charset="-120"/>
                         </a:rPr>
-                        <a:t>8.00</a:t>
+                        <a:t>8.40</a:t>
                       </a:r>
                       <a:endParaRPr lang="en-US" sz="800" dirty="0">
                         <a:latin typeface="Arial" charset="0"/>
@@ -8061,7 +8061,7 @@
                 <a:ea typeface="Arial" pitchFamily="34" charset="-122"/>
                 <a:cs typeface="Arial" pitchFamily="34" charset="-120"/>
               </a:rPr>
-              <a:t>全体平均 8.90点 → 目標 9.40点</a:t>
+              <a:t>全体平均 8.89点 → 目標 9.39点</a:t>
             </a:r>
             <a:endParaRPr lang="en-US" sz="1200" dirty="0"/>
           </a:p>

--- a/納品レポート/ホテル別レポート/comfort_era_higashikanda_口コミ分析レポート.pptx
+++ b/納品レポート/ホテル別レポート/comfort_era_higashikanda_口コミ分析レポート.pptx
@@ -214,16 +214,16 @@
                   <c:v>10</c:v>
                 </c:pt>
                 <c:pt idx="2">
-                  <c:v>9.79</c:v>
+                  <c:v>9.81</c:v>
                 </c:pt>
                 <c:pt idx="3">
-                  <c:v>8.92</c:v>
+                  <c:v>8.91</c:v>
                 </c:pt>
                 <c:pt idx="4">
-                  <c:v>8</c:v>
+                  <c:v>8.67</c:v>
                 </c:pt>
                 <c:pt idx="5">
-                  <c:v>7.84</c:v>
+                  <c:v>7.82</c:v>
                 </c:pt>
               </c:numCache>
             </c:numRef>
@@ -566,13 +566,13 @@
               <c:numCache>
                 <c:ptCount val="3"/>
                 <c:pt idx="0">
-                  <c:v>108</c:v>
+                  <c:v>109</c:v>
                 </c:pt>
                 <c:pt idx="1">
                   <c:v>11</c:v>
                 </c:pt>
                 <c:pt idx="2">
-                  <c:v>6</c:v>
+                  <c:v>5</c:v>
                 </c:pt>
               </c:numCache>
             </c:numRef>
@@ -823,13 +823,13 @@
                 <c:formatCode>General</c:formatCode>
                 <c:ptCount val="9"/>
                 <c:pt idx="0">
-                  <c:v>71</c:v>
+                  <c:v>72</c:v>
                 </c:pt>
                 <c:pt idx="1">
-                  <c:v>17</c:v>
+                  <c:v>15</c:v>
                 </c:pt>
                 <c:pt idx="2">
-                  <c:v>20</c:v>
+                  <c:v>22</c:v>
                 </c:pt>
                 <c:pt idx="3">
                   <c:v>7</c:v>
@@ -841,7 +841,7 @@
                   <c:v>1</c:v>
                 </c:pt>
                 <c:pt idx="6">
-                  <c:v>2</c:v>
+                  <c:v>1</c:v>
                 </c:pt>
                 <c:pt idx="7">
                   <c:v>1</c:v>
@@ -2818,7 +2818,7 @@
                 <a:ea typeface="Arial" pitchFamily="34" charset="-122"/>
                 <a:cs typeface="Arial" pitchFamily="34" charset="-120"/>
               </a:rPr>
-              <a:t>作成日：2026年4月2日</a:t>
+              <a:t>作成日：2026年4月5日</a:t>
             </a:r>
             <a:endParaRPr lang="en-US" sz="1000" dirty="0"/>
           </a:p>
@@ -3364,7 +3364,7 @@
                           <a:ea typeface="Arial" pitchFamily="34" charset="-122"/>
                           <a:cs typeface="Arial" pitchFamily="34" charset="-120"/>
                         </a:rPr>
-                        <a:t>8.90点</a:t>
+                        <a:t>8.93点</a:t>
                       </a:r>
                       <a:endParaRPr lang="en-US" sz="1000" dirty="0">
                         <a:latin typeface="Arial" charset="0"/>
@@ -3638,7 +3638,7 @@
                           <a:ea typeface="Arial" pitchFamily="34" charset="-122"/>
                           <a:cs typeface="Arial" pitchFamily="34" charset="-120"/>
                         </a:rPr>
-                        <a:t>86.4%</a:t>
+                        <a:t>87.2%</a:t>
                       </a:r>
                       <a:endParaRPr lang="en-US" sz="1000" dirty="0">
                         <a:latin typeface="Arial" charset="0"/>
@@ -3706,7 +3706,7 @@
                           <a:ea typeface="Arial" pitchFamily="34" charset="-122"/>
                           <a:cs typeface="Arial" pitchFamily="34" charset="-120"/>
                         </a:rPr>
-                        <a:t>91%以上</a:t>
+                        <a:t>92%以上</a:t>
                       </a:r>
                       <a:endParaRPr lang="en-US" sz="1000" dirty="0">
                         <a:latin typeface="Arial" charset="0"/>
@@ -3912,7 +3912,7 @@
                           <a:ea typeface="Arial" pitchFamily="34" charset="-122"/>
                           <a:cs typeface="Arial" pitchFamily="34" charset="-120"/>
                         </a:rPr>
-                        <a:t>4.8%</a:t>
+                        <a:t>4.0%</a:t>
                       </a:r>
                       <a:endParaRPr lang="en-US" sz="1000" dirty="0">
                         <a:latin typeface="Arial" charset="0"/>
@@ -3980,7 +3980,7 @@
                           <a:ea typeface="Arial" pitchFamily="34" charset="-122"/>
                           <a:cs typeface="Arial" pitchFamily="34" charset="-120"/>
                         </a:rPr>
-                        <a:t>2%以下</a:t>
+                        <a:t>1%以下</a:t>
                       </a:r>
                       <a:endParaRPr lang="en-US" sz="1000" dirty="0">
                         <a:latin typeface="Arial" charset="0"/>
@@ -4734,7 +4734,7 @@
                           <a:ea typeface="Arial" pitchFamily="34" charset="-122"/>
                           <a:cs typeface="Arial" pitchFamily="34" charset="-120"/>
                         </a:rPr>
-                        <a:t>約23件/期間</a:t>
+                        <a:t>約21件/期間</a:t>
                       </a:r>
                       <a:endParaRPr lang="en-US" sz="1000" dirty="0">
                         <a:latin typeface="Arial" charset="0"/>
@@ -4802,7 +4802,7 @@
                           <a:ea typeface="Arial" pitchFamily="34" charset="-122"/>
                           <a:cs typeface="Arial" pitchFamily="34" charset="-120"/>
                         </a:rPr>
-                        <a:t>11件以下</a:t>
+                        <a:t>10件以下</a:t>
                       </a:r>
                       <a:endParaRPr lang="en-US" sz="1000" dirty="0">
                         <a:latin typeface="Arial" charset="0"/>
@@ -5373,7 +5373,7 @@
                 <a:ea typeface="Arial" pitchFamily="34" charset="-122"/>
                 <a:cs typeface="Arial" pitchFamily="34" charset="-120"/>
               </a:rPr>
-              <a:t>8.90</a:t>
+              <a:t>8.93</a:t>
             </a:r>
             <a:endParaRPr lang="en-US" sz="3200" dirty="0"/>
           </a:p>
@@ -5498,7 +5498,7 @@
                 <a:ea typeface="Arial" pitchFamily="34" charset="-122"/>
                 <a:cs typeface="Arial" pitchFamily="34" charset="-120"/>
               </a:rPr>
-              <a:t>86.4%</a:t>
+              <a:t>87.2%</a:t>
             </a:r>
             <a:endParaRPr lang="en-US" sz="3200" dirty="0"/>
           </a:p>
@@ -5623,7 +5623,7 @@
                 <a:ea typeface="Arial" pitchFamily="34" charset="-122"/>
                 <a:cs typeface="Arial" pitchFamily="34" charset="-120"/>
               </a:rPr>
-              <a:t>4.8%</a:t>
+              <a:t>4.0%</a:t>
             </a:r>
             <a:endParaRPr lang="en-US" sz="3200" dirty="0"/>
           </a:p>
@@ -5896,7 +5896,7 @@
                 <a:ea typeface="Arial" pitchFamily="34" charset="-122"/>
                 <a:cs typeface="Arial" pitchFamily="34" charset="-120"/>
               </a:rPr>
-              <a:t>  Location was good and in a quiet area</a:t>
+              <a:t>  Close to the shops</a:t>
             </a:r>
             <a:endParaRPr lang="en-US" sz="1100" dirty="0"/>
           </a:p>
@@ -5936,7 +5936,7 @@
                 <a:ea typeface="Arial" pitchFamily="34" charset="-122"/>
                 <a:cs typeface="Arial" pitchFamily="34" charset="-120"/>
               </a:rPr>
-              <a:t>  Breakfast was abundant and very diverse and the staff wer...</a:t>
+              <a:t>  ホテルの方々が本当に親切でした</a:t>
             </a:r>
             <a:endParaRPr lang="en-US" sz="1100" dirty="0"/>
           </a:p>
@@ -5956,7 +5956,7 @@
                 <a:ea typeface="Arial" pitchFamily="34" charset="-122"/>
                 <a:cs typeface="Arial" pitchFamily="34" charset="-120"/>
               </a:rPr>
-              <a:t>清潔さ・清掃 </a:t>
+              <a:t>朝食 </a:t>
             </a:r>
             <a:endParaRPr lang="en-US" sz="1100" dirty="0"/>
           </a:p>
@@ -5976,7 +5976,7 @@
                 <a:ea typeface="Arial" pitchFamily="34" charset="-122"/>
                 <a:cs typeface="Arial" pitchFamily="34" charset="-120"/>
               </a:rPr>
-              <a:t>  部屋も風呂も清潔で適度に広く、過ごしやすかったです</a:t>
+              <a:t>  Breakfast was great</a:t>
             </a:r>
             <a:endParaRPr lang="en-US" sz="1100" dirty="0"/>
           </a:p>
@@ -6557,7 +6557,7 @@
                 <a:ea typeface="Arial" pitchFamily="34" charset="-122"/>
                 <a:cs typeface="Arial" pitchFamily="34" charset="-120"/>
               </a:rPr>
-              <a:t>8.90</a:t>
+              <a:t>8.93</a:t>
             </a:r>
             <a:endParaRPr lang="en-US" sz="3200" dirty="0"/>
           </a:p>
@@ -6682,7 +6682,7 @@
                 <a:ea typeface="Arial" pitchFamily="34" charset="-122"/>
                 <a:cs typeface="Arial" pitchFamily="34" charset="-120"/>
               </a:rPr>
-              <a:t>86.4%</a:t>
+              <a:t>87.2%</a:t>
             </a:r>
             <a:endParaRPr lang="en-US" sz="3200" dirty="0"/>
           </a:p>
@@ -6807,7 +6807,7 @@
                 <a:ea typeface="Arial" pitchFamily="34" charset="-122"/>
                 <a:cs typeface="Arial" pitchFamily="34" charset="-120"/>
               </a:rPr>
-              <a:t>4.8%</a:t>
+              <a:t>4.0%</a:t>
             </a:r>
             <a:endParaRPr lang="en-US" sz="3200" dirty="0"/>
           </a:p>
@@ -7911,7 +7911,7 @@
                           <a:ea typeface="Arial" pitchFamily="34" charset="-122"/>
                           <a:cs typeface="Arial" pitchFamily="34" charset="-120"/>
                         </a:rPr>
-                        <a:t>1</a:t>
+                        <a:t>2</a:t>
                       </a:r>
                       <a:endParaRPr lang="en-US" sz="900" dirty="0">
                         <a:latin typeface="Arial" charset="0"/>
@@ -8595,7 +8595,7 @@
                           <a:ea typeface="Arial" pitchFamily="34" charset="-122"/>
                           <a:cs typeface="Arial" pitchFamily="34" charset="-120"/>
                         </a:rPr>
-                        <a:t>28</a:t>
+                        <a:t>26</a:t>
                       </a:r>
                       <a:endParaRPr lang="en-US" sz="900" dirty="0">
                         <a:latin typeface="Arial" charset="0"/>
@@ -8663,7 +8663,7 @@
                           <a:ea typeface="Arial" pitchFamily="34" charset="-122"/>
                           <a:cs typeface="Arial" pitchFamily="34" charset="-120"/>
                         </a:rPr>
-                        <a:t>9.79</a:t>
+                        <a:t>9.81</a:t>
                       </a:r>
                       <a:endParaRPr lang="en-US" sz="900" dirty="0">
                         <a:latin typeface="Arial" charset="0"/>
@@ -8799,7 +8799,7 @@
                           <a:ea typeface="Arial" pitchFamily="34" charset="-122"/>
                           <a:cs typeface="Arial" pitchFamily="34" charset="-120"/>
                         </a:rPr>
-                        <a:t>9.79</a:t>
+                        <a:t>9.81</a:t>
                       </a:r>
                       <a:endParaRPr lang="en-US" sz="900" dirty="0">
                         <a:latin typeface="Arial" charset="0"/>
@@ -8937,7 +8937,7 @@
                           <a:ea typeface="Arial" pitchFamily="34" charset="-122"/>
                           <a:cs typeface="Arial" pitchFamily="34" charset="-120"/>
                         </a:rPr>
-                        <a:t>65</a:t>
+                        <a:t>67</a:t>
                       </a:r>
                       <a:endParaRPr lang="en-US" sz="900" dirty="0">
                         <a:latin typeface="Arial" charset="0"/>
@@ -9005,7 +9005,7 @@
                           <a:ea typeface="Arial" pitchFamily="34" charset="-122"/>
                           <a:cs typeface="Arial" pitchFamily="34" charset="-120"/>
                         </a:rPr>
-                        <a:t>8.92</a:t>
+                        <a:t>8.91</a:t>
                       </a:r>
                       <a:endParaRPr lang="en-US" sz="900" dirty="0">
                         <a:latin typeface="Arial" charset="0"/>
@@ -9141,7 +9141,7 @@
                           <a:ea typeface="Arial" pitchFamily="34" charset="-122"/>
                           <a:cs typeface="Arial" pitchFamily="34" charset="-120"/>
                         </a:rPr>
-                        <a:t>8.92</a:t>
+                        <a:t>8.91</a:t>
                       </a:r>
                       <a:endParaRPr lang="en-US" sz="900" dirty="0">
                         <a:latin typeface="Arial" charset="0"/>
@@ -9279,7 +9279,7 @@
                           <a:ea typeface="Arial" pitchFamily="34" charset="-122"/>
                           <a:cs typeface="Arial" pitchFamily="34" charset="-120"/>
                         </a:rPr>
-                        <a:t>4</a:t>
+                        <a:t>6</a:t>
                       </a:r>
                       <a:endParaRPr lang="en-US" sz="900" dirty="0">
                         <a:latin typeface="Arial" charset="0"/>
@@ -9347,7 +9347,7 @@
                           <a:ea typeface="Arial" pitchFamily="34" charset="-122"/>
                           <a:cs typeface="Arial" pitchFamily="34" charset="-120"/>
                         </a:rPr>
-                        <a:t>4</a:t>
+                        <a:t>4.33</a:t>
                       </a:r>
                       <a:endParaRPr lang="en-US" sz="900" dirty="0">
                         <a:latin typeface="Arial" charset="0"/>
@@ -9483,7 +9483,7 @@
                           <a:ea typeface="Arial" pitchFamily="34" charset="-122"/>
                           <a:cs typeface="Arial" pitchFamily="34" charset="-120"/>
                         </a:rPr>
-                        <a:t>8</a:t>
+                        <a:t>8.67</a:t>
                       </a:r>
                       <a:endParaRPr lang="en-US" sz="900" dirty="0">
                         <a:latin typeface="Arial" charset="0"/>
@@ -9621,7 +9621,7 @@
                           <a:ea typeface="Arial" pitchFamily="34" charset="-122"/>
                           <a:cs typeface="Arial" pitchFamily="34" charset="-120"/>
                         </a:rPr>
-                        <a:t>25</a:t>
+                        <a:t>22</a:t>
                       </a:r>
                       <a:endParaRPr lang="en-US" sz="900" dirty="0">
                         <a:latin typeface="Arial" charset="0"/>
@@ -9689,7 +9689,7 @@
                           <a:ea typeface="Arial" pitchFamily="34" charset="-122"/>
                           <a:cs typeface="Arial" pitchFamily="34" charset="-120"/>
                         </a:rPr>
-                        <a:t>3.92</a:t>
+                        <a:t>3.91</a:t>
                       </a:r>
                       <a:endParaRPr lang="en-US" sz="900" dirty="0">
                         <a:latin typeface="Arial" charset="0"/>
@@ -9825,7 +9825,7 @@
                           <a:ea typeface="Arial" pitchFamily="34" charset="-122"/>
                           <a:cs typeface="Arial" pitchFamily="34" charset="-120"/>
                         </a:rPr>
-                        <a:t>7.84</a:t>
+                        <a:t>7.82</a:t>
                       </a:r>
                       <a:endParaRPr lang="en-US" sz="900" dirty="0">
                         <a:latin typeface="Arial" charset="0"/>
@@ -10233,7 +10233,7 @@
                 <a:ea typeface="Arial" pitchFamily="34" charset="-122"/>
                 <a:cs typeface="Arial" pitchFamily="34" charset="-120"/>
               </a:rPr>
-              <a:t>108件（86.4%）</a:t>
+              <a:t>109件（87.2%）</a:t>
             </a:r>
             <a:endParaRPr lang="en-US" sz="1100" dirty="0"/>
           </a:p>
@@ -10429,7 +10429,7 @@
                 <a:ea typeface="Arial" pitchFamily="34" charset="-122"/>
                 <a:cs typeface="Arial" pitchFamily="34" charset="-120"/>
               </a:rPr>
-              <a:t>6件（4.8%）</a:t>
+              <a:t>5件（4.0%）</a:t>
             </a:r>
             <a:endParaRPr lang="en-US" sz="1100" dirty="0"/>
           </a:p>
@@ -10841,7 +10841,7 @@
                 <a:ea typeface="Arial" pitchFamily="34" charset="-122"/>
                 <a:cs typeface="Arial" pitchFamily="34" charset="-120"/>
               </a:rPr>
-              <a:t>Location was good and in a quiet area</a:t>
+              <a:t>Close to the shops</a:t>
             </a:r>
             <a:endParaRPr lang="en-US" sz="900" dirty="0"/>
           </a:p>
@@ -10880,7 +10880,7 @@
                 <a:ea typeface="Arial" pitchFamily="34" charset="-122"/>
                 <a:cs typeface="Arial" pitchFamily="34" charset="-120"/>
               </a:rPr>
-              <a:t>「La posizione anche se non è centrale è ben fornita da 2 s...」</a:t>
+              <a:t>「Location was good and in a quiet area」</a:t>
             </a:r>
             <a:endParaRPr lang="en-US" sz="900" dirty="0"/>
           </a:p>
@@ -11064,7 +11064,7 @@
                 <a:ea typeface="Arial" pitchFamily="34" charset="-122"/>
                 <a:cs typeface="Arial" pitchFamily="34" charset="-120"/>
               </a:rPr>
-              <a:t>Breakfast was abundant and very diverse and the staff wer...</a:t>
+              <a:t>ホテルの方々が本当に親切でした</a:t>
             </a:r>
             <a:endParaRPr lang="en-US" sz="900" dirty="0"/>
           </a:p>
@@ -11103,7 +11103,7 @@
                 <a:ea typeface="Arial" pitchFamily="34" charset="-122"/>
                 <a:cs typeface="Arial" pitchFamily="34" charset="-120"/>
               </a:rPr>
-              <a:t>「スタッフは親切で、部屋もスーツケースを置くのに十分な広さだった（他の多くのホテルの部屋はもっと狭かった）」</a:t>
+              <a:t>「スタッフさんの対応がとてもよくて又来たいなと思いました」</a:t>
             </a:r>
             <a:endParaRPr lang="en-US" sz="900" dirty="0"/>
           </a:p>
@@ -11248,7 +11248,7 @@
                 <a:ea typeface="Arial" pitchFamily="34" charset="-122"/>
                 <a:cs typeface="Arial" pitchFamily="34" charset="-120"/>
               </a:rPr>
-              <a:t>清潔さ・清掃</a:t>
+              <a:t>朝食</a:t>
             </a:r>
             <a:endParaRPr lang="en-US" sz="1300" dirty="0"/>
           </a:p>
@@ -11287,7 +11287,7 @@
                 <a:ea typeface="Arial" pitchFamily="34" charset="-122"/>
                 <a:cs typeface="Arial" pitchFamily="34" charset="-120"/>
               </a:rPr>
-              <a:t>部屋も風呂も清潔で適度に広く、過ごしやすかったです</a:t>
+              <a:t>Breakfast was great</a:t>
             </a:r>
             <a:endParaRPr lang="en-US" sz="900" dirty="0"/>
           </a:p>
@@ -11302,6 +11302,452 @@
         <p:spPr>
           <a:xfrm>
             <a:off x="6263640" y="1828800"/>
+            <a:ext cx="2377440" cy="640080"/>
+          </a:xfrm>
+          <a:prstGeom prst="rect">
+            <a:avLst/>
+          </a:prstGeom>
+          <a:noFill/>
+          <a:ln/>
+        </p:spPr>
+        <p:txBody>
+          <a:bodyPr wrap="square" lIns="0" tIns="0" rIns="0" bIns="0" rtlCol="0" anchor="ctr"/>
+          <a:lstStyle/>
+          <a:p>
+            <a:pPr indent="0" marL="0">
+              <a:buNone/>
+            </a:pPr>
+            <a:r>
+              <a:rPr lang="en-US" sz="900" i="1" dirty="0">
+                <a:solidFill>
+                  <a:srgbClr val="3B7DD8"/>
+                </a:solidFill>
+                <a:latin typeface="Arial" pitchFamily="34" charset="0"/>
+                <a:ea typeface="Arial" pitchFamily="34" charset="-122"/>
+                <a:cs typeface="Arial" pitchFamily="34" charset="-120"/>
+              </a:rPr>
+              <a:t>「Cleanliness, convenience, breakfast」</a:t>
+            </a:r>
+            <a:endParaRPr lang="en-US" sz="900" dirty="0"/>
+          </a:p>
+        </p:txBody>
+      </p:sp>
+      <p:sp>
+        <p:nvSpPr>
+          <p:cNvPr id="26" name="Shape 24"/>
+          <p:cNvSpPr/>
+          <p:nvPr/>
+        </p:nvSpPr>
+        <p:spPr>
+          <a:xfrm>
+            <a:off x="457200" y="2880360"/>
+            <a:ext cx="2651760" cy="1600200"/>
+          </a:xfrm>
+          <a:prstGeom prst="rect">
+            <a:avLst/>
+          </a:prstGeom>
+          <a:solidFill>
+            <a:srgbClr val="FFFFFF"/>
+          </a:solidFill>
+          <a:ln/>
+          <a:effectLst>
+            <a:outerShdw sx="100000" sy="100000" kx="0" ky="0" algn="bl" rotWithShape="0" blurRad="50800" dist="25400" dir="8100000">
+              <a:srgbClr val="000000">
+                <a:alpha val="10000"/>
+              </a:srgbClr>
+            </a:outerShdw>
+          </a:effectLst>
+        </p:spPr>
+      </p:sp>
+      <p:sp>
+        <p:nvSpPr>
+          <p:cNvPr id="27" name="Shape 25"/>
+          <p:cNvSpPr/>
+          <p:nvPr/>
+        </p:nvSpPr>
+        <p:spPr>
+          <a:xfrm>
+            <a:off x="457200" y="2880360"/>
+            <a:ext cx="54864" cy="1600200"/>
+          </a:xfrm>
+          <a:prstGeom prst="rect">
+            <a:avLst/>
+          </a:prstGeom>
+          <a:solidFill>
+            <a:srgbClr val="16A34A"/>
+          </a:solidFill>
+          <a:ln/>
+        </p:spPr>
+      </p:sp>
+      <p:sp>
+        <p:nvSpPr>
+          <p:cNvPr id="28" name="Shape 26"/>
+          <p:cNvSpPr/>
+          <p:nvPr/>
+        </p:nvSpPr>
+        <p:spPr>
+          <a:xfrm>
+            <a:off x="2286000" y="2953512"/>
+            <a:ext cx="658368" cy="228600"/>
+          </a:xfrm>
+          <a:prstGeom prst="rect">
+            <a:avLst/>
+          </a:prstGeom>
+          <a:solidFill>
+            <a:srgbClr val="DCFCE7"/>
+          </a:solidFill>
+          <a:ln/>
+        </p:spPr>
+      </p:sp>
+      <p:sp>
+        <p:nvSpPr>
+          <p:cNvPr id="29" name="Text 27"/>
+          <p:cNvSpPr/>
+          <p:nvPr/>
+        </p:nvSpPr>
+        <p:spPr>
+          <a:xfrm>
+            <a:off x="2286000" y="2953512"/>
+            <a:ext cx="658368" cy="228600"/>
+          </a:xfrm>
+          <a:prstGeom prst="rect">
+            <a:avLst/>
+          </a:prstGeom>
+          <a:noFill/>
+          <a:ln/>
+        </p:spPr>
+        <p:txBody>
+          <a:bodyPr wrap="square" lIns="0" tIns="0" rIns="0" bIns="0" rtlCol="0" anchor="ctr"/>
+          <a:lstStyle/>
+          <a:p>
+            <a:pPr algn="ctr" indent="0" marL="0">
+              <a:buNone/>
+            </a:pPr>
+            <a:r>
+              <a:rPr lang="en-US" sz="900" b="1" dirty="0">
+                <a:solidFill>
+                  <a:srgbClr val="16A34A"/>
+                </a:solidFill>
+                <a:latin typeface="Arial" pitchFamily="34" charset="0"/>
+                <a:ea typeface="Arial" pitchFamily="34" charset="-122"/>
+                <a:cs typeface="Arial" pitchFamily="34" charset="-120"/>
+              </a:rPr>
+              <a:t>20件+</a:t>
+            </a:r>
+            <a:endParaRPr lang="en-US" sz="900" dirty="0"/>
+          </a:p>
+        </p:txBody>
+      </p:sp>
+      <p:sp>
+        <p:nvSpPr>
+          <p:cNvPr id="30" name="Text 28"/>
+          <p:cNvSpPr/>
+          <p:nvPr/>
+        </p:nvSpPr>
+        <p:spPr>
+          <a:xfrm>
+            <a:off x="594360" y="2953512"/>
+            <a:ext cx="1645920" cy="274320"/>
+          </a:xfrm>
+          <a:prstGeom prst="rect">
+            <a:avLst/>
+          </a:prstGeom>
+          <a:noFill/>
+          <a:ln/>
+        </p:spPr>
+        <p:txBody>
+          <a:bodyPr wrap="square" lIns="0" tIns="0" rIns="0" bIns="0" rtlCol="0" anchor="ctr"/>
+          <a:lstStyle/>
+          <a:p>
+            <a:pPr indent="0" marL="0">
+              <a:buNone/>
+            </a:pPr>
+            <a:r>
+              <a:rPr lang="en-US" sz="1300" b="1" dirty="0">
+                <a:solidFill>
+                  <a:srgbClr val="1A2744"/>
+                </a:solidFill>
+                <a:latin typeface="Arial" pitchFamily="34" charset="0"/>
+                <a:ea typeface="Arial" pitchFamily="34" charset="-122"/>
+                <a:cs typeface="Arial" pitchFamily="34" charset="-120"/>
+              </a:rPr>
+              <a:t>清潔さ・清掃</a:t>
+            </a:r>
+            <a:endParaRPr lang="en-US" sz="1300" dirty="0"/>
+          </a:p>
+        </p:txBody>
+      </p:sp>
+      <p:sp>
+        <p:nvSpPr>
+          <p:cNvPr id="31" name="Text 29"/>
+          <p:cNvSpPr/>
+          <p:nvPr/>
+        </p:nvSpPr>
+        <p:spPr>
+          <a:xfrm>
+            <a:off x="594360" y="3246120"/>
+            <a:ext cx="2377440" cy="365760"/>
+          </a:xfrm>
+          <a:prstGeom prst="rect">
+            <a:avLst/>
+          </a:prstGeom>
+          <a:noFill/>
+          <a:ln/>
+        </p:spPr>
+        <p:txBody>
+          <a:bodyPr wrap="square" lIns="0" tIns="0" rIns="0" bIns="0" rtlCol="0" anchor="ctr"/>
+          <a:lstStyle/>
+          <a:p>
+            <a:pPr indent="0" marL="0">
+              <a:buNone/>
+            </a:pPr>
+            <a:r>
+              <a:rPr lang="en-US" sz="900" dirty="0">
+                <a:solidFill>
+                  <a:srgbClr val="64748B"/>
+                </a:solidFill>
+                <a:latin typeface="Arial" pitchFamily="34" charset="0"/>
+                <a:ea typeface="Arial" pitchFamily="34" charset="-122"/>
+                <a:cs typeface="Arial" pitchFamily="34" charset="-120"/>
+              </a:rPr>
+              <a:t>Cleanliness, convenience, breakfast</a:t>
+            </a:r>
+            <a:endParaRPr lang="en-US" sz="900" dirty="0"/>
+          </a:p>
+        </p:txBody>
+      </p:sp>
+      <p:sp>
+        <p:nvSpPr>
+          <p:cNvPr id="32" name="Text 30"/>
+          <p:cNvSpPr/>
+          <p:nvPr/>
+        </p:nvSpPr>
+        <p:spPr>
+          <a:xfrm>
+            <a:off x="594360" y="3657600"/>
+            <a:ext cx="2377440" cy="640080"/>
+          </a:xfrm>
+          <a:prstGeom prst="rect">
+            <a:avLst/>
+          </a:prstGeom>
+          <a:noFill/>
+          <a:ln/>
+        </p:spPr>
+        <p:txBody>
+          <a:bodyPr wrap="square" lIns="0" tIns="0" rIns="0" bIns="0" rtlCol="0" anchor="ctr"/>
+          <a:lstStyle/>
+          <a:p>
+            <a:pPr indent="0" marL="0">
+              <a:buNone/>
+            </a:pPr>
+            <a:r>
+              <a:rPr lang="en-US" sz="900" i="1" dirty="0">
+                <a:solidFill>
+                  <a:srgbClr val="3B7DD8"/>
+                </a:solidFill>
+                <a:latin typeface="Arial" pitchFamily="34" charset="0"/>
+                <a:ea typeface="Arial" pitchFamily="34" charset="-122"/>
+                <a:cs typeface="Arial" pitchFamily="34" charset="-120"/>
+              </a:rPr>
+              <a:t>「部屋も風呂も清潔で適度に広く、過ごしやすかったです」</a:t>
+            </a:r>
+            <a:endParaRPr lang="en-US" sz="900" dirty="0"/>
+          </a:p>
+        </p:txBody>
+      </p:sp>
+      <p:sp>
+        <p:nvSpPr>
+          <p:cNvPr id="33" name="Shape 31"/>
+          <p:cNvSpPr/>
+          <p:nvPr/>
+        </p:nvSpPr>
+        <p:spPr>
+          <a:xfrm>
+            <a:off x="3291840" y="2880360"/>
+            <a:ext cx="2651760" cy="1600200"/>
+          </a:xfrm>
+          <a:prstGeom prst="rect">
+            <a:avLst/>
+          </a:prstGeom>
+          <a:solidFill>
+            <a:srgbClr val="FFFFFF"/>
+          </a:solidFill>
+          <a:ln/>
+          <a:effectLst>
+            <a:outerShdw sx="100000" sy="100000" kx="0" ky="0" algn="bl" rotWithShape="0" blurRad="50800" dist="25400" dir="8100000">
+              <a:srgbClr val="000000">
+                <a:alpha val="10000"/>
+              </a:srgbClr>
+            </a:outerShdw>
+          </a:effectLst>
+        </p:spPr>
+      </p:sp>
+      <p:sp>
+        <p:nvSpPr>
+          <p:cNvPr id="34" name="Shape 32"/>
+          <p:cNvSpPr/>
+          <p:nvPr/>
+        </p:nvSpPr>
+        <p:spPr>
+          <a:xfrm>
+            <a:off x="3291840" y="2880360"/>
+            <a:ext cx="54864" cy="1600200"/>
+          </a:xfrm>
+          <a:prstGeom prst="rect">
+            <a:avLst/>
+          </a:prstGeom>
+          <a:solidFill>
+            <a:srgbClr val="16A34A"/>
+          </a:solidFill>
+          <a:ln/>
+        </p:spPr>
+      </p:sp>
+      <p:sp>
+        <p:nvSpPr>
+          <p:cNvPr id="35" name="Shape 33"/>
+          <p:cNvSpPr/>
+          <p:nvPr/>
+        </p:nvSpPr>
+        <p:spPr>
+          <a:xfrm>
+            <a:off x="5120640" y="2953512"/>
+            <a:ext cx="658368" cy="228600"/>
+          </a:xfrm>
+          <a:prstGeom prst="rect">
+            <a:avLst/>
+          </a:prstGeom>
+          <a:solidFill>
+            <a:srgbClr val="DCFCE7"/>
+          </a:solidFill>
+          <a:ln/>
+        </p:spPr>
+      </p:sp>
+      <p:sp>
+        <p:nvSpPr>
+          <p:cNvPr id="36" name="Text 34"/>
+          <p:cNvSpPr/>
+          <p:nvPr/>
+        </p:nvSpPr>
+        <p:spPr>
+          <a:xfrm>
+            <a:off x="5120640" y="2953512"/>
+            <a:ext cx="658368" cy="228600"/>
+          </a:xfrm>
+          <a:prstGeom prst="rect">
+            <a:avLst/>
+          </a:prstGeom>
+          <a:noFill/>
+          <a:ln/>
+        </p:spPr>
+        <p:txBody>
+          <a:bodyPr wrap="square" lIns="0" tIns="0" rIns="0" bIns="0" rtlCol="0" anchor="ctr"/>
+          <a:lstStyle/>
+          <a:p>
+            <a:pPr algn="ctr" indent="0" marL="0">
+              <a:buNone/>
+            </a:pPr>
+            <a:r>
+              <a:rPr lang="en-US" sz="900" b="1" dirty="0">
+                <a:solidFill>
+                  <a:srgbClr val="16A34A"/>
+                </a:solidFill>
+                <a:latin typeface="Arial" pitchFamily="34" charset="0"/>
+                <a:ea typeface="Arial" pitchFamily="34" charset="-122"/>
+                <a:cs typeface="Arial" pitchFamily="34" charset="-120"/>
+              </a:rPr>
+              <a:t>20件+</a:t>
+            </a:r>
+            <a:endParaRPr lang="en-US" sz="900" dirty="0"/>
+          </a:p>
+        </p:txBody>
+      </p:sp>
+      <p:sp>
+        <p:nvSpPr>
+          <p:cNvPr id="37" name="Text 35"/>
+          <p:cNvSpPr/>
+          <p:nvPr/>
+        </p:nvSpPr>
+        <p:spPr>
+          <a:xfrm>
+            <a:off x="3429000" y="2953512"/>
+            <a:ext cx="1645920" cy="274320"/>
+          </a:xfrm>
+          <a:prstGeom prst="rect">
+            <a:avLst/>
+          </a:prstGeom>
+          <a:noFill/>
+          <a:ln/>
+        </p:spPr>
+        <p:txBody>
+          <a:bodyPr wrap="square" lIns="0" tIns="0" rIns="0" bIns="0" rtlCol="0" anchor="ctr"/>
+          <a:lstStyle/>
+          <a:p>
+            <a:pPr indent="0" marL="0">
+              <a:buNone/>
+            </a:pPr>
+            <a:r>
+              <a:rPr lang="en-US" sz="1300" b="1" dirty="0">
+                <a:solidFill>
+                  <a:srgbClr val="1A2744"/>
+                </a:solidFill>
+                <a:latin typeface="Arial" pitchFamily="34" charset="0"/>
+                <a:ea typeface="Arial" pitchFamily="34" charset="-122"/>
+                <a:cs typeface="Arial" pitchFamily="34" charset="-120"/>
+              </a:rPr>
+              <a:t>快適さ・設備</a:t>
+            </a:r>
+            <a:endParaRPr lang="en-US" sz="1300" dirty="0"/>
+          </a:p>
+        </p:txBody>
+      </p:sp>
+      <p:sp>
+        <p:nvSpPr>
+          <p:cNvPr id="38" name="Text 36"/>
+          <p:cNvSpPr/>
+          <p:nvPr/>
+        </p:nvSpPr>
+        <p:spPr>
+          <a:xfrm>
+            <a:off x="3429000" y="3246120"/>
+            <a:ext cx="2377440" cy="365760"/>
+          </a:xfrm>
+          <a:prstGeom prst="rect">
+            <a:avLst/>
+          </a:prstGeom>
+          <a:noFill/>
+          <a:ln/>
+        </p:spPr>
+        <p:txBody>
+          <a:bodyPr wrap="square" lIns="0" tIns="0" rIns="0" bIns="0" rtlCol="0" anchor="ctr"/>
+          <a:lstStyle/>
+          <a:p>
+            <a:pPr indent="0" marL="0">
+              <a:buNone/>
+            </a:pPr>
+            <a:r>
+              <a:rPr lang="en-US" sz="900" dirty="0">
+                <a:solidFill>
+                  <a:srgbClr val="64748B"/>
+                </a:solidFill>
+                <a:latin typeface="Arial" pitchFamily="34" charset="0"/>
+                <a:ea typeface="Arial" pitchFamily="34" charset="-122"/>
+                <a:cs typeface="Arial" pitchFamily="34" charset="-120"/>
+              </a:rPr>
+              <a:t>いつも、変わりなく場所が変わっても快適で、安心</a:t>
+            </a:r>
+            <a:endParaRPr lang="en-US" sz="900" dirty="0"/>
+          </a:p>
+        </p:txBody>
+      </p:sp>
+      <p:sp>
+        <p:nvSpPr>
+          <p:cNvPr id="39" name="Text 37"/>
+          <p:cNvSpPr/>
+          <p:nvPr/>
+        </p:nvSpPr>
+        <p:spPr>
+          <a:xfrm>
+            <a:off x="3429000" y="3657600"/>
             <a:ext cx="2377440" cy="640080"/>
           </a:xfrm>
           <a:prstGeom prst="rect">
@@ -11334,452 +11780,6 @@
       </p:sp>
       <p:sp>
         <p:nvSpPr>
-          <p:cNvPr id="26" name="Shape 24"/>
-          <p:cNvSpPr/>
-          <p:nvPr/>
-        </p:nvSpPr>
-        <p:spPr>
-          <a:xfrm>
-            <a:off x="457200" y="2880360"/>
-            <a:ext cx="2651760" cy="1600200"/>
-          </a:xfrm>
-          <a:prstGeom prst="rect">
-            <a:avLst/>
-          </a:prstGeom>
-          <a:solidFill>
-            <a:srgbClr val="FFFFFF"/>
-          </a:solidFill>
-          <a:ln/>
-          <a:effectLst>
-            <a:outerShdw sx="100000" sy="100000" kx="0" ky="0" algn="bl" rotWithShape="0" blurRad="50800" dist="25400" dir="8100000">
-              <a:srgbClr val="000000">
-                <a:alpha val="10000"/>
-              </a:srgbClr>
-            </a:outerShdw>
-          </a:effectLst>
-        </p:spPr>
-      </p:sp>
-      <p:sp>
-        <p:nvSpPr>
-          <p:cNvPr id="27" name="Shape 25"/>
-          <p:cNvSpPr/>
-          <p:nvPr/>
-        </p:nvSpPr>
-        <p:spPr>
-          <a:xfrm>
-            <a:off x="457200" y="2880360"/>
-            <a:ext cx="54864" cy="1600200"/>
-          </a:xfrm>
-          <a:prstGeom prst="rect">
-            <a:avLst/>
-          </a:prstGeom>
-          <a:solidFill>
-            <a:srgbClr val="16A34A"/>
-          </a:solidFill>
-          <a:ln/>
-        </p:spPr>
-      </p:sp>
-      <p:sp>
-        <p:nvSpPr>
-          <p:cNvPr id="28" name="Shape 26"/>
-          <p:cNvSpPr/>
-          <p:nvPr/>
-        </p:nvSpPr>
-        <p:spPr>
-          <a:xfrm>
-            <a:off x="2286000" y="2953512"/>
-            <a:ext cx="658368" cy="228600"/>
-          </a:xfrm>
-          <a:prstGeom prst="rect">
-            <a:avLst/>
-          </a:prstGeom>
-          <a:solidFill>
-            <a:srgbClr val="DCFCE7"/>
-          </a:solidFill>
-          <a:ln/>
-        </p:spPr>
-      </p:sp>
-      <p:sp>
-        <p:nvSpPr>
-          <p:cNvPr id="29" name="Text 27"/>
-          <p:cNvSpPr/>
-          <p:nvPr/>
-        </p:nvSpPr>
-        <p:spPr>
-          <a:xfrm>
-            <a:off x="2286000" y="2953512"/>
-            <a:ext cx="658368" cy="228600"/>
-          </a:xfrm>
-          <a:prstGeom prst="rect">
-            <a:avLst/>
-          </a:prstGeom>
-          <a:noFill/>
-          <a:ln/>
-        </p:spPr>
-        <p:txBody>
-          <a:bodyPr wrap="square" lIns="0" tIns="0" rIns="0" bIns="0" rtlCol="0" anchor="ctr"/>
-          <a:lstStyle/>
-          <a:p>
-            <a:pPr algn="ctr" indent="0" marL="0">
-              <a:buNone/>
-            </a:pPr>
-            <a:r>
-              <a:rPr lang="en-US" sz="900" b="1" dirty="0">
-                <a:solidFill>
-                  <a:srgbClr val="16A34A"/>
-                </a:solidFill>
-                <a:latin typeface="Arial" pitchFamily="34" charset="0"/>
-                <a:ea typeface="Arial" pitchFamily="34" charset="-122"/>
-                <a:cs typeface="Arial" pitchFamily="34" charset="-120"/>
-              </a:rPr>
-              <a:t>20件+</a:t>
-            </a:r>
-            <a:endParaRPr lang="en-US" sz="900" dirty="0"/>
-          </a:p>
-        </p:txBody>
-      </p:sp>
-      <p:sp>
-        <p:nvSpPr>
-          <p:cNvPr id="30" name="Text 28"/>
-          <p:cNvSpPr/>
-          <p:nvPr/>
-        </p:nvSpPr>
-        <p:spPr>
-          <a:xfrm>
-            <a:off x="594360" y="2953512"/>
-            <a:ext cx="1645920" cy="274320"/>
-          </a:xfrm>
-          <a:prstGeom prst="rect">
-            <a:avLst/>
-          </a:prstGeom>
-          <a:noFill/>
-          <a:ln/>
-        </p:spPr>
-        <p:txBody>
-          <a:bodyPr wrap="square" lIns="0" tIns="0" rIns="0" bIns="0" rtlCol="0" anchor="ctr"/>
-          <a:lstStyle/>
-          <a:p>
-            <a:pPr indent="0" marL="0">
-              <a:buNone/>
-            </a:pPr>
-            <a:r>
-              <a:rPr lang="en-US" sz="1300" b="1" dirty="0">
-                <a:solidFill>
-                  <a:srgbClr val="1A2744"/>
-                </a:solidFill>
-                <a:latin typeface="Arial" pitchFamily="34" charset="0"/>
-                <a:ea typeface="Arial" pitchFamily="34" charset="-122"/>
-                <a:cs typeface="Arial" pitchFamily="34" charset="-120"/>
-              </a:rPr>
-              <a:t>朝食</a:t>
-            </a:r>
-            <a:endParaRPr lang="en-US" sz="1300" dirty="0"/>
-          </a:p>
-        </p:txBody>
-      </p:sp>
-      <p:sp>
-        <p:nvSpPr>
-          <p:cNvPr id="31" name="Text 29"/>
-          <p:cNvSpPr/>
-          <p:nvPr/>
-        </p:nvSpPr>
-        <p:spPr>
-          <a:xfrm>
-            <a:off x="594360" y="3246120"/>
-            <a:ext cx="2377440" cy="365760"/>
-          </a:xfrm>
-          <a:prstGeom prst="rect">
-            <a:avLst/>
-          </a:prstGeom>
-          <a:noFill/>
-          <a:ln/>
-        </p:spPr>
-        <p:txBody>
-          <a:bodyPr wrap="square" lIns="0" tIns="0" rIns="0" bIns="0" rtlCol="0" anchor="ctr"/>
-          <a:lstStyle/>
-          <a:p>
-            <a:pPr indent="0" marL="0">
-              <a:buNone/>
-            </a:pPr>
-            <a:r>
-              <a:rPr lang="en-US" sz="900" dirty="0">
-                <a:solidFill>
-                  <a:srgbClr val="64748B"/>
-                </a:solidFill>
-                <a:latin typeface="Arial" pitchFamily="34" charset="0"/>
-                <a:ea typeface="Arial" pitchFamily="34" charset="-122"/>
-                <a:cs typeface="Arial" pitchFamily="34" charset="-120"/>
-              </a:rPr>
-              <a:t>Breakfast was abundant and very diverse and the staff wer...</a:t>
-            </a:r>
-            <a:endParaRPr lang="en-US" sz="900" dirty="0"/>
-          </a:p>
-        </p:txBody>
-      </p:sp>
-      <p:sp>
-        <p:nvSpPr>
-          <p:cNvPr id="32" name="Text 30"/>
-          <p:cNvSpPr/>
-          <p:nvPr/>
-        </p:nvSpPr>
-        <p:spPr>
-          <a:xfrm>
-            <a:off x="594360" y="3657600"/>
-            <a:ext cx="2377440" cy="640080"/>
-          </a:xfrm>
-          <a:prstGeom prst="rect">
-            <a:avLst/>
-          </a:prstGeom>
-          <a:noFill/>
-          <a:ln/>
-        </p:spPr>
-        <p:txBody>
-          <a:bodyPr wrap="square" lIns="0" tIns="0" rIns="0" bIns="0" rtlCol="0" anchor="ctr"/>
-          <a:lstStyle/>
-          <a:p>
-            <a:pPr indent="0" marL="0">
-              <a:buNone/>
-            </a:pPr>
-            <a:r>
-              <a:rPr lang="en-US" sz="900" i="1" dirty="0">
-                <a:solidFill>
-                  <a:srgbClr val="3B7DD8"/>
-                </a:solidFill>
-                <a:latin typeface="Arial" pitchFamily="34" charset="0"/>
-                <a:ea typeface="Arial" pitchFamily="34" charset="-122"/>
-                <a:cs typeface="Arial" pitchFamily="34" charset="-120"/>
-              </a:rPr>
-              <a:t>「朝食も野菜が多く体調が整いました」</a:t>
-            </a:r>
-            <a:endParaRPr lang="en-US" sz="900" dirty="0"/>
-          </a:p>
-        </p:txBody>
-      </p:sp>
-      <p:sp>
-        <p:nvSpPr>
-          <p:cNvPr id="33" name="Shape 31"/>
-          <p:cNvSpPr/>
-          <p:nvPr/>
-        </p:nvSpPr>
-        <p:spPr>
-          <a:xfrm>
-            <a:off x="3291840" y="2880360"/>
-            <a:ext cx="2651760" cy="1600200"/>
-          </a:xfrm>
-          <a:prstGeom prst="rect">
-            <a:avLst/>
-          </a:prstGeom>
-          <a:solidFill>
-            <a:srgbClr val="FFFFFF"/>
-          </a:solidFill>
-          <a:ln/>
-          <a:effectLst>
-            <a:outerShdw sx="100000" sy="100000" kx="0" ky="0" algn="bl" rotWithShape="0" blurRad="50800" dist="25400" dir="8100000">
-              <a:srgbClr val="000000">
-                <a:alpha val="10000"/>
-              </a:srgbClr>
-            </a:outerShdw>
-          </a:effectLst>
-        </p:spPr>
-      </p:sp>
-      <p:sp>
-        <p:nvSpPr>
-          <p:cNvPr id="34" name="Shape 32"/>
-          <p:cNvSpPr/>
-          <p:nvPr/>
-        </p:nvSpPr>
-        <p:spPr>
-          <a:xfrm>
-            <a:off x="3291840" y="2880360"/>
-            <a:ext cx="54864" cy="1600200"/>
-          </a:xfrm>
-          <a:prstGeom prst="rect">
-            <a:avLst/>
-          </a:prstGeom>
-          <a:solidFill>
-            <a:srgbClr val="16A34A"/>
-          </a:solidFill>
-          <a:ln/>
-        </p:spPr>
-      </p:sp>
-      <p:sp>
-        <p:nvSpPr>
-          <p:cNvPr id="35" name="Shape 33"/>
-          <p:cNvSpPr/>
-          <p:nvPr/>
-        </p:nvSpPr>
-        <p:spPr>
-          <a:xfrm>
-            <a:off x="5120640" y="2953512"/>
-            <a:ext cx="658368" cy="228600"/>
-          </a:xfrm>
-          <a:prstGeom prst="rect">
-            <a:avLst/>
-          </a:prstGeom>
-          <a:solidFill>
-            <a:srgbClr val="DCFCE7"/>
-          </a:solidFill>
-          <a:ln/>
-        </p:spPr>
-      </p:sp>
-      <p:sp>
-        <p:nvSpPr>
-          <p:cNvPr id="36" name="Text 34"/>
-          <p:cNvSpPr/>
-          <p:nvPr/>
-        </p:nvSpPr>
-        <p:spPr>
-          <a:xfrm>
-            <a:off x="5120640" y="2953512"/>
-            <a:ext cx="658368" cy="228600"/>
-          </a:xfrm>
-          <a:prstGeom prst="rect">
-            <a:avLst/>
-          </a:prstGeom>
-          <a:noFill/>
-          <a:ln/>
-        </p:spPr>
-        <p:txBody>
-          <a:bodyPr wrap="square" lIns="0" tIns="0" rIns="0" bIns="0" rtlCol="0" anchor="ctr"/>
-          <a:lstStyle/>
-          <a:p>
-            <a:pPr algn="ctr" indent="0" marL="0">
-              <a:buNone/>
-            </a:pPr>
-            <a:r>
-              <a:rPr lang="en-US" sz="900" b="1" dirty="0">
-                <a:solidFill>
-                  <a:srgbClr val="16A34A"/>
-                </a:solidFill>
-                <a:latin typeface="Arial" pitchFamily="34" charset="0"/>
-                <a:ea typeface="Arial" pitchFamily="34" charset="-122"/>
-                <a:cs typeface="Arial" pitchFamily="34" charset="-120"/>
-              </a:rPr>
-              <a:t>20件+</a:t>
-            </a:r>
-            <a:endParaRPr lang="en-US" sz="900" dirty="0"/>
-          </a:p>
-        </p:txBody>
-      </p:sp>
-      <p:sp>
-        <p:nvSpPr>
-          <p:cNvPr id="37" name="Text 35"/>
-          <p:cNvSpPr/>
-          <p:nvPr/>
-        </p:nvSpPr>
-        <p:spPr>
-          <a:xfrm>
-            <a:off x="3429000" y="2953512"/>
-            <a:ext cx="1645920" cy="274320"/>
-          </a:xfrm>
-          <a:prstGeom prst="rect">
-            <a:avLst/>
-          </a:prstGeom>
-          <a:noFill/>
-          <a:ln/>
-        </p:spPr>
-        <p:txBody>
-          <a:bodyPr wrap="square" lIns="0" tIns="0" rIns="0" bIns="0" rtlCol="0" anchor="ctr"/>
-          <a:lstStyle/>
-          <a:p>
-            <a:pPr indent="0" marL="0">
-              <a:buNone/>
-            </a:pPr>
-            <a:r>
-              <a:rPr lang="en-US" sz="1300" b="1" dirty="0">
-                <a:solidFill>
-                  <a:srgbClr val="1A2744"/>
-                </a:solidFill>
-                <a:latin typeface="Arial" pitchFamily="34" charset="0"/>
-                <a:ea typeface="Arial" pitchFamily="34" charset="-122"/>
-                <a:cs typeface="Arial" pitchFamily="34" charset="-120"/>
-              </a:rPr>
-              <a:t>快適さ・設備</a:t>
-            </a:r>
-            <a:endParaRPr lang="en-US" sz="1300" dirty="0"/>
-          </a:p>
-        </p:txBody>
-      </p:sp>
-      <p:sp>
-        <p:nvSpPr>
-          <p:cNvPr id="38" name="Text 36"/>
-          <p:cNvSpPr/>
-          <p:nvPr/>
-        </p:nvSpPr>
-        <p:spPr>
-          <a:xfrm>
-            <a:off x="3429000" y="3246120"/>
-            <a:ext cx="2377440" cy="365760"/>
-          </a:xfrm>
-          <a:prstGeom prst="rect">
-            <a:avLst/>
-          </a:prstGeom>
-          <a:noFill/>
-          <a:ln/>
-        </p:spPr>
-        <p:txBody>
-          <a:bodyPr wrap="square" lIns="0" tIns="0" rIns="0" bIns="0" rtlCol="0" anchor="ctr"/>
-          <a:lstStyle/>
-          <a:p>
-            <a:pPr indent="0" marL="0">
-              <a:buNone/>
-            </a:pPr>
-            <a:r>
-              <a:rPr lang="en-US" sz="900" dirty="0">
-                <a:solidFill>
-                  <a:srgbClr val="64748B"/>
-                </a:solidFill>
-                <a:latin typeface="Arial" pitchFamily="34" charset="0"/>
-                <a:ea typeface="Arial" pitchFamily="34" charset="-122"/>
-                <a:cs typeface="Arial" pitchFamily="34" charset="-120"/>
-              </a:rPr>
-              <a:t>清潔で静かで快適でした</a:t>
-            </a:r>
-            <a:endParaRPr lang="en-US" sz="900" dirty="0"/>
-          </a:p>
-        </p:txBody>
-      </p:sp>
-      <p:sp>
-        <p:nvSpPr>
-          <p:cNvPr id="39" name="Text 37"/>
-          <p:cNvSpPr/>
-          <p:nvPr/>
-        </p:nvSpPr>
-        <p:spPr>
-          <a:xfrm>
-            <a:off x="3429000" y="3657600"/>
-            <a:ext cx="2377440" cy="640080"/>
-          </a:xfrm>
-          <a:prstGeom prst="rect">
-            <a:avLst/>
-          </a:prstGeom>
-          <a:noFill/>
-          <a:ln/>
-        </p:spPr>
-        <p:txBody>
-          <a:bodyPr wrap="square" lIns="0" tIns="0" rIns="0" bIns="0" rtlCol="0" anchor="ctr"/>
-          <a:lstStyle/>
-          <a:p>
-            <a:pPr indent="0" marL="0">
-              <a:buNone/>
-            </a:pPr>
-            <a:r>
-              <a:rPr lang="en-US" sz="900" i="1" dirty="0">
-                <a:solidFill>
-                  <a:srgbClr val="3B7DD8"/>
-                </a:solidFill>
-                <a:latin typeface="Arial" pitchFamily="34" charset="0"/>
-                <a:ea typeface="Arial" pitchFamily="34" charset="-122"/>
-                <a:cs typeface="Arial" pitchFamily="34" charset="-120"/>
-              </a:rPr>
-              <a:t>「สงบ สะดวก สบาย สะอาด 静かで、便利で、快適で、清潔」</a:t>
-            </a:r>
-            <a:endParaRPr lang="en-US" sz="900" dirty="0"/>
-          </a:p>
-        </p:txBody>
-      </p:sp>
-      <p:sp>
-        <p:nvSpPr>
           <p:cNvPr id="40" name="Shape 38"/>
           <p:cNvSpPr/>
           <p:nvPr/>
@@ -11956,7 +11956,7 @@
                 <a:ea typeface="Arial" pitchFamily="34" charset="-122"/>
                 <a:cs typeface="Arial" pitchFamily="34" charset="-120"/>
               </a:rPr>
-              <a:t>駅、セブンイレブン、ローソン、ファミリーマートが近くにあり、とても便利な立地です</a:t>
+              <a:t>Cleanliness, convenience, breakfast</a:t>
             </a:r>
             <a:endParaRPr lang="en-US" sz="900" dirty="0"/>
           </a:p>
@@ -11995,7 +11995,7 @@
                 <a:ea typeface="Arial" pitchFamily="34" charset="-122"/>
                 <a:cs typeface="Arial" pitchFamily="34" charset="-120"/>
               </a:rPr>
-              <a:t>「สะดวกมากๆ ใกล้รถไฟ ใกล้ 7-11, lowson, family mart ห้องกว้...」</a:t>
+              <a:t>「駅、セブンイレブン、ローソン、ファミリーマートが近くにあり、とても便利な立地です」</a:t>
             </a:r>
             <a:endParaRPr lang="en-US" sz="900" dirty="0"/>
           </a:p>
@@ -12753,7 +12753,7 @@
                           <a:ea typeface="Arial" pitchFamily="34" charset="-122"/>
                           <a:cs typeface="Arial" pitchFamily="34" charset="-120"/>
                         </a:rPr>
-                        <a:t>23件</a:t>
+                        <a:t>21件</a:t>
                       </a:r>
                       <a:endParaRPr lang="en-US" sz="900" dirty="0">
                         <a:latin typeface="Arial" charset="0"/>
@@ -13027,7 +13027,7 @@
                           <a:ea typeface="Arial" pitchFamily="34" charset="-122"/>
                           <a:cs typeface="Arial" pitchFamily="34" charset="-120"/>
                         </a:rPr>
-                        <a:t>9件</a:t>
+                        <a:t>8件</a:t>
                       </a:r>
                       <a:endParaRPr lang="en-US" sz="900" dirty="0">
                         <a:latin typeface="Arial" charset="0"/>
@@ -13507,7 +13507,7 @@
                           <a:ea typeface="Arial" pitchFamily="34" charset="-122"/>
                           <a:cs typeface="Arial" pitchFamily="34" charset="-120"/>
                         </a:rPr>
-                        <a:t>サービスは最悪」  数日間滞在しましたが、残念ながら非常に不快な印象を受けました</a:t>
+                        <a:t>みたいな感じでしたが、敷地内は禁煙ですと、毅然とした態度を示し、外国人は退散しました</a:t>
                       </a:r>
                       <a:endParaRPr lang="en-US" sz="900" dirty="0">
                         <a:latin typeface="Arial" charset="0"/>
@@ -13575,7 +13575,7 @@
                           <a:ea typeface="Arial" pitchFamily="34" charset="-122"/>
                           <a:cs typeface="Arial" pitchFamily="34" charset="-120"/>
                         </a:rPr>
-                        <a:t>5件</a:t>
+                        <a:t>6件</a:t>
                       </a:r>
                       <a:endParaRPr lang="en-US" sz="900" dirty="0">
                         <a:latin typeface="Arial" charset="0"/>
@@ -14055,7 +14055,7 @@
                           <a:ea typeface="Arial" pitchFamily="34" charset="-122"/>
                           <a:cs typeface="Arial" pitchFamily="34" charset="-120"/>
                         </a:rPr>
-                        <a:t>大手チェーン店ではタバコ臭かったり何かしらの不具合に見舞われますが、ここにはありませんでした</a:t>
+                        <a:t>外国人の方の利用が多いようで不安でしたが、たまたま玄関先でタバコを吸っている外国人3人が居る所に遭遇したのですが、...</a:t>
                       </a:r>
                       <a:endParaRPr lang="en-US" sz="900" dirty="0">
                         <a:latin typeface="Arial" charset="0"/>
@@ -14123,7 +14123,7 @@
                           <a:ea typeface="Arial" pitchFamily="34" charset="-122"/>
                           <a:cs typeface="Arial" pitchFamily="34" charset="-120"/>
                         </a:rPr>
-                        <a:t>1件</a:t>
+                        <a:t>2件</a:t>
                       </a:r>
                       <a:endParaRPr lang="en-US" sz="900" dirty="0">
                         <a:latin typeface="Arial" charset="0"/>

--- a/納品レポート/ホテル別レポート/comfort_era_higashikanda_口コミ分析レポート.pptx
+++ b/納品レポート/ホテル別レポート/comfort_era_higashikanda_口コミ分析レポート.pptx
@@ -214,16 +214,16 @@
                   <c:v>10</c:v>
                 </c:pt>
                 <c:pt idx="2">
-                  <c:v>9.81</c:v>
+                  <c:v>9.79</c:v>
                 </c:pt>
                 <c:pt idx="3">
                   <c:v>8.91</c:v>
                 </c:pt>
                 <c:pt idx="4">
-                  <c:v>8.67</c:v>
+                  <c:v>8.8</c:v>
                 </c:pt>
                 <c:pt idx="5">
-                  <c:v>7.82</c:v>
+                  <c:v>7</c:v>
                 </c:pt>
               </c:numCache>
             </c:numRef>
@@ -566,10 +566,10 @@
               <c:numCache>
                 <c:ptCount val="3"/>
                 <c:pt idx="0">
-                  <c:v>109</c:v>
+                  <c:v>59</c:v>
                 </c:pt>
                 <c:pt idx="1">
-                  <c:v>11</c:v>
+                  <c:v>3</c:v>
                 </c:pt>
                 <c:pt idx="2">
                   <c:v>5</c:v>
@@ -730,7 +730,7 @@
             <c:bubble3D val="0"/>
             <c:spPr>
               <a:solidFill>
-                <a:srgbClr val="D4A843"/>
+                <a:srgbClr val="DC2626"/>
               </a:solidFill>
               <a:effectLst/>
             </c:spPr>
@@ -741,7 +741,7 @@
             <c:bubble3D val="0"/>
             <c:spPr>
               <a:solidFill>
-                <a:srgbClr val="D4A843"/>
+                <a:srgbClr val="DC2626"/>
               </a:solidFill>
               <a:effectLst/>
             </c:spPr>
@@ -757,33 +757,11 @@
               <a:effectLst/>
             </c:spPr>
           </c:dPt>
-          <c:dPt>
-            <c:idx val="7"/>
-            <c:invertIfNegative val="0"/>
-            <c:bubble3D val="0"/>
-            <c:spPr>
-              <a:solidFill>
-                <a:srgbClr val="DC2626"/>
-              </a:solidFill>
-              <a:effectLst/>
-            </c:spPr>
-          </c:dPt>
-          <c:dPt>
-            <c:idx val="8"/>
-            <c:invertIfNegative val="0"/>
-            <c:bubble3D val="0"/>
-            <c:spPr>
-              <a:solidFill>
-                <a:srgbClr val="DC2626"/>
-              </a:solidFill>
-              <a:effectLst/>
-            </c:spPr>
-          </c:dPt>
           <c:cat>
             <c:multiLvlStrRef>
-              <c:f>Sheet1!$A$2:$A$10</c:f>
+              <c:f>Sheet1!$A$2:$A$8</c:f>
               <c:multiLvlStrCache>
-                <c:ptCount val="9"/>
+                <c:ptCount val="7"/>
                 <c:lvl>
                   <c:pt idx="0">
                     <c:v>10点</c:v>
@@ -798,18 +776,12 @@
                     <c:v>7点</c:v>
                   </c:pt>
                   <c:pt idx="4">
-                    <c:v>6点</c:v>
+                    <c:v>4点</c:v>
                   </c:pt>
                   <c:pt idx="5">
-                    <c:v>5点</c:v>
+                    <c:v>3点</c:v>
                   </c:pt>
                   <c:pt idx="6">
-                    <c:v>4点</c:v>
-                  </c:pt>
-                  <c:pt idx="7">
-                    <c:v>3点</c:v>
-                  </c:pt>
-                  <c:pt idx="8">
                     <c:v>2点</c:v>
                   </c:pt>
                 </c:lvl>
@@ -818,35 +790,29 @@
           </c:cat>
           <c:val>
             <c:numRef>
-              <c:f>Sheet1!$B$2:$B$10</c:f>
+              <c:f>Sheet1!$B$2:$B$8</c:f>
               <c:numCache>
                 <c:formatCode>General</c:formatCode>
-                <c:ptCount val="9"/>
+                <c:ptCount val="7"/>
                 <c:pt idx="0">
-                  <c:v>72</c:v>
+                  <c:v>39</c:v>
                 </c:pt>
                 <c:pt idx="1">
-                  <c:v>15</c:v>
+                  <c:v>4</c:v>
                 </c:pt>
                 <c:pt idx="2">
-                  <c:v>22</c:v>
+                  <c:v>16</c:v>
                 </c:pt>
                 <c:pt idx="3">
-                  <c:v>7</c:v>
+                  <c:v>3</c:v>
                 </c:pt>
                 <c:pt idx="4">
-                  <c:v>3</c:v>
+                  <c:v>1</c:v>
                 </c:pt>
                 <c:pt idx="5">
                   <c:v>1</c:v>
                 </c:pt>
                 <c:pt idx="6">
-                  <c:v>1</c:v>
-                </c:pt>
-                <c:pt idx="7">
-                  <c:v>1</c:v>
-                </c:pt>
-                <c:pt idx="8">
                   <c:v>3</c:v>
                 </c:pt>
               </c:numCache>
@@ -2778,7 +2744,7 @@
                 <a:ea typeface="Arial" pitchFamily="34" charset="-122"/>
                 <a:cs typeface="Arial" pitchFamily="34" charset="-120"/>
               </a:rPr>
-              <a:t>分析対象期間：2026年2月〜3月</a:t>
+              <a:t>分析対象期間：2026年3月</a:t>
             </a:r>
             <a:endParaRPr lang="en-US" sz="1000" dirty="0"/>
           </a:p>
@@ -2798,7 +2764,7 @@
                 <a:ea typeface="Arial" pitchFamily="34" charset="-122"/>
                 <a:cs typeface="Arial" pitchFamily="34" charset="-120"/>
               </a:rPr>
-              <a:t>レビュー総数：125件（6サイト）</a:t>
+              <a:t>レビュー総数：67件（6サイト）</a:t>
             </a:r>
             <a:endParaRPr lang="en-US" sz="1000" dirty="0"/>
           </a:p>
@@ -3364,7 +3330,7 @@
                           <a:ea typeface="Arial" pitchFamily="34" charset="-122"/>
                           <a:cs typeface="Arial" pitchFamily="34" charset="-120"/>
                         </a:rPr>
-                        <a:t>8.93点</a:t>
+                        <a:t>8.78点</a:t>
                       </a:r>
                       <a:endParaRPr lang="en-US" sz="1000" dirty="0">
                         <a:latin typeface="Arial" charset="0"/>
@@ -3432,7 +3398,7 @@
                           <a:ea typeface="Arial" pitchFamily="34" charset="-122"/>
                           <a:cs typeface="Arial" pitchFamily="34" charset="-120"/>
                         </a:rPr>
-                        <a:t>9.2点以上</a:t>
+                        <a:t>9.1点以上</a:t>
                       </a:r>
                       <a:endParaRPr lang="en-US" sz="1000" dirty="0">
                         <a:latin typeface="Arial" charset="0"/>
@@ -3638,7 +3604,7 @@
                           <a:ea typeface="Arial" pitchFamily="34" charset="-122"/>
                           <a:cs typeface="Arial" pitchFamily="34" charset="-120"/>
                         </a:rPr>
-                        <a:t>87.2%</a:t>
+                        <a:t>88.1%</a:t>
                       </a:r>
                       <a:endParaRPr lang="en-US" sz="1000" dirty="0">
                         <a:latin typeface="Arial" charset="0"/>
@@ -3706,7 +3672,7 @@
                           <a:ea typeface="Arial" pitchFamily="34" charset="-122"/>
                           <a:cs typeface="Arial" pitchFamily="34" charset="-120"/>
                         </a:rPr>
-                        <a:t>92%以上</a:t>
+                        <a:t>93%以上</a:t>
                       </a:r>
                       <a:endParaRPr lang="en-US" sz="1000" dirty="0">
                         <a:latin typeface="Arial" charset="0"/>
@@ -3912,7 +3878,7 @@
                           <a:ea typeface="Arial" pitchFamily="34" charset="-122"/>
                           <a:cs typeface="Arial" pitchFamily="34" charset="-120"/>
                         </a:rPr>
-                        <a:t>4.0%</a:t>
+                        <a:t>7.5%</a:t>
                       </a:r>
                       <a:endParaRPr lang="en-US" sz="1000" dirty="0">
                         <a:latin typeface="Arial" charset="0"/>
@@ -3980,7 +3946,7 @@
                           <a:ea typeface="Arial" pitchFamily="34" charset="-122"/>
                           <a:cs typeface="Arial" pitchFamily="34" charset="-120"/>
                         </a:rPr>
-                        <a:t>1%以下</a:t>
+                        <a:t>5%以下</a:t>
                       </a:r>
                       <a:endParaRPr lang="en-US" sz="1000" dirty="0">
                         <a:latin typeface="Arial" charset="0"/>
@@ -4186,7 +4152,7 @@
                           <a:ea typeface="Arial" pitchFamily="34" charset="-122"/>
                           <a:cs typeface="Arial" pitchFamily="34" charset="-120"/>
                         </a:rPr>
-                        <a:t>7.8点</a:t>
+                        <a:t>7.0点</a:t>
                       </a:r>
                       <a:endParaRPr lang="en-US" sz="1000" dirty="0">
                         <a:latin typeface="Arial" charset="0"/>
@@ -4254,7 +4220,7 @@
                           <a:ea typeface="Arial" pitchFamily="34" charset="-122"/>
                           <a:cs typeface="Arial" pitchFamily="34" charset="-120"/>
                         </a:rPr>
-                        <a:t>8.8点以上</a:t>
+                        <a:t>8.0点以上</a:t>
                       </a:r>
                       <a:endParaRPr lang="en-US" sz="1000" dirty="0">
                         <a:latin typeface="Arial" charset="0"/>
@@ -4734,7 +4700,7 @@
                           <a:ea typeface="Arial" pitchFamily="34" charset="-122"/>
                           <a:cs typeface="Arial" pitchFamily="34" charset="-120"/>
                         </a:rPr>
-                        <a:t>約21件/期間</a:t>
+                        <a:t>約16件/期間</a:t>
                       </a:r>
                       <a:endParaRPr lang="en-US" sz="1000" dirty="0">
                         <a:latin typeface="Arial" charset="0"/>
@@ -4802,7 +4768,7 @@
                           <a:ea typeface="Arial" pitchFamily="34" charset="-122"/>
                           <a:cs typeface="Arial" pitchFamily="34" charset="-120"/>
                         </a:rPr>
-                        <a:t>10件以下</a:t>
+                        <a:t>8件以下</a:t>
                       </a:r>
                       <a:endParaRPr lang="en-US" sz="1000" dirty="0">
                         <a:latin typeface="Arial" charset="0"/>
@@ -5373,7 +5339,7 @@
                 <a:ea typeface="Arial" pitchFamily="34" charset="-122"/>
                 <a:cs typeface="Arial" pitchFamily="34" charset="-120"/>
               </a:rPr>
-              <a:t>8.93</a:t>
+              <a:t>8.78</a:t>
             </a:r>
             <a:endParaRPr lang="en-US" sz="3200" dirty="0"/>
           </a:p>
@@ -5498,7 +5464,7 @@
                 <a:ea typeface="Arial" pitchFamily="34" charset="-122"/>
                 <a:cs typeface="Arial" pitchFamily="34" charset="-120"/>
               </a:rPr>
-              <a:t>87.2%</a:t>
+              <a:t>88.1%</a:t>
             </a:r>
             <a:endParaRPr lang="en-US" sz="3200" dirty="0"/>
           </a:p>
@@ -5546,7 +5512,7 @@
             <a:avLst/>
           </a:prstGeom>
           <a:solidFill>
-            <a:srgbClr val="16A34A"/>
+            <a:srgbClr val="DC2626"/>
           </a:solidFill>
           <a:ln/>
         </p:spPr>
@@ -5617,13 +5583,13 @@
             <a:r>
               <a:rPr lang="en-US" sz="3200" b="1" dirty="0">
                 <a:solidFill>
-                  <a:srgbClr val="16A34A"/>
+                  <a:srgbClr val="DC2626"/>
                 </a:solidFill>
                 <a:latin typeface="Arial" pitchFamily="34" charset="0"/>
                 <a:ea typeface="Arial" pitchFamily="34" charset="-122"/>
                 <a:cs typeface="Arial" pitchFamily="34" charset="-120"/>
               </a:rPr>
-              <a:t>4.0%</a:t>
+              <a:t>7.5%</a:t>
             </a:r>
             <a:endParaRPr lang="en-US" sz="3200" dirty="0"/>
           </a:p>
@@ -5748,7 +5714,7 @@
                 <a:ea typeface="Arial" pitchFamily="34" charset="-122"/>
                 <a:cs typeface="Arial" pitchFamily="34" charset="-120"/>
               </a:rPr>
-              <a:t>125件</a:t>
+              <a:t>67件</a:t>
             </a:r>
             <a:endParaRPr lang="en-US" sz="3200" dirty="0"/>
           </a:p>
@@ -5956,7 +5922,7 @@
                 <a:ea typeface="Arial" pitchFamily="34" charset="-122"/>
                 <a:cs typeface="Arial" pitchFamily="34" charset="-120"/>
               </a:rPr>
-              <a:t>朝食 </a:t>
+              <a:t>清潔さ・清掃 </a:t>
             </a:r>
             <a:endParaRPr lang="en-US" sz="1100" dirty="0"/>
           </a:p>
@@ -5976,7 +5942,7 @@
                 <a:ea typeface="Arial" pitchFamily="34" charset="-122"/>
                 <a:cs typeface="Arial" pitchFamily="34" charset="-120"/>
               </a:rPr>
-              <a:t>  Breakfast was great</a:t>
+              <a:t>  Cleanliness, convenience, breakfast</a:t>
             </a:r>
             <a:endParaRPr lang="en-US" sz="1100" dirty="0"/>
           </a:p>
@@ -6557,7 +6523,7 @@
                 <a:ea typeface="Arial" pitchFamily="34" charset="-122"/>
                 <a:cs typeface="Arial" pitchFamily="34" charset="-120"/>
               </a:rPr>
-              <a:t>8.93</a:t>
+              <a:t>8.78</a:t>
             </a:r>
             <a:endParaRPr lang="en-US" sz="3200" dirty="0"/>
           </a:p>
@@ -6682,7 +6648,7 @@
                 <a:ea typeface="Arial" pitchFamily="34" charset="-122"/>
                 <a:cs typeface="Arial" pitchFamily="34" charset="-120"/>
               </a:rPr>
-              <a:t>87.2%</a:t>
+              <a:t>88.1%</a:t>
             </a:r>
             <a:endParaRPr lang="en-US" sz="3200" dirty="0"/>
           </a:p>
@@ -6730,7 +6696,7 @@
             <a:avLst/>
           </a:prstGeom>
           <a:solidFill>
-            <a:srgbClr val="16A34A"/>
+            <a:srgbClr val="DC2626"/>
           </a:solidFill>
           <a:ln/>
         </p:spPr>
@@ -6801,13 +6767,13 @@
             <a:r>
               <a:rPr lang="en-US" sz="3200" b="1" dirty="0">
                 <a:solidFill>
-                  <a:srgbClr val="16A34A"/>
+                  <a:srgbClr val="DC2626"/>
                 </a:solidFill>
                 <a:latin typeface="Arial" pitchFamily="34" charset="0"/>
                 <a:ea typeface="Arial" pitchFamily="34" charset="-122"/>
                 <a:cs typeface="Arial" pitchFamily="34" charset="-120"/>
               </a:rPr>
-              <a:t>4.0%</a:t>
+              <a:t>7.5%</a:t>
             </a:r>
             <a:endParaRPr lang="en-US" sz="3200" dirty="0"/>
           </a:p>
@@ -6932,7 +6898,7 @@
                 <a:ea typeface="Arial" pitchFamily="34" charset="-122"/>
                 <a:cs typeface="Arial" pitchFamily="34" charset="-120"/>
               </a:rPr>
-              <a:t>125件</a:t>
+              <a:t>67件</a:t>
             </a:r>
             <a:endParaRPr lang="en-US" sz="3200" dirty="0"/>
           </a:p>
@@ -7402,7 +7368,7 @@
                 <a:ea typeface="Arial" pitchFamily="34" charset="-122"/>
                 <a:cs typeface="Arial" pitchFamily="34" charset="-120"/>
               </a:rPr>
-              <a:t>Google(7.8)が相対的に低い。口コミ返信の強化が急務</a:t>
+              <a:t>Google(7.0)が相対的に低い。口コミ返信の強化が急務</a:t>
             </a:r>
             <a:endParaRPr lang="en-US" sz="1100" dirty="0"/>
           </a:p>
@@ -7911,7 +7877,7 @@
                           <a:ea typeface="Arial" pitchFamily="34" charset="-122"/>
                           <a:cs typeface="Arial" pitchFamily="34" charset="-120"/>
                         </a:rPr>
-                        <a:t>2</a:t>
+                        <a:t>1</a:t>
                       </a:r>
                       <a:endParaRPr lang="en-US" sz="900" dirty="0">
                         <a:latin typeface="Arial" charset="0"/>
@@ -8253,7 +8219,7 @@
                           <a:ea typeface="Arial" pitchFamily="34" charset="-122"/>
                           <a:cs typeface="Arial" pitchFamily="34" charset="-120"/>
                         </a:rPr>
-                        <a:t>2</a:t>
+                        <a:t>1</a:t>
                       </a:r>
                       <a:endParaRPr lang="en-US" sz="900" dirty="0">
                         <a:latin typeface="Arial" charset="0"/>
@@ -8595,7 +8561,7 @@
                           <a:ea typeface="Arial" pitchFamily="34" charset="-122"/>
                           <a:cs typeface="Arial" pitchFamily="34" charset="-120"/>
                         </a:rPr>
-                        <a:t>26</a:t>
+                        <a:t>14</a:t>
                       </a:r>
                       <a:endParaRPr lang="en-US" sz="900" dirty="0">
                         <a:latin typeface="Arial" charset="0"/>
@@ -8663,7 +8629,7 @@
                           <a:ea typeface="Arial" pitchFamily="34" charset="-122"/>
                           <a:cs typeface="Arial" pitchFamily="34" charset="-120"/>
                         </a:rPr>
-                        <a:t>9.81</a:t>
+                        <a:t>9.79</a:t>
                       </a:r>
                       <a:endParaRPr lang="en-US" sz="900" dirty="0">
                         <a:latin typeface="Arial" charset="0"/>
@@ -8799,7 +8765,7 @@
                           <a:ea typeface="Arial" pitchFamily="34" charset="-122"/>
                           <a:cs typeface="Arial" pitchFamily="34" charset="-120"/>
                         </a:rPr>
-                        <a:t>9.81</a:t>
+                        <a:t>9.79</a:t>
                       </a:r>
                       <a:endParaRPr lang="en-US" sz="900" dirty="0">
                         <a:latin typeface="Arial" charset="0"/>
@@ -8937,7 +8903,7 @@
                           <a:ea typeface="Arial" pitchFamily="34" charset="-122"/>
                           <a:cs typeface="Arial" pitchFamily="34" charset="-120"/>
                         </a:rPr>
-                        <a:t>67</a:t>
+                        <a:t>34</a:t>
                       </a:r>
                       <a:endParaRPr lang="en-US" sz="900" dirty="0">
                         <a:latin typeface="Arial" charset="0"/>
@@ -9279,7 +9245,7 @@
                           <a:ea typeface="Arial" pitchFamily="34" charset="-122"/>
                           <a:cs typeface="Arial" pitchFamily="34" charset="-120"/>
                         </a:rPr>
-                        <a:t>6</a:t>
+                        <a:t>5</a:t>
                       </a:r>
                       <a:endParaRPr lang="en-US" sz="900" dirty="0">
                         <a:latin typeface="Arial" charset="0"/>
@@ -9347,7 +9313,7 @@
                           <a:ea typeface="Arial" pitchFamily="34" charset="-122"/>
                           <a:cs typeface="Arial" pitchFamily="34" charset="-120"/>
                         </a:rPr>
-                        <a:t>4.33</a:t>
+                        <a:t>4.4</a:t>
                       </a:r>
                       <a:endParaRPr lang="en-US" sz="900" dirty="0">
                         <a:latin typeface="Arial" charset="0"/>
@@ -9483,7 +9449,7 @@
                           <a:ea typeface="Arial" pitchFamily="34" charset="-122"/>
                           <a:cs typeface="Arial" pitchFamily="34" charset="-120"/>
                         </a:rPr>
-                        <a:t>8.67</a:t>
+                        <a:t>8.8</a:t>
                       </a:r>
                       <a:endParaRPr lang="en-US" sz="900" dirty="0">
                         <a:latin typeface="Arial" charset="0"/>
@@ -9621,7 +9587,7 @@
                           <a:ea typeface="Arial" pitchFamily="34" charset="-122"/>
                           <a:cs typeface="Arial" pitchFamily="34" charset="-120"/>
                         </a:rPr>
-                        <a:t>22</a:t>
+                        <a:t>12</a:t>
                       </a:r>
                       <a:endParaRPr lang="en-US" sz="900" dirty="0">
                         <a:latin typeface="Arial" charset="0"/>
@@ -9689,7 +9655,7 @@
                           <a:ea typeface="Arial" pitchFamily="34" charset="-122"/>
                           <a:cs typeface="Arial" pitchFamily="34" charset="-120"/>
                         </a:rPr>
-                        <a:t>3.91</a:t>
+                        <a:t>3.5</a:t>
                       </a:r>
                       <a:endParaRPr lang="en-US" sz="900" dirty="0">
                         <a:latin typeface="Arial" charset="0"/>
@@ -9825,7 +9791,7 @@
                           <a:ea typeface="Arial" pitchFamily="34" charset="-122"/>
                           <a:cs typeface="Arial" pitchFamily="34" charset="-120"/>
                         </a:rPr>
-                        <a:t>7.82</a:t>
+                        <a:t>7</a:t>
                       </a:r>
                       <a:endParaRPr lang="en-US" sz="900" dirty="0">
                         <a:latin typeface="Arial" charset="0"/>
@@ -10233,7 +10199,7 @@
                 <a:ea typeface="Arial" pitchFamily="34" charset="-122"/>
                 <a:cs typeface="Arial" pitchFamily="34" charset="-120"/>
               </a:rPr>
-              <a:t>109件（87.2%）</a:t>
+              <a:t>59件（88.1%）</a:t>
             </a:r>
             <a:endParaRPr lang="en-US" sz="1100" dirty="0"/>
           </a:p>
@@ -10331,7 +10297,7 @@
                 <a:ea typeface="Arial" pitchFamily="34" charset="-122"/>
                 <a:cs typeface="Arial" pitchFamily="34" charset="-120"/>
               </a:rPr>
-              <a:t>11件（8.8%）</a:t>
+              <a:t>3件（4.5%）</a:t>
             </a:r>
             <a:endParaRPr lang="en-US" sz="1100" dirty="0"/>
           </a:p>
@@ -10352,7 +10318,7 @@
             <a:avLst/>
           </a:prstGeom>
           <a:solidFill>
-            <a:srgbClr val="DCFCE7"/>
+            <a:srgbClr val="FEE2E2"/>
           </a:solidFill>
           <a:ln/>
         </p:spPr>
@@ -10384,7 +10350,7 @@
             <a:r>
               <a:rPr lang="en-US" sz="1000" b="1" dirty="0">
                 <a:solidFill>
-                  <a:srgbClr val="16A34A"/>
+                  <a:srgbClr val="DC2626"/>
                 </a:solidFill>
                 <a:latin typeface="Arial" pitchFamily="34" charset="0"/>
                 <a:ea typeface="Arial" pitchFamily="34" charset="-122"/>
@@ -10423,13 +10389,13 @@
             <a:r>
               <a:rPr lang="en-US" sz="1100" b="1" dirty="0">
                 <a:solidFill>
-                  <a:srgbClr val="16A34A"/>
+                  <a:srgbClr val="DC2626"/>
                 </a:solidFill>
                 <a:latin typeface="Arial" pitchFamily="34" charset="0"/>
                 <a:ea typeface="Arial" pitchFamily="34" charset="-122"/>
                 <a:cs typeface="Arial" pitchFamily="34" charset="-120"/>
               </a:rPr>
-              <a:t>5件（4.0%）</a:t>
+              <a:t>5件（7.5%）</a:t>
             </a:r>
             <a:endParaRPr lang="en-US" sz="1100" dirty="0"/>
           </a:p>
@@ -11209,7 +11175,7 @@
                 <a:ea typeface="Arial" pitchFamily="34" charset="-122"/>
                 <a:cs typeface="Arial" pitchFamily="34" charset="-120"/>
               </a:rPr>
-              <a:t>20件+</a:t>
+              <a:t>10件+</a:t>
             </a:r>
             <a:endParaRPr lang="en-US" sz="900" dirty="0"/>
           </a:p>
@@ -11224,6 +11190,452 @@
         <p:spPr>
           <a:xfrm>
             <a:off x="6263640" y="1124712"/>
+            <a:ext cx="1645920" cy="274320"/>
+          </a:xfrm>
+          <a:prstGeom prst="rect">
+            <a:avLst/>
+          </a:prstGeom>
+          <a:noFill/>
+          <a:ln/>
+        </p:spPr>
+        <p:txBody>
+          <a:bodyPr wrap="square" lIns="0" tIns="0" rIns="0" bIns="0" rtlCol="0" anchor="ctr"/>
+          <a:lstStyle/>
+          <a:p>
+            <a:pPr indent="0" marL="0">
+              <a:buNone/>
+            </a:pPr>
+            <a:r>
+              <a:rPr lang="en-US" sz="1300" b="1" dirty="0">
+                <a:solidFill>
+                  <a:srgbClr val="1A2744"/>
+                </a:solidFill>
+                <a:latin typeface="Arial" pitchFamily="34" charset="0"/>
+                <a:ea typeface="Arial" pitchFamily="34" charset="-122"/>
+                <a:cs typeface="Arial" pitchFamily="34" charset="-120"/>
+              </a:rPr>
+              <a:t>清潔さ・清掃</a:t>
+            </a:r>
+            <a:endParaRPr lang="en-US" sz="1300" dirty="0"/>
+          </a:p>
+        </p:txBody>
+      </p:sp>
+      <p:sp>
+        <p:nvSpPr>
+          <p:cNvPr id="24" name="Text 22"/>
+          <p:cNvSpPr/>
+          <p:nvPr/>
+        </p:nvSpPr>
+        <p:spPr>
+          <a:xfrm>
+            <a:off x="6263640" y="1417320"/>
+            <a:ext cx="2377440" cy="365760"/>
+          </a:xfrm>
+          <a:prstGeom prst="rect">
+            <a:avLst/>
+          </a:prstGeom>
+          <a:noFill/>
+          <a:ln/>
+        </p:spPr>
+        <p:txBody>
+          <a:bodyPr wrap="square" lIns="0" tIns="0" rIns="0" bIns="0" rtlCol="0" anchor="ctr"/>
+          <a:lstStyle/>
+          <a:p>
+            <a:pPr indent="0" marL="0">
+              <a:buNone/>
+            </a:pPr>
+            <a:r>
+              <a:rPr lang="en-US" sz="900" dirty="0">
+                <a:solidFill>
+                  <a:srgbClr val="64748B"/>
+                </a:solidFill>
+                <a:latin typeface="Arial" pitchFamily="34" charset="0"/>
+                <a:ea typeface="Arial" pitchFamily="34" charset="-122"/>
+                <a:cs typeface="Arial" pitchFamily="34" charset="-120"/>
+              </a:rPr>
+              <a:t>Cleanliness, convenience, breakfast</a:t>
+            </a:r>
+            <a:endParaRPr lang="en-US" sz="900" dirty="0"/>
+          </a:p>
+        </p:txBody>
+      </p:sp>
+      <p:sp>
+        <p:nvSpPr>
+          <p:cNvPr id="25" name="Text 23"/>
+          <p:cNvSpPr/>
+          <p:nvPr/>
+        </p:nvSpPr>
+        <p:spPr>
+          <a:xfrm>
+            <a:off x="6263640" y="1828800"/>
+            <a:ext cx="2377440" cy="640080"/>
+          </a:xfrm>
+          <a:prstGeom prst="rect">
+            <a:avLst/>
+          </a:prstGeom>
+          <a:noFill/>
+          <a:ln/>
+        </p:spPr>
+        <p:txBody>
+          <a:bodyPr wrap="square" lIns="0" tIns="0" rIns="0" bIns="0" rtlCol="0" anchor="ctr"/>
+          <a:lstStyle/>
+          <a:p>
+            <a:pPr indent="0" marL="0">
+              <a:buNone/>
+            </a:pPr>
+            <a:r>
+              <a:rPr lang="en-US" sz="900" i="1" dirty="0">
+                <a:solidFill>
+                  <a:srgbClr val="3B7DD8"/>
+                </a:solidFill>
+                <a:latin typeface="Arial" pitchFamily="34" charset="0"/>
+                <a:ea typeface="Arial" pitchFamily="34" charset="-122"/>
+                <a:cs typeface="Arial" pitchFamily="34" charset="-120"/>
+              </a:rPr>
+              <a:t>「部屋も風呂も清潔で適度に広く、過ごしやすかったです」</a:t>
+            </a:r>
+            <a:endParaRPr lang="en-US" sz="900" dirty="0"/>
+          </a:p>
+        </p:txBody>
+      </p:sp>
+      <p:sp>
+        <p:nvSpPr>
+          <p:cNvPr id="26" name="Shape 24"/>
+          <p:cNvSpPr/>
+          <p:nvPr/>
+        </p:nvSpPr>
+        <p:spPr>
+          <a:xfrm>
+            <a:off x="457200" y="2880360"/>
+            <a:ext cx="2651760" cy="1600200"/>
+          </a:xfrm>
+          <a:prstGeom prst="rect">
+            <a:avLst/>
+          </a:prstGeom>
+          <a:solidFill>
+            <a:srgbClr val="FFFFFF"/>
+          </a:solidFill>
+          <a:ln/>
+          <a:effectLst>
+            <a:outerShdw sx="100000" sy="100000" kx="0" ky="0" algn="bl" rotWithShape="0" blurRad="50800" dist="25400" dir="8100000">
+              <a:srgbClr val="000000">
+                <a:alpha val="10000"/>
+              </a:srgbClr>
+            </a:outerShdw>
+          </a:effectLst>
+        </p:spPr>
+      </p:sp>
+      <p:sp>
+        <p:nvSpPr>
+          <p:cNvPr id="27" name="Shape 25"/>
+          <p:cNvSpPr/>
+          <p:nvPr/>
+        </p:nvSpPr>
+        <p:spPr>
+          <a:xfrm>
+            <a:off x="457200" y="2880360"/>
+            <a:ext cx="54864" cy="1600200"/>
+          </a:xfrm>
+          <a:prstGeom prst="rect">
+            <a:avLst/>
+          </a:prstGeom>
+          <a:solidFill>
+            <a:srgbClr val="16A34A"/>
+          </a:solidFill>
+          <a:ln/>
+        </p:spPr>
+      </p:sp>
+      <p:sp>
+        <p:nvSpPr>
+          <p:cNvPr id="28" name="Shape 26"/>
+          <p:cNvSpPr/>
+          <p:nvPr/>
+        </p:nvSpPr>
+        <p:spPr>
+          <a:xfrm>
+            <a:off x="2286000" y="2953512"/>
+            <a:ext cx="658368" cy="228600"/>
+          </a:xfrm>
+          <a:prstGeom prst="rect">
+            <a:avLst/>
+          </a:prstGeom>
+          <a:solidFill>
+            <a:srgbClr val="DCFCE7"/>
+          </a:solidFill>
+          <a:ln/>
+        </p:spPr>
+      </p:sp>
+      <p:sp>
+        <p:nvSpPr>
+          <p:cNvPr id="29" name="Text 27"/>
+          <p:cNvSpPr/>
+          <p:nvPr/>
+        </p:nvSpPr>
+        <p:spPr>
+          <a:xfrm>
+            <a:off x="2286000" y="2953512"/>
+            <a:ext cx="658368" cy="228600"/>
+          </a:xfrm>
+          <a:prstGeom prst="rect">
+            <a:avLst/>
+          </a:prstGeom>
+          <a:noFill/>
+          <a:ln/>
+        </p:spPr>
+        <p:txBody>
+          <a:bodyPr wrap="square" lIns="0" tIns="0" rIns="0" bIns="0" rtlCol="0" anchor="ctr"/>
+          <a:lstStyle/>
+          <a:p>
+            <a:pPr algn="ctr" indent="0" marL="0">
+              <a:buNone/>
+            </a:pPr>
+            <a:r>
+              <a:rPr lang="en-US" sz="900" b="1" dirty="0">
+                <a:solidFill>
+                  <a:srgbClr val="16A34A"/>
+                </a:solidFill>
+                <a:latin typeface="Arial" pitchFamily="34" charset="0"/>
+                <a:ea typeface="Arial" pitchFamily="34" charset="-122"/>
+                <a:cs typeface="Arial" pitchFamily="34" charset="-120"/>
+              </a:rPr>
+              <a:t>10件+</a:t>
+            </a:r>
+            <a:endParaRPr lang="en-US" sz="900" dirty="0"/>
+          </a:p>
+        </p:txBody>
+      </p:sp>
+      <p:sp>
+        <p:nvSpPr>
+          <p:cNvPr id="30" name="Text 28"/>
+          <p:cNvSpPr/>
+          <p:nvPr/>
+        </p:nvSpPr>
+        <p:spPr>
+          <a:xfrm>
+            <a:off x="594360" y="2953512"/>
+            <a:ext cx="1645920" cy="274320"/>
+          </a:xfrm>
+          <a:prstGeom prst="rect">
+            <a:avLst/>
+          </a:prstGeom>
+          <a:noFill/>
+          <a:ln/>
+        </p:spPr>
+        <p:txBody>
+          <a:bodyPr wrap="square" lIns="0" tIns="0" rIns="0" bIns="0" rtlCol="0" anchor="ctr"/>
+          <a:lstStyle/>
+          <a:p>
+            <a:pPr indent="0" marL="0">
+              <a:buNone/>
+            </a:pPr>
+            <a:r>
+              <a:rPr lang="en-US" sz="1300" b="1" dirty="0">
+                <a:solidFill>
+                  <a:srgbClr val="1A2744"/>
+                </a:solidFill>
+                <a:latin typeface="Arial" pitchFamily="34" charset="0"/>
+                <a:ea typeface="Arial" pitchFamily="34" charset="-122"/>
+                <a:cs typeface="Arial" pitchFamily="34" charset="-120"/>
+              </a:rPr>
+              <a:t>快適さ・設備</a:t>
+            </a:r>
+            <a:endParaRPr lang="en-US" sz="1300" dirty="0"/>
+          </a:p>
+        </p:txBody>
+      </p:sp>
+      <p:sp>
+        <p:nvSpPr>
+          <p:cNvPr id="31" name="Text 29"/>
+          <p:cNvSpPr/>
+          <p:nvPr/>
+        </p:nvSpPr>
+        <p:spPr>
+          <a:xfrm>
+            <a:off x="594360" y="3246120"/>
+            <a:ext cx="2377440" cy="365760"/>
+          </a:xfrm>
+          <a:prstGeom prst="rect">
+            <a:avLst/>
+          </a:prstGeom>
+          <a:noFill/>
+          <a:ln/>
+        </p:spPr>
+        <p:txBody>
+          <a:bodyPr wrap="square" lIns="0" tIns="0" rIns="0" bIns="0" rtlCol="0" anchor="ctr"/>
+          <a:lstStyle/>
+          <a:p>
+            <a:pPr indent="0" marL="0">
+              <a:buNone/>
+            </a:pPr>
+            <a:r>
+              <a:rPr lang="en-US" sz="900" dirty="0">
+                <a:solidFill>
+                  <a:srgbClr val="64748B"/>
+                </a:solidFill>
+                <a:latin typeface="Arial" pitchFamily="34" charset="0"/>
+                <a:ea typeface="Arial" pitchFamily="34" charset="-122"/>
+                <a:cs typeface="Arial" pitchFamily="34" charset="-120"/>
+              </a:rPr>
+              <a:t>いつも、変わりなく場所が変わっても快適で、安心</a:t>
+            </a:r>
+            <a:endParaRPr lang="en-US" sz="900" dirty="0"/>
+          </a:p>
+        </p:txBody>
+      </p:sp>
+      <p:sp>
+        <p:nvSpPr>
+          <p:cNvPr id="32" name="Text 30"/>
+          <p:cNvSpPr/>
+          <p:nvPr/>
+        </p:nvSpPr>
+        <p:spPr>
+          <a:xfrm>
+            <a:off x="594360" y="3657600"/>
+            <a:ext cx="2377440" cy="640080"/>
+          </a:xfrm>
+          <a:prstGeom prst="rect">
+            <a:avLst/>
+          </a:prstGeom>
+          <a:noFill/>
+          <a:ln/>
+        </p:spPr>
+        <p:txBody>
+          <a:bodyPr wrap="square" lIns="0" tIns="0" rIns="0" bIns="0" rtlCol="0" anchor="ctr"/>
+          <a:lstStyle/>
+          <a:p>
+            <a:pPr indent="0" marL="0">
+              <a:buNone/>
+            </a:pPr>
+            <a:r>
+              <a:rPr lang="en-US" sz="900" i="1" dirty="0">
+                <a:solidFill>
+                  <a:srgbClr val="3B7DD8"/>
+                </a:solidFill>
+                <a:latin typeface="Arial" pitchFamily="34" charset="0"/>
+                <a:ea typeface="Arial" pitchFamily="34" charset="-122"/>
+                <a:cs typeface="Arial" pitchFamily="34" charset="-120"/>
+              </a:rPr>
+              <a:t>「清潔で静かで快適でした」</a:t>
+            </a:r>
+            <a:endParaRPr lang="en-US" sz="900" dirty="0"/>
+          </a:p>
+        </p:txBody>
+      </p:sp>
+      <p:sp>
+        <p:nvSpPr>
+          <p:cNvPr id="33" name="Shape 31"/>
+          <p:cNvSpPr/>
+          <p:nvPr/>
+        </p:nvSpPr>
+        <p:spPr>
+          <a:xfrm>
+            <a:off x="3291840" y="2880360"/>
+            <a:ext cx="2651760" cy="1600200"/>
+          </a:xfrm>
+          <a:prstGeom prst="rect">
+            <a:avLst/>
+          </a:prstGeom>
+          <a:solidFill>
+            <a:srgbClr val="FFFFFF"/>
+          </a:solidFill>
+          <a:ln/>
+          <a:effectLst>
+            <a:outerShdw sx="100000" sy="100000" kx="0" ky="0" algn="bl" rotWithShape="0" blurRad="50800" dist="25400" dir="8100000">
+              <a:srgbClr val="000000">
+                <a:alpha val="10000"/>
+              </a:srgbClr>
+            </a:outerShdw>
+          </a:effectLst>
+        </p:spPr>
+      </p:sp>
+      <p:sp>
+        <p:nvSpPr>
+          <p:cNvPr id="34" name="Shape 32"/>
+          <p:cNvSpPr/>
+          <p:nvPr/>
+        </p:nvSpPr>
+        <p:spPr>
+          <a:xfrm>
+            <a:off x="3291840" y="2880360"/>
+            <a:ext cx="54864" cy="1600200"/>
+          </a:xfrm>
+          <a:prstGeom prst="rect">
+            <a:avLst/>
+          </a:prstGeom>
+          <a:solidFill>
+            <a:srgbClr val="16A34A"/>
+          </a:solidFill>
+          <a:ln/>
+        </p:spPr>
+      </p:sp>
+      <p:sp>
+        <p:nvSpPr>
+          <p:cNvPr id="35" name="Shape 33"/>
+          <p:cNvSpPr/>
+          <p:nvPr/>
+        </p:nvSpPr>
+        <p:spPr>
+          <a:xfrm>
+            <a:off x="5120640" y="2953512"/>
+            <a:ext cx="658368" cy="228600"/>
+          </a:xfrm>
+          <a:prstGeom prst="rect">
+            <a:avLst/>
+          </a:prstGeom>
+          <a:solidFill>
+            <a:srgbClr val="DCFCE7"/>
+          </a:solidFill>
+          <a:ln/>
+        </p:spPr>
+      </p:sp>
+      <p:sp>
+        <p:nvSpPr>
+          <p:cNvPr id="36" name="Text 34"/>
+          <p:cNvSpPr/>
+          <p:nvPr/>
+        </p:nvSpPr>
+        <p:spPr>
+          <a:xfrm>
+            <a:off x="5120640" y="2953512"/>
+            <a:ext cx="658368" cy="228600"/>
+          </a:xfrm>
+          <a:prstGeom prst="rect">
+            <a:avLst/>
+          </a:prstGeom>
+          <a:noFill/>
+          <a:ln/>
+        </p:spPr>
+        <p:txBody>
+          <a:bodyPr wrap="square" lIns="0" tIns="0" rIns="0" bIns="0" rtlCol="0" anchor="ctr"/>
+          <a:lstStyle/>
+          <a:p>
+            <a:pPr algn="ctr" indent="0" marL="0">
+              <a:buNone/>
+            </a:pPr>
+            <a:r>
+              <a:rPr lang="en-US" sz="900" b="1" dirty="0">
+                <a:solidFill>
+                  <a:srgbClr val="16A34A"/>
+                </a:solidFill>
+                <a:latin typeface="Arial" pitchFamily="34" charset="0"/>
+                <a:ea typeface="Arial" pitchFamily="34" charset="-122"/>
+                <a:cs typeface="Arial" pitchFamily="34" charset="-120"/>
+              </a:rPr>
+              <a:t>10件+</a:t>
+            </a:r>
+            <a:endParaRPr lang="en-US" sz="900" dirty="0"/>
+          </a:p>
+        </p:txBody>
+      </p:sp>
+      <p:sp>
+        <p:nvSpPr>
+          <p:cNvPr id="37" name="Text 35"/>
+          <p:cNvSpPr/>
+          <p:nvPr/>
+        </p:nvSpPr>
+        <p:spPr>
+          <a:xfrm>
+            <a:off x="3429000" y="2953512"/>
             <a:ext cx="1645920" cy="274320"/>
           </a:xfrm>
           <a:prstGeom prst="rect">
@@ -11256,13 +11668,13 @@
       </p:sp>
       <p:sp>
         <p:nvSpPr>
-          <p:cNvPr id="24" name="Text 22"/>
-          <p:cNvSpPr/>
-          <p:nvPr/>
-        </p:nvSpPr>
-        <p:spPr>
-          <a:xfrm>
-            <a:off x="6263640" y="1417320"/>
+          <p:cNvPr id="38" name="Text 36"/>
+          <p:cNvSpPr/>
+          <p:nvPr/>
+        </p:nvSpPr>
+        <p:spPr>
+          <a:xfrm>
+            <a:off x="3429000" y="3246120"/>
             <a:ext cx="2377440" cy="365760"/>
           </a:xfrm>
           <a:prstGeom prst="rect">
@@ -11295,13 +11707,13 @@
       </p:sp>
       <p:sp>
         <p:nvSpPr>
-          <p:cNvPr id="25" name="Text 23"/>
-          <p:cNvSpPr/>
-          <p:nvPr/>
-        </p:nvSpPr>
-        <p:spPr>
-          <a:xfrm>
-            <a:off x="6263640" y="1828800"/>
+          <p:cNvPr id="39" name="Text 37"/>
+          <p:cNvSpPr/>
+          <p:nvPr/>
+        </p:nvSpPr>
+        <p:spPr>
+          <a:xfrm>
+            <a:off x="3429000" y="3657600"/>
             <a:ext cx="2377440" cy="640080"/>
           </a:xfrm>
           <a:prstGeom prst="rect">
@@ -11334,13 +11746,13 @@
       </p:sp>
       <p:sp>
         <p:nvSpPr>
-          <p:cNvPr id="26" name="Shape 24"/>
-          <p:cNvSpPr/>
-          <p:nvPr/>
-        </p:nvSpPr>
-        <p:spPr>
-          <a:xfrm>
-            <a:off x="457200" y="2880360"/>
+          <p:cNvPr id="40" name="Shape 38"/>
+          <p:cNvSpPr/>
+          <p:nvPr/>
+        </p:nvSpPr>
+        <p:spPr>
+          <a:xfrm>
+            <a:off x="6126480" y="2880360"/>
             <a:ext cx="2651760" cy="1600200"/>
           </a:xfrm>
           <a:prstGeom prst="rect">
@@ -11361,13 +11773,13 @@
       </p:sp>
       <p:sp>
         <p:nvSpPr>
-          <p:cNvPr id="27" name="Shape 25"/>
-          <p:cNvSpPr/>
-          <p:nvPr/>
-        </p:nvSpPr>
-        <p:spPr>
-          <a:xfrm>
-            <a:off x="457200" y="2880360"/>
+          <p:cNvPr id="41" name="Shape 39"/>
+          <p:cNvSpPr/>
+          <p:nvPr/>
+        </p:nvSpPr>
+        <p:spPr>
+          <a:xfrm>
+            <a:off x="6126480" y="2880360"/>
             <a:ext cx="54864" cy="1600200"/>
           </a:xfrm>
           <a:prstGeom prst="rect">
@@ -11381,13 +11793,13 @@
       </p:sp>
       <p:sp>
         <p:nvSpPr>
-          <p:cNvPr id="28" name="Shape 26"/>
-          <p:cNvSpPr/>
-          <p:nvPr/>
-        </p:nvSpPr>
-        <p:spPr>
-          <a:xfrm>
-            <a:off x="2286000" y="2953512"/>
+          <p:cNvPr id="42" name="Shape 40"/>
+          <p:cNvSpPr/>
+          <p:nvPr/>
+        </p:nvSpPr>
+        <p:spPr>
+          <a:xfrm>
+            <a:off x="7955280" y="2953512"/>
             <a:ext cx="658368" cy="228600"/>
           </a:xfrm>
           <a:prstGeom prst="rect">
@@ -11401,13 +11813,13 @@
       </p:sp>
       <p:sp>
         <p:nvSpPr>
-          <p:cNvPr id="29" name="Text 27"/>
-          <p:cNvSpPr/>
-          <p:nvPr/>
-        </p:nvSpPr>
-        <p:spPr>
-          <a:xfrm>
-            <a:off x="2286000" y="2953512"/>
+          <p:cNvPr id="43" name="Text 41"/>
+          <p:cNvSpPr/>
+          <p:nvPr/>
+        </p:nvSpPr>
+        <p:spPr>
+          <a:xfrm>
+            <a:off x="7955280" y="2953512"/>
             <a:ext cx="658368" cy="228600"/>
           </a:xfrm>
           <a:prstGeom prst="rect">
@@ -11432,453 +11844,7 @@
                 <a:ea typeface="Arial" pitchFamily="34" charset="-122"/>
                 <a:cs typeface="Arial" pitchFamily="34" charset="-120"/>
               </a:rPr>
-              <a:t>20件+</a:t>
-            </a:r>
-            <a:endParaRPr lang="en-US" sz="900" dirty="0"/>
-          </a:p>
-        </p:txBody>
-      </p:sp>
-      <p:sp>
-        <p:nvSpPr>
-          <p:cNvPr id="30" name="Text 28"/>
-          <p:cNvSpPr/>
-          <p:nvPr/>
-        </p:nvSpPr>
-        <p:spPr>
-          <a:xfrm>
-            <a:off x="594360" y="2953512"/>
-            <a:ext cx="1645920" cy="274320"/>
-          </a:xfrm>
-          <a:prstGeom prst="rect">
-            <a:avLst/>
-          </a:prstGeom>
-          <a:noFill/>
-          <a:ln/>
-        </p:spPr>
-        <p:txBody>
-          <a:bodyPr wrap="square" lIns="0" tIns="0" rIns="0" bIns="0" rtlCol="0" anchor="ctr"/>
-          <a:lstStyle/>
-          <a:p>
-            <a:pPr indent="0" marL="0">
-              <a:buNone/>
-            </a:pPr>
-            <a:r>
-              <a:rPr lang="en-US" sz="1300" b="1" dirty="0">
-                <a:solidFill>
-                  <a:srgbClr val="1A2744"/>
-                </a:solidFill>
-                <a:latin typeface="Arial" pitchFamily="34" charset="0"/>
-                <a:ea typeface="Arial" pitchFamily="34" charset="-122"/>
-                <a:cs typeface="Arial" pitchFamily="34" charset="-120"/>
-              </a:rPr>
-              <a:t>清潔さ・清掃</a:t>
-            </a:r>
-            <a:endParaRPr lang="en-US" sz="1300" dirty="0"/>
-          </a:p>
-        </p:txBody>
-      </p:sp>
-      <p:sp>
-        <p:nvSpPr>
-          <p:cNvPr id="31" name="Text 29"/>
-          <p:cNvSpPr/>
-          <p:nvPr/>
-        </p:nvSpPr>
-        <p:spPr>
-          <a:xfrm>
-            <a:off x="594360" y="3246120"/>
-            <a:ext cx="2377440" cy="365760"/>
-          </a:xfrm>
-          <a:prstGeom prst="rect">
-            <a:avLst/>
-          </a:prstGeom>
-          <a:noFill/>
-          <a:ln/>
-        </p:spPr>
-        <p:txBody>
-          <a:bodyPr wrap="square" lIns="0" tIns="0" rIns="0" bIns="0" rtlCol="0" anchor="ctr"/>
-          <a:lstStyle/>
-          <a:p>
-            <a:pPr indent="0" marL="0">
-              <a:buNone/>
-            </a:pPr>
-            <a:r>
-              <a:rPr lang="en-US" sz="900" dirty="0">
-                <a:solidFill>
-                  <a:srgbClr val="64748B"/>
-                </a:solidFill>
-                <a:latin typeface="Arial" pitchFamily="34" charset="0"/>
-                <a:ea typeface="Arial" pitchFamily="34" charset="-122"/>
-                <a:cs typeface="Arial" pitchFamily="34" charset="-120"/>
-              </a:rPr>
-              <a:t>Cleanliness, convenience, breakfast</a:t>
-            </a:r>
-            <a:endParaRPr lang="en-US" sz="900" dirty="0"/>
-          </a:p>
-        </p:txBody>
-      </p:sp>
-      <p:sp>
-        <p:nvSpPr>
-          <p:cNvPr id="32" name="Text 30"/>
-          <p:cNvSpPr/>
-          <p:nvPr/>
-        </p:nvSpPr>
-        <p:spPr>
-          <a:xfrm>
-            <a:off x="594360" y="3657600"/>
-            <a:ext cx="2377440" cy="640080"/>
-          </a:xfrm>
-          <a:prstGeom prst="rect">
-            <a:avLst/>
-          </a:prstGeom>
-          <a:noFill/>
-          <a:ln/>
-        </p:spPr>
-        <p:txBody>
-          <a:bodyPr wrap="square" lIns="0" tIns="0" rIns="0" bIns="0" rtlCol="0" anchor="ctr"/>
-          <a:lstStyle/>
-          <a:p>
-            <a:pPr indent="0" marL="0">
-              <a:buNone/>
-            </a:pPr>
-            <a:r>
-              <a:rPr lang="en-US" sz="900" i="1" dirty="0">
-                <a:solidFill>
-                  <a:srgbClr val="3B7DD8"/>
-                </a:solidFill>
-                <a:latin typeface="Arial" pitchFamily="34" charset="0"/>
-                <a:ea typeface="Arial" pitchFamily="34" charset="-122"/>
-                <a:cs typeface="Arial" pitchFamily="34" charset="-120"/>
-              </a:rPr>
-              <a:t>「部屋も風呂も清潔で適度に広く、過ごしやすかったです」</a:t>
-            </a:r>
-            <a:endParaRPr lang="en-US" sz="900" dirty="0"/>
-          </a:p>
-        </p:txBody>
-      </p:sp>
-      <p:sp>
-        <p:nvSpPr>
-          <p:cNvPr id="33" name="Shape 31"/>
-          <p:cNvSpPr/>
-          <p:nvPr/>
-        </p:nvSpPr>
-        <p:spPr>
-          <a:xfrm>
-            <a:off x="3291840" y="2880360"/>
-            <a:ext cx="2651760" cy="1600200"/>
-          </a:xfrm>
-          <a:prstGeom prst="rect">
-            <a:avLst/>
-          </a:prstGeom>
-          <a:solidFill>
-            <a:srgbClr val="FFFFFF"/>
-          </a:solidFill>
-          <a:ln/>
-          <a:effectLst>
-            <a:outerShdw sx="100000" sy="100000" kx="0" ky="0" algn="bl" rotWithShape="0" blurRad="50800" dist="25400" dir="8100000">
-              <a:srgbClr val="000000">
-                <a:alpha val="10000"/>
-              </a:srgbClr>
-            </a:outerShdw>
-          </a:effectLst>
-        </p:spPr>
-      </p:sp>
-      <p:sp>
-        <p:nvSpPr>
-          <p:cNvPr id="34" name="Shape 32"/>
-          <p:cNvSpPr/>
-          <p:nvPr/>
-        </p:nvSpPr>
-        <p:spPr>
-          <a:xfrm>
-            <a:off x="3291840" y="2880360"/>
-            <a:ext cx="54864" cy="1600200"/>
-          </a:xfrm>
-          <a:prstGeom prst="rect">
-            <a:avLst/>
-          </a:prstGeom>
-          <a:solidFill>
-            <a:srgbClr val="16A34A"/>
-          </a:solidFill>
-          <a:ln/>
-        </p:spPr>
-      </p:sp>
-      <p:sp>
-        <p:nvSpPr>
-          <p:cNvPr id="35" name="Shape 33"/>
-          <p:cNvSpPr/>
-          <p:nvPr/>
-        </p:nvSpPr>
-        <p:spPr>
-          <a:xfrm>
-            <a:off x="5120640" y="2953512"/>
-            <a:ext cx="658368" cy="228600"/>
-          </a:xfrm>
-          <a:prstGeom prst="rect">
-            <a:avLst/>
-          </a:prstGeom>
-          <a:solidFill>
-            <a:srgbClr val="DCFCE7"/>
-          </a:solidFill>
-          <a:ln/>
-        </p:spPr>
-      </p:sp>
-      <p:sp>
-        <p:nvSpPr>
-          <p:cNvPr id="36" name="Text 34"/>
-          <p:cNvSpPr/>
-          <p:nvPr/>
-        </p:nvSpPr>
-        <p:spPr>
-          <a:xfrm>
-            <a:off x="5120640" y="2953512"/>
-            <a:ext cx="658368" cy="228600"/>
-          </a:xfrm>
-          <a:prstGeom prst="rect">
-            <a:avLst/>
-          </a:prstGeom>
-          <a:noFill/>
-          <a:ln/>
-        </p:spPr>
-        <p:txBody>
-          <a:bodyPr wrap="square" lIns="0" tIns="0" rIns="0" bIns="0" rtlCol="0" anchor="ctr"/>
-          <a:lstStyle/>
-          <a:p>
-            <a:pPr algn="ctr" indent="0" marL="0">
-              <a:buNone/>
-            </a:pPr>
-            <a:r>
-              <a:rPr lang="en-US" sz="900" b="1" dirty="0">
-                <a:solidFill>
-                  <a:srgbClr val="16A34A"/>
-                </a:solidFill>
-                <a:latin typeface="Arial" pitchFamily="34" charset="0"/>
-                <a:ea typeface="Arial" pitchFamily="34" charset="-122"/>
-                <a:cs typeface="Arial" pitchFamily="34" charset="-120"/>
-              </a:rPr>
-              <a:t>20件+</a:t>
-            </a:r>
-            <a:endParaRPr lang="en-US" sz="900" dirty="0"/>
-          </a:p>
-        </p:txBody>
-      </p:sp>
-      <p:sp>
-        <p:nvSpPr>
-          <p:cNvPr id="37" name="Text 35"/>
-          <p:cNvSpPr/>
-          <p:nvPr/>
-        </p:nvSpPr>
-        <p:spPr>
-          <a:xfrm>
-            <a:off x="3429000" y="2953512"/>
-            <a:ext cx="1645920" cy="274320"/>
-          </a:xfrm>
-          <a:prstGeom prst="rect">
-            <a:avLst/>
-          </a:prstGeom>
-          <a:noFill/>
-          <a:ln/>
-        </p:spPr>
-        <p:txBody>
-          <a:bodyPr wrap="square" lIns="0" tIns="0" rIns="0" bIns="0" rtlCol="0" anchor="ctr"/>
-          <a:lstStyle/>
-          <a:p>
-            <a:pPr indent="0" marL="0">
-              <a:buNone/>
-            </a:pPr>
-            <a:r>
-              <a:rPr lang="en-US" sz="1300" b="1" dirty="0">
-                <a:solidFill>
-                  <a:srgbClr val="1A2744"/>
-                </a:solidFill>
-                <a:latin typeface="Arial" pitchFamily="34" charset="0"/>
-                <a:ea typeface="Arial" pitchFamily="34" charset="-122"/>
-                <a:cs typeface="Arial" pitchFamily="34" charset="-120"/>
-              </a:rPr>
-              <a:t>快適さ・設備</a:t>
-            </a:r>
-            <a:endParaRPr lang="en-US" sz="1300" dirty="0"/>
-          </a:p>
-        </p:txBody>
-      </p:sp>
-      <p:sp>
-        <p:nvSpPr>
-          <p:cNvPr id="38" name="Text 36"/>
-          <p:cNvSpPr/>
-          <p:nvPr/>
-        </p:nvSpPr>
-        <p:spPr>
-          <a:xfrm>
-            <a:off x="3429000" y="3246120"/>
-            <a:ext cx="2377440" cy="365760"/>
-          </a:xfrm>
-          <a:prstGeom prst="rect">
-            <a:avLst/>
-          </a:prstGeom>
-          <a:noFill/>
-          <a:ln/>
-        </p:spPr>
-        <p:txBody>
-          <a:bodyPr wrap="square" lIns="0" tIns="0" rIns="0" bIns="0" rtlCol="0" anchor="ctr"/>
-          <a:lstStyle/>
-          <a:p>
-            <a:pPr indent="0" marL="0">
-              <a:buNone/>
-            </a:pPr>
-            <a:r>
-              <a:rPr lang="en-US" sz="900" dirty="0">
-                <a:solidFill>
-                  <a:srgbClr val="64748B"/>
-                </a:solidFill>
-                <a:latin typeface="Arial" pitchFamily="34" charset="0"/>
-                <a:ea typeface="Arial" pitchFamily="34" charset="-122"/>
-                <a:cs typeface="Arial" pitchFamily="34" charset="-120"/>
-              </a:rPr>
-              <a:t>いつも、変わりなく場所が変わっても快適で、安心</a:t>
-            </a:r>
-            <a:endParaRPr lang="en-US" sz="900" dirty="0"/>
-          </a:p>
-        </p:txBody>
-      </p:sp>
-      <p:sp>
-        <p:nvSpPr>
-          <p:cNvPr id="39" name="Text 37"/>
-          <p:cNvSpPr/>
-          <p:nvPr/>
-        </p:nvSpPr>
-        <p:spPr>
-          <a:xfrm>
-            <a:off x="3429000" y="3657600"/>
-            <a:ext cx="2377440" cy="640080"/>
-          </a:xfrm>
-          <a:prstGeom prst="rect">
-            <a:avLst/>
-          </a:prstGeom>
-          <a:noFill/>
-          <a:ln/>
-        </p:spPr>
-        <p:txBody>
-          <a:bodyPr wrap="square" lIns="0" tIns="0" rIns="0" bIns="0" rtlCol="0" anchor="ctr"/>
-          <a:lstStyle/>
-          <a:p>
-            <a:pPr indent="0" marL="0">
-              <a:buNone/>
-            </a:pPr>
-            <a:r>
-              <a:rPr lang="en-US" sz="900" i="1" dirty="0">
-                <a:solidFill>
-                  <a:srgbClr val="3B7DD8"/>
-                </a:solidFill>
-                <a:latin typeface="Arial" pitchFamily="34" charset="0"/>
-                <a:ea typeface="Arial" pitchFamily="34" charset="-122"/>
-                <a:cs typeface="Arial" pitchFamily="34" charset="-120"/>
-              </a:rPr>
-              <a:t>「清潔で静かで快適でした」</a:t>
-            </a:r>
-            <a:endParaRPr lang="en-US" sz="900" dirty="0"/>
-          </a:p>
-        </p:txBody>
-      </p:sp>
-      <p:sp>
-        <p:nvSpPr>
-          <p:cNvPr id="40" name="Shape 38"/>
-          <p:cNvSpPr/>
-          <p:nvPr/>
-        </p:nvSpPr>
-        <p:spPr>
-          <a:xfrm>
-            <a:off x="6126480" y="2880360"/>
-            <a:ext cx="2651760" cy="1600200"/>
-          </a:xfrm>
-          <a:prstGeom prst="rect">
-            <a:avLst/>
-          </a:prstGeom>
-          <a:solidFill>
-            <a:srgbClr val="FFFFFF"/>
-          </a:solidFill>
-          <a:ln/>
-          <a:effectLst>
-            <a:outerShdw sx="100000" sy="100000" kx="0" ky="0" algn="bl" rotWithShape="0" blurRad="50800" dist="25400" dir="8100000">
-              <a:srgbClr val="000000">
-                <a:alpha val="10000"/>
-              </a:srgbClr>
-            </a:outerShdw>
-          </a:effectLst>
-        </p:spPr>
-      </p:sp>
-      <p:sp>
-        <p:nvSpPr>
-          <p:cNvPr id="41" name="Shape 39"/>
-          <p:cNvSpPr/>
-          <p:nvPr/>
-        </p:nvSpPr>
-        <p:spPr>
-          <a:xfrm>
-            <a:off x="6126480" y="2880360"/>
-            <a:ext cx="54864" cy="1600200"/>
-          </a:xfrm>
-          <a:prstGeom prst="rect">
-            <a:avLst/>
-          </a:prstGeom>
-          <a:solidFill>
-            <a:srgbClr val="16A34A"/>
-          </a:solidFill>
-          <a:ln/>
-        </p:spPr>
-      </p:sp>
-      <p:sp>
-        <p:nvSpPr>
-          <p:cNvPr id="42" name="Shape 40"/>
-          <p:cNvSpPr/>
-          <p:nvPr/>
-        </p:nvSpPr>
-        <p:spPr>
-          <a:xfrm>
-            <a:off x="7955280" y="2953512"/>
-            <a:ext cx="658368" cy="228600"/>
-          </a:xfrm>
-          <a:prstGeom prst="rect">
-            <a:avLst/>
-          </a:prstGeom>
-          <a:solidFill>
-            <a:srgbClr val="DCFCE7"/>
-          </a:solidFill>
-          <a:ln/>
-        </p:spPr>
-      </p:sp>
-      <p:sp>
-        <p:nvSpPr>
-          <p:cNvPr id="43" name="Text 41"/>
-          <p:cNvSpPr/>
-          <p:nvPr/>
-        </p:nvSpPr>
-        <p:spPr>
-          <a:xfrm>
-            <a:off x="7955280" y="2953512"/>
-            <a:ext cx="658368" cy="228600"/>
-          </a:xfrm>
-          <a:prstGeom prst="rect">
-            <a:avLst/>
-          </a:prstGeom>
-          <a:noFill/>
-          <a:ln/>
-        </p:spPr>
-        <p:txBody>
-          <a:bodyPr wrap="square" lIns="0" tIns="0" rIns="0" bIns="0" rtlCol="0" anchor="ctr"/>
-          <a:lstStyle/>
-          <a:p>
-            <a:pPr algn="ctr" indent="0" marL="0">
-              <a:buNone/>
-            </a:pPr>
-            <a:r>
-              <a:rPr lang="en-US" sz="900" b="1" dirty="0">
-                <a:solidFill>
-                  <a:srgbClr val="16A34A"/>
-                </a:solidFill>
-                <a:latin typeface="Arial" pitchFamily="34" charset="0"/>
-                <a:ea typeface="Arial" pitchFamily="34" charset="-122"/>
-                <a:cs typeface="Arial" pitchFamily="34" charset="-120"/>
-              </a:rPr>
-              <a:t>10件+</a:t>
+              <a:t>9件</a:t>
             </a:r>
             <a:endParaRPr lang="en-US" sz="900" dirty="0"/>
           </a:p>
@@ -12753,7 +12719,7 @@
                           <a:ea typeface="Arial" pitchFamily="34" charset="-122"/>
                           <a:cs typeface="Arial" pitchFamily="34" charset="-120"/>
                         </a:rPr>
-                        <a:t>21件</a:t>
+                        <a:t>16件</a:t>
                       </a:r>
                       <a:endParaRPr lang="en-US" sz="900" dirty="0">
                         <a:latin typeface="Arial" charset="0"/>
@@ -13027,7 +12993,7 @@
                           <a:ea typeface="Arial" pitchFamily="34" charset="-122"/>
                           <a:cs typeface="Arial" pitchFamily="34" charset="-120"/>
                         </a:rPr>
-                        <a:t>8件</a:t>
+                        <a:t>5件</a:t>
                       </a:r>
                       <a:endParaRPr lang="en-US" sz="900" dirty="0">
                         <a:latin typeface="Arial" charset="0"/>
@@ -13301,7 +13267,7 @@
                           <a:ea typeface="Arial" pitchFamily="34" charset="-122"/>
                           <a:cs typeface="Arial" pitchFamily="34" charset="-120"/>
                         </a:rPr>
-                        <a:t>6件</a:t>
+                        <a:t>3件</a:t>
                       </a:r>
                       <a:endParaRPr lang="en-US" sz="900" dirty="0">
                         <a:latin typeface="Arial" charset="0"/>
@@ -13439,7 +13405,7 @@
                           <a:ea typeface="Arial" pitchFamily="34" charset="-122"/>
                           <a:cs typeface="Arial" pitchFamily="34" charset="-120"/>
                         </a:rPr>
-                        <a:t>対応・サービスの不満</a:t>
+                        <a:t>防音性能</a:t>
                       </a:r>
                       <a:endParaRPr lang="en-US" sz="900" dirty="0">
                         <a:latin typeface="Arial" charset="0"/>
@@ -13507,7 +13473,7 @@
                           <a:ea typeface="Arial" pitchFamily="34" charset="-122"/>
                           <a:cs typeface="Arial" pitchFamily="34" charset="-120"/>
                         </a:rPr>
-                        <a:t>みたいな感じでしたが、敷地内は禁煙ですと、毅然とした態度を示し、外国人は退散しました</a:t>
+                        <a:t>The luggage store was easy to use and convenient 最初の夜は隣室か...</a:t>
                       </a:r>
                       <a:endParaRPr lang="en-US" sz="900" dirty="0">
                         <a:latin typeface="Arial" charset="0"/>
@@ -13575,7 +13541,7 @@
                           <a:ea typeface="Arial" pitchFamily="34" charset="-122"/>
                           <a:cs typeface="Arial" pitchFamily="34" charset="-120"/>
                         </a:rPr>
-                        <a:t>6件</a:t>
+                        <a:t>2件</a:t>
                       </a:r>
                       <a:endParaRPr lang="en-US" sz="900" dirty="0">
                         <a:latin typeface="Arial" charset="0"/>
@@ -13713,7 +13679,7 @@
                           <a:ea typeface="Arial" pitchFamily="34" charset="-122"/>
                           <a:cs typeface="Arial" pitchFamily="34" charset="-120"/>
                         </a:rPr>
-                        <a:t>防音性能</a:t>
+                        <a:t>臭い・匂い</a:t>
                       </a:r>
                       <a:endParaRPr lang="en-US" sz="900" dirty="0">
                         <a:latin typeface="Arial" charset="0"/>
@@ -13781,7 +13747,7 @@
                           <a:ea typeface="Arial" pitchFamily="34" charset="-122"/>
                           <a:cs typeface="Arial" pitchFamily="34" charset="-120"/>
                         </a:rPr>
-                        <a:t>The luggage store was easy to use and convenient 最初の夜は隣室か...</a:t>
+                        <a:t>外国人の方の利用が多いようで不安でしたが、たまたま玄関先でタバコを吸っている外国人3人が居る所に遭遇したのですが、...</a:t>
                       </a:r>
                       <a:endParaRPr lang="en-US" sz="900" dirty="0">
                         <a:latin typeface="Arial" charset="0"/>
@@ -13849,7 +13815,7 @@
                           <a:ea typeface="Arial" pitchFamily="34" charset="-122"/>
                           <a:cs typeface="Arial" pitchFamily="34" charset="-120"/>
                         </a:rPr>
-                        <a:t>3件</a:t>
+                        <a:t>2件</a:t>
                       </a:r>
                       <a:endParaRPr lang="en-US" sz="900" dirty="0">
                         <a:latin typeface="Arial" charset="0"/>
@@ -13987,7 +13953,7 @@
                           <a:ea typeface="Arial" pitchFamily="34" charset="-122"/>
                           <a:cs typeface="Arial" pitchFamily="34" charset="-120"/>
                         </a:rPr>
-                        <a:t>臭い・匂い</a:t>
+                        <a:t>対応・サービスの不満</a:t>
                       </a:r>
                       <a:endParaRPr lang="en-US" sz="900" dirty="0">
                         <a:latin typeface="Arial" charset="0"/>
@@ -14055,7 +14021,7 @@
                           <a:ea typeface="Arial" pitchFamily="34" charset="-122"/>
                           <a:cs typeface="Arial" pitchFamily="34" charset="-120"/>
                         </a:rPr>
-                        <a:t>外国人の方の利用が多いようで不安でしたが、たまたま玄関先でタバコを吸っている外国人3人が居る所に遭遇したのですが、...</a:t>
+                        <a:t>みたいな感じでしたが、敷地内は禁煙ですと、毅然とした態度を示し、外国人は退散しました</a:t>
                       </a:r>
                       <a:endParaRPr lang="en-US" sz="900" dirty="0">
                         <a:latin typeface="Arial" charset="0"/>

--- a/納品レポート/ホテル別レポート/comfort_era_higashikanda_口コミ分析レポート.pptx
+++ b/納品レポート/ホテル別レポート/comfort_era_higashikanda_口コミ分析レポート.pptx
@@ -214,16 +214,16 @@
                   <c:v>10</c:v>
                 </c:pt>
                 <c:pt idx="2">
-                  <c:v>9.79</c:v>
+                  <c:v>9.81</c:v>
                 </c:pt>
                 <c:pt idx="3">
                   <c:v>8.91</c:v>
                 </c:pt>
                 <c:pt idx="4">
-                  <c:v>8.8</c:v>
+                  <c:v>8.67</c:v>
                 </c:pt>
                 <c:pt idx="5">
-                  <c:v>7</c:v>
+                  <c:v>7.82</c:v>
                 </c:pt>
               </c:numCache>
             </c:numRef>
@@ -566,10 +566,10 @@
               <c:numCache>
                 <c:ptCount val="3"/>
                 <c:pt idx="0">
-                  <c:v>59</c:v>
+                  <c:v>109</c:v>
                 </c:pt>
                 <c:pt idx="1">
-                  <c:v>3</c:v>
+                  <c:v>11</c:v>
                 </c:pt>
                 <c:pt idx="2">
                   <c:v>5</c:v>
@@ -730,7 +730,7 @@
             <c:bubble3D val="0"/>
             <c:spPr>
               <a:solidFill>
-                <a:srgbClr val="DC2626"/>
+                <a:srgbClr val="D4A843"/>
               </a:solidFill>
               <a:effectLst/>
             </c:spPr>
@@ -741,7 +741,7 @@
             <c:bubble3D val="0"/>
             <c:spPr>
               <a:solidFill>
-                <a:srgbClr val="DC2626"/>
+                <a:srgbClr val="D4A843"/>
               </a:solidFill>
               <a:effectLst/>
             </c:spPr>
@@ -757,11 +757,33 @@
               <a:effectLst/>
             </c:spPr>
           </c:dPt>
+          <c:dPt>
+            <c:idx val="7"/>
+            <c:invertIfNegative val="0"/>
+            <c:bubble3D val="0"/>
+            <c:spPr>
+              <a:solidFill>
+                <a:srgbClr val="DC2626"/>
+              </a:solidFill>
+              <a:effectLst/>
+            </c:spPr>
+          </c:dPt>
+          <c:dPt>
+            <c:idx val="8"/>
+            <c:invertIfNegative val="0"/>
+            <c:bubble3D val="0"/>
+            <c:spPr>
+              <a:solidFill>
+                <a:srgbClr val="DC2626"/>
+              </a:solidFill>
+              <a:effectLst/>
+            </c:spPr>
+          </c:dPt>
           <c:cat>
             <c:multiLvlStrRef>
-              <c:f>Sheet1!$A$2:$A$8</c:f>
+              <c:f>Sheet1!$A$2:$A$10</c:f>
               <c:multiLvlStrCache>
-                <c:ptCount val="7"/>
+                <c:ptCount val="9"/>
                 <c:lvl>
                   <c:pt idx="0">
                     <c:v>10点</c:v>
@@ -776,12 +798,18 @@
                     <c:v>7点</c:v>
                   </c:pt>
                   <c:pt idx="4">
+                    <c:v>6点</c:v>
+                  </c:pt>
+                  <c:pt idx="5">
+                    <c:v>5点</c:v>
+                  </c:pt>
+                  <c:pt idx="6">
                     <c:v>4点</c:v>
                   </c:pt>
-                  <c:pt idx="5">
+                  <c:pt idx="7">
                     <c:v>3点</c:v>
                   </c:pt>
-                  <c:pt idx="6">
+                  <c:pt idx="8">
                     <c:v>2点</c:v>
                   </c:pt>
                 </c:lvl>
@@ -790,29 +818,35 @@
           </c:cat>
           <c:val>
             <c:numRef>
-              <c:f>Sheet1!$B$2:$B$8</c:f>
+              <c:f>Sheet1!$B$2:$B$10</c:f>
               <c:numCache>
                 <c:formatCode>General</c:formatCode>
-                <c:ptCount val="7"/>
+                <c:ptCount val="9"/>
                 <c:pt idx="0">
-                  <c:v>39</c:v>
+                  <c:v>72</c:v>
                 </c:pt>
                 <c:pt idx="1">
-                  <c:v>4</c:v>
+                  <c:v>15</c:v>
                 </c:pt>
                 <c:pt idx="2">
-                  <c:v>16</c:v>
+                  <c:v>22</c:v>
                 </c:pt>
                 <c:pt idx="3">
-                  <c:v>3</c:v>
+                  <c:v>7</c:v>
                 </c:pt>
                 <c:pt idx="4">
-                  <c:v>1</c:v>
+                  <c:v>3</c:v>
                 </c:pt>
                 <c:pt idx="5">
                   <c:v>1</c:v>
                 </c:pt>
                 <c:pt idx="6">
+                  <c:v>1</c:v>
+                </c:pt>
+                <c:pt idx="7">
+                  <c:v>1</c:v>
+                </c:pt>
+                <c:pt idx="8">
                   <c:v>3</c:v>
                 </c:pt>
               </c:numCache>
@@ -2744,7 +2778,7 @@
                 <a:ea typeface="Arial" pitchFamily="34" charset="-122"/>
                 <a:cs typeface="Arial" pitchFamily="34" charset="-120"/>
               </a:rPr>
-              <a:t>分析対象期間：2026年3月</a:t>
+              <a:t>分析対象期間：2026年2月〜3月</a:t>
             </a:r>
             <a:endParaRPr lang="en-US" sz="1000" dirty="0"/>
           </a:p>
@@ -2764,7 +2798,7 @@
                 <a:ea typeface="Arial" pitchFamily="34" charset="-122"/>
                 <a:cs typeface="Arial" pitchFamily="34" charset="-120"/>
               </a:rPr>
-              <a:t>レビュー総数：67件（6サイト）</a:t>
+              <a:t>レビュー総数：125件（6サイト）</a:t>
             </a:r>
             <a:endParaRPr lang="en-US" sz="1000" dirty="0"/>
           </a:p>
@@ -3330,7 +3364,7 @@
                           <a:ea typeface="Arial" pitchFamily="34" charset="-122"/>
                           <a:cs typeface="Arial" pitchFamily="34" charset="-120"/>
                         </a:rPr>
-                        <a:t>8.78点</a:t>
+                        <a:t>8.93点</a:t>
                       </a:r>
                       <a:endParaRPr lang="en-US" sz="1000" dirty="0">
                         <a:latin typeface="Arial" charset="0"/>
@@ -3398,7 +3432,7 @@
                           <a:ea typeface="Arial" pitchFamily="34" charset="-122"/>
                           <a:cs typeface="Arial" pitchFamily="34" charset="-120"/>
                         </a:rPr>
-                        <a:t>9.1点以上</a:t>
+                        <a:t>9.2点以上</a:t>
                       </a:r>
                       <a:endParaRPr lang="en-US" sz="1000" dirty="0">
                         <a:latin typeface="Arial" charset="0"/>
@@ -3604,7 +3638,7 @@
                           <a:ea typeface="Arial" pitchFamily="34" charset="-122"/>
                           <a:cs typeface="Arial" pitchFamily="34" charset="-120"/>
                         </a:rPr>
-                        <a:t>88.1%</a:t>
+                        <a:t>87.2%</a:t>
                       </a:r>
                       <a:endParaRPr lang="en-US" sz="1000" dirty="0">
                         <a:latin typeface="Arial" charset="0"/>
@@ -3672,7 +3706,7 @@
                           <a:ea typeface="Arial" pitchFamily="34" charset="-122"/>
                           <a:cs typeface="Arial" pitchFamily="34" charset="-120"/>
                         </a:rPr>
-                        <a:t>93%以上</a:t>
+                        <a:t>92%以上</a:t>
                       </a:r>
                       <a:endParaRPr lang="en-US" sz="1000" dirty="0">
                         <a:latin typeface="Arial" charset="0"/>
@@ -3878,7 +3912,7 @@
                           <a:ea typeface="Arial" pitchFamily="34" charset="-122"/>
                           <a:cs typeface="Arial" pitchFamily="34" charset="-120"/>
                         </a:rPr>
-                        <a:t>7.5%</a:t>
+                        <a:t>4.0%</a:t>
                       </a:r>
                       <a:endParaRPr lang="en-US" sz="1000" dirty="0">
                         <a:latin typeface="Arial" charset="0"/>
@@ -3946,7 +3980,7 @@
                           <a:ea typeface="Arial" pitchFamily="34" charset="-122"/>
                           <a:cs typeface="Arial" pitchFamily="34" charset="-120"/>
                         </a:rPr>
-                        <a:t>5%以下</a:t>
+                        <a:t>1%以下</a:t>
                       </a:r>
                       <a:endParaRPr lang="en-US" sz="1000" dirty="0">
                         <a:latin typeface="Arial" charset="0"/>
@@ -4152,7 +4186,7 @@
                           <a:ea typeface="Arial" pitchFamily="34" charset="-122"/>
                           <a:cs typeface="Arial" pitchFamily="34" charset="-120"/>
                         </a:rPr>
-                        <a:t>7.0点</a:t>
+                        <a:t>7.8点</a:t>
                       </a:r>
                       <a:endParaRPr lang="en-US" sz="1000" dirty="0">
                         <a:latin typeface="Arial" charset="0"/>
@@ -4220,7 +4254,7 @@
                           <a:ea typeface="Arial" pitchFamily="34" charset="-122"/>
                           <a:cs typeface="Arial" pitchFamily="34" charset="-120"/>
                         </a:rPr>
-                        <a:t>8.0点以上</a:t>
+                        <a:t>8.8点以上</a:t>
                       </a:r>
                       <a:endParaRPr lang="en-US" sz="1000" dirty="0">
                         <a:latin typeface="Arial" charset="0"/>
@@ -4700,7 +4734,7 @@
                           <a:ea typeface="Arial" pitchFamily="34" charset="-122"/>
                           <a:cs typeface="Arial" pitchFamily="34" charset="-120"/>
                         </a:rPr>
-                        <a:t>約16件/期間</a:t>
+                        <a:t>約21件/期間</a:t>
                       </a:r>
                       <a:endParaRPr lang="en-US" sz="1000" dirty="0">
                         <a:latin typeface="Arial" charset="0"/>
@@ -4768,7 +4802,7 @@
                           <a:ea typeface="Arial" pitchFamily="34" charset="-122"/>
                           <a:cs typeface="Arial" pitchFamily="34" charset="-120"/>
                         </a:rPr>
-                        <a:t>8件以下</a:t>
+                        <a:t>10件以下</a:t>
                       </a:r>
                       <a:endParaRPr lang="en-US" sz="1000" dirty="0">
                         <a:latin typeface="Arial" charset="0"/>
@@ -5339,7 +5373,7 @@
                 <a:ea typeface="Arial" pitchFamily="34" charset="-122"/>
                 <a:cs typeface="Arial" pitchFamily="34" charset="-120"/>
               </a:rPr>
-              <a:t>8.78</a:t>
+              <a:t>8.93</a:t>
             </a:r>
             <a:endParaRPr lang="en-US" sz="3200" dirty="0"/>
           </a:p>
@@ -5464,7 +5498,7 @@
                 <a:ea typeface="Arial" pitchFamily="34" charset="-122"/>
                 <a:cs typeface="Arial" pitchFamily="34" charset="-120"/>
               </a:rPr>
-              <a:t>88.1%</a:t>
+              <a:t>87.2%</a:t>
             </a:r>
             <a:endParaRPr lang="en-US" sz="3200" dirty="0"/>
           </a:p>
@@ -5512,7 +5546,7 @@
             <a:avLst/>
           </a:prstGeom>
           <a:solidFill>
-            <a:srgbClr val="DC2626"/>
+            <a:srgbClr val="16A34A"/>
           </a:solidFill>
           <a:ln/>
         </p:spPr>
@@ -5583,13 +5617,13 @@
             <a:r>
               <a:rPr lang="en-US" sz="3200" b="1" dirty="0">
                 <a:solidFill>
-                  <a:srgbClr val="DC2626"/>
+                  <a:srgbClr val="16A34A"/>
                 </a:solidFill>
                 <a:latin typeface="Arial" pitchFamily="34" charset="0"/>
                 <a:ea typeface="Arial" pitchFamily="34" charset="-122"/>
                 <a:cs typeface="Arial" pitchFamily="34" charset="-120"/>
               </a:rPr>
-              <a:t>7.5%</a:t>
+              <a:t>4.0%</a:t>
             </a:r>
             <a:endParaRPr lang="en-US" sz="3200" dirty="0"/>
           </a:p>
@@ -5714,7 +5748,7 @@
                 <a:ea typeface="Arial" pitchFamily="34" charset="-122"/>
                 <a:cs typeface="Arial" pitchFamily="34" charset="-120"/>
               </a:rPr>
-              <a:t>67件</a:t>
+              <a:t>125件</a:t>
             </a:r>
             <a:endParaRPr lang="en-US" sz="3200" dirty="0"/>
           </a:p>
@@ -5922,7 +5956,7 @@
                 <a:ea typeface="Arial" pitchFamily="34" charset="-122"/>
                 <a:cs typeface="Arial" pitchFamily="34" charset="-120"/>
               </a:rPr>
-              <a:t>清潔さ・清掃 </a:t>
+              <a:t>朝食 </a:t>
             </a:r>
             <a:endParaRPr lang="en-US" sz="1100" dirty="0"/>
           </a:p>
@@ -5942,7 +5976,7 @@
                 <a:ea typeface="Arial" pitchFamily="34" charset="-122"/>
                 <a:cs typeface="Arial" pitchFamily="34" charset="-120"/>
               </a:rPr>
-              <a:t>  Cleanliness, convenience, breakfast</a:t>
+              <a:t>  Breakfast was great</a:t>
             </a:r>
             <a:endParaRPr lang="en-US" sz="1100" dirty="0"/>
           </a:p>
@@ -6523,7 +6557,7 @@
                 <a:ea typeface="Arial" pitchFamily="34" charset="-122"/>
                 <a:cs typeface="Arial" pitchFamily="34" charset="-120"/>
               </a:rPr>
-              <a:t>8.78</a:t>
+              <a:t>8.93</a:t>
             </a:r>
             <a:endParaRPr lang="en-US" sz="3200" dirty="0"/>
           </a:p>
@@ -6648,7 +6682,7 @@
                 <a:ea typeface="Arial" pitchFamily="34" charset="-122"/>
                 <a:cs typeface="Arial" pitchFamily="34" charset="-120"/>
               </a:rPr>
-              <a:t>88.1%</a:t>
+              <a:t>87.2%</a:t>
             </a:r>
             <a:endParaRPr lang="en-US" sz="3200" dirty="0"/>
           </a:p>
@@ -6696,7 +6730,7 @@
             <a:avLst/>
           </a:prstGeom>
           <a:solidFill>
-            <a:srgbClr val="DC2626"/>
+            <a:srgbClr val="16A34A"/>
           </a:solidFill>
           <a:ln/>
         </p:spPr>
@@ -6767,13 +6801,13 @@
             <a:r>
               <a:rPr lang="en-US" sz="3200" b="1" dirty="0">
                 <a:solidFill>
-                  <a:srgbClr val="DC2626"/>
+                  <a:srgbClr val="16A34A"/>
                 </a:solidFill>
                 <a:latin typeface="Arial" pitchFamily="34" charset="0"/>
                 <a:ea typeface="Arial" pitchFamily="34" charset="-122"/>
                 <a:cs typeface="Arial" pitchFamily="34" charset="-120"/>
               </a:rPr>
-              <a:t>7.5%</a:t>
+              <a:t>4.0%</a:t>
             </a:r>
             <a:endParaRPr lang="en-US" sz="3200" dirty="0"/>
           </a:p>
@@ -6898,7 +6932,7 @@
                 <a:ea typeface="Arial" pitchFamily="34" charset="-122"/>
                 <a:cs typeface="Arial" pitchFamily="34" charset="-120"/>
               </a:rPr>
-              <a:t>67件</a:t>
+              <a:t>125件</a:t>
             </a:r>
             <a:endParaRPr lang="en-US" sz="3200" dirty="0"/>
           </a:p>
@@ -7368,7 +7402,7 @@
                 <a:ea typeface="Arial" pitchFamily="34" charset="-122"/>
                 <a:cs typeface="Arial" pitchFamily="34" charset="-120"/>
               </a:rPr>
-              <a:t>Google(7.0)が相対的に低い。口コミ返信の強化が急務</a:t>
+              <a:t>Google(7.8)が相対的に低い。口コミ返信の強化が急務</a:t>
             </a:r>
             <a:endParaRPr lang="en-US" sz="1100" dirty="0"/>
           </a:p>
@@ -7877,7 +7911,7 @@
                           <a:ea typeface="Arial" pitchFamily="34" charset="-122"/>
                           <a:cs typeface="Arial" pitchFamily="34" charset="-120"/>
                         </a:rPr>
-                        <a:t>1</a:t>
+                        <a:t>2</a:t>
                       </a:r>
                       <a:endParaRPr lang="en-US" sz="900" dirty="0">
                         <a:latin typeface="Arial" charset="0"/>
@@ -8219,7 +8253,7 @@
                           <a:ea typeface="Arial" pitchFamily="34" charset="-122"/>
                           <a:cs typeface="Arial" pitchFamily="34" charset="-120"/>
                         </a:rPr>
-                        <a:t>1</a:t>
+                        <a:t>2</a:t>
                       </a:r>
                       <a:endParaRPr lang="en-US" sz="900" dirty="0">
                         <a:latin typeface="Arial" charset="0"/>
@@ -8561,7 +8595,7 @@
                           <a:ea typeface="Arial" pitchFamily="34" charset="-122"/>
                           <a:cs typeface="Arial" pitchFamily="34" charset="-120"/>
                         </a:rPr>
-                        <a:t>14</a:t>
+                        <a:t>26</a:t>
                       </a:r>
                       <a:endParaRPr lang="en-US" sz="900" dirty="0">
                         <a:latin typeface="Arial" charset="0"/>
@@ -8629,7 +8663,7 @@
                           <a:ea typeface="Arial" pitchFamily="34" charset="-122"/>
                           <a:cs typeface="Arial" pitchFamily="34" charset="-120"/>
                         </a:rPr>
-                        <a:t>9.79</a:t>
+                        <a:t>9.81</a:t>
                       </a:r>
                       <a:endParaRPr lang="en-US" sz="900" dirty="0">
                         <a:latin typeface="Arial" charset="0"/>
@@ -8765,7 +8799,7 @@
                           <a:ea typeface="Arial" pitchFamily="34" charset="-122"/>
                           <a:cs typeface="Arial" pitchFamily="34" charset="-120"/>
                         </a:rPr>
-                        <a:t>9.79</a:t>
+                        <a:t>9.81</a:t>
                       </a:r>
                       <a:endParaRPr lang="en-US" sz="900" dirty="0">
                         <a:latin typeface="Arial" charset="0"/>
@@ -8903,7 +8937,7 @@
                           <a:ea typeface="Arial" pitchFamily="34" charset="-122"/>
                           <a:cs typeface="Arial" pitchFamily="34" charset="-120"/>
                         </a:rPr>
-                        <a:t>34</a:t>
+                        <a:t>67</a:t>
                       </a:r>
                       <a:endParaRPr lang="en-US" sz="900" dirty="0">
                         <a:latin typeface="Arial" charset="0"/>
@@ -9245,7 +9279,7 @@
                           <a:ea typeface="Arial" pitchFamily="34" charset="-122"/>
                           <a:cs typeface="Arial" pitchFamily="34" charset="-120"/>
                         </a:rPr>
-                        <a:t>5</a:t>
+                        <a:t>6</a:t>
                       </a:r>
                       <a:endParaRPr lang="en-US" sz="900" dirty="0">
                         <a:latin typeface="Arial" charset="0"/>
@@ -9313,7 +9347,7 @@
                           <a:ea typeface="Arial" pitchFamily="34" charset="-122"/>
                           <a:cs typeface="Arial" pitchFamily="34" charset="-120"/>
                         </a:rPr>
-                        <a:t>4.4</a:t>
+                        <a:t>4.33</a:t>
                       </a:r>
                       <a:endParaRPr lang="en-US" sz="900" dirty="0">
                         <a:latin typeface="Arial" charset="0"/>
@@ -9449,7 +9483,7 @@
                           <a:ea typeface="Arial" pitchFamily="34" charset="-122"/>
                           <a:cs typeface="Arial" pitchFamily="34" charset="-120"/>
                         </a:rPr>
-                        <a:t>8.8</a:t>
+                        <a:t>8.67</a:t>
                       </a:r>
                       <a:endParaRPr lang="en-US" sz="900" dirty="0">
                         <a:latin typeface="Arial" charset="0"/>
@@ -9587,7 +9621,7 @@
                           <a:ea typeface="Arial" pitchFamily="34" charset="-122"/>
                           <a:cs typeface="Arial" pitchFamily="34" charset="-120"/>
                         </a:rPr>
-                        <a:t>12</a:t>
+                        <a:t>22</a:t>
                       </a:r>
                       <a:endParaRPr lang="en-US" sz="900" dirty="0">
                         <a:latin typeface="Arial" charset="0"/>
@@ -9655,7 +9689,7 @@
                           <a:ea typeface="Arial" pitchFamily="34" charset="-122"/>
                           <a:cs typeface="Arial" pitchFamily="34" charset="-120"/>
                         </a:rPr>
-                        <a:t>3.5</a:t>
+                        <a:t>3.91</a:t>
                       </a:r>
                       <a:endParaRPr lang="en-US" sz="900" dirty="0">
                         <a:latin typeface="Arial" charset="0"/>
@@ -9791,7 +9825,7 @@
                           <a:ea typeface="Arial" pitchFamily="34" charset="-122"/>
                           <a:cs typeface="Arial" pitchFamily="34" charset="-120"/>
                         </a:rPr>
-                        <a:t>7</a:t>
+                        <a:t>7.82</a:t>
                       </a:r>
                       <a:endParaRPr lang="en-US" sz="900" dirty="0">
                         <a:latin typeface="Arial" charset="0"/>
@@ -10199,7 +10233,7 @@
                 <a:ea typeface="Arial" pitchFamily="34" charset="-122"/>
                 <a:cs typeface="Arial" pitchFamily="34" charset="-120"/>
               </a:rPr>
-              <a:t>59件（88.1%）</a:t>
+              <a:t>109件（87.2%）</a:t>
             </a:r>
             <a:endParaRPr lang="en-US" sz="1100" dirty="0"/>
           </a:p>
@@ -10297,7 +10331,7 @@
                 <a:ea typeface="Arial" pitchFamily="34" charset="-122"/>
                 <a:cs typeface="Arial" pitchFamily="34" charset="-120"/>
               </a:rPr>
-              <a:t>3件（4.5%）</a:t>
+              <a:t>11件（8.8%）</a:t>
             </a:r>
             <a:endParaRPr lang="en-US" sz="1100" dirty="0"/>
           </a:p>
@@ -10318,7 +10352,7 @@
             <a:avLst/>
           </a:prstGeom>
           <a:solidFill>
-            <a:srgbClr val="FEE2E2"/>
+            <a:srgbClr val="DCFCE7"/>
           </a:solidFill>
           <a:ln/>
         </p:spPr>
@@ -10350,7 +10384,7 @@
             <a:r>
               <a:rPr lang="en-US" sz="1000" b="1" dirty="0">
                 <a:solidFill>
-                  <a:srgbClr val="DC2626"/>
+                  <a:srgbClr val="16A34A"/>
                 </a:solidFill>
                 <a:latin typeface="Arial" pitchFamily="34" charset="0"/>
                 <a:ea typeface="Arial" pitchFamily="34" charset="-122"/>
@@ -10389,13 +10423,13 @@
             <a:r>
               <a:rPr lang="en-US" sz="1100" b="1" dirty="0">
                 <a:solidFill>
-                  <a:srgbClr val="DC2626"/>
+                  <a:srgbClr val="16A34A"/>
                 </a:solidFill>
                 <a:latin typeface="Arial" pitchFamily="34" charset="0"/>
                 <a:ea typeface="Arial" pitchFamily="34" charset="-122"/>
                 <a:cs typeface="Arial" pitchFamily="34" charset="-120"/>
               </a:rPr>
-              <a:t>5件（7.5%）</a:t>
+              <a:t>5件（4.0%）</a:t>
             </a:r>
             <a:endParaRPr lang="en-US" sz="1100" dirty="0"/>
           </a:p>
@@ -11175,7 +11209,7 @@
                 <a:ea typeface="Arial" pitchFamily="34" charset="-122"/>
                 <a:cs typeface="Arial" pitchFamily="34" charset="-120"/>
               </a:rPr>
-              <a:t>10件+</a:t>
+              <a:t>20件+</a:t>
             </a:r>
             <a:endParaRPr lang="en-US" sz="900" dirty="0"/>
           </a:p>
@@ -11190,6 +11224,229 @@
         <p:spPr>
           <a:xfrm>
             <a:off x="6263640" y="1124712"/>
+            <a:ext cx="1645920" cy="274320"/>
+          </a:xfrm>
+          <a:prstGeom prst="rect">
+            <a:avLst/>
+          </a:prstGeom>
+          <a:noFill/>
+          <a:ln/>
+        </p:spPr>
+        <p:txBody>
+          <a:bodyPr wrap="square" lIns="0" tIns="0" rIns="0" bIns="0" rtlCol="0" anchor="ctr"/>
+          <a:lstStyle/>
+          <a:p>
+            <a:pPr indent="0" marL="0">
+              <a:buNone/>
+            </a:pPr>
+            <a:r>
+              <a:rPr lang="en-US" sz="1300" b="1" dirty="0">
+                <a:solidFill>
+                  <a:srgbClr val="1A2744"/>
+                </a:solidFill>
+                <a:latin typeface="Arial" pitchFamily="34" charset="0"/>
+                <a:ea typeface="Arial" pitchFamily="34" charset="-122"/>
+                <a:cs typeface="Arial" pitchFamily="34" charset="-120"/>
+              </a:rPr>
+              <a:t>朝食</a:t>
+            </a:r>
+            <a:endParaRPr lang="en-US" sz="1300" dirty="0"/>
+          </a:p>
+        </p:txBody>
+      </p:sp>
+      <p:sp>
+        <p:nvSpPr>
+          <p:cNvPr id="24" name="Text 22"/>
+          <p:cNvSpPr/>
+          <p:nvPr/>
+        </p:nvSpPr>
+        <p:spPr>
+          <a:xfrm>
+            <a:off x="6263640" y="1417320"/>
+            <a:ext cx="2377440" cy="365760"/>
+          </a:xfrm>
+          <a:prstGeom prst="rect">
+            <a:avLst/>
+          </a:prstGeom>
+          <a:noFill/>
+          <a:ln/>
+        </p:spPr>
+        <p:txBody>
+          <a:bodyPr wrap="square" lIns="0" tIns="0" rIns="0" bIns="0" rtlCol="0" anchor="ctr"/>
+          <a:lstStyle/>
+          <a:p>
+            <a:pPr indent="0" marL="0">
+              <a:buNone/>
+            </a:pPr>
+            <a:r>
+              <a:rPr lang="en-US" sz="900" dirty="0">
+                <a:solidFill>
+                  <a:srgbClr val="64748B"/>
+                </a:solidFill>
+                <a:latin typeface="Arial" pitchFamily="34" charset="0"/>
+                <a:ea typeface="Arial" pitchFamily="34" charset="-122"/>
+                <a:cs typeface="Arial" pitchFamily="34" charset="-120"/>
+              </a:rPr>
+              <a:t>Breakfast was great</a:t>
+            </a:r>
+            <a:endParaRPr lang="en-US" sz="900" dirty="0"/>
+          </a:p>
+        </p:txBody>
+      </p:sp>
+      <p:sp>
+        <p:nvSpPr>
+          <p:cNvPr id="25" name="Text 23"/>
+          <p:cNvSpPr/>
+          <p:nvPr/>
+        </p:nvSpPr>
+        <p:spPr>
+          <a:xfrm>
+            <a:off x="6263640" y="1828800"/>
+            <a:ext cx="2377440" cy="640080"/>
+          </a:xfrm>
+          <a:prstGeom prst="rect">
+            <a:avLst/>
+          </a:prstGeom>
+          <a:noFill/>
+          <a:ln/>
+        </p:spPr>
+        <p:txBody>
+          <a:bodyPr wrap="square" lIns="0" tIns="0" rIns="0" bIns="0" rtlCol="0" anchor="ctr"/>
+          <a:lstStyle/>
+          <a:p>
+            <a:pPr indent="0" marL="0">
+              <a:buNone/>
+            </a:pPr>
+            <a:r>
+              <a:rPr lang="en-US" sz="900" i="1" dirty="0">
+                <a:solidFill>
+                  <a:srgbClr val="3B7DD8"/>
+                </a:solidFill>
+                <a:latin typeface="Arial" pitchFamily="34" charset="0"/>
+                <a:ea typeface="Arial" pitchFamily="34" charset="-122"/>
+                <a:cs typeface="Arial" pitchFamily="34" charset="-120"/>
+              </a:rPr>
+              <a:t>「Cleanliness, convenience, breakfast」</a:t>
+            </a:r>
+            <a:endParaRPr lang="en-US" sz="900" dirty="0"/>
+          </a:p>
+        </p:txBody>
+      </p:sp>
+      <p:sp>
+        <p:nvSpPr>
+          <p:cNvPr id="26" name="Shape 24"/>
+          <p:cNvSpPr/>
+          <p:nvPr/>
+        </p:nvSpPr>
+        <p:spPr>
+          <a:xfrm>
+            <a:off x="457200" y="2880360"/>
+            <a:ext cx="2651760" cy="1600200"/>
+          </a:xfrm>
+          <a:prstGeom prst="rect">
+            <a:avLst/>
+          </a:prstGeom>
+          <a:solidFill>
+            <a:srgbClr val="FFFFFF"/>
+          </a:solidFill>
+          <a:ln/>
+          <a:effectLst>
+            <a:outerShdw sx="100000" sy="100000" kx="0" ky="0" algn="bl" rotWithShape="0" blurRad="50800" dist="25400" dir="8100000">
+              <a:srgbClr val="000000">
+                <a:alpha val="10000"/>
+              </a:srgbClr>
+            </a:outerShdw>
+          </a:effectLst>
+        </p:spPr>
+      </p:sp>
+      <p:sp>
+        <p:nvSpPr>
+          <p:cNvPr id="27" name="Shape 25"/>
+          <p:cNvSpPr/>
+          <p:nvPr/>
+        </p:nvSpPr>
+        <p:spPr>
+          <a:xfrm>
+            <a:off x="457200" y="2880360"/>
+            <a:ext cx="54864" cy="1600200"/>
+          </a:xfrm>
+          <a:prstGeom prst="rect">
+            <a:avLst/>
+          </a:prstGeom>
+          <a:solidFill>
+            <a:srgbClr val="16A34A"/>
+          </a:solidFill>
+          <a:ln/>
+        </p:spPr>
+      </p:sp>
+      <p:sp>
+        <p:nvSpPr>
+          <p:cNvPr id="28" name="Shape 26"/>
+          <p:cNvSpPr/>
+          <p:nvPr/>
+        </p:nvSpPr>
+        <p:spPr>
+          <a:xfrm>
+            <a:off x="2286000" y="2953512"/>
+            <a:ext cx="658368" cy="228600"/>
+          </a:xfrm>
+          <a:prstGeom prst="rect">
+            <a:avLst/>
+          </a:prstGeom>
+          <a:solidFill>
+            <a:srgbClr val="DCFCE7"/>
+          </a:solidFill>
+          <a:ln/>
+        </p:spPr>
+      </p:sp>
+      <p:sp>
+        <p:nvSpPr>
+          <p:cNvPr id="29" name="Text 27"/>
+          <p:cNvSpPr/>
+          <p:nvPr/>
+        </p:nvSpPr>
+        <p:spPr>
+          <a:xfrm>
+            <a:off x="2286000" y="2953512"/>
+            <a:ext cx="658368" cy="228600"/>
+          </a:xfrm>
+          <a:prstGeom prst="rect">
+            <a:avLst/>
+          </a:prstGeom>
+          <a:noFill/>
+          <a:ln/>
+        </p:spPr>
+        <p:txBody>
+          <a:bodyPr wrap="square" lIns="0" tIns="0" rIns="0" bIns="0" rtlCol="0" anchor="ctr"/>
+          <a:lstStyle/>
+          <a:p>
+            <a:pPr algn="ctr" indent="0" marL="0">
+              <a:buNone/>
+            </a:pPr>
+            <a:r>
+              <a:rPr lang="en-US" sz="900" b="1" dirty="0">
+                <a:solidFill>
+                  <a:srgbClr val="16A34A"/>
+                </a:solidFill>
+                <a:latin typeface="Arial" pitchFamily="34" charset="0"/>
+                <a:ea typeface="Arial" pitchFamily="34" charset="-122"/>
+                <a:cs typeface="Arial" pitchFamily="34" charset="-120"/>
+              </a:rPr>
+              <a:t>20件+</a:t>
+            </a:r>
+            <a:endParaRPr lang="en-US" sz="900" dirty="0"/>
+          </a:p>
+        </p:txBody>
+      </p:sp>
+      <p:sp>
+        <p:nvSpPr>
+          <p:cNvPr id="30" name="Text 28"/>
+          <p:cNvSpPr/>
+          <p:nvPr/>
+        </p:nvSpPr>
+        <p:spPr>
+          <a:xfrm>
+            <a:off x="594360" y="2953512"/>
             <a:ext cx="1645920" cy="274320"/>
           </a:xfrm>
           <a:prstGeom prst="rect">
@@ -11222,13 +11479,13 @@
       </p:sp>
       <p:sp>
         <p:nvSpPr>
-          <p:cNvPr id="24" name="Text 22"/>
-          <p:cNvSpPr/>
-          <p:nvPr/>
-        </p:nvSpPr>
-        <p:spPr>
-          <a:xfrm>
-            <a:off x="6263640" y="1417320"/>
+          <p:cNvPr id="31" name="Text 29"/>
+          <p:cNvSpPr/>
+          <p:nvPr/>
+        </p:nvSpPr>
+        <p:spPr>
+          <a:xfrm>
+            <a:off x="594360" y="3246120"/>
             <a:ext cx="2377440" cy="365760"/>
           </a:xfrm>
           <a:prstGeom prst="rect">
@@ -11261,13 +11518,13 @@
       </p:sp>
       <p:sp>
         <p:nvSpPr>
-          <p:cNvPr id="25" name="Text 23"/>
-          <p:cNvSpPr/>
-          <p:nvPr/>
-        </p:nvSpPr>
-        <p:spPr>
-          <a:xfrm>
-            <a:off x="6263640" y="1828800"/>
+          <p:cNvPr id="32" name="Text 30"/>
+          <p:cNvSpPr/>
+          <p:nvPr/>
+        </p:nvSpPr>
+        <p:spPr>
+          <a:xfrm>
+            <a:off x="594360" y="3657600"/>
             <a:ext cx="2377440" cy="640080"/>
           </a:xfrm>
           <a:prstGeom prst="rect">
@@ -11300,13 +11557,13 @@
       </p:sp>
       <p:sp>
         <p:nvSpPr>
-          <p:cNvPr id="26" name="Shape 24"/>
-          <p:cNvSpPr/>
-          <p:nvPr/>
-        </p:nvSpPr>
-        <p:spPr>
-          <a:xfrm>
-            <a:off x="457200" y="2880360"/>
+          <p:cNvPr id="33" name="Shape 31"/>
+          <p:cNvSpPr/>
+          <p:nvPr/>
+        </p:nvSpPr>
+        <p:spPr>
+          <a:xfrm>
+            <a:off x="3291840" y="2880360"/>
             <a:ext cx="2651760" cy="1600200"/>
           </a:xfrm>
           <a:prstGeom prst="rect">
@@ -11327,13 +11584,13 @@
       </p:sp>
       <p:sp>
         <p:nvSpPr>
-          <p:cNvPr id="27" name="Shape 25"/>
-          <p:cNvSpPr/>
-          <p:nvPr/>
-        </p:nvSpPr>
-        <p:spPr>
-          <a:xfrm>
-            <a:off x="457200" y="2880360"/>
+          <p:cNvPr id="34" name="Shape 32"/>
+          <p:cNvSpPr/>
+          <p:nvPr/>
+        </p:nvSpPr>
+        <p:spPr>
+          <a:xfrm>
+            <a:off x="3291840" y="2880360"/>
             <a:ext cx="54864" cy="1600200"/>
           </a:xfrm>
           <a:prstGeom prst="rect">
@@ -11347,13 +11604,13 @@
       </p:sp>
       <p:sp>
         <p:nvSpPr>
-          <p:cNvPr id="28" name="Shape 26"/>
-          <p:cNvSpPr/>
-          <p:nvPr/>
-        </p:nvSpPr>
-        <p:spPr>
-          <a:xfrm>
-            <a:off x="2286000" y="2953512"/>
+          <p:cNvPr id="35" name="Shape 33"/>
+          <p:cNvSpPr/>
+          <p:nvPr/>
+        </p:nvSpPr>
+        <p:spPr>
+          <a:xfrm>
+            <a:off x="5120640" y="2953512"/>
             <a:ext cx="658368" cy="228600"/>
           </a:xfrm>
           <a:prstGeom prst="rect">
@@ -11367,13 +11624,236 @@
       </p:sp>
       <p:sp>
         <p:nvSpPr>
-          <p:cNvPr id="29" name="Text 27"/>
-          <p:cNvSpPr/>
-          <p:nvPr/>
-        </p:nvSpPr>
-        <p:spPr>
-          <a:xfrm>
-            <a:off x="2286000" y="2953512"/>
+          <p:cNvPr id="36" name="Text 34"/>
+          <p:cNvSpPr/>
+          <p:nvPr/>
+        </p:nvSpPr>
+        <p:spPr>
+          <a:xfrm>
+            <a:off x="5120640" y="2953512"/>
+            <a:ext cx="658368" cy="228600"/>
+          </a:xfrm>
+          <a:prstGeom prst="rect">
+            <a:avLst/>
+          </a:prstGeom>
+          <a:noFill/>
+          <a:ln/>
+        </p:spPr>
+        <p:txBody>
+          <a:bodyPr wrap="square" lIns="0" tIns="0" rIns="0" bIns="0" rtlCol="0" anchor="ctr"/>
+          <a:lstStyle/>
+          <a:p>
+            <a:pPr algn="ctr" indent="0" marL="0">
+              <a:buNone/>
+            </a:pPr>
+            <a:r>
+              <a:rPr lang="en-US" sz="900" b="1" dirty="0">
+                <a:solidFill>
+                  <a:srgbClr val="16A34A"/>
+                </a:solidFill>
+                <a:latin typeface="Arial" pitchFamily="34" charset="0"/>
+                <a:ea typeface="Arial" pitchFamily="34" charset="-122"/>
+                <a:cs typeface="Arial" pitchFamily="34" charset="-120"/>
+              </a:rPr>
+              <a:t>20件+</a:t>
+            </a:r>
+            <a:endParaRPr lang="en-US" sz="900" dirty="0"/>
+          </a:p>
+        </p:txBody>
+      </p:sp>
+      <p:sp>
+        <p:nvSpPr>
+          <p:cNvPr id="37" name="Text 35"/>
+          <p:cNvSpPr/>
+          <p:nvPr/>
+        </p:nvSpPr>
+        <p:spPr>
+          <a:xfrm>
+            <a:off x="3429000" y="2953512"/>
+            <a:ext cx="1645920" cy="274320"/>
+          </a:xfrm>
+          <a:prstGeom prst="rect">
+            <a:avLst/>
+          </a:prstGeom>
+          <a:noFill/>
+          <a:ln/>
+        </p:spPr>
+        <p:txBody>
+          <a:bodyPr wrap="square" lIns="0" tIns="0" rIns="0" bIns="0" rtlCol="0" anchor="ctr"/>
+          <a:lstStyle/>
+          <a:p>
+            <a:pPr indent="0" marL="0">
+              <a:buNone/>
+            </a:pPr>
+            <a:r>
+              <a:rPr lang="en-US" sz="1300" b="1" dirty="0">
+                <a:solidFill>
+                  <a:srgbClr val="1A2744"/>
+                </a:solidFill>
+                <a:latin typeface="Arial" pitchFamily="34" charset="0"/>
+                <a:ea typeface="Arial" pitchFamily="34" charset="-122"/>
+                <a:cs typeface="Arial" pitchFamily="34" charset="-120"/>
+              </a:rPr>
+              <a:t>快適さ・設備</a:t>
+            </a:r>
+            <a:endParaRPr lang="en-US" sz="1300" dirty="0"/>
+          </a:p>
+        </p:txBody>
+      </p:sp>
+      <p:sp>
+        <p:nvSpPr>
+          <p:cNvPr id="38" name="Text 36"/>
+          <p:cNvSpPr/>
+          <p:nvPr/>
+        </p:nvSpPr>
+        <p:spPr>
+          <a:xfrm>
+            <a:off x="3429000" y="3246120"/>
+            <a:ext cx="2377440" cy="365760"/>
+          </a:xfrm>
+          <a:prstGeom prst="rect">
+            <a:avLst/>
+          </a:prstGeom>
+          <a:noFill/>
+          <a:ln/>
+        </p:spPr>
+        <p:txBody>
+          <a:bodyPr wrap="square" lIns="0" tIns="0" rIns="0" bIns="0" rtlCol="0" anchor="ctr"/>
+          <a:lstStyle/>
+          <a:p>
+            <a:pPr indent="0" marL="0">
+              <a:buNone/>
+            </a:pPr>
+            <a:r>
+              <a:rPr lang="en-US" sz="900" dirty="0">
+                <a:solidFill>
+                  <a:srgbClr val="64748B"/>
+                </a:solidFill>
+                <a:latin typeface="Arial" pitchFamily="34" charset="0"/>
+                <a:ea typeface="Arial" pitchFamily="34" charset="-122"/>
+                <a:cs typeface="Arial" pitchFamily="34" charset="-120"/>
+              </a:rPr>
+              <a:t>いつも、変わりなく場所が変わっても快適で、安心</a:t>
+            </a:r>
+            <a:endParaRPr lang="en-US" sz="900" dirty="0"/>
+          </a:p>
+        </p:txBody>
+      </p:sp>
+      <p:sp>
+        <p:nvSpPr>
+          <p:cNvPr id="39" name="Text 37"/>
+          <p:cNvSpPr/>
+          <p:nvPr/>
+        </p:nvSpPr>
+        <p:spPr>
+          <a:xfrm>
+            <a:off x="3429000" y="3657600"/>
+            <a:ext cx="2377440" cy="640080"/>
+          </a:xfrm>
+          <a:prstGeom prst="rect">
+            <a:avLst/>
+          </a:prstGeom>
+          <a:noFill/>
+          <a:ln/>
+        </p:spPr>
+        <p:txBody>
+          <a:bodyPr wrap="square" lIns="0" tIns="0" rIns="0" bIns="0" rtlCol="0" anchor="ctr"/>
+          <a:lstStyle/>
+          <a:p>
+            <a:pPr indent="0" marL="0">
+              <a:buNone/>
+            </a:pPr>
+            <a:r>
+              <a:rPr lang="en-US" sz="900" i="1" dirty="0">
+                <a:solidFill>
+                  <a:srgbClr val="3B7DD8"/>
+                </a:solidFill>
+                <a:latin typeface="Arial" pitchFamily="34" charset="0"/>
+                <a:ea typeface="Arial" pitchFamily="34" charset="-122"/>
+                <a:cs typeface="Arial" pitchFamily="34" charset="-120"/>
+              </a:rPr>
+              <a:t>「清潔で静かで快適でした」</a:t>
+            </a:r>
+            <a:endParaRPr lang="en-US" sz="900" dirty="0"/>
+          </a:p>
+        </p:txBody>
+      </p:sp>
+      <p:sp>
+        <p:nvSpPr>
+          <p:cNvPr id="40" name="Shape 38"/>
+          <p:cNvSpPr/>
+          <p:nvPr/>
+        </p:nvSpPr>
+        <p:spPr>
+          <a:xfrm>
+            <a:off x="6126480" y="2880360"/>
+            <a:ext cx="2651760" cy="1600200"/>
+          </a:xfrm>
+          <a:prstGeom prst="rect">
+            <a:avLst/>
+          </a:prstGeom>
+          <a:solidFill>
+            <a:srgbClr val="FFFFFF"/>
+          </a:solidFill>
+          <a:ln/>
+          <a:effectLst>
+            <a:outerShdw sx="100000" sy="100000" kx="0" ky="0" algn="bl" rotWithShape="0" blurRad="50800" dist="25400" dir="8100000">
+              <a:srgbClr val="000000">
+                <a:alpha val="10000"/>
+              </a:srgbClr>
+            </a:outerShdw>
+          </a:effectLst>
+        </p:spPr>
+      </p:sp>
+      <p:sp>
+        <p:nvSpPr>
+          <p:cNvPr id="41" name="Shape 39"/>
+          <p:cNvSpPr/>
+          <p:nvPr/>
+        </p:nvSpPr>
+        <p:spPr>
+          <a:xfrm>
+            <a:off x="6126480" y="2880360"/>
+            <a:ext cx="54864" cy="1600200"/>
+          </a:xfrm>
+          <a:prstGeom prst="rect">
+            <a:avLst/>
+          </a:prstGeom>
+          <a:solidFill>
+            <a:srgbClr val="16A34A"/>
+          </a:solidFill>
+          <a:ln/>
+        </p:spPr>
+      </p:sp>
+      <p:sp>
+        <p:nvSpPr>
+          <p:cNvPr id="42" name="Shape 40"/>
+          <p:cNvSpPr/>
+          <p:nvPr/>
+        </p:nvSpPr>
+        <p:spPr>
+          <a:xfrm>
+            <a:off x="7955280" y="2953512"/>
+            <a:ext cx="658368" cy="228600"/>
+          </a:xfrm>
+          <a:prstGeom prst="rect">
+            <a:avLst/>
+          </a:prstGeom>
+          <a:solidFill>
+            <a:srgbClr val="DCFCE7"/>
+          </a:solidFill>
+          <a:ln/>
+        </p:spPr>
+      </p:sp>
+      <p:sp>
+        <p:nvSpPr>
+          <p:cNvPr id="43" name="Text 41"/>
+          <p:cNvSpPr/>
+          <p:nvPr/>
+        </p:nvSpPr>
+        <p:spPr>
+          <a:xfrm>
+            <a:off x="7955280" y="2953512"/>
             <a:ext cx="658368" cy="228600"/>
           </a:xfrm>
           <a:prstGeom prst="rect">
@@ -11399,452 +11879,6 @@
                 <a:cs typeface="Arial" pitchFamily="34" charset="-120"/>
               </a:rPr>
               <a:t>10件+</a:t>
-            </a:r>
-            <a:endParaRPr lang="en-US" sz="900" dirty="0"/>
-          </a:p>
-        </p:txBody>
-      </p:sp>
-      <p:sp>
-        <p:nvSpPr>
-          <p:cNvPr id="30" name="Text 28"/>
-          <p:cNvSpPr/>
-          <p:nvPr/>
-        </p:nvSpPr>
-        <p:spPr>
-          <a:xfrm>
-            <a:off x="594360" y="2953512"/>
-            <a:ext cx="1645920" cy="274320"/>
-          </a:xfrm>
-          <a:prstGeom prst="rect">
-            <a:avLst/>
-          </a:prstGeom>
-          <a:noFill/>
-          <a:ln/>
-        </p:spPr>
-        <p:txBody>
-          <a:bodyPr wrap="square" lIns="0" tIns="0" rIns="0" bIns="0" rtlCol="0" anchor="ctr"/>
-          <a:lstStyle/>
-          <a:p>
-            <a:pPr indent="0" marL="0">
-              <a:buNone/>
-            </a:pPr>
-            <a:r>
-              <a:rPr lang="en-US" sz="1300" b="1" dirty="0">
-                <a:solidFill>
-                  <a:srgbClr val="1A2744"/>
-                </a:solidFill>
-                <a:latin typeface="Arial" pitchFamily="34" charset="0"/>
-                <a:ea typeface="Arial" pitchFamily="34" charset="-122"/>
-                <a:cs typeface="Arial" pitchFamily="34" charset="-120"/>
-              </a:rPr>
-              <a:t>快適さ・設備</a:t>
-            </a:r>
-            <a:endParaRPr lang="en-US" sz="1300" dirty="0"/>
-          </a:p>
-        </p:txBody>
-      </p:sp>
-      <p:sp>
-        <p:nvSpPr>
-          <p:cNvPr id="31" name="Text 29"/>
-          <p:cNvSpPr/>
-          <p:nvPr/>
-        </p:nvSpPr>
-        <p:spPr>
-          <a:xfrm>
-            <a:off x="594360" y="3246120"/>
-            <a:ext cx="2377440" cy="365760"/>
-          </a:xfrm>
-          <a:prstGeom prst="rect">
-            <a:avLst/>
-          </a:prstGeom>
-          <a:noFill/>
-          <a:ln/>
-        </p:spPr>
-        <p:txBody>
-          <a:bodyPr wrap="square" lIns="0" tIns="0" rIns="0" bIns="0" rtlCol="0" anchor="ctr"/>
-          <a:lstStyle/>
-          <a:p>
-            <a:pPr indent="0" marL="0">
-              <a:buNone/>
-            </a:pPr>
-            <a:r>
-              <a:rPr lang="en-US" sz="900" dirty="0">
-                <a:solidFill>
-                  <a:srgbClr val="64748B"/>
-                </a:solidFill>
-                <a:latin typeface="Arial" pitchFamily="34" charset="0"/>
-                <a:ea typeface="Arial" pitchFamily="34" charset="-122"/>
-                <a:cs typeface="Arial" pitchFamily="34" charset="-120"/>
-              </a:rPr>
-              <a:t>いつも、変わりなく場所が変わっても快適で、安心</a:t>
-            </a:r>
-            <a:endParaRPr lang="en-US" sz="900" dirty="0"/>
-          </a:p>
-        </p:txBody>
-      </p:sp>
-      <p:sp>
-        <p:nvSpPr>
-          <p:cNvPr id="32" name="Text 30"/>
-          <p:cNvSpPr/>
-          <p:nvPr/>
-        </p:nvSpPr>
-        <p:spPr>
-          <a:xfrm>
-            <a:off x="594360" y="3657600"/>
-            <a:ext cx="2377440" cy="640080"/>
-          </a:xfrm>
-          <a:prstGeom prst="rect">
-            <a:avLst/>
-          </a:prstGeom>
-          <a:noFill/>
-          <a:ln/>
-        </p:spPr>
-        <p:txBody>
-          <a:bodyPr wrap="square" lIns="0" tIns="0" rIns="0" bIns="0" rtlCol="0" anchor="ctr"/>
-          <a:lstStyle/>
-          <a:p>
-            <a:pPr indent="0" marL="0">
-              <a:buNone/>
-            </a:pPr>
-            <a:r>
-              <a:rPr lang="en-US" sz="900" i="1" dirty="0">
-                <a:solidFill>
-                  <a:srgbClr val="3B7DD8"/>
-                </a:solidFill>
-                <a:latin typeface="Arial" pitchFamily="34" charset="0"/>
-                <a:ea typeface="Arial" pitchFamily="34" charset="-122"/>
-                <a:cs typeface="Arial" pitchFamily="34" charset="-120"/>
-              </a:rPr>
-              <a:t>「清潔で静かで快適でした」</a:t>
-            </a:r>
-            <a:endParaRPr lang="en-US" sz="900" dirty="0"/>
-          </a:p>
-        </p:txBody>
-      </p:sp>
-      <p:sp>
-        <p:nvSpPr>
-          <p:cNvPr id="33" name="Shape 31"/>
-          <p:cNvSpPr/>
-          <p:nvPr/>
-        </p:nvSpPr>
-        <p:spPr>
-          <a:xfrm>
-            <a:off x="3291840" y="2880360"/>
-            <a:ext cx="2651760" cy="1600200"/>
-          </a:xfrm>
-          <a:prstGeom prst="rect">
-            <a:avLst/>
-          </a:prstGeom>
-          <a:solidFill>
-            <a:srgbClr val="FFFFFF"/>
-          </a:solidFill>
-          <a:ln/>
-          <a:effectLst>
-            <a:outerShdw sx="100000" sy="100000" kx="0" ky="0" algn="bl" rotWithShape="0" blurRad="50800" dist="25400" dir="8100000">
-              <a:srgbClr val="000000">
-                <a:alpha val="10000"/>
-              </a:srgbClr>
-            </a:outerShdw>
-          </a:effectLst>
-        </p:spPr>
-      </p:sp>
-      <p:sp>
-        <p:nvSpPr>
-          <p:cNvPr id="34" name="Shape 32"/>
-          <p:cNvSpPr/>
-          <p:nvPr/>
-        </p:nvSpPr>
-        <p:spPr>
-          <a:xfrm>
-            <a:off x="3291840" y="2880360"/>
-            <a:ext cx="54864" cy="1600200"/>
-          </a:xfrm>
-          <a:prstGeom prst="rect">
-            <a:avLst/>
-          </a:prstGeom>
-          <a:solidFill>
-            <a:srgbClr val="16A34A"/>
-          </a:solidFill>
-          <a:ln/>
-        </p:spPr>
-      </p:sp>
-      <p:sp>
-        <p:nvSpPr>
-          <p:cNvPr id="35" name="Shape 33"/>
-          <p:cNvSpPr/>
-          <p:nvPr/>
-        </p:nvSpPr>
-        <p:spPr>
-          <a:xfrm>
-            <a:off x="5120640" y="2953512"/>
-            <a:ext cx="658368" cy="228600"/>
-          </a:xfrm>
-          <a:prstGeom prst="rect">
-            <a:avLst/>
-          </a:prstGeom>
-          <a:solidFill>
-            <a:srgbClr val="DCFCE7"/>
-          </a:solidFill>
-          <a:ln/>
-        </p:spPr>
-      </p:sp>
-      <p:sp>
-        <p:nvSpPr>
-          <p:cNvPr id="36" name="Text 34"/>
-          <p:cNvSpPr/>
-          <p:nvPr/>
-        </p:nvSpPr>
-        <p:spPr>
-          <a:xfrm>
-            <a:off x="5120640" y="2953512"/>
-            <a:ext cx="658368" cy="228600"/>
-          </a:xfrm>
-          <a:prstGeom prst="rect">
-            <a:avLst/>
-          </a:prstGeom>
-          <a:noFill/>
-          <a:ln/>
-        </p:spPr>
-        <p:txBody>
-          <a:bodyPr wrap="square" lIns="0" tIns="0" rIns="0" bIns="0" rtlCol="0" anchor="ctr"/>
-          <a:lstStyle/>
-          <a:p>
-            <a:pPr algn="ctr" indent="0" marL="0">
-              <a:buNone/>
-            </a:pPr>
-            <a:r>
-              <a:rPr lang="en-US" sz="900" b="1" dirty="0">
-                <a:solidFill>
-                  <a:srgbClr val="16A34A"/>
-                </a:solidFill>
-                <a:latin typeface="Arial" pitchFamily="34" charset="0"/>
-                <a:ea typeface="Arial" pitchFamily="34" charset="-122"/>
-                <a:cs typeface="Arial" pitchFamily="34" charset="-120"/>
-              </a:rPr>
-              <a:t>10件+</a:t>
-            </a:r>
-            <a:endParaRPr lang="en-US" sz="900" dirty="0"/>
-          </a:p>
-        </p:txBody>
-      </p:sp>
-      <p:sp>
-        <p:nvSpPr>
-          <p:cNvPr id="37" name="Text 35"/>
-          <p:cNvSpPr/>
-          <p:nvPr/>
-        </p:nvSpPr>
-        <p:spPr>
-          <a:xfrm>
-            <a:off x="3429000" y="2953512"/>
-            <a:ext cx="1645920" cy="274320"/>
-          </a:xfrm>
-          <a:prstGeom prst="rect">
-            <a:avLst/>
-          </a:prstGeom>
-          <a:noFill/>
-          <a:ln/>
-        </p:spPr>
-        <p:txBody>
-          <a:bodyPr wrap="square" lIns="0" tIns="0" rIns="0" bIns="0" rtlCol="0" anchor="ctr"/>
-          <a:lstStyle/>
-          <a:p>
-            <a:pPr indent="0" marL="0">
-              <a:buNone/>
-            </a:pPr>
-            <a:r>
-              <a:rPr lang="en-US" sz="1300" b="1" dirty="0">
-                <a:solidFill>
-                  <a:srgbClr val="1A2744"/>
-                </a:solidFill>
-                <a:latin typeface="Arial" pitchFamily="34" charset="0"/>
-                <a:ea typeface="Arial" pitchFamily="34" charset="-122"/>
-                <a:cs typeface="Arial" pitchFamily="34" charset="-120"/>
-              </a:rPr>
-              <a:t>朝食</a:t>
-            </a:r>
-            <a:endParaRPr lang="en-US" sz="1300" dirty="0"/>
-          </a:p>
-        </p:txBody>
-      </p:sp>
-      <p:sp>
-        <p:nvSpPr>
-          <p:cNvPr id="38" name="Text 36"/>
-          <p:cNvSpPr/>
-          <p:nvPr/>
-        </p:nvSpPr>
-        <p:spPr>
-          <a:xfrm>
-            <a:off x="3429000" y="3246120"/>
-            <a:ext cx="2377440" cy="365760"/>
-          </a:xfrm>
-          <a:prstGeom prst="rect">
-            <a:avLst/>
-          </a:prstGeom>
-          <a:noFill/>
-          <a:ln/>
-        </p:spPr>
-        <p:txBody>
-          <a:bodyPr wrap="square" lIns="0" tIns="0" rIns="0" bIns="0" rtlCol="0" anchor="ctr"/>
-          <a:lstStyle/>
-          <a:p>
-            <a:pPr indent="0" marL="0">
-              <a:buNone/>
-            </a:pPr>
-            <a:r>
-              <a:rPr lang="en-US" sz="900" dirty="0">
-                <a:solidFill>
-                  <a:srgbClr val="64748B"/>
-                </a:solidFill>
-                <a:latin typeface="Arial" pitchFamily="34" charset="0"/>
-                <a:ea typeface="Arial" pitchFamily="34" charset="-122"/>
-                <a:cs typeface="Arial" pitchFamily="34" charset="-120"/>
-              </a:rPr>
-              <a:t>Breakfast was great</a:t>
-            </a:r>
-            <a:endParaRPr lang="en-US" sz="900" dirty="0"/>
-          </a:p>
-        </p:txBody>
-      </p:sp>
-      <p:sp>
-        <p:nvSpPr>
-          <p:cNvPr id="39" name="Text 37"/>
-          <p:cNvSpPr/>
-          <p:nvPr/>
-        </p:nvSpPr>
-        <p:spPr>
-          <a:xfrm>
-            <a:off x="3429000" y="3657600"/>
-            <a:ext cx="2377440" cy="640080"/>
-          </a:xfrm>
-          <a:prstGeom prst="rect">
-            <a:avLst/>
-          </a:prstGeom>
-          <a:noFill/>
-          <a:ln/>
-        </p:spPr>
-        <p:txBody>
-          <a:bodyPr wrap="square" lIns="0" tIns="0" rIns="0" bIns="0" rtlCol="0" anchor="ctr"/>
-          <a:lstStyle/>
-          <a:p>
-            <a:pPr indent="0" marL="0">
-              <a:buNone/>
-            </a:pPr>
-            <a:r>
-              <a:rPr lang="en-US" sz="900" i="1" dirty="0">
-                <a:solidFill>
-                  <a:srgbClr val="3B7DD8"/>
-                </a:solidFill>
-                <a:latin typeface="Arial" pitchFamily="34" charset="0"/>
-                <a:ea typeface="Arial" pitchFamily="34" charset="-122"/>
-                <a:cs typeface="Arial" pitchFamily="34" charset="-120"/>
-              </a:rPr>
-              <a:t>「Cleanliness, convenience, breakfast」</a:t>
-            </a:r>
-            <a:endParaRPr lang="en-US" sz="900" dirty="0"/>
-          </a:p>
-        </p:txBody>
-      </p:sp>
-      <p:sp>
-        <p:nvSpPr>
-          <p:cNvPr id="40" name="Shape 38"/>
-          <p:cNvSpPr/>
-          <p:nvPr/>
-        </p:nvSpPr>
-        <p:spPr>
-          <a:xfrm>
-            <a:off x="6126480" y="2880360"/>
-            <a:ext cx="2651760" cy="1600200"/>
-          </a:xfrm>
-          <a:prstGeom prst="rect">
-            <a:avLst/>
-          </a:prstGeom>
-          <a:solidFill>
-            <a:srgbClr val="FFFFFF"/>
-          </a:solidFill>
-          <a:ln/>
-          <a:effectLst>
-            <a:outerShdw sx="100000" sy="100000" kx="0" ky="0" algn="bl" rotWithShape="0" blurRad="50800" dist="25400" dir="8100000">
-              <a:srgbClr val="000000">
-                <a:alpha val="10000"/>
-              </a:srgbClr>
-            </a:outerShdw>
-          </a:effectLst>
-        </p:spPr>
-      </p:sp>
-      <p:sp>
-        <p:nvSpPr>
-          <p:cNvPr id="41" name="Shape 39"/>
-          <p:cNvSpPr/>
-          <p:nvPr/>
-        </p:nvSpPr>
-        <p:spPr>
-          <a:xfrm>
-            <a:off x="6126480" y="2880360"/>
-            <a:ext cx="54864" cy="1600200"/>
-          </a:xfrm>
-          <a:prstGeom prst="rect">
-            <a:avLst/>
-          </a:prstGeom>
-          <a:solidFill>
-            <a:srgbClr val="16A34A"/>
-          </a:solidFill>
-          <a:ln/>
-        </p:spPr>
-      </p:sp>
-      <p:sp>
-        <p:nvSpPr>
-          <p:cNvPr id="42" name="Shape 40"/>
-          <p:cNvSpPr/>
-          <p:nvPr/>
-        </p:nvSpPr>
-        <p:spPr>
-          <a:xfrm>
-            <a:off x="7955280" y="2953512"/>
-            <a:ext cx="658368" cy="228600"/>
-          </a:xfrm>
-          <a:prstGeom prst="rect">
-            <a:avLst/>
-          </a:prstGeom>
-          <a:solidFill>
-            <a:srgbClr val="DCFCE7"/>
-          </a:solidFill>
-          <a:ln/>
-        </p:spPr>
-      </p:sp>
-      <p:sp>
-        <p:nvSpPr>
-          <p:cNvPr id="43" name="Text 41"/>
-          <p:cNvSpPr/>
-          <p:nvPr/>
-        </p:nvSpPr>
-        <p:spPr>
-          <a:xfrm>
-            <a:off x="7955280" y="2953512"/>
-            <a:ext cx="658368" cy="228600"/>
-          </a:xfrm>
-          <a:prstGeom prst="rect">
-            <a:avLst/>
-          </a:prstGeom>
-          <a:noFill/>
-          <a:ln/>
-        </p:spPr>
-        <p:txBody>
-          <a:bodyPr wrap="square" lIns="0" tIns="0" rIns="0" bIns="0" rtlCol="0" anchor="ctr"/>
-          <a:lstStyle/>
-          <a:p>
-            <a:pPr algn="ctr" indent="0" marL="0">
-              <a:buNone/>
-            </a:pPr>
-            <a:r>
-              <a:rPr lang="en-US" sz="900" b="1" dirty="0">
-                <a:solidFill>
-                  <a:srgbClr val="16A34A"/>
-                </a:solidFill>
-                <a:latin typeface="Arial" pitchFamily="34" charset="0"/>
-                <a:ea typeface="Arial" pitchFamily="34" charset="-122"/>
-                <a:cs typeface="Arial" pitchFamily="34" charset="-120"/>
-              </a:rPr>
-              <a:t>9件</a:t>
             </a:r>
             <a:endParaRPr lang="en-US" sz="900" dirty="0"/>
           </a:p>
@@ -12719,7 +12753,7 @@
                           <a:ea typeface="Arial" pitchFamily="34" charset="-122"/>
                           <a:cs typeface="Arial" pitchFamily="34" charset="-120"/>
                         </a:rPr>
-                        <a:t>16件</a:t>
+                        <a:t>21件</a:t>
                       </a:r>
                       <a:endParaRPr lang="en-US" sz="900" dirty="0">
                         <a:latin typeface="Arial" charset="0"/>
@@ -12993,7 +13027,7 @@
                           <a:ea typeface="Arial" pitchFamily="34" charset="-122"/>
                           <a:cs typeface="Arial" pitchFamily="34" charset="-120"/>
                         </a:rPr>
-                        <a:t>5件</a:t>
+                        <a:t>8件</a:t>
                       </a:r>
                       <a:endParaRPr lang="en-US" sz="900" dirty="0">
                         <a:latin typeface="Arial" charset="0"/>
@@ -13267,7 +13301,7 @@
                           <a:ea typeface="Arial" pitchFamily="34" charset="-122"/>
                           <a:cs typeface="Arial" pitchFamily="34" charset="-120"/>
                         </a:rPr>
-                        <a:t>3件</a:t>
+                        <a:t>6件</a:t>
                       </a:r>
                       <a:endParaRPr lang="en-US" sz="900" dirty="0">
                         <a:latin typeface="Arial" charset="0"/>
@@ -13405,7 +13439,7 @@
                           <a:ea typeface="Arial" pitchFamily="34" charset="-122"/>
                           <a:cs typeface="Arial" pitchFamily="34" charset="-120"/>
                         </a:rPr>
-                        <a:t>防音性能</a:t>
+                        <a:t>対応・サービスの不満</a:t>
                       </a:r>
                       <a:endParaRPr lang="en-US" sz="900" dirty="0">
                         <a:latin typeface="Arial" charset="0"/>
@@ -13473,7 +13507,7 @@
                           <a:ea typeface="Arial" pitchFamily="34" charset="-122"/>
                           <a:cs typeface="Arial" pitchFamily="34" charset="-120"/>
                         </a:rPr>
-                        <a:t>The luggage store was easy to use and convenient 最初の夜は隣室か...</a:t>
+                        <a:t>みたいな感じでしたが、敷地内は禁煙ですと、毅然とした態度を示し、外国人は退散しました</a:t>
                       </a:r>
                       <a:endParaRPr lang="en-US" sz="900" dirty="0">
                         <a:latin typeface="Arial" charset="0"/>
@@ -13541,7 +13575,7 @@
                           <a:ea typeface="Arial" pitchFamily="34" charset="-122"/>
                           <a:cs typeface="Arial" pitchFamily="34" charset="-120"/>
                         </a:rPr>
-                        <a:t>2件</a:t>
+                        <a:t>6件</a:t>
                       </a:r>
                       <a:endParaRPr lang="en-US" sz="900" dirty="0">
                         <a:latin typeface="Arial" charset="0"/>
@@ -13679,7 +13713,7 @@
                           <a:ea typeface="Arial" pitchFamily="34" charset="-122"/>
                           <a:cs typeface="Arial" pitchFamily="34" charset="-120"/>
                         </a:rPr>
-                        <a:t>臭い・匂い</a:t>
+                        <a:t>防音性能</a:t>
                       </a:r>
                       <a:endParaRPr lang="en-US" sz="900" dirty="0">
                         <a:latin typeface="Arial" charset="0"/>
@@ -13747,7 +13781,7 @@
                           <a:ea typeface="Arial" pitchFamily="34" charset="-122"/>
                           <a:cs typeface="Arial" pitchFamily="34" charset="-120"/>
                         </a:rPr>
-                        <a:t>外国人の方の利用が多いようで不安でしたが、たまたま玄関先でタバコを吸っている外国人3人が居る所に遭遇したのですが、...</a:t>
+                        <a:t>The luggage store was easy to use and convenient 最初の夜は隣室か...</a:t>
                       </a:r>
                       <a:endParaRPr lang="en-US" sz="900" dirty="0">
                         <a:latin typeface="Arial" charset="0"/>
@@ -13815,7 +13849,7 @@
                           <a:ea typeface="Arial" pitchFamily="34" charset="-122"/>
                           <a:cs typeface="Arial" pitchFamily="34" charset="-120"/>
                         </a:rPr>
-                        <a:t>2件</a:t>
+                        <a:t>3件</a:t>
                       </a:r>
                       <a:endParaRPr lang="en-US" sz="900" dirty="0">
                         <a:latin typeface="Arial" charset="0"/>
@@ -13953,7 +13987,7 @@
                           <a:ea typeface="Arial" pitchFamily="34" charset="-122"/>
                           <a:cs typeface="Arial" pitchFamily="34" charset="-120"/>
                         </a:rPr>
-                        <a:t>対応・サービスの不満</a:t>
+                        <a:t>臭い・匂い</a:t>
                       </a:r>
                       <a:endParaRPr lang="en-US" sz="900" dirty="0">
                         <a:latin typeface="Arial" charset="0"/>
@@ -14021,7 +14055,7 @@
                           <a:ea typeface="Arial" pitchFamily="34" charset="-122"/>
                           <a:cs typeface="Arial" pitchFamily="34" charset="-120"/>
                         </a:rPr>
-                        <a:t>みたいな感じでしたが、敷地内は禁煙ですと、毅然とした態度を示し、外国人は退散しました</a:t>
+                        <a:t>外国人の方の利用が多いようで不安でしたが、たまたま玄関先でタバコを吸っている外国人3人が居る所に遭遇したのですが、...</a:t>
                       </a:r>
                       <a:endParaRPr lang="en-US" sz="900" dirty="0">
                         <a:latin typeface="Arial" charset="0"/>

--- a/納品レポート/ホテル別レポート/comfort_era_higashikanda_口コミ分析レポート.pptx
+++ b/納品レポート/ホテル別レポート/comfort_era_higashikanda_口コミ分析レポート.pptx
@@ -2818,7 +2818,7 @@
                 <a:ea typeface="Arial" pitchFamily="34" charset="-122"/>
                 <a:cs typeface="Arial" pitchFamily="34" charset="-120"/>
               </a:rPr>
-              <a:t>作成日：2026年4月6日</a:t>
+              <a:t>作成日：2026年4月7日</a:t>
             </a:r>
             <a:endParaRPr lang="en-US" sz="1000" dirty="0"/>
           </a:p>

--- a/納品レポート/ホテル別レポート/comfort_era_higashikanda_口コミ分析レポート.pptx
+++ b/納品レポート/ホテル別レポート/comfort_era_higashikanda_口コミ分析レポート.pptx
@@ -189,10 +189,10 @@
                     <c:v>Trip.com</c:v>
                   </c:pt>
                   <c:pt idx="3">
-                    <c:v>Booking.com</c:v>
+                    <c:v>楽天トラベル</c:v>
                   </c:pt>
                   <c:pt idx="4">
-                    <c:v>楽天トラベル</c:v>
+                    <c:v>Booking.com</c:v>
                   </c:pt>
                   <c:pt idx="5">
                     <c:v>Google</c:v>
@@ -214,16 +214,16 @@
                   <c:v>10</c:v>
                 </c:pt>
                 <c:pt idx="2">
-                  <c:v>9.81</c:v>
+                  <c:v>9.61</c:v>
                 </c:pt>
                 <c:pt idx="3">
-                  <c:v>8.91</c:v>
+                  <c:v>9</c:v>
                 </c:pt>
                 <c:pt idx="4">
-                  <c:v>8.67</c:v>
+                  <c:v>8.97</c:v>
                 </c:pt>
                 <c:pt idx="5">
-                  <c:v>7.82</c:v>
+                  <c:v>7.5</c:v>
                 </c:pt>
               </c:numCache>
             </c:numRef>
@@ -566,10 +566,10 @@
               <c:numCache>
                 <c:ptCount val="3"/>
                 <c:pt idx="0">
-                  <c:v>109</c:v>
+                  <c:v>72</c:v>
                 </c:pt>
                 <c:pt idx="1">
-                  <c:v>11</c:v>
+                  <c:v>4</c:v>
                 </c:pt>
                 <c:pt idx="2">
                   <c:v>5</c:v>
@@ -741,7 +741,7 @@
             <c:bubble3D val="0"/>
             <c:spPr>
               <a:solidFill>
-                <a:srgbClr val="D4A843"/>
+                <a:srgbClr val="DC2626"/>
               </a:solidFill>
               <a:effectLst/>
             </c:spPr>
@@ -768,22 +768,11 @@
               <a:effectLst/>
             </c:spPr>
           </c:dPt>
-          <c:dPt>
-            <c:idx val="8"/>
-            <c:invertIfNegative val="0"/>
-            <c:bubble3D val="0"/>
-            <c:spPr>
-              <a:solidFill>
-                <a:srgbClr val="DC2626"/>
-              </a:solidFill>
-              <a:effectLst/>
-            </c:spPr>
-          </c:dPt>
           <c:cat>
             <c:multiLvlStrRef>
-              <c:f>Sheet1!$A$2:$A$10</c:f>
+              <c:f>Sheet1!$A$2:$A$9</c:f>
               <c:multiLvlStrCache>
-                <c:ptCount val="9"/>
+                <c:ptCount val="8"/>
                 <c:lvl>
                   <c:pt idx="0">
                     <c:v>10点</c:v>
@@ -801,15 +790,12 @@
                     <c:v>6点</c:v>
                   </c:pt>
                   <c:pt idx="5">
-                    <c:v>5点</c:v>
+                    <c:v>4点</c:v>
                   </c:pt>
                   <c:pt idx="6">
-                    <c:v>4点</c:v>
+                    <c:v>3点</c:v>
                   </c:pt>
                   <c:pt idx="7">
-                    <c:v>3点</c:v>
-                  </c:pt>
-                  <c:pt idx="8">
                     <c:v>2点</c:v>
                   </c:pt>
                 </c:lvl>
@@ -818,24 +804,24 @@
           </c:cat>
           <c:val>
             <c:numRef>
-              <c:f>Sheet1!$B$2:$B$10</c:f>
+              <c:f>Sheet1!$B$2:$B$9</c:f>
               <c:numCache>
                 <c:formatCode>General</c:formatCode>
-                <c:ptCount val="9"/>
+                <c:ptCount val="8"/>
                 <c:pt idx="0">
-                  <c:v>72</c:v>
+                  <c:v>48</c:v>
                 </c:pt>
                 <c:pt idx="1">
-                  <c:v>15</c:v>
+                  <c:v>5</c:v>
                 </c:pt>
                 <c:pt idx="2">
-                  <c:v>22</c:v>
+                  <c:v>19</c:v>
                 </c:pt>
                 <c:pt idx="3">
-                  <c:v>7</c:v>
+                  <c:v>3</c:v>
                 </c:pt>
                 <c:pt idx="4">
-                  <c:v>3</c:v>
+                  <c:v>1</c:v>
                 </c:pt>
                 <c:pt idx="5">
                   <c:v>1</c:v>
@@ -844,9 +830,6 @@
                   <c:v>1</c:v>
                 </c:pt>
                 <c:pt idx="7">
-                  <c:v>1</c:v>
-                </c:pt>
-                <c:pt idx="8">
                   <c:v>3</c:v>
                 </c:pt>
               </c:numCache>
@@ -2778,7 +2761,7 @@
                 <a:ea typeface="Arial" pitchFamily="34" charset="-122"/>
                 <a:cs typeface="Arial" pitchFamily="34" charset="-120"/>
               </a:rPr>
-              <a:t>分析対象期間：2026年2月〜3月</a:t>
+              <a:t>分析対象期間：2026年3月〜4月</a:t>
             </a:r>
             <a:endParaRPr lang="en-US" sz="1000" dirty="0"/>
           </a:p>
@@ -2798,7 +2781,7 @@
                 <a:ea typeface="Arial" pitchFamily="34" charset="-122"/>
                 <a:cs typeface="Arial" pitchFamily="34" charset="-120"/>
               </a:rPr>
-              <a:t>レビュー総数：125件（6サイト）</a:t>
+              <a:t>レビュー総数：81件（6サイト）</a:t>
             </a:r>
             <a:endParaRPr lang="en-US" sz="1000" dirty="0"/>
           </a:p>
@@ -2818,7 +2801,7 @@
                 <a:ea typeface="Arial" pitchFamily="34" charset="-122"/>
                 <a:cs typeface="Arial" pitchFamily="34" charset="-120"/>
               </a:rPr>
-              <a:t>作成日：2026年4月7日</a:t>
+              <a:t>作成日：2026年4月8日</a:t>
             </a:r>
             <a:endParaRPr lang="en-US" sz="1000" dirty="0"/>
           </a:p>
@@ -3364,7 +3347,7 @@
                           <a:ea typeface="Arial" pitchFamily="34" charset="-122"/>
                           <a:cs typeface="Arial" pitchFamily="34" charset="-120"/>
                         </a:rPr>
-                        <a:t>8.93点</a:t>
+                        <a:t>8.85点</a:t>
                       </a:r>
                       <a:endParaRPr lang="en-US" sz="1000" dirty="0">
                         <a:latin typeface="Arial" charset="0"/>
@@ -3638,7 +3621,7 @@
                           <a:ea typeface="Arial" pitchFamily="34" charset="-122"/>
                           <a:cs typeface="Arial" pitchFamily="34" charset="-120"/>
                         </a:rPr>
-                        <a:t>87.2%</a:t>
+                        <a:t>88.9%</a:t>
                       </a:r>
                       <a:endParaRPr lang="en-US" sz="1000" dirty="0">
                         <a:latin typeface="Arial" charset="0"/>
@@ -3706,7 +3689,7 @@
                           <a:ea typeface="Arial" pitchFamily="34" charset="-122"/>
                           <a:cs typeface="Arial" pitchFamily="34" charset="-120"/>
                         </a:rPr>
-                        <a:t>92%以上</a:t>
+                        <a:t>94%以上</a:t>
                       </a:r>
                       <a:endParaRPr lang="en-US" sz="1000" dirty="0">
                         <a:latin typeface="Arial" charset="0"/>
@@ -3912,7 +3895,7 @@
                           <a:ea typeface="Arial" pitchFamily="34" charset="-122"/>
                           <a:cs typeface="Arial" pitchFamily="34" charset="-120"/>
                         </a:rPr>
-                        <a:t>4.0%</a:t>
+                        <a:t>6.2%</a:t>
                       </a:r>
                       <a:endParaRPr lang="en-US" sz="1000" dirty="0">
                         <a:latin typeface="Arial" charset="0"/>
@@ -3980,7 +3963,7 @@
                           <a:ea typeface="Arial" pitchFamily="34" charset="-122"/>
                           <a:cs typeface="Arial" pitchFamily="34" charset="-120"/>
                         </a:rPr>
-                        <a:t>1%以下</a:t>
+                        <a:t>3%以下</a:t>
                       </a:r>
                       <a:endParaRPr lang="en-US" sz="1000" dirty="0">
                         <a:latin typeface="Arial" charset="0"/>
@@ -4186,7 +4169,7 @@
                           <a:ea typeface="Arial" pitchFamily="34" charset="-122"/>
                           <a:cs typeface="Arial" pitchFamily="34" charset="-120"/>
                         </a:rPr>
-                        <a:t>7.8点</a:t>
+                        <a:t>7.5点</a:t>
                       </a:r>
                       <a:endParaRPr lang="en-US" sz="1000" dirty="0">
                         <a:latin typeface="Arial" charset="0"/>
@@ -4254,7 +4237,7 @@
                           <a:ea typeface="Arial" pitchFamily="34" charset="-122"/>
                           <a:cs typeface="Arial" pitchFamily="34" charset="-120"/>
                         </a:rPr>
-                        <a:t>8.8点以上</a:t>
+                        <a:t>8.5点以上</a:t>
                       </a:r>
                       <a:endParaRPr lang="en-US" sz="1000" dirty="0">
                         <a:latin typeface="Arial" charset="0"/>
@@ -5373,7 +5356,7 @@
                 <a:ea typeface="Arial" pitchFamily="34" charset="-122"/>
                 <a:cs typeface="Arial" pitchFamily="34" charset="-120"/>
               </a:rPr>
-              <a:t>8.93</a:t>
+              <a:t>8.85</a:t>
             </a:r>
             <a:endParaRPr lang="en-US" sz="3200" dirty="0"/>
           </a:p>
@@ -5498,7 +5481,7 @@
                 <a:ea typeface="Arial" pitchFamily="34" charset="-122"/>
                 <a:cs typeface="Arial" pitchFamily="34" charset="-120"/>
               </a:rPr>
-              <a:t>87.2%</a:t>
+              <a:t>88.9%</a:t>
             </a:r>
             <a:endParaRPr lang="en-US" sz="3200" dirty="0"/>
           </a:p>
@@ -5546,7 +5529,7 @@
             <a:avLst/>
           </a:prstGeom>
           <a:solidFill>
-            <a:srgbClr val="16A34A"/>
+            <a:srgbClr val="DC2626"/>
           </a:solidFill>
           <a:ln/>
         </p:spPr>
@@ -5617,13 +5600,13 @@
             <a:r>
               <a:rPr lang="en-US" sz="3200" b="1" dirty="0">
                 <a:solidFill>
-                  <a:srgbClr val="16A34A"/>
+                  <a:srgbClr val="DC2626"/>
                 </a:solidFill>
                 <a:latin typeface="Arial" pitchFamily="34" charset="0"/>
                 <a:ea typeface="Arial" pitchFamily="34" charset="-122"/>
                 <a:cs typeface="Arial" pitchFamily="34" charset="-120"/>
               </a:rPr>
-              <a:t>4.0%</a:t>
+              <a:t>6.2%</a:t>
             </a:r>
             <a:endParaRPr lang="en-US" sz="3200" dirty="0"/>
           </a:p>
@@ -5748,7 +5731,7 @@
                 <a:ea typeface="Arial" pitchFamily="34" charset="-122"/>
                 <a:cs typeface="Arial" pitchFamily="34" charset="-120"/>
               </a:rPr>
-              <a:t>125件</a:t>
+              <a:t>81件</a:t>
             </a:r>
             <a:endParaRPr lang="en-US" sz="3200" dirty="0"/>
           </a:p>
@@ -5896,7 +5879,7 @@
                 <a:ea typeface="Arial" pitchFamily="34" charset="-122"/>
                 <a:cs typeface="Arial" pitchFamily="34" charset="-120"/>
               </a:rPr>
-              <a:t>  Close to the shops</a:t>
+              <a:t>  立地も抜群で、近くに複数の駅があり、秋葉原や上野へも徒歩圏内です</a:t>
             </a:r>
             <a:endParaRPr lang="en-US" sz="1100" dirty="0"/>
           </a:p>
@@ -5936,7 +5919,7 @@
                 <a:ea typeface="Arial" pitchFamily="34" charset="-122"/>
                 <a:cs typeface="Arial" pitchFamily="34" charset="-120"/>
               </a:rPr>
-              <a:t>  ホテルの方々が本当に親切でした</a:t>
+              <a:t>  受付スタッフは親切で気配りが行き届いており、常にカウンターにいました</a:t>
             </a:r>
             <a:endParaRPr lang="en-US" sz="1100" dirty="0"/>
           </a:p>
@@ -5976,7 +5959,7 @@
                 <a:ea typeface="Arial" pitchFamily="34" charset="-122"/>
                 <a:cs typeface="Arial" pitchFamily="34" charset="-120"/>
               </a:rPr>
-              <a:t>  Cleanliness, convenience, breakfast</a:t>
+              <a:t>  部屋は常に清潔に保たれており、毎日のメイクアップサービスも行き届いていました</a:t>
             </a:r>
             <a:endParaRPr lang="en-US" sz="1100" dirty="0"/>
           </a:p>
@@ -6124,7 +6107,47 @@
                 <a:ea typeface="Arial" pitchFamily="34" charset="-122"/>
                 <a:cs typeface="Arial" pitchFamily="34" charset="-120"/>
               </a:rPr>
-              <a:t>  Good hotel had everything needed for a Tokyo stay 良いホテルで、...</a:t>
+              <a:t>  I stayed here as a solo traveller and felt safe walking b...</a:t>
+            </a:r>
+            <a:endParaRPr lang="en-US" sz="1100" dirty="0"/>
+          </a:p>
+          <a:p>
+            <a:pPr indent="0" marL="0">
+              <a:spcAft>
+                <a:spcPts val="200"/>
+              </a:spcAft>
+              <a:buNone/>
+            </a:pPr>
+            <a:r>
+              <a:rPr lang="en-US" sz="1100" b="1" dirty="0">
+                <a:solidFill>
+                  <a:srgbClr val="334155"/>
+                </a:solidFill>
+                <a:latin typeface="Arial" pitchFamily="34" charset="0"/>
+                <a:ea typeface="Arial" pitchFamily="34" charset="-122"/>
+                <a:cs typeface="Arial" pitchFamily="34" charset="-120"/>
+              </a:rPr>
+              <a:t>部屋の狭さ </a:t>
+            </a:r>
+            <a:endParaRPr lang="en-US" sz="1100" dirty="0"/>
+          </a:p>
+          <a:p>
+            <a:pPr indent="0" marL="0">
+              <a:spcAft>
+                <a:spcPts val="200"/>
+              </a:spcAft>
+              <a:buNone/>
+            </a:pPr>
+            <a:r>
+              <a:rPr lang="en-US" sz="900" dirty="0">
+                <a:solidFill>
+                  <a:srgbClr val="64748B"/>
+                </a:solidFill>
+                <a:latin typeface="Arial" pitchFamily="34" charset="0"/>
+                <a:ea typeface="Arial" pitchFamily="34" charset="-122"/>
+                <a:cs typeface="Arial" pitchFamily="34" charset="-120"/>
+              </a:rPr>
+              <a:t>  客室は典型的な東京の部屋で、やや狭めです</a:t>
             </a:r>
             <a:endParaRPr lang="en-US" sz="1100" dirty="0"/>
           </a:p>
@@ -6164,47 +6187,7 @@
                 <a:ea typeface="Arial" pitchFamily="34" charset="-122"/>
                 <a:cs typeface="Arial" pitchFamily="34" charset="-120"/>
               </a:rPr>
-              <a:t>  14時から17時までにチェックインすると人形焼が無料でもらえます🆓 ラウンジは広くウェルカムドリンクが飲み放題で...</a:t>
-            </a:r>
-            <a:endParaRPr lang="en-US" sz="1100" dirty="0"/>
-          </a:p>
-          <a:p>
-            <a:pPr indent="0" marL="0">
-              <a:spcAft>
-                <a:spcPts val="200"/>
-              </a:spcAft>
-              <a:buNone/>
-            </a:pPr>
-            <a:r>
-              <a:rPr lang="en-US" sz="1100" b="1" dirty="0">
-                <a:solidFill>
-                  <a:srgbClr val="334155"/>
-                </a:solidFill>
-                <a:latin typeface="Arial" pitchFamily="34" charset="0"/>
-                <a:ea typeface="Arial" pitchFamily="34" charset="-122"/>
-                <a:cs typeface="Arial" pitchFamily="34" charset="-120"/>
-              </a:rPr>
-              <a:t>部屋の狭さ </a:t>
-            </a:r>
-            <a:endParaRPr lang="en-US" sz="1100" dirty="0"/>
-          </a:p>
-          <a:p>
-            <a:pPr indent="0" marL="0">
-              <a:spcAft>
-                <a:spcPts val="200"/>
-              </a:spcAft>
-              <a:buNone/>
-            </a:pPr>
-            <a:r>
-              <a:rPr lang="en-US" sz="900" dirty="0">
-                <a:solidFill>
-                  <a:srgbClr val="64748B"/>
-                </a:solidFill>
-                <a:latin typeface="Arial" pitchFamily="34" charset="0"/>
-                <a:ea typeface="Arial" pitchFamily="34" charset="-122"/>
-                <a:cs typeface="Arial" pitchFamily="34" charset="-120"/>
-              </a:rPr>
-              <a:t>  欧米人で、アメリカのホテルのような快適さに慣れている方にとっては、特に窮屈に感じるかもしれません</a:t>
+              <a:t>  唯一の小さな難点は、シャワー中に排水溝から時折下水の臭いがすることでしたが、それほど強い臭いではなく、耐えられない...</a:t>
             </a:r>
             <a:endParaRPr lang="en-US" sz="1100" dirty="0"/>
           </a:p>
@@ -6557,7 +6540,7 @@
                 <a:ea typeface="Arial" pitchFamily="34" charset="-122"/>
                 <a:cs typeface="Arial" pitchFamily="34" charset="-120"/>
               </a:rPr>
-              <a:t>8.93</a:t>
+              <a:t>8.85</a:t>
             </a:r>
             <a:endParaRPr lang="en-US" sz="3200" dirty="0"/>
           </a:p>
@@ -6682,7 +6665,7 @@
                 <a:ea typeface="Arial" pitchFamily="34" charset="-122"/>
                 <a:cs typeface="Arial" pitchFamily="34" charset="-120"/>
               </a:rPr>
-              <a:t>87.2%</a:t>
+              <a:t>88.9%</a:t>
             </a:r>
             <a:endParaRPr lang="en-US" sz="3200" dirty="0"/>
           </a:p>
@@ -6730,7 +6713,7 @@
             <a:avLst/>
           </a:prstGeom>
           <a:solidFill>
-            <a:srgbClr val="16A34A"/>
+            <a:srgbClr val="DC2626"/>
           </a:solidFill>
           <a:ln/>
         </p:spPr>
@@ -6801,13 +6784,13 @@
             <a:r>
               <a:rPr lang="en-US" sz="3200" b="1" dirty="0">
                 <a:solidFill>
-                  <a:srgbClr val="16A34A"/>
+                  <a:srgbClr val="DC2626"/>
                 </a:solidFill>
                 <a:latin typeface="Arial" pitchFamily="34" charset="0"/>
                 <a:ea typeface="Arial" pitchFamily="34" charset="-122"/>
                 <a:cs typeface="Arial" pitchFamily="34" charset="-120"/>
               </a:rPr>
-              <a:t>4.0%</a:t>
+              <a:t>6.2%</a:t>
             </a:r>
             <a:endParaRPr lang="en-US" sz="3200" dirty="0"/>
           </a:p>
@@ -6932,7 +6915,7 @@
                 <a:ea typeface="Arial" pitchFamily="34" charset="-122"/>
                 <a:cs typeface="Arial" pitchFamily="34" charset="-120"/>
               </a:rPr>
-              <a:t>125件</a:t>
+              <a:t>81件</a:t>
             </a:r>
             <a:endParaRPr lang="en-US" sz="3200" dirty="0"/>
           </a:p>
@@ -7402,7 +7385,7 @@
                 <a:ea typeface="Arial" pitchFamily="34" charset="-122"/>
                 <a:cs typeface="Arial" pitchFamily="34" charset="-120"/>
               </a:rPr>
-              <a:t>Google(7.8)が相対的に低い。口コミ返信の強化が急務</a:t>
+              <a:t>Google(7.5)が相対的に低い。口コミ返信の強化が急務</a:t>
             </a:r>
             <a:endParaRPr lang="en-US" sz="1100" dirty="0"/>
           </a:p>
@@ -7911,7 +7894,7 @@
                           <a:ea typeface="Arial" pitchFamily="34" charset="-122"/>
                           <a:cs typeface="Arial" pitchFamily="34" charset="-120"/>
                         </a:rPr>
-                        <a:t>2</a:t>
+                        <a:t>1</a:t>
                       </a:r>
                       <a:endParaRPr lang="en-US" sz="900" dirty="0">
                         <a:latin typeface="Arial" charset="0"/>
@@ -8253,7 +8236,7 @@
                           <a:ea typeface="Arial" pitchFamily="34" charset="-122"/>
                           <a:cs typeface="Arial" pitchFamily="34" charset="-120"/>
                         </a:rPr>
-                        <a:t>2</a:t>
+                        <a:t>1</a:t>
                       </a:r>
                       <a:endParaRPr lang="en-US" sz="900" dirty="0">
                         <a:latin typeface="Arial" charset="0"/>
@@ -8595,7 +8578,7 @@
                           <a:ea typeface="Arial" pitchFamily="34" charset="-122"/>
                           <a:cs typeface="Arial" pitchFamily="34" charset="-120"/>
                         </a:rPr>
-                        <a:t>26</a:t>
+                        <a:t>18</a:t>
                       </a:r>
                       <a:endParaRPr lang="en-US" sz="900" dirty="0">
                         <a:latin typeface="Arial" charset="0"/>
@@ -8663,7 +8646,7 @@
                           <a:ea typeface="Arial" pitchFamily="34" charset="-122"/>
                           <a:cs typeface="Arial" pitchFamily="34" charset="-120"/>
                         </a:rPr>
-                        <a:t>9.81</a:t>
+                        <a:t>9.61</a:t>
                       </a:r>
                       <a:endParaRPr lang="en-US" sz="900" dirty="0">
                         <a:latin typeface="Arial" charset="0"/>
@@ -8799,7 +8782,7 @@
                           <a:ea typeface="Arial" pitchFamily="34" charset="-122"/>
                           <a:cs typeface="Arial" pitchFamily="34" charset="-120"/>
                         </a:rPr>
-                        <a:t>9.81</a:t>
+                        <a:t>9.61</a:t>
                       </a:r>
                       <a:endParaRPr lang="en-US" sz="900" dirty="0">
                         <a:latin typeface="Arial" charset="0"/>
@@ -8847,6 +8830,348 @@
                     </a:lnB>
                     <a:solidFill>
                       <a:srgbClr val="E8EFF8"/>
+                    </a:solidFill>
+                  </a:tcPr>
+                </a:tc>
+              </a:tr>
+              <a:tr h="201168">
+                <a:tc>
+                  <a:txBody>
+                    <a:bodyPr/>
+                    <a:lstStyle/>
+                    <a:p>
+                      <a:pPr algn="ctr" indent="0" marL="0">
+                        <a:buNone/>
+                      </a:pPr>
+                      <a:r>
+                        <a:rPr lang="en-US" sz="900" dirty="0">
+                          <a:solidFill>
+                            <a:srgbClr val="000000"/>
+                          </a:solidFill>
+                          <a:latin typeface="Arial" pitchFamily="34" charset="0"/>
+                          <a:ea typeface="Arial" pitchFamily="34" charset="-122"/>
+                          <a:cs typeface="Arial" pitchFamily="34" charset="-120"/>
+                        </a:rPr>
+                        <a:t>楽天トラベル</a:t>
+                      </a:r>
+                      <a:endParaRPr lang="en-US" sz="900" dirty="0">
+                        <a:latin typeface="Arial" charset="0"/>
+                        <a:ea typeface="Arial" charset="0"/>
+                        <a:cs typeface="Arial" charset="0"/>
+                      </a:endParaRPr>
+                    </a:p>
+                  </a:txBody>
+                  <a:tcPr marL="91440" marR="91440" marT="45720" marB="45720">
+                    <a:lnL w="6350" cap="flat" cmpd="sng" algn="ctr">
+                      <a:solidFill>
+                        <a:srgbClr val="CBD5E1"/>
+                      </a:solidFill>
+                      <a:prstDash val="solid"/>
+                      <a:round/>
+                      <a:headEnd type="none" w="med" len="med"/>
+                      <a:tailEnd type="none" w="med" len="med"/>
+                    </a:lnL>
+                    <a:lnR w="6350" cap="flat" cmpd="sng" algn="ctr">
+                      <a:solidFill>
+                        <a:srgbClr val="CBD5E1"/>
+                      </a:solidFill>
+                      <a:prstDash val="solid"/>
+                      <a:round/>
+                      <a:headEnd type="none" w="med" len="med"/>
+                      <a:tailEnd type="none" w="med" len="med"/>
+                    </a:lnR>
+                    <a:lnT w="6350" cap="flat" cmpd="sng" algn="ctr">
+                      <a:solidFill>
+                        <a:srgbClr val="CBD5E1"/>
+                      </a:solidFill>
+                      <a:prstDash val="solid"/>
+                      <a:round/>
+                      <a:headEnd type="none" w="med" len="med"/>
+                      <a:tailEnd type="none" w="med" len="med"/>
+                    </a:lnT>
+                    <a:lnB w="6350" cap="flat" cmpd="sng" algn="ctr">
+                      <a:solidFill>
+                        <a:srgbClr val="CBD5E1"/>
+                      </a:solidFill>
+                      <a:prstDash val="solid"/>
+                      <a:round/>
+                      <a:headEnd type="none" w="med" len="med"/>
+                      <a:tailEnd type="none" w="med" len="med"/>
+                    </a:lnB>
+                    <a:solidFill>
+                      <a:srgbClr val="FFFFFF"/>
+                    </a:solidFill>
+                  </a:tcPr>
+                </a:tc>
+                <a:tc>
+                  <a:txBody>
+                    <a:bodyPr/>
+                    <a:lstStyle/>
+                    <a:p>
+                      <a:pPr algn="ctr" indent="0" marL="0">
+                        <a:buNone/>
+                      </a:pPr>
+                      <a:r>
+                        <a:rPr lang="en-US" sz="900" dirty="0">
+                          <a:solidFill>
+                            <a:srgbClr val="000000"/>
+                          </a:solidFill>
+                          <a:latin typeface="Arial" pitchFamily="34" charset="0"/>
+                          <a:ea typeface="Arial" pitchFamily="34" charset="-122"/>
+                          <a:cs typeface="Arial" pitchFamily="34" charset="-120"/>
+                        </a:rPr>
+                        <a:t>6</a:t>
+                      </a:r>
+                      <a:endParaRPr lang="en-US" sz="900" dirty="0">
+                        <a:latin typeface="Arial" charset="0"/>
+                        <a:ea typeface="Arial" charset="0"/>
+                        <a:cs typeface="Arial" charset="0"/>
+                      </a:endParaRPr>
+                    </a:p>
+                  </a:txBody>
+                  <a:tcPr marL="91440" marR="91440" marT="45720" marB="45720">
+                    <a:lnL w="6350" cap="flat" cmpd="sng" algn="ctr">
+                      <a:solidFill>
+                        <a:srgbClr val="CBD5E1"/>
+                      </a:solidFill>
+                      <a:prstDash val="solid"/>
+                      <a:round/>
+                      <a:headEnd type="none" w="med" len="med"/>
+                      <a:tailEnd type="none" w="med" len="med"/>
+                    </a:lnL>
+                    <a:lnR w="6350" cap="flat" cmpd="sng" algn="ctr">
+                      <a:solidFill>
+                        <a:srgbClr val="CBD5E1"/>
+                      </a:solidFill>
+                      <a:prstDash val="solid"/>
+                      <a:round/>
+                      <a:headEnd type="none" w="med" len="med"/>
+                      <a:tailEnd type="none" w="med" len="med"/>
+                    </a:lnR>
+                    <a:lnT w="6350" cap="flat" cmpd="sng" algn="ctr">
+                      <a:solidFill>
+                        <a:srgbClr val="CBD5E1"/>
+                      </a:solidFill>
+                      <a:prstDash val="solid"/>
+                      <a:round/>
+                      <a:headEnd type="none" w="med" len="med"/>
+                      <a:tailEnd type="none" w="med" len="med"/>
+                    </a:lnT>
+                    <a:lnB w="6350" cap="flat" cmpd="sng" algn="ctr">
+                      <a:solidFill>
+                        <a:srgbClr val="CBD5E1"/>
+                      </a:solidFill>
+                      <a:prstDash val="solid"/>
+                      <a:round/>
+                      <a:headEnd type="none" w="med" len="med"/>
+                      <a:tailEnd type="none" w="med" len="med"/>
+                    </a:lnB>
+                    <a:solidFill>
+                      <a:srgbClr val="FFFFFF"/>
+                    </a:solidFill>
+                  </a:tcPr>
+                </a:tc>
+                <a:tc>
+                  <a:txBody>
+                    <a:bodyPr/>
+                    <a:lstStyle/>
+                    <a:p>
+                      <a:pPr algn="ctr" indent="0" marL="0">
+                        <a:buNone/>
+                      </a:pPr>
+                      <a:r>
+                        <a:rPr lang="en-US" sz="900" dirty="0">
+                          <a:solidFill>
+                            <a:srgbClr val="000000"/>
+                          </a:solidFill>
+                          <a:latin typeface="Arial" pitchFamily="34" charset="0"/>
+                          <a:ea typeface="Arial" pitchFamily="34" charset="-122"/>
+                          <a:cs typeface="Arial" pitchFamily="34" charset="-120"/>
+                        </a:rPr>
+                        <a:t>4.5</a:t>
+                      </a:r>
+                      <a:endParaRPr lang="en-US" sz="900" dirty="0">
+                        <a:latin typeface="Arial" charset="0"/>
+                        <a:ea typeface="Arial" charset="0"/>
+                        <a:cs typeface="Arial" charset="0"/>
+                      </a:endParaRPr>
+                    </a:p>
+                  </a:txBody>
+                  <a:tcPr marL="91440" marR="91440" marT="45720" marB="45720">
+                    <a:lnL w="6350" cap="flat" cmpd="sng" algn="ctr">
+                      <a:solidFill>
+                        <a:srgbClr val="CBD5E1"/>
+                      </a:solidFill>
+                      <a:prstDash val="solid"/>
+                      <a:round/>
+                      <a:headEnd type="none" w="med" len="med"/>
+                      <a:tailEnd type="none" w="med" len="med"/>
+                    </a:lnL>
+                    <a:lnR w="6350" cap="flat" cmpd="sng" algn="ctr">
+                      <a:solidFill>
+                        <a:srgbClr val="CBD5E1"/>
+                      </a:solidFill>
+                      <a:prstDash val="solid"/>
+                      <a:round/>
+                      <a:headEnd type="none" w="med" len="med"/>
+                      <a:tailEnd type="none" w="med" len="med"/>
+                    </a:lnR>
+                    <a:lnT w="6350" cap="flat" cmpd="sng" algn="ctr">
+                      <a:solidFill>
+                        <a:srgbClr val="CBD5E1"/>
+                      </a:solidFill>
+                      <a:prstDash val="solid"/>
+                      <a:round/>
+                      <a:headEnd type="none" w="med" len="med"/>
+                      <a:tailEnd type="none" w="med" len="med"/>
+                    </a:lnT>
+                    <a:lnB w="6350" cap="flat" cmpd="sng" algn="ctr">
+                      <a:solidFill>
+                        <a:srgbClr val="CBD5E1"/>
+                      </a:solidFill>
+                      <a:prstDash val="solid"/>
+                      <a:round/>
+                      <a:headEnd type="none" w="med" len="med"/>
+                      <a:tailEnd type="none" w="med" len="med"/>
+                    </a:lnB>
+                    <a:solidFill>
+                      <a:srgbClr val="FFFFFF"/>
+                    </a:solidFill>
+                  </a:tcPr>
+                </a:tc>
+                <a:tc>
+                  <a:txBody>
+                    <a:bodyPr/>
+                    <a:lstStyle/>
+                    <a:p>
+                      <a:pPr algn="ctr" indent="0" marL="0">
+                        <a:buNone/>
+                      </a:pPr>
+                      <a:r>
+                        <a:rPr lang="en-US" sz="900" dirty="0">
+                          <a:solidFill>
+                            <a:srgbClr val="000000"/>
+                          </a:solidFill>
+                          <a:latin typeface="Arial" pitchFamily="34" charset="0"/>
+                          <a:ea typeface="Arial" pitchFamily="34" charset="-122"/>
+                          <a:cs typeface="Arial" pitchFamily="34" charset="-120"/>
+                        </a:rPr>
+                        <a:t>/5 (×2)</a:t>
+                      </a:r>
+                      <a:endParaRPr lang="en-US" sz="900" dirty="0">
+                        <a:latin typeface="Arial" charset="0"/>
+                        <a:ea typeface="Arial" charset="0"/>
+                        <a:cs typeface="Arial" charset="0"/>
+                      </a:endParaRPr>
+                    </a:p>
+                  </a:txBody>
+                  <a:tcPr marL="91440" marR="91440" marT="45720" marB="45720">
+                    <a:lnL w="6350" cap="flat" cmpd="sng" algn="ctr">
+                      <a:solidFill>
+                        <a:srgbClr val="CBD5E1"/>
+                      </a:solidFill>
+                      <a:prstDash val="solid"/>
+                      <a:round/>
+                      <a:headEnd type="none" w="med" len="med"/>
+                      <a:tailEnd type="none" w="med" len="med"/>
+                    </a:lnL>
+                    <a:lnR w="6350" cap="flat" cmpd="sng" algn="ctr">
+                      <a:solidFill>
+                        <a:srgbClr val="CBD5E1"/>
+                      </a:solidFill>
+                      <a:prstDash val="solid"/>
+                      <a:round/>
+                      <a:headEnd type="none" w="med" len="med"/>
+                      <a:tailEnd type="none" w="med" len="med"/>
+                    </a:lnR>
+                    <a:lnT w="6350" cap="flat" cmpd="sng" algn="ctr">
+                      <a:solidFill>
+                        <a:srgbClr val="CBD5E1"/>
+                      </a:solidFill>
+                      <a:prstDash val="solid"/>
+                      <a:round/>
+                      <a:headEnd type="none" w="med" len="med"/>
+                      <a:tailEnd type="none" w="med" len="med"/>
+                    </a:lnT>
+                    <a:lnB w="6350" cap="flat" cmpd="sng" algn="ctr">
+                      <a:solidFill>
+                        <a:srgbClr val="CBD5E1"/>
+                      </a:solidFill>
+                      <a:prstDash val="solid"/>
+                      <a:round/>
+                      <a:headEnd type="none" w="med" len="med"/>
+                      <a:tailEnd type="none" w="med" len="med"/>
+                    </a:lnB>
+                    <a:solidFill>
+                      <a:srgbClr val="FFFFFF"/>
+                    </a:solidFill>
+                  </a:tcPr>
+                </a:tc>
+                <a:tc>
+                  <a:txBody>
+                    <a:bodyPr/>
+                    <a:lstStyle/>
+                    <a:p>
+                      <a:pPr algn="ctr" indent="0" marL="0">
+                        <a:buNone/>
+                      </a:pPr>
+                      <a:r>
+                        <a:rPr lang="en-US" sz="900" dirty="0">
+                          <a:solidFill>
+                            <a:srgbClr val="000000"/>
+                          </a:solidFill>
+                          <a:latin typeface="Arial" pitchFamily="34" charset="0"/>
+                          <a:ea typeface="Arial" pitchFamily="34" charset="-122"/>
+                          <a:cs typeface="Arial" pitchFamily="34" charset="-120"/>
+                        </a:rPr>
+                        <a:t>9</a:t>
+                      </a:r>
+                      <a:endParaRPr lang="en-US" sz="900" dirty="0">
+                        <a:latin typeface="Arial" charset="0"/>
+                        <a:ea typeface="Arial" charset="0"/>
+                        <a:cs typeface="Arial" charset="0"/>
+                      </a:endParaRPr>
+                    </a:p>
+                  </a:txBody>
+                  <a:tcPr marL="91440" marR="91440" marT="45720" marB="45720">
+                    <a:lnL w="6350" cap="flat" cmpd="sng" algn="ctr">
+                      <a:solidFill>
+                        <a:srgbClr val="CBD5E1"/>
+                      </a:solidFill>
+                      <a:prstDash val="solid"/>
+                      <a:round/>
+                      <a:headEnd type="none" w="med" len="med"/>
+                      <a:tailEnd type="none" w="med" len="med"/>
+                    </a:lnL>
+                    <a:lnR w="6350" cap="flat" cmpd="sng" algn="ctr">
+                      <a:solidFill>
+                        <a:srgbClr val="CBD5E1"/>
+                      </a:solidFill>
+                      <a:prstDash val="solid"/>
+                      <a:round/>
+                      <a:headEnd type="none" w="med" len="med"/>
+                      <a:tailEnd type="none" w="med" len="med"/>
+                    </a:lnR>
+                    <a:lnT w="6350" cap="flat" cmpd="sng" algn="ctr">
+                      <a:solidFill>
+                        <a:srgbClr val="CBD5E1"/>
+                      </a:solidFill>
+                      <a:prstDash val="solid"/>
+                      <a:round/>
+                      <a:headEnd type="none" w="med" len="med"/>
+                      <a:tailEnd type="none" w="med" len="med"/>
+                    </a:lnT>
+                    <a:lnB w="6350" cap="flat" cmpd="sng" algn="ctr">
+                      <a:solidFill>
+                        <a:srgbClr val="CBD5E1"/>
+                      </a:solidFill>
+                      <a:prstDash val="solid"/>
+                      <a:round/>
+                      <a:headEnd type="none" w="med" len="med"/>
+                      <a:tailEnd type="none" w="med" len="med"/>
+                    </a:lnB>
+                    <a:solidFill>
+                      <a:srgbClr val="FFFFFF"/>
                     </a:solidFill>
                   </a:tcPr>
                 </a:tc>
@@ -8916,7 +9241,7 @@
                       <a:tailEnd type="none" w="med" len="med"/>
                     </a:lnB>
                     <a:solidFill>
-                      <a:srgbClr val="FFFFFF"/>
+                      <a:srgbClr val="E8EFF8"/>
                     </a:solidFill>
                   </a:tcPr>
                 </a:tc>
@@ -8937,7 +9262,7 @@
                           <a:ea typeface="Arial" pitchFamily="34" charset="-122"/>
                           <a:cs typeface="Arial" pitchFamily="34" charset="-120"/>
                         </a:rPr>
-                        <a:t>67</a:t>
+                        <a:t>39</a:t>
                       </a:r>
                       <a:endParaRPr lang="en-US" sz="900" dirty="0">
                         <a:latin typeface="Arial" charset="0"/>
@@ -8984,7 +9309,7 @@
                       <a:tailEnd type="none" w="med" len="med"/>
                     </a:lnB>
                     <a:solidFill>
-                      <a:srgbClr val="FFFFFF"/>
+                      <a:srgbClr val="E8EFF8"/>
                     </a:solidFill>
                   </a:tcPr>
                 </a:tc>
@@ -9005,7 +9330,7 @@
                           <a:ea typeface="Arial" pitchFamily="34" charset="-122"/>
                           <a:cs typeface="Arial" pitchFamily="34" charset="-120"/>
                         </a:rPr>
-                        <a:t>8.91</a:t>
+                        <a:t>8.97</a:t>
                       </a:r>
                       <a:endParaRPr lang="en-US" sz="900" dirty="0">
                         <a:latin typeface="Arial" charset="0"/>
@@ -9052,7 +9377,7 @@
                       <a:tailEnd type="none" w="med" len="med"/>
                     </a:lnB>
                     <a:solidFill>
-                      <a:srgbClr val="FFFFFF"/>
+                      <a:srgbClr val="E8EFF8"/>
                     </a:solidFill>
                   </a:tcPr>
                 </a:tc>
@@ -9120,144 +9445,6 @@
                       <a:tailEnd type="none" w="med" len="med"/>
                     </a:lnB>
                     <a:solidFill>
-                      <a:srgbClr val="FFFFFF"/>
-                    </a:solidFill>
-                  </a:tcPr>
-                </a:tc>
-                <a:tc>
-                  <a:txBody>
-                    <a:bodyPr/>
-                    <a:lstStyle/>
-                    <a:p>
-                      <a:pPr algn="ctr" indent="0" marL="0">
-                        <a:buNone/>
-                      </a:pPr>
-                      <a:r>
-                        <a:rPr lang="en-US" sz="900" dirty="0">
-                          <a:solidFill>
-                            <a:srgbClr val="000000"/>
-                          </a:solidFill>
-                          <a:latin typeface="Arial" pitchFamily="34" charset="0"/>
-                          <a:ea typeface="Arial" pitchFamily="34" charset="-122"/>
-                          <a:cs typeface="Arial" pitchFamily="34" charset="-120"/>
-                        </a:rPr>
-                        <a:t>8.91</a:t>
-                      </a:r>
-                      <a:endParaRPr lang="en-US" sz="900" dirty="0">
-                        <a:latin typeface="Arial" charset="0"/>
-                        <a:ea typeface="Arial" charset="0"/>
-                        <a:cs typeface="Arial" charset="0"/>
-                      </a:endParaRPr>
-                    </a:p>
-                  </a:txBody>
-                  <a:tcPr marL="91440" marR="91440" marT="45720" marB="45720">
-                    <a:lnL w="6350" cap="flat" cmpd="sng" algn="ctr">
-                      <a:solidFill>
-                        <a:srgbClr val="CBD5E1"/>
-                      </a:solidFill>
-                      <a:prstDash val="solid"/>
-                      <a:round/>
-                      <a:headEnd type="none" w="med" len="med"/>
-                      <a:tailEnd type="none" w="med" len="med"/>
-                    </a:lnL>
-                    <a:lnR w="6350" cap="flat" cmpd="sng" algn="ctr">
-                      <a:solidFill>
-                        <a:srgbClr val="CBD5E1"/>
-                      </a:solidFill>
-                      <a:prstDash val="solid"/>
-                      <a:round/>
-                      <a:headEnd type="none" w="med" len="med"/>
-                      <a:tailEnd type="none" w="med" len="med"/>
-                    </a:lnR>
-                    <a:lnT w="6350" cap="flat" cmpd="sng" algn="ctr">
-                      <a:solidFill>
-                        <a:srgbClr val="CBD5E1"/>
-                      </a:solidFill>
-                      <a:prstDash val="solid"/>
-                      <a:round/>
-                      <a:headEnd type="none" w="med" len="med"/>
-                      <a:tailEnd type="none" w="med" len="med"/>
-                    </a:lnT>
-                    <a:lnB w="6350" cap="flat" cmpd="sng" algn="ctr">
-                      <a:solidFill>
-                        <a:srgbClr val="CBD5E1"/>
-                      </a:solidFill>
-                      <a:prstDash val="solid"/>
-                      <a:round/>
-                      <a:headEnd type="none" w="med" len="med"/>
-                      <a:tailEnd type="none" w="med" len="med"/>
-                    </a:lnB>
-                    <a:solidFill>
-                      <a:srgbClr val="FFFFFF"/>
-                    </a:solidFill>
-                  </a:tcPr>
-                </a:tc>
-              </a:tr>
-              <a:tr h="201168">
-                <a:tc>
-                  <a:txBody>
-                    <a:bodyPr/>
-                    <a:lstStyle/>
-                    <a:p>
-                      <a:pPr algn="ctr" indent="0" marL="0">
-                        <a:buNone/>
-                      </a:pPr>
-                      <a:r>
-                        <a:rPr lang="en-US" sz="900" dirty="0">
-                          <a:solidFill>
-                            <a:srgbClr val="000000"/>
-                          </a:solidFill>
-                          <a:latin typeface="Arial" pitchFamily="34" charset="0"/>
-                          <a:ea typeface="Arial" pitchFamily="34" charset="-122"/>
-                          <a:cs typeface="Arial" pitchFamily="34" charset="-120"/>
-                        </a:rPr>
-                        <a:t>楽天トラベル</a:t>
-                      </a:r>
-                      <a:endParaRPr lang="en-US" sz="900" dirty="0">
-                        <a:latin typeface="Arial" charset="0"/>
-                        <a:ea typeface="Arial" charset="0"/>
-                        <a:cs typeface="Arial" charset="0"/>
-                      </a:endParaRPr>
-                    </a:p>
-                  </a:txBody>
-                  <a:tcPr marL="91440" marR="91440" marT="45720" marB="45720">
-                    <a:lnL w="6350" cap="flat" cmpd="sng" algn="ctr">
-                      <a:solidFill>
-                        <a:srgbClr val="CBD5E1"/>
-                      </a:solidFill>
-                      <a:prstDash val="solid"/>
-                      <a:round/>
-                      <a:headEnd type="none" w="med" len="med"/>
-                      <a:tailEnd type="none" w="med" len="med"/>
-                    </a:lnL>
-                    <a:lnR w="6350" cap="flat" cmpd="sng" algn="ctr">
-                      <a:solidFill>
-                        <a:srgbClr val="CBD5E1"/>
-                      </a:solidFill>
-                      <a:prstDash val="solid"/>
-                      <a:round/>
-                      <a:headEnd type="none" w="med" len="med"/>
-                      <a:tailEnd type="none" w="med" len="med"/>
-                    </a:lnR>
-                    <a:lnT w="6350" cap="flat" cmpd="sng" algn="ctr">
-                      <a:solidFill>
-                        <a:srgbClr val="CBD5E1"/>
-                      </a:solidFill>
-                      <a:prstDash val="solid"/>
-                      <a:round/>
-                      <a:headEnd type="none" w="med" len="med"/>
-                      <a:tailEnd type="none" w="med" len="med"/>
-                    </a:lnT>
-                    <a:lnB w="6350" cap="flat" cmpd="sng" algn="ctr">
-                      <a:solidFill>
-                        <a:srgbClr val="CBD5E1"/>
-                      </a:solidFill>
-                      <a:prstDash val="solid"/>
-                      <a:round/>
-                      <a:headEnd type="none" w="med" len="med"/>
-                      <a:tailEnd type="none" w="med" len="med"/>
-                    </a:lnB>
-                    <a:solidFill>
                       <a:srgbClr val="E8EFF8"/>
                     </a:solidFill>
                   </a:tcPr>
@@ -9279,211 +9466,7 @@
                           <a:ea typeface="Arial" pitchFamily="34" charset="-122"/>
                           <a:cs typeface="Arial" pitchFamily="34" charset="-120"/>
                         </a:rPr>
-                        <a:t>6</a:t>
-                      </a:r>
-                      <a:endParaRPr lang="en-US" sz="900" dirty="0">
-                        <a:latin typeface="Arial" charset="0"/>
-                        <a:ea typeface="Arial" charset="0"/>
-                        <a:cs typeface="Arial" charset="0"/>
-                      </a:endParaRPr>
-                    </a:p>
-                  </a:txBody>
-                  <a:tcPr marL="91440" marR="91440" marT="45720" marB="45720">
-                    <a:lnL w="6350" cap="flat" cmpd="sng" algn="ctr">
-                      <a:solidFill>
-                        <a:srgbClr val="CBD5E1"/>
-                      </a:solidFill>
-                      <a:prstDash val="solid"/>
-                      <a:round/>
-                      <a:headEnd type="none" w="med" len="med"/>
-                      <a:tailEnd type="none" w="med" len="med"/>
-                    </a:lnL>
-                    <a:lnR w="6350" cap="flat" cmpd="sng" algn="ctr">
-                      <a:solidFill>
-                        <a:srgbClr val="CBD5E1"/>
-                      </a:solidFill>
-                      <a:prstDash val="solid"/>
-                      <a:round/>
-                      <a:headEnd type="none" w="med" len="med"/>
-                      <a:tailEnd type="none" w="med" len="med"/>
-                    </a:lnR>
-                    <a:lnT w="6350" cap="flat" cmpd="sng" algn="ctr">
-                      <a:solidFill>
-                        <a:srgbClr val="CBD5E1"/>
-                      </a:solidFill>
-                      <a:prstDash val="solid"/>
-                      <a:round/>
-                      <a:headEnd type="none" w="med" len="med"/>
-                      <a:tailEnd type="none" w="med" len="med"/>
-                    </a:lnT>
-                    <a:lnB w="6350" cap="flat" cmpd="sng" algn="ctr">
-                      <a:solidFill>
-                        <a:srgbClr val="CBD5E1"/>
-                      </a:solidFill>
-                      <a:prstDash val="solid"/>
-                      <a:round/>
-                      <a:headEnd type="none" w="med" len="med"/>
-                      <a:tailEnd type="none" w="med" len="med"/>
-                    </a:lnB>
-                    <a:solidFill>
-                      <a:srgbClr val="E8EFF8"/>
-                    </a:solidFill>
-                  </a:tcPr>
-                </a:tc>
-                <a:tc>
-                  <a:txBody>
-                    <a:bodyPr/>
-                    <a:lstStyle/>
-                    <a:p>
-                      <a:pPr algn="ctr" indent="0" marL="0">
-                        <a:buNone/>
-                      </a:pPr>
-                      <a:r>
-                        <a:rPr lang="en-US" sz="900" dirty="0">
-                          <a:solidFill>
-                            <a:srgbClr val="000000"/>
-                          </a:solidFill>
-                          <a:latin typeface="Arial" pitchFamily="34" charset="0"/>
-                          <a:ea typeface="Arial" pitchFamily="34" charset="-122"/>
-                          <a:cs typeface="Arial" pitchFamily="34" charset="-120"/>
-                        </a:rPr>
-                        <a:t>4.33</a:t>
-                      </a:r>
-                      <a:endParaRPr lang="en-US" sz="900" dirty="0">
-                        <a:latin typeface="Arial" charset="0"/>
-                        <a:ea typeface="Arial" charset="0"/>
-                        <a:cs typeface="Arial" charset="0"/>
-                      </a:endParaRPr>
-                    </a:p>
-                  </a:txBody>
-                  <a:tcPr marL="91440" marR="91440" marT="45720" marB="45720">
-                    <a:lnL w="6350" cap="flat" cmpd="sng" algn="ctr">
-                      <a:solidFill>
-                        <a:srgbClr val="CBD5E1"/>
-                      </a:solidFill>
-                      <a:prstDash val="solid"/>
-                      <a:round/>
-                      <a:headEnd type="none" w="med" len="med"/>
-                      <a:tailEnd type="none" w="med" len="med"/>
-                    </a:lnL>
-                    <a:lnR w="6350" cap="flat" cmpd="sng" algn="ctr">
-                      <a:solidFill>
-                        <a:srgbClr val="CBD5E1"/>
-                      </a:solidFill>
-                      <a:prstDash val="solid"/>
-                      <a:round/>
-                      <a:headEnd type="none" w="med" len="med"/>
-                      <a:tailEnd type="none" w="med" len="med"/>
-                    </a:lnR>
-                    <a:lnT w="6350" cap="flat" cmpd="sng" algn="ctr">
-                      <a:solidFill>
-                        <a:srgbClr val="CBD5E1"/>
-                      </a:solidFill>
-                      <a:prstDash val="solid"/>
-                      <a:round/>
-                      <a:headEnd type="none" w="med" len="med"/>
-                      <a:tailEnd type="none" w="med" len="med"/>
-                    </a:lnT>
-                    <a:lnB w="6350" cap="flat" cmpd="sng" algn="ctr">
-                      <a:solidFill>
-                        <a:srgbClr val="CBD5E1"/>
-                      </a:solidFill>
-                      <a:prstDash val="solid"/>
-                      <a:round/>
-                      <a:headEnd type="none" w="med" len="med"/>
-                      <a:tailEnd type="none" w="med" len="med"/>
-                    </a:lnB>
-                    <a:solidFill>
-                      <a:srgbClr val="E8EFF8"/>
-                    </a:solidFill>
-                  </a:tcPr>
-                </a:tc>
-                <a:tc>
-                  <a:txBody>
-                    <a:bodyPr/>
-                    <a:lstStyle/>
-                    <a:p>
-                      <a:pPr algn="ctr" indent="0" marL="0">
-                        <a:buNone/>
-                      </a:pPr>
-                      <a:r>
-                        <a:rPr lang="en-US" sz="900" dirty="0">
-                          <a:solidFill>
-                            <a:srgbClr val="000000"/>
-                          </a:solidFill>
-                          <a:latin typeface="Arial" pitchFamily="34" charset="0"/>
-                          <a:ea typeface="Arial" pitchFamily="34" charset="-122"/>
-                          <a:cs typeface="Arial" pitchFamily="34" charset="-120"/>
-                        </a:rPr>
-                        <a:t>/5 (×2)</a:t>
-                      </a:r>
-                      <a:endParaRPr lang="en-US" sz="900" dirty="0">
-                        <a:latin typeface="Arial" charset="0"/>
-                        <a:ea typeface="Arial" charset="0"/>
-                        <a:cs typeface="Arial" charset="0"/>
-                      </a:endParaRPr>
-                    </a:p>
-                  </a:txBody>
-                  <a:tcPr marL="91440" marR="91440" marT="45720" marB="45720">
-                    <a:lnL w="6350" cap="flat" cmpd="sng" algn="ctr">
-                      <a:solidFill>
-                        <a:srgbClr val="CBD5E1"/>
-                      </a:solidFill>
-                      <a:prstDash val="solid"/>
-                      <a:round/>
-                      <a:headEnd type="none" w="med" len="med"/>
-                      <a:tailEnd type="none" w="med" len="med"/>
-                    </a:lnL>
-                    <a:lnR w="6350" cap="flat" cmpd="sng" algn="ctr">
-                      <a:solidFill>
-                        <a:srgbClr val="CBD5E1"/>
-                      </a:solidFill>
-                      <a:prstDash val="solid"/>
-                      <a:round/>
-                      <a:headEnd type="none" w="med" len="med"/>
-                      <a:tailEnd type="none" w="med" len="med"/>
-                    </a:lnR>
-                    <a:lnT w="6350" cap="flat" cmpd="sng" algn="ctr">
-                      <a:solidFill>
-                        <a:srgbClr val="CBD5E1"/>
-                      </a:solidFill>
-                      <a:prstDash val="solid"/>
-                      <a:round/>
-                      <a:headEnd type="none" w="med" len="med"/>
-                      <a:tailEnd type="none" w="med" len="med"/>
-                    </a:lnT>
-                    <a:lnB w="6350" cap="flat" cmpd="sng" algn="ctr">
-                      <a:solidFill>
-                        <a:srgbClr val="CBD5E1"/>
-                      </a:solidFill>
-                      <a:prstDash val="solid"/>
-                      <a:round/>
-                      <a:headEnd type="none" w="med" len="med"/>
-                      <a:tailEnd type="none" w="med" len="med"/>
-                    </a:lnB>
-                    <a:solidFill>
-                      <a:srgbClr val="E8EFF8"/>
-                    </a:solidFill>
-                  </a:tcPr>
-                </a:tc>
-                <a:tc>
-                  <a:txBody>
-                    <a:bodyPr/>
-                    <a:lstStyle/>
-                    <a:p>
-                      <a:pPr algn="ctr" indent="0" marL="0">
-                        <a:buNone/>
-                      </a:pPr>
-                      <a:r>
-                        <a:rPr lang="en-US" sz="900" dirty="0">
-                          <a:solidFill>
-                            <a:srgbClr val="000000"/>
-                          </a:solidFill>
-                          <a:latin typeface="Arial" pitchFamily="34" charset="0"/>
-                          <a:ea typeface="Arial" pitchFamily="34" charset="-122"/>
-                          <a:cs typeface="Arial" pitchFamily="34" charset="-120"/>
-                        </a:rPr>
-                        <a:t>8.67</a:t>
+                        <a:t>8.97</a:t>
                       </a:r>
                       <a:endParaRPr lang="en-US" sz="900" dirty="0">
                         <a:latin typeface="Arial" charset="0"/>
@@ -9621,7 +9604,7 @@
                           <a:ea typeface="Arial" pitchFamily="34" charset="-122"/>
                           <a:cs typeface="Arial" pitchFamily="34" charset="-120"/>
                         </a:rPr>
-                        <a:t>22</a:t>
+                        <a:t>16</a:t>
                       </a:r>
                       <a:endParaRPr lang="en-US" sz="900" dirty="0">
                         <a:latin typeface="Arial" charset="0"/>
@@ -9689,7 +9672,7 @@
                           <a:ea typeface="Arial" pitchFamily="34" charset="-122"/>
                           <a:cs typeface="Arial" pitchFamily="34" charset="-120"/>
                         </a:rPr>
-                        <a:t>3.91</a:t>
+                        <a:t>3.75</a:t>
                       </a:r>
                       <a:endParaRPr lang="en-US" sz="900" dirty="0">
                         <a:latin typeface="Arial" charset="0"/>
@@ -9825,7 +9808,7 @@
                           <a:ea typeface="Arial" pitchFamily="34" charset="-122"/>
                           <a:cs typeface="Arial" pitchFamily="34" charset="-120"/>
                         </a:rPr>
-                        <a:t>7.82</a:t>
+                        <a:t>7.5</a:t>
                       </a:r>
                       <a:endParaRPr lang="en-US" sz="900" dirty="0">
                         <a:latin typeface="Arial" charset="0"/>
@@ -10233,7 +10216,7 @@
                 <a:ea typeface="Arial" pitchFamily="34" charset="-122"/>
                 <a:cs typeface="Arial" pitchFamily="34" charset="-120"/>
               </a:rPr>
-              <a:t>109件（87.2%）</a:t>
+              <a:t>72件（88.9%）</a:t>
             </a:r>
             <a:endParaRPr lang="en-US" sz="1100" dirty="0"/>
           </a:p>
@@ -10331,7 +10314,7 @@
                 <a:ea typeface="Arial" pitchFamily="34" charset="-122"/>
                 <a:cs typeface="Arial" pitchFamily="34" charset="-120"/>
               </a:rPr>
-              <a:t>11件（8.8%）</a:t>
+              <a:t>4件（4.9%）</a:t>
             </a:r>
             <a:endParaRPr lang="en-US" sz="1100" dirty="0"/>
           </a:p>
@@ -10352,7 +10335,7 @@
             <a:avLst/>
           </a:prstGeom>
           <a:solidFill>
-            <a:srgbClr val="DCFCE7"/>
+            <a:srgbClr val="FEE2E2"/>
           </a:solidFill>
           <a:ln/>
         </p:spPr>
@@ -10384,7 +10367,7 @@
             <a:r>
               <a:rPr lang="en-US" sz="1000" b="1" dirty="0">
                 <a:solidFill>
-                  <a:srgbClr val="16A34A"/>
+                  <a:srgbClr val="DC2626"/>
                 </a:solidFill>
                 <a:latin typeface="Arial" pitchFamily="34" charset="0"/>
                 <a:ea typeface="Arial" pitchFamily="34" charset="-122"/>
@@ -10423,13 +10406,13 @@
             <a:r>
               <a:rPr lang="en-US" sz="1100" b="1" dirty="0">
                 <a:solidFill>
-                  <a:srgbClr val="16A34A"/>
+                  <a:srgbClr val="DC2626"/>
                 </a:solidFill>
                 <a:latin typeface="Arial" pitchFamily="34" charset="0"/>
                 <a:ea typeface="Arial" pitchFamily="34" charset="-122"/>
                 <a:cs typeface="Arial" pitchFamily="34" charset="-120"/>
               </a:rPr>
-              <a:t>5件（4.0%）</a:t>
+              <a:t>5件（6.2%）</a:t>
             </a:r>
             <a:endParaRPr lang="en-US" sz="1100" dirty="0"/>
           </a:p>
@@ -10841,7 +10824,7 @@
                 <a:ea typeface="Arial" pitchFamily="34" charset="-122"/>
                 <a:cs typeface="Arial" pitchFamily="34" charset="-120"/>
               </a:rPr>
-              <a:t>Close to the shops</a:t>
+              <a:t>立地も抜群で、近くに複数の駅があり、秋葉原や上野へも徒歩圏内です</a:t>
             </a:r>
             <a:endParaRPr lang="en-US" sz="900" dirty="0"/>
           </a:p>
@@ -10880,7 +10863,7 @@
                 <a:ea typeface="Arial" pitchFamily="34" charset="-122"/>
                 <a:cs typeface="Arial" pitchFamily="34" charset="-120"/>
               </a:rPr>
-              <a:t>「Location was good and in a quiet area」</a:t>
+              <a:t>「秋葉原近辺のホテルをお探しなら、ここは中心部に位置する非常に便利なホテルです」</a:t>
             </a:r>
             <a:endParaRPr lang="en-US" sz="900" dirty="0"/>
           </a:p>
@@ -11064,7 +11047,7 @@
                 <a:ea typeface="Arial" pitchFamily="34" charset="-122"/>
                 <a:cs typeface="Arial" pitchFamily="34" charset="-120"/>
               </a:rPr>
-              <a:t>ホテルの方々が本当に親切でした</a:t>
+              <a:t>受付スタッフは親切で気配りが行き届いており、常にカウンターにいました</a:t>
             </a:r>
             <a:endParaRPr lang="en-US" sz="900" dirty="0"/>
           </a:p>
@@ -11103,7 +11086,7 @@
                 <a:ea typeface="Arial" pitchFamily="34" charset="-122"/>
                 <a:cs typeface="Arial" pitchFamily="34" charset="-120"/>
               </a:rPr>
-              <a:t>「スタッフさんの対応がとてもよくて又来たいなと思いました」</a:t>
+              <a:t>「フロントの方もみなさん親切でした」</a:t>
             </a:r>
             <a:endParaRPr lang="en-US" sz="900" dirty="0"/>
           </a:p>
@@ -11209,7 +11192,7 @@
                 <a:ea typeface="Arial" pitchFamily="34" charset="-122"/>
                 <a:cs typeface="Arial" pitchFamily="34" charset="-120"/>
               </a:rPr>
-              <a:t>20件+</a:t>
+              <a:t>10件+</a:t>
             </a:r>
             <a:endParaRPr lang="en-US" sz="900" dirty="0"/>
           </a:p>
@@ -11287,7 +11270,7 @@
                 <a:ea typeface="Arial" pitchFamily="34" charset="-122"/>
                 <a:cs typeface="Arial" pitchFamily="34" charset="-120"/>
               </a:rPr>
-              <a:t>Cleanliness, convenience, breakfast</a:t>
+              <a:t>部屋は常に清潔に保たれており、毎日のメイクアップサービスも行き届いていました</a:t>
             </a:r>
             <a:endParaRPr lang="en-US" sz="900" dirty="0"/>
           </a:p>
@@ -11326,7 +11309,7 @@
                 <a:ea typeface="Arial" pitchFamily="34" charset="-122"/>
                 <a:cs typeface="Arial" pitchFamily="34" charset="-120"/>
               </a:rPr>
-              <a:t>「部屋も風呂も清潔で適度に広く、過ごしやすかったです」</a:t>
+              <a:t>「Rest needs improvement 全体的に見て、ホテルの清掃は良かった」</a:t>
             </a:r>
             <a:endParaRPr lang="en-US" sz="900" dirty="0"/>
           </a:p>
@@ -11432,7 +11415,7 @@
                 <a:ea typeface="Arial" pitchFamily="34" charset="-122"/>
                 <a:cs typeface="Arial" pitchFamily="34" charset="-120"/>
               </a:rPr>
-              <a:t>20件+</a:t>
+              <a:t>10件+</a:t>
             </a:r>
             <a:endParaRPr lang="en-US" sz="900" dirty="0"/>
           </a:p>
@@ -11510,7 +11493,7 @@
                 <a:ea typeface="Arial" pitchFamily="34" charset="-122"/>
                 <a:cs typeface="Arial" pitchFamily="34" charset="-120"/>
               </a:rPr>
-              <a:t>Breakfast was great</a:t>
+              <a:t>ラウンジのスナック美味しい</a:t>
             </a:r>
             <a:endParaRPr lang="en-US" sz="900" dirty="0"/>
           </a:p>
@@ -11525,6 +11508,452 @@
         <p:spPr>
           <a:xfrm>
             <a:off x="594360" y="3657600"/>
+            <a:ext cx="2377440" cy="640080"/>
+          </a:xfrm>
+          <a:prstGeom prst="rect">
+            <a:avLst/>
+          </a:prstGeom>
+          <a:noFill/>
+          <a:ln/>
+        </p:spPr>
+        <p:txBody>
+          <a:bodyPr wrap="square" lIns="0" tIns="0" rIns="0" bIns="0" rtlCol="0" anchor="ctr"/>
+          <a:lstStyle/>
+          <a:p>
+            <a:pPr indent="0" marL="0">
+              <a:buNone/>
+            </a:pPr>
+            <a:r>
+              <a:rPr lang="en-US" sz="900" i="1" dirty="0">
+                <a:solidFill>
+                  <a:srgbClr val="3B7DD8"/>
+                </a:solidFill>
+                <a:latin typeface="Arial" pitchFamily="34" charset="0"/>
+                <a:ea typeface="Arial" pitchFamily="34" charset="-122"/>
+                <a:cs typeface="Arial" pitchFamily="34" charset="-120"/>
+              </a:rPr>
+              <a:t>「唯一の難点は朝食で、もう少し種類が豊富だと良いと思います」</a:t>
+            </a:r>
+            <a:endParaRPr lang="en-US" sz="900" dirty="0"/>
+          </a:p>
+        </p:txBody>
+      </p:sp>
+      <p:sp>
+        <p:nvSpPr>
+          <p:cNvPr id="33" name="Shape 31"/>
+          <p:cNvSpPr/>
+          <p:nvPr/>
+        </p:nvSpPr>
+        <p:spPr>
+          <a:xfrm>
+            <a:off x="3291840" y="2880360"/>
+            <a:ext cx="2651760" cy="1600200"/>
+          </a:xfrm>
+          <a:prstGeom prst="rect">
+            <a:avLst/>
+          </a:prstGeom>
+          <a:solidFill>
+            <a:srgbClr val="FFFFFF"/>
+          </a:solidFill>
+          <a:ln/>
+          <a:effectLst>
+            <a:outerShdw sx="100000" sy="100000" kx="0" ky="0" algn="bl" rotWithShape="0" blurRad="50800" dist="25400" dir="8100000">
+              <a:srgbClr val="000000">
+                <a:alpha val="10000"/>
+              </a:srgbClr>
+            </a:outerShdw>
+          </a:effectLst>
+        </p:spPr>
+      </p:sp>
+      <p:sp>
+        <p:nvSpPr>
+          <p:cNvPr id="34" name="Shape 32"/>
+          <p:cNvSpPr/>
+          <p:nvPr/>
+        </p:nvSpPr>
+        <p:spPr>
+          <a:xfrm>
+            <a:off x="3291840" y="2880360"/>
+            <a:ext cx="54864" cy="1600200"/>
+          </a:xfrm>
+          <a:prstGeom prst="rect">
+            <a:avLst/>
+          </a:prstGeom>
+          <a:solidFill>
+            <a:srgbClr val="16A34A"/>
+          </a:solidFill>
+          <a:ln/>
+        </p:spPr>
+      </p:sp>
+      <p:sp>
+        <p:nvSpPr>
+          <p:cNvPr id="35" name="Shape 33"/>
+          <p:cNvSpPr/>
+          <p:nvPr/>
+        </p:nvSpPr>
+        <p:spPr>
+          <a:xfrm>
+            <a:off x="5120640" y="2953512"/>
+            <a:ext cx="658368" cy="228600"/>
+          </a:xfrm>
+          <a:prstGeom prst="rect">
+            <a:avLst/>
+          </a:prstGeom>
+          <a:solidFill>
+            <a:srgbClr val="DCFCE7"/>
+          </a:solidFill>
+          <a:ln/>
+        </p:spPr>
+      </p:sp>
+      <p:sp>
+        <p:nvSpPr>
+          <p:cNvPr id="36" name="Text 34"/>
+          <p:cNvSpPr/>
+          <p:nvPr/>
+        </p:nvSpPr>
+        <p:spPr>
+          <a:xfrm>
+            <a:off x="5120640" y="2953512"/>
+            <a:ext cx="658368" cy="228600"/>
+          </a:xfrm>
+          <a:prstGeom prst="rect">
+            <a:avLst/>
+          </a:prstGeom>
+          <a:noFill/>
+          <a:ln/>
+        </p:spPr>
+        <p:txBody>
+          <a:bodyPr wrap="square" lIns="0" tIns="0" rIns="0" bIns="0" rtlCol="0" anchor="ctr"/>
+          <a:lstStyle/>
+          <a:p>
+            <a:pPr algn="ctr" indent="0" marL="0">
+              <a:buNone/>
+            </a:pPr>
+            <a:r>
+              <a:rPr lang="en-US" sz="900" b="1" dirty="0">
+                <a:solidFill>
+                  <a:srgbClr val="16A34A"/>
+                </a:solidFill>
+                <a:latin typeface="Arial" pitchFamily="34" charset="0"/>
+                <a:ea typeface="Arial" pitchFamily="34" charset="-122"/>
+                <a:cs typeface="Arial" pitchFamily="34" charset="-120"/>
+              </a:rPr>
+              <a:t>10件+</a:t>
+            </a:r>
+            <a:endParaRPr lang="en-US" sz="900" dirty="0"/>
+          </a:p>
+        </p:txBody>
+      </p:sp>
+      <p:sp>
+        <p:nvSpPr>
+          <p:cNvPr id="37" name="Text 35"/>
+          <p:cNvSpPr/>
+          <p:nvPr/>
+        </p:nvSpPr>
+        <p:spPr>
+          <a:xfrm>
+            <a:off x="3429000" y="2953512"/>
+            <a:ext cx="1645920" cy="274320"/>
+          </a:xfrm>
+          <a:prstGeom prst="rect">
+            <a:avLst/>
+          </a:prstGeom>
+          <a:noFill/>
+          <a:ln/>
+        </p:spPr>
+        <p:txBody>
+          <a:bodyPr wrap="square" lIns="0" tIns="0" rIns="0" bIns="0" rtlCol="0" anchor="ctr"/>
+          <a:lstStyle/>
+          <a:p>
+            <a:pPr indent="0" marL="0">
+              <a:buNone/>
+            </a:pPr>
+            <a:r>
+              <a:rPr lang="en-US" sz="1300" b="1" dirty="0">
+                <a:solidFill>
+                  <a:srgbClr val="1A2744"/>
+                </a:solidFill>
+                <a:latin typeface="Arial" pitchFamily="34" charset="0"/>
+                <a:ea typeface="Arial" pitchFamily="34" charset="-122"/>
+                <a:cs typeface="Arial" pitchFamily="34" charset="-120"/>
+              </a:rPr>
+              <a:t>快適さ・設備</a:t>
+            </a:r>
+            <a:endParaRPr lang="en-US" sz="1300" dirty="0"/>
+          </a:p>
+        </p:txBody>
+      </p:sp>
+      <p:sp>
+        <p:nvSpPr>
+          <p:cNvPr id="38" name="Text 36"/>
+          <p:cNvSpPr/>
+          <p:nvPr/>
+        </p:nvSpPr>
+        <p:spPr>
+          <a:xfrm>
+            <a:off x="3429000" y="3246120"/>
+            <a:ext cx="2377440" cy="365760"/>
+          </a:xfrm>
+          <a:prstGeom prst="rect">
+            <a:avLst/>
+          </a:prstGeom>
+          <a:noFill/>
+          <a:ln/>
+        </p:spPr>
+        <p:txBody>
+          <a:bodyPr wrap="square" lIns="0" tIns="0" rIns="0" bIns="0" rtlCol="0" anchor="ctr"/>
+          <a:lstStyle/>
+          <a:p>
+            <a:pPr indent="0" marL="0">
+              <a:buNone/>
+            </a:pPr>
+            <a:r>
+              <a:rPr lang="en-US" sz="900" dirty="0">
+                <a:solidFill>
+                  <a:srgbClr val="64748B"/>
+                </a:solidFill>
+                <a:latin typeface="Arial" pitchFamily="34" charset="0"/>
+                <a:ea typeface="Arial" pitchFamily="34" charset="-122"/>
+                <a:cs typeface="Arial" pitchFamily="34" charset="-120"/>
+              </a:rPr>
+              <a:t>アメニティも充実しており、ロビーで受け取ることができます</a:t>
+            </a:r>
+            <a:endParaRPr lang="en-US" sz="900" dirty="0"/>
+          </a:p>
+        </p:txBody>
+      </p:sp>
+      <p:sp>
+        <p:nvSpPr>
+          <p:cNvPr id="39" name="Text 37"/>
+          <p:cNvSpPr/>
+          <p:nvPr/>
+        </p:nvSpPr>
+        <p:spPr>
+          <a:xfrm>
+            <a:off x="3429000" y="3657600"/>
+            <a:ext cx="2377440" cy="640080"/>
+          </a:xfrm>
+          <a:prstGeom prst="rect">
+            <a:avLst/>
+          </a:prstGeom>
+          <a:noFill/>
+          <a:ln/>
+        </p:spPr>
+        <p:txBody>
+          <a:bodyPr wrap="square" lIns="0" tIns="0" rIns="0" bIns="0" rtlCol="0" anchor="ctr"/>
+          <a:lstStyle/>
+          <a:p>
+            <a:pPr indent="0" marL="0">
+              <a:buNone/>
+            </a:pPr>
+            <a:r>
+              <a:rPr lang="en-US" sz="900" i="1" dirty="0">
+                <a:solidFill>
+                  <a:srgbClr val="3B7DD8"/>
+                </a:solidFill>
+                <a:latin typeface="Arial" pitchFamily="34" charset="0"/>
+                <a:ea typeface="Arial" pitchFamily="34" charset="-122"/>
+                <a:cs typeface="Arial" pitchFamily="34" charset="-120"/>
+              </a:rPr>
+              <a:t>「ベッド広い」</a:t>
+            </a:r>
+            <a:endParaRPr lang="en-US" sz="900" dirty="0"/>
+          </a:p>
+        </p:txBody>
+      </p:sp>
+      <p:sp>
+        <p:nvSpPr>
+          <p:cNvPr id="40" name="Shape 38"/>
+          <p:cNvSpPr/>
+          <p:nvPr/>
+        </p:nvSpPr>
+        <p:spPr>
+          <a:xfrm>
+            <a:off x="6126480" y="2880360"/>
+            <a:ext cx="2651760" cy="1600200"/>
+          </a:xfrm>
+          <a:prstGeom prst="rect">
+            <a:avLst/>
+          </a:prstGeom>
+          <a:solidFill>
+            <a:srgbClr val="FFFFFF"/>
+          </a:solidFill>
+          <a:ln/>
+          <a:effectLst>
+            <a:outerShdw sx="100000" sy="100000" kx="0" ky="0" algn="bl" rotWithShape="0" blurRad="50800" dist="25400" dir="8100000">
+              <a:srgbClr val="000000">
+                <a:alpha val="10000"/>
+              </a:srgbClr>
+            </a:outerShdw>
+          </a:effectLst>
+        </p:spPr>
+      </p:sp>
+      <p:sp>
+        <p:nvSpPr>
+          <p:cNvPr id="41" name="Shape 39"/>
+          <p:cNvSpPr/>
+          <p:nvPr/>
+        </p:nvSpPr>
+        <p:spPr>
+          <a:xfrm>
+            <a:off x="6126480" y="2880360"/>
+            <a:ext cx="54864" cy="1600200"/>
+          </a:xfrm>
+          <a:prstGeom prst="rect">
+            <a:avLst/>
+          </a:prstGeom>
+          <a:solidFill>
+            <a:srgbClr val="16A34A"/>
+          </a:solidFill>
+          <a:ln/>
+        </p:spPr>
+      </p:sp>
+      <p:sp>
+        <p:nvSpPr>
+          <p:cNvPr id="42" name="Shape 40"/>
+          <p:cNvSpPr/>
+          <p:nvPr/>
+        </p:nvSpPr>
+        <p:spPr>
+          <a:xfrm>
+            <a:off x="7955280" y="2953512"/>
+            <a:ext cx="658368" cy="228600"/>
+          </a:xfrm>
+          <a:prstGeom prst="rect">
+            <a:avLst/>
+          </a:prstGeom>
+          <a:solidFill>
+            <a:srgbClr val="DCFCE7"/>
+          </a:solidFill>
+          <a:ln/>
+        </p:spPr>
+      </p:sp>
+      <p:sp>
+        <p:nvSpPr>
+          <p:cNvPr id="43" name="Text 41"/>
+          <p:cNvSpPr/>
+          <p:nvPr/>
+        </p:nvSpPr>
+        <p:spPr>
+          <a:xfrm>
+            <a:off x="7955280" y="2953512"/>
+            <a:ext cx="658368" cy="228600"/>
+          </a:xfrm>
+          <a:prstGeom prst="rect">
+            <a:avLst/>
+          </a:prstGeom>
+          <a:noFill/>
+          <a:ln/>
+        </p:spPr>
+        <p:txBody>
+          <a:bodyPr wrap="square" lIns="0" tIns="0" rIns="0" bIns="0" rtlCol="0" anchor="ctr"/>
+          <a:lstStyle/>
+          <a:p>
+            <a:pPr algn="ctr" indent="0" marL="0">
+              <a:buNone/>
+            </a:pPr>
+            <a:r>
+              <a:rPr lang="en-US" sz="900" b="1" dirty="0">
+                <a:solidFill>
+                  <a:srgbClr val="16A34A"/>
+                </a:solidFill>
+                <a:latin typeface="Arial" pitchFamily="34" charset="0"/>
+                <a:ea typeface="Arial" pitchFamily="34" charset="-122"/>
+                <a:cs typeface="Arial" pitchFamily="34" charset="-120"/>
+              </a:rPr>
+              <a:t>10件+</a:t>
+            </a:r>
+            <a:endParaRPr lang="en-US" sz="900" dirty="0"/>
+          </a:p>
+        </p:txBody>
+      </p:sp>
+      <p:sp>
+        <p:nvSpPr>
+          <p:cNvPr id="44" name="Text 42"/>
+          <p:cNvSpPr/>
+          <p:nvPr/>
+        </p:nvSpPr>
+        <p:spPr>
+          <a:xfrm>
+            <a:off x="6263640" y="2953512"/>
+            <a:ext cx="1645920" cy="274320"/>
+          </a:xfrm>
+          <a:prstGeom prst="rect">
+            <a:avLst/>
+          </a:prstGeom>
+          <a:noFill/>
+          <a:ln/>
+        </p:spPr>
+        <p:txBody>
+          <a:bodyPr wrap="square" lIns="0" tIns="0" rIns="0" bIns="0" rtlCol="0" anchor="ctr"/>
+          <a:lstStyle/>
+          <a:p>
+            <a:pPr indent="0" marL="0">
+              <a:buNone/>
+            </a:pPr>
+            <a:r>
+              <a:rPr lang="en-US" sz="1300" b="1" dirty="0">
+                <a:solidFill>
+                  <a:srgbClr val="1A2744"/>
+                </a:solidFill>
+                <a:latin typeface="Arial" pitchFamily="34" charset="0"/>
+                <a:ea typeface="Arial" pitchFamily="34" charset="-122"/>
+                <a:cs typeface="Arial" pitchFamily="34" charset="-120"/>
+              </a:rPr>
+              <a:t>コンビニ・周辺施設</a:t>
+            </a:r>
+            <a:endParaRPr lang="en-US" sz="1300" dirty="0"/>
+          </a:p>
+        </p:txBody>
+      </p:sp>
+      <p:sp>
+        <p:nvSpPr>
+          <p:cNvPr id="45" name="Text 43"/>
+          <p:cNvSpPr/>
+          <p:nvPr/>
+        </p:nvSpPr>
+        <p:spPr>
+          <a:xfrm>
+            <a:off x="6263640" y="3246120"/>
+            <a:ext cx="2377440" cy="365760"/>
+          </a:xfrm>
+          <a:prstGeom prst="rect">
+            <a:avLst/>
+          </a:prstGeom>
+          <a:noFill/>
+          <a:ln/>
+        </p:spPr>
+        <p:txBody>
+          <a:bodyPr wrap="square" lIns="0" tIns="0" rIns="0" bIns="0" rtlCol="0" anchor="ctr"/>
+          <a:lstStyle/>
+          <a:p>
+            <a:pPr indent="0" marL="0">
+              <a:buNone/>
+            </a:pPr>
+            <a:r>
+              <a:rPr lang="en-US" sz="900" dirty="0">
+                <a:solidFill>
+                  <a:srgbClr val="64748B"/>
+                </a:solidFill>
+                <a:latin typeface="Arial" pitchFamily="34" charset="0"/>
+                <a:ea typeface="Arial" pitchFamily="34" charset="-122"/>
+                <a:cs typeface="Arial" pitchFamily="34" charset="-120"/>
+              </a:rPr>
+              <a:t>近くにセブンイレブンもあるので、早朝に出かける際にちょっとした軽食を買うのに最適です</a:t>
+            </a:r>
+            <a:endParaRPr lang="en-US" sz="900" dirty="0"/>
+          </a:p>
+        </p:txBody>
+      </p:sp>
+      <p:sp>
+        <p:nvSpPr>
+          <p:cNvPr id="46" name="Text 44"/>
+          <p:cNvSpPr/>
+          <p:nvPr/>
+        </p:nvSpPr>
+        <p:spPr>
+          <a:xfrm>
+            <a:off x="6263640" y="3657600"/>
             <a:ext cx="2377440" cy="640080"/>
           </a:xfrm>
           <a:prstGeom prst="rect">
@@ -11550,452 +11979,6 @@
                 <a:cs typeface="Arial" pitchFamily="34" charset="-120"/>
               </a:rPr>
               <a:t>「Cleanliness, convenience, breakfast」</a:t>
-            </a:r>
-            <a:endParaRPr lang="en-US" sz="900" dirty="0"/>
-          </a:p>
-        </p:txBody>
-      </p:sp>
-      <p:sp>
-        <p:nvSpPr>
-          <p:cNvPr id="33" name="Shape 31"/>
-          <p:cNvSpPr/>
-          <p:nvPr/>
-        </p:nvSpPr>
-        <p:spPr>
-          <a:xfrm>
-            <a:off x="3291840" y="2880360"/>
-            <a:ext cx="2651760" cy="1600200"/>
-          </a:xfrm>
-          <a:prstGeom prst="rect">
-            <a:avLst/>
-          </a:prstGeom>
-          <a:solidFill>
-            <a:srgbClr val="FFFFFF"/>
-          </a:solidFill>
-          <a:ln/>
-          <a:effectLst>
-            <a:outerShdw sx="100000" sy="100000" kx="0" ky="0" algn="bl" rotWithShape="0" blurRad="50800" dist="25400" dir="8100000">
-              <a:srgbClr val="000000">
-                <a:alpha val="10000"/>
-              </a:srgbClr>
-            </a:outerShdw>
-          </a:effectLst>
-        </p:spPr>
-      </p:sp>
-      <p:sp>
-        <p:nvSpPr>
-          <p:cNvPr id="34" name="Shape 32"/>
-          <p:cNvSpPr/>
-          <p:nvPr/>
-        </p:nvSpPr>
-        <p:spPr>
-          <a:xfrm>
-            <a:off x="3291840" y="2880360"/>
-            <a:ext cx="54864" cy="1600200"/>
-          </a:xfrm>
-          <a:prstGeom prst="rect">
-            <a:avLst/>
-          </a:prstGeom>
-          <a:solidFill>
-            <a:srgbClr val="16A34A"/>
-          </a:solidFill>
-          <a:ln/>
-        </p:spPr>
-      </p:sp>
-      <p:sp>
-        <p:nvSpPr>
-          <p:cNvPr id="35" name="Shape 33"/>
-          <p:cNvSpPr/>
-          <p:nvPr/>
-        </p:nvSpPr>
-        <p:spPr>
-          <a:xfrm>
-            <a:off x="5120640" y="2953512"/>
-            <a:ext cx="658368" cy="228600"/>
-          </a:xfrm>
-          <a:prstGeom prst="rect">
-            <a:avLst/>
-          </a:prstGeom>
-          <a:solidFill>
-            <a:srgbClr val="DCFCE7"/>
-          </a:solidFill>
-          <a:ln/>
-        </p:spPr>
-      </p:sp>
-      <p:sp>
-        <p:nvSpPr>
-          <p:cNvPr id="36" name="Text 34"/>
-          <p:cNvSpPr/>
-          <p:nvPr/>
-        </p:nvSpPr>
-        <p:spPr>
-          <a:xfrm>
-            <a:off x="5120640" y="2953512"/>
-            <a:ext cx="658368" cy="228600"/>
-          </a:xfrm>
-          <a:prstGeom prst="rect">
-            <a:avLst/>
-          </a:prstGeom>
-          <a:noFill/>
-          <a:ln/>
-        </p:spPr>
-        <p:txBody>
-          <a:bodyPr wrap="square" lIns="0" tIns="0" rIns="0" bIns="0" rtlCol="0" anchor="ctr"/>
-          <a:lstStyle/>
-          <a:p>
-            <a:pPr algn="ctr" indent="0" marL="0">
-              <a:buNone/>
-            </a:pPr>
-            <a:r>
-              <a:rPr lang="en-US" sz="900" b="1" dirty="0">
-                <a:solidFill>
-                  <a:srgbClr val="16A34A"/>
-                </a:solidFill>
-                <a:latin typeface="Arial" pitchFamily="34" charset="0"/>
-                <a:ea typeface="Arial" pitchFamily="34" charset="-122"/>
-                <a:cs typeface="Arial" pitchFamily="34" charset="-120"/>
-              </a:rPr>
-              <a:t>20件+</a:t>
-            </a:r>
-            <a:endParaRPr lang="en-US" sz="900" dirty="0"/>
-          </a:p>
-        </p:txBody>
-      </p:sp>
-      <p:sp>
-        <p:nvSpPr>
-          <p:cNvPr id="37" name="Text 35"/>
-          <p:cNvSpPr/>
-          <p:nvPr/>
-        </p:nvSpPr>
-        <p:spPr>
-          <a:xfrm>
-            <a:off x="3429000" y="2953512"/>
-            <a:ext cx="1645920" cy="274320"/>
-          </a:xfrm>
-          <a:prstGeom prst="rect">
-            <a:avLst/>
-          </a:prstGeom>
-          <a:noFill/>
-          <a:ln/>
-        </p:spPr>
-        <p:txBody>
-          <a:bodyPr wrap="square" lIns="0" tIns="0" rIns="0" bIns="0" rtlCol="0" anchor="ctr"/>
-          <a:lstStyle/>
-          <a:p>
-            <a:pPr indent="0" marL="0">
-              <a:buNone/>
-            </a:pPr>
-            <a:r>
-              <a:rPr lang="en-US" sz="1300" b="1" dirty="0">
-                <a:solidFill>
-                  <a:srgbClr val="1A2744"/>
-                </a:solidFill>
-                <a:latin typeface="Arial" pitchFamily="34" charset="0"/>
-                <a:ea typeface="Arial" pitchFamily="34" charset="-122"/>
-                <a:cs typeface="Arial" pitchFamily="34" charset="-120"/>
-              </a:rPr>
-              <a:t>快適さ・設備</a:t>
-            </a:r>
-            <a:endParaRPr lang="en-US" sz="1300" dirty="0"/>
-          </a:p>
-        </p:txBody>
-      </p:sp>
-      <p:sp>
-        <p:nvSpPr>
-          <p:cNvPr id="38" name="Text 36"/>
-          <p:cNvSpPr/>
-          <p:nvPr/>
-        </p:nvSpPr>
-        <p:spPr>
-          <a:xfrm>
-            <a:off x="3429000" y="3246120"/>
-            <a:ext cx="2377440" cy="365760"/>
-          </a:xfrm>
-          <a:prstGeom prst="rect">
-            <a:avLst/>
-          </a:prstGeom>
-          <a:noFill/>
-          <a:ln/>
-        </p:spPr>
-        <p:txBody>
-          <a:bodyPr wrap="square" lIns="0" tIns="0" rIns="0" bIns="0" rtlCol="0" anchor="ctr"/>
-          <a:lstStyle/>
-          <a:p>
-            <a:pPr indent="0" marL="0">
-              <a:buNone/>
-            </a:pPr>
-            <a:r>
-              <a:rPr lang="en-US" sz="900" dirty="0">
-                <a:solidFill>
-                  <a:srgbClr val="64748B"/>
-                </a:solidFill>
-                <a:latin typeface="Arial" pitchFamily="34" charset="0"/>
-                <a:ea typeface="Arial" pitchFamily="34" charset="-122"/>
-                <a:cs typeface="Arial" pitchFamily="34" charset="-120"/>
-              </a:rPr>
-              <a:t>いつも、変わりなく場所が変わっても快適で、安心</a:t>
-            </a:r>
-            <a:endParaRPr lang="en-US" sz="900" dirty="0"/>
-          </a:p>
-        </p:txBody>
-      </p:sp>
-      <p:sp>
-        <p:nvSpPr>
-          <p:cNvPr id="39" name="Text 37"/>
-          <p:cNvSpPr/>
-          <p:nvPr/>
-        </p:nvSpPr>
-        <p:spPr>
-          <a:xfrm>
-            <a:off x="3429000" y="3657600"/>
-            <a:ext cx="2377440" cy="640080"/>
-          </a:xfrm>
-          <a:prstGeom prst="rect">
-            <a:avLst/>
-          </a:prstGeom>
-          <a:noFill/>
-          <a:ln/>
-        </p:spPr>
-        <p:txBody>
-          <a:bodyPr wrap="square" lIns="0" tIns="0" rIns="0" bIns="0" rtlCol="0" anchor="ctr"/>
-          <a:lstStyle/>
-          <a:p>
-            <a:pPr indent="0" marL="0">
-              <a:buNone/>
-            </a:pPr>
-            <a:r>
-              <a:rPr lang="en-US" sz="900" i="1" dirty="0">
-                <a:solidFill>
-                  <a:srgbClr val="3B7DD8"/>
-                </a:solidFill>
-                <a:latin typeface="Arial" pitchFamily="34" charset="0"/>
-                <a:ea typeface="Arial" pitchFamily="34" charset="-122"/>
-                <a:cs typeface="Arial" pitchFamily="34" charset="-120"/>
-              </a:rPr>
-              <a:t>「清潔で静かで快適でした」</a:t>
-            </a:r>
-            <a:endParaRPr lang="en-US" sz="900" dirty="0"/>
-          </a:p>
-        </p:txBody>
-      </p:sp>
-      <p:sp>
-        <p:nvSpPr>
-          <p:cNvPr id="40" name="Shape 38"/>
-          <p:cNvSpPr/>
-          <p:nvPr/>
-        </p:nvSpPr>
-        <p:spPr>
-          <a:xfrm>
-            <a:off x="6126480" y="2880360"/>
-            <a:ext cx="2651760" cy="1600200"/>
-          </a:xfrm>
-          <a:prstGeom prst="rect">
-            <a:avLst/>
-          </a:prstGeom>
-          <a:solidFill>
-            <a:srgbClr val="FFFFFF"/>
-          </a:solidFill>
-          <a:ln/>
-          <a:effectLst>
-            <a:outerShdw sx="100000" sy="100000" kx="0" ky="0" algn="bl" rotWithShape="0" blurRad="50800" dist="25400" dir="8100000">
-              <a:srgbClr val="000000">
-                <a:alpha val="10000"/>
-              </a:srgbClr>
-            </a:outerShdw>
-          </a:effectLst>
-        </p:spPr>
-      </p:sp>
-      <p:sp>
-        <p:nvSpPr>
-          <p:cNvPr id="41" name="Shape 39"/>
-          <p:cNvSpPr/>
-          <p:nvPr/>
-        </p:nvSpPr>
-        <p:spPr>
-          <a:xfrm>
-            <a:off x="6126480" y="2880360"/>
-            <a:ext cx="54864" cy="1600200"/>
-          </a:xfrm>
-          <a:prstGeom prst="rect">
-            <a:avLst/>
-          </a:prstGeom>
-          <a:solidFill>
-            <a:srgbClr val="16A34A"/>
-          </a:solidFill>
-          <a:ln/>
-        </p:spPr>
-      </p:sp>
-      <p:sp>
-        <p:nvSpPr>
-          <p:cNvPr id="42" name="Shape 40"/>
-          <p:cNvSpPr/>
-          <p:nvPr/>
-        </p:nvSpPr>
-        <p:spPr>
-          <a:xfrm>
-            <a:off x="7955280" y="2953512"/>
-            <a:ext cx="658368" cy="228600"/>
-          </a:xfrm>
-          <a:prstGeom prst="rect">
-            <a:avLst/>
-          </a:prstGeom>
-          <a:solidFill>
-            <a:srgbClr val="DCFCE7"/>
-          </a:solidFill>
-          <a:ln/>
-        </p:spPr>
-      </p:sp>
-      <p:sp>
-        <p:nvSpPr>
-          <p:cNvPr id="43" name="Text 41"/>
-          <p:cNvSpPr/>
-          <p:nvPr/>
-        </p:nvSpPr>
-        <p:spPr>
-          <a:xfrm>
-            <a:off x="7955280" y="2953512"/>
-            <a:ext cx="658368" cy="228600"/>
-          </a:xfrm>
-          <a:prstGeom prst="rect">
-            <a:avLst/>
-          </a:prstGeom>
-          <a:noFill/>
-          <a:ln/>
-        </p:spPr>
-        <p:txBody>
-          <a:bodyPr wrap="square" lIns="0" tIns="0" rIns="0" bIns="0" rtlCol="0" anchor="ctr"/>
-          <a:lstStyle/>
-          <a:p>
-            <a:pPr algn="ctr" indent="0" marL="0">
-              <a:buNone/>
-            </a:pPr>
-            <a:r>
-              <a:rPr lang="en-US" sz="900" b="1" dirty="0">
-                <a:solidFill>
-                  <a:srgbClr val="16A34A"/>
-                </a:solidFill>
-                <a:latin typeface="Arial" pitchFamily="34" charset="0"/>
-                <a:ea typeface="Arial" pitchFamily="34" charset="-122"/>
-                <a:cs typeface="Arial" pitchFamily="34" charset="-120"/>
-              </a:rPr>
-              <a:t>10件+</a:t>
-            </a:r>
-            <a:endParaRPr lang="en-US" sz="900" dirty="0"/>
-          </a:p>
-        </p:txBody>
-      </p:sp>
-      <p:sp>
-        <p:nvSpPr>
-          <p:cNvPr id="44" name="Text 42"/>
-          <p:cNvSpPr/>
-          <p:nvPr/>
-        </p:nvSpPr>
-        <p:spPr>
-          <a:xfrm>
-            <a:off x="6263640" y="2953512"/>
-            <a:ext cx="1645920" cy="274320"/>
-          </a:xfrm>
-          <a:prstGeom prst="rect">
-            <a:avLst/>
-          </a:prstGeom>
-          <a:noFill/>
-          <a:ln/>
-        </p:spPr>
-        <p:txBody>
-          <a:bodyPr wrap="square" lIns="0" tIns="0" rIns="0" bIns="0" rtlCol="0" anchor="ctr"/>
-          <a:lstStyle/>
-          <a:p>
-            <a:pPr indent="0" marL="0">
-              <a:buNone/>
-            </a:pPr>
-            <a:r>
-              <a:rPr lang="en-US" sz="1300" b="1" dirty="0">
-                <a:solidFill>
-                  <a:srgbClr val="1A2744"/>
-                </a:solidFill>
-                <a:latin typeface="Arial" pitchFamily="34" charset="0"/>
-                <a:ea typeface="Arial" pitchFamily="34" charset="-122"/>
-                <a:cs typeface="Arial" pitchFamily="34" charset="-120"/>
-              </a:rPr>
-              <a:t>コンビニ・周辺施設</a:t>
-            </a:r>
-            <a:endParaRPr lang="en-US" sz="1300" dirty="0"/>
-          </a:p>
-        </p:txBody>
-      </p:sp>
-      <p:sp>
-        <p:nvSpPr>
-          <p:cNvPr id="45" name="Text 43"/>
-          <p:cNvSpPr/>
-          <p:nvPr/>
-        </p:nvSpPr>
-        <p:spPr>
-          <a:xfrm>
-            <a:off x="6263640" y="3246120"/>
-            <a:ext cx="2377440" cy="365760"/>
-          </a:xfrm>
-          <a:prstGeom prst="rect">
-            <a:avLst/>
-          </a:prstGeom>
-          <a:noFill/>
-          <a:ln/>
-        </p:spPr>
-        <p:txBody>
-          <a:bodyPr wrap="square" lIns="0" tIns="0" rIns="0" bIns="0" rtlCol="0" anchor="ctr"/>
-          <a:lstStyle/>
-          <a:p>
-            <a:pPr indent="0" marL="0">
-              <a:buNone/>
-            </a:pPr>
-            <a:r>
-              <a:rPr lang="en-US" sz="900" dirty="0">
-                <a:solidFill>
-                  <a:srgbClr val="64748B"/>
-                </a:solidFill>
-                <a:latin typeface="Arial" pitchFamily="34" charset="0"/>
-                <a:ea typeface="Arial" pitchFamily="34" charset="-122"/>
-                <a:cs typeface="Arial" pitchFamily="34" charset="-120"/>
-              </a:rPr>
-              <a:t>Cleanliness, convenience, breakfast</a:t>
-            </a:r>
-            <a:endParaRPr lang="en-US" sz="900" dirty="0"/>
-          </a:p>
-        </p:txBody>
-      </p:sp>
-      <p:sp>
-        <p:nvSpPr>
-          <p:cNvPr id="46" name="Text 44"/>
-          <p:cNvSpPr/>
-          <p:nvPr/>
-        </p:nvSpPr>
-        <p:spPr>
-          <a:xfrm>
-            <a:off x="6263640" y="3657600"/>
-            <a:ext cx="2377440" cy="640080"/>
-          </a:xfrm>
-          <a:prstGeom prst="rect">
-            <a:avLst/>
-          </a:prstGeom>
-          <a:noFill/>
-          <a:ln/>
-        </p:spPr>
-        <p:txBody>
-          <a:bodyPr wrap="square" lIns="0" tIns="0" rIns="0" bIns="0" rtlCol="0" anchor="ctr"/>
-          <a:lstStyle/>
-          <a:p>
-            <a:pPr indent="0" marL="0">
-              <a:buNone/>
-            </a:pPr>
-            <a:r>
-              <a:rPr lang="en-US" sz="900" i="1" dirty="0">
-                <a:solidFill>
-                  <a:srgbClr val="3B7DD8"/>
-                </a:solidFill>
-                <a:latin typeface="Arial" pitchFamily="34" charset="0"/>
-                <a:ea typeface="Arial" pitchFamily="34" charset="-122"/>
-                <a:cs typeface="Arial" pitchFamily="34" charset="-120"/>
-              </a:rPr>
-              <a:t>「駅、セブンイレブン、ローソン、ファミリーマートが近くにあり、とても便利な立地です」</a:t>
             </a:r>
             <a:endParaRPr lang="en-US" sz="900" dirty="0"/>
           </a:p>
@@ -12685,7 +12668,7 @@
                           <a:ea typeface="Arial" pitchFamily="34" charset="-122"/>
                           <a:cs typeface="Arial" pitchFamily="34" charset="-120"/>
                         </a:rPr>
-                        <a:t>Good hotel had everything needed for a Tokyo stay 良いホテルで、...</a:t>
+                        <a:t>I stayed here as a solo traveller and felt safe walking b...</a:t>
                       </a:r>
                       <a:endParaRPr lang="en-US" sz="900" dirty="0">
                         <a:latin typeface="Arial" charset="0"/>
@@ -12891,7 +12874,7 @@
                           <a:ea typeface="Arial" pitchFamily="34" charset="-122"/>
                           <a:cs typeface="Arial" pitchFamily="34" charset="-120"/>
                         </a:rPr>
-                        <a:t>浴室・水回り</a:t>
+                        <a:t>部屋の狭さ</a:t>
                       </a:r>
                       <a:endParaRPr lang="en-US" sz="900" dirty="0">
                         <a:latin typeface="Arial" charset="0"/>
@@ -12959,7 +12942,7 @@
                           <a:ea typeface="Arial" pitchFamily="34" charset="-122"/>
                           <a:cs typeface="Arial" pitchFamily="34" charset="-120"/>
                         </a:rPr>
-                        <a:t>14時から17時までにチェックインすると人形焼が無料でもらえます🆓 ラウンジは広くウェルカムドリンクが飲み放題で...</a:t>
+                        <a:t>客室は典型的な東京の部屋で、やや狭めです</a:t>
                       </a:r>
                       <a:endParaRPr lang="en-US" sz="900" dirty="0">
                         <a:latin typeface="Arial" charset="0"/>
@@ -13027,7 +13010,7 @@
                           <a:ea typeface="Arial" pitchFamily="34" charset="-122"/>
                           <a:cs typeface="Arial" pitchFamily="34" charset="-120"/>
                         </a:rPr>
-                        <a:t>8件</a:t>
+                        <a:t>6件</a:t>
                       </a:r>
                       <a:endParaRPr lang="en-US" sz="900" dirty="0">
                         <a:latin typeface="Arial" charset="0"/>
@@ -13165,7 +13148,7 @@
                           <a:ea typeface="Arial" pitchFamily="34" charset="-122"/>
                           <a:cs typeface="Arial" pitchFamily="34" charset="-120"/>
                         </a:rPr>
-                        <a:t>部屋の狭さ</a:t>
+                        <a:t>浴室・水回り</a:t>
                       </a:r>
                       <a:endParaRPr lang="en-US" sz="900" dirty="0">
                         <a:latin typeface="Arial" charset="0"/>
@@ -13233,7 +13216,7 @@
                           <a:ea typeface="Arial" pitchFamily="34" charset="-122"/>
                           <a:cs typeface="Arial" pitchFamily="34" charset="-120"/>
                         </a:rPr>
-                        <a:t>欧米人で、アメリカのホテルのような快適さに慣れている方にとっては、特に窮屈に感じるかもしれません</a:t>
+                        <a:t>唯一の小さな難点は、シャワー中に排水溝から時折下水の臭いがすることでしたが、それほど強い臭いではなく、耐えられない...</a:t>
                       </a:r>
                       <a:endParaRPr lang="en-US" sz="900" dirty="0">
                         <a:latin typeface="Arial" charset="0"/>
@@ -13439,7 +13422,7 @@
                           <a:ea typeface="Arial" pitchFamily="34" charset="-122"/>
                           <a:cs typeface="Arial" pitchFamily="34" charset="-120"/>
                         </a:rPr>
-                        <a:t>対応・サービスの不満</a:t>
+                        <a:t>防音性能</a:t>
                       </a:r>
                       <a:endParaRPr lang="en-US" sz="900" dirty="0">
                         <a:latin typeface="Arial" charset="0"/>
@@ -13507,7 +13490,7 @@
                           <a:ea typeface="Arial" pitchFamily="34" charset="-122"/>
                           <a:cs typeface="Arial" pitchFamily="34" charset="-120"/>
                         </a:rPr>
-                        <a:t>みたいな感じでしたが、敷地内は禁煙ですと、毅然とした態度を示し、外国人は退散しました</a:t>
+                        <a:t>ホテルはとても静かで穏やかで、騒音の問題は全くありませんでした</a:t>
                       </a:r>
                       <a:endParaRPr lang="en-US" sz="900" dirty="0">
                         <a:latin typeface="Arial" charset="0"/>
@@ -13575,7 +13558,7 @@
                           <a:ea typeface="Arial" pitchFamily="34" charset="-122"/>
                           <a:cs typeface="Arial" pitchFamily="34" charset="-120"/>
                         </a:rPr>
-                        <a:t>6件</a:t>
+                        <a:t>3件</a:t>
                       </a:r>
                       <a:endParaRPr lang="en-US" sz="900" dirty="0">
                         <a:latin typeface="Arial" charset="0"/>
@@ -13713,7 +13696,7 @@
                           <a:ea typeface="Arial" pitchFamily="34" charset="-122"/>
                           <a:cs typeface="Arial" pitchFamily="34" charset="-120"/>
                         </a:rPr>
-                        <a:t>防音性能</a:t>
+                        <a:t>臭い・匂い</a:t>
                       </a:r>
                       <a:endParaRPr lang="en-US" sz="900" dirty="0">
                         <a:latin typeface="Arial" charset="0"/>
@@ -13781,7 +13764,7 @@
                           <a:ea typeface="Arial" pitchFamily="34" charset="-122"/>
                           <a:cs typeface="Arial" pitchFamily="34" charset="-120"/>
                         </a:rPr>
-                        <a:t>The luggage store was easy to use and convenient 最初の夜は隣室か...</a:t>
+                        <a:t>唯一の小さな難点は、シャワー中に排水溝から時折下水の臭いがすることでしたが、それほど強い臭いではなく、耐えられない...</a:t>
                       </a:r>
                       <a:endParaRPr lang="en-US" sz="900" dirty="0">
                         <a:latin typeface="Arial" charset="0"/>
@@ -13987,7 +13970,7 @@
                           <a:ea typeface="Arial" pitchFamily="34" charset="-122"/>
                           <a:cs typeface="Arial" pitchFamily="34" charset="-120"/>
                         </a:rPr>
-                        <a:t>臭い・匂い</a:t>
+                        <a:t>対応・サービスの不満</a:t>
                       </a:r>
                       <a:endParaRPr lang="en-US" sz="900" dirty="0">
                         <a:latin typeface="Arial" charset="0"/>
@@ -14055,7 +14038,7 @@
                           <a:ea typeface="Arial" pitchFamily="34" charset="-122"/>
                           <a:cs typeface="Arial" pitchFamily="34" charset="-120"/>
                         </a:rPr>
-                        <a:t>外国人の方の利用が多いようで不安でしたが、たまたま玄関先でタバコを吸っている外国人3人が居る所に遭遇したのですが、...</a:t>
+                        <a:t>みたいな感じでしたが、敷地内は禁煙ですと、毅然とした態度を示し、外国人は退散しました</a:t>
                       </a:r>
                       <a:endParaRPr lang="en-US" sz="900" dirty="0">
                         <a:latin typeface="Arial" charset="0"/>
@@ -14261,7 +14244,7 @@
                           <a:ea typeface="Arial" pitchFamily="34" charset="-122"/>
                           <a:cs typeface="Arial" pitchFamily="34" charset="-120"/>
                         </a:rPr>
-                        <a:t>清掃不備</a:t>
+                        <a:t>設備の老朽化</a:t>
                       </a:r>
                       <a:endParaRPr lang="en-US" sz="900" dirty="0">
                         <a:latin typeface="Arial" charset="0"/>
@@ -14329,7 +14312,7 @@
                           <a:ea typeface="Arial" pitchFamily="34" charset="-122"/>
                           <a:cs typeface="Arial" pitchFamily="34" charset="-120"/>
                         </a:rPr>
-                        <a:t>Alcune cose sono un po datate e sarebbero da cambiare (te...</a:t>
+                        <a:t>I also enjoyed the communal lounge/library area, where fr...</a:t>
                       </a:r>
                       <a:endParaRPr lang="en-US" sz="900" dirty="0">
                         <a:latin typeface="Arial" charset="0"/>
@@ -14449,6 +14432,280 @@
                   </a:tcPr>
                 </a:tc>
               </a:tr>
+              <a:tr h="320040">
+                <a:tc>
+                  <a:txBody>
+                    <a:bodyPr/>
+                    <a:lstStyle/>
+                    <a:p>
+                      <a:pPr algn="ctr" indent="0" marL="0">
+                        <a:buNone/>
+                      </a:pPr>
+                      <a:r>
+                        <a:rPr lang="en-US" sz="1200" b="1" dirty="0">
+                          <a:solidFill>
+                            <a:srgbClr val="94A3B8"/>
+                          </a:solidFill>
+                          <a:latin typeface="Arial" pitchFamily="34" charset="0"/>
+                          <a:ea typeface="Arial" pitchFamily="34" charset="-122"/>
+                          <a:cs typeface="Arial" pitchFamily="34" charset="-120"/>
+                        </a:rPr>
+                        <a:t>C</a:t>
+                      </a:r>
+                      <a:endParaRPr lang="en-US" sz="1200" dirty="0">
+                        <a:latin typeface="Arial" charset="0"/>
+                        <a:ea typeface="Arial" charset="0"/>
+                        <a:cs typeface="Arial" charset="0"/>
+                      </a:endParaRPr>
+                    </a:p>
+                  </a:txBody>
+                  <a:tcPr marL="91440" marR="91440" marT="45720" marB="45720">
+                    <a:lnL w="6350" cap="flat" cmpd="sng" algn="ctr">
+                      <a:solidFill>
+                        <a:srgbClr val="CBD5E1"/>
+                      </a:solidFill>
+                      <a:prstDash val="solid"/>
+                      <a:round/>
+                      <a:headEnd type="none" w="med" len="med"/>
+                      <a:tailEnd type="none" w="med" len="med"/>
+                    </a:lnL>
+                    <a:lnR w="6350" cap="flat" cmpd="sng" algn="ctr">
+                      <a:solidFill>
+                        <a:srgbClr val="CBD5E1"/>
+                      </a:solidFill>
+                      <a:prstDash val="solid"/>
+                      <a:round/>
+                      <a:headEnd type="none" w="med" len="med"/>
+                      <a:tailEnd type="none" w="med" len="med"/>
+                    </a:lnR>
+                    <a:lnT w="6350" cap="flat" cmpd="sng" algn="ctr">
+                      <a:solidFill>
+                        <a:srgbClr val="CBD5E1"/>
+                      </a:solidFill>
+                      <a:prstDash val="solid"/>
+                      <a:round/>
+                      <a:headEnd type="none" w="med" len="med"/>
+                      <a:tailEnd type="none" w="med" len="med"/>
+                    </a:lnT>
+                    <a:lnB w="6350" cap="flat" cmpd="sng" algn="ctr">
+                      <a:solidFill>
+                        <a:srgbClr val="CBD5E1"/>
+                      </a:solidFill>
+                      <a:prstDash val="solid"/>
+                      <a:round/>
+                      <a:headEnd type="none" w="med" len="med"/>
+                      <a:tailEnd type="none" w="med" len="med"/>
+                    </a:lnB>
+                    <a:solidFill>
+                      <a:srgbClr val="FFFFFF"/>
+                    </a:solidFill>
+                  </a:tcPr>
+                </a:tc>
+                <a:tc>
+                  <a:txBody>
+                    <a:bodyPr/>
+                    <a:lstStyle/>
+                    <a:p>
+                      <a:pPr indent="0" marL="0">
+                        <a:buNone/>
+                      </a:pPr>
+                      <a:r>
+                        <a:rPr lang="en-US" sz="900" b="1" dirty="0">
+                          <a:solidFill>
+                            <a:srgbClr val="334155"/>
+                          </a:solidFill>
+                          <a:latin typeface="Arial" pitchFamily="34" charset="0"/>
+                          <a:ea typeface="Arial" pitchFamily="34" charset="-122"/>
+                          <a:cs typeface="Arial" pitchFamily="34" charset="-120"/>
+                        </a:rPr>
+                        <a:t>清掃不備</a:t>
+                      </a:r>
+                      <a:endParaRPr lang="en-US" sz="900" dirty="0">
+                        <a:latin typeface="Arial" charset="0"/>
+                        <a:ea typeface="Arial" charset="0"/>
+                        <a:cs typeface="Arial" charset="0"/>
+                      </a:endParaRPr>
+                    </a:p>
+                  </a:txBody>
+                  <a:tcPr marL="91440" marR="91440" marT="45720" marB="45720">
+                    <a:lnL w="6350" cap="flat" cmpd="sng" algn="ctr">
+                      <a:solidFill>
+                        <a:srgbClr val="CBD5E1"/>
+                      </a:solidFill>
+                      <a:prstDash val="solid"/>
+                      <a:round/>
+                      <a:headEnd type="none" w="med" len="med"/>
+                      <a:tailEnd type="none" w="med" len="med"/>
+                    </a:lnL>
+                    <a:lnR w="6350" cap="flat" cmpd="sng" algn="ctr">
+                      <a:solidFill>
+                        <a:srgbClr val="CBD5E1"/>
+                      </a:solidFill>
+                      <a:prstDash val="solid"/>
+                      <a:round/>
+                      <a:headEnd type="none" w="med" len="med"/>
+                      <a:tailEnd type="none" w="med" len="med"/>
+                    </a:lnR>
+                    <a:lnT w="6350" cap="flat" cmpd="sng" algn="ctr">
+                      <a:solidFill>
+                        <a:srgbClr val="CBD5E1"/>
+                      </a:solidFill>
+                      <a:prstDash val="solid"/>
+                      <a:round/>
+                      <a:headEnd type="none" w="med" len="med"/>
+                      <a:tailEnd type="none" w="med" len="med"/>
+                    </a:lnT>
+                    <a:lnB w="6350" cap="flat" cmpd="sng" algn="ctr">
+                      <a:solidFill>
+                        <a:srgbClr val="CBD5E1"/>
+                      </a:solidFill>
+                      <a:prstDash val="solid"/>
+                      <a:round/>
+                      <a:headEnd type="none" w="med" len="med"/>
+                      <a:tailEnd type="none" w="med" len="med"/>
+                    </a:lnB>
+                    <a:solidFill>
+                      <a:srgbClr val="FFFFFF"/>
+                    </a:solidFill>
+                  </a:tcPr>
+                </a:tc>
+                <a:tc>
+                  <a:txBody>
+                    <a:bodyPr/>
+                    <a:lstStyle/>
+                    <a:p>
+                      <a:pPr indent="0" marL="0">
+                        <a:buNone/>
+                      </a:pPr>
+                      <a:r>
+                        <a:rPr lang="en-US" sz="900" dirty="0">
+                          <a:solidFill>
+                            <a:srgbClr val="64748B"/>
+                          </a:solidFill>
+                          <a:latin typeface="Arial" pitchFamily="34" charset="0"/>
+                          <a:ea typeface="Arial" pitchFamily="34" charset="-122"/>
+                          <a:cs typeface="Arial" pitchFamily="34" charset="-120"/>
+                        </a:rPr>
+                        <a:t>Alcune cose sono un po datate e sarebbero da cambiare (te...</a:t>
+                      </a:r>
+                      <a:endParaRPr lang="en-US" sz="900" dirty="0">
+                        <a:latin typeface="Arial" charset="0"/>
+                        <a:ea typeface="Arial" charset="0"/>
+                        <a:cs typeface="Arial" charset="0"/>
+                      </a:endParaRPr>
+                    </a:p>
+                  </a:txBody>
+                  <a:tcPr marL="91440" marR="91440" marT="45720" marB="45720">
+                    <a:lnL w="6350" cap="flat" cmpd="sng" algn="ctr">
+                      <a:solidFill>
+                        <a:srgbClr val="CBD5E1"/>
+                      </a:solidFill>
+                      <a:prstDash val="solid"/>
+                      <a:round/>
+                      <a:headEnd type="none" w="med" len="med"/>
+                      <a:tailEnd type="none" w="med" len="med"/>
+                    </a:lnL>
+                    <a:lnR w="6350" cap="flat" cmpd="sng" algn="ctr">
+                      <a:solidFill>
+                        <a:srgbClr val="CBD5E1"/>
+                      </a:solidFill>
+                      <a:prstDash val="solid"/>
+                      <a:round/>
+                      <a:headEnd type="none" w="med" len="med"/>
+                      <a:tailEnd type="none" w="med" len="med"/>
+                    </a:lnR>
+                    <a:lnT w="6350" cap="flat" cmpd="sng" algn="ctr">
+                      <a:solidFill>
+                        <a:srgbClr val="CBD5E1"/>
+                      </a:solidFill>
+                      <a:prstDash val="solid"/>
+                      <a:round/>
+                      <a:headEnd type="none" w="med" len="med"/>
+                      <a:tailEnd type="none" w="med" len="med"/>
+                    </a:lnT>
+                    <a:lnB w="6350" cap="flat" cmpd="sng" algn="ctr">
+                      <a:solidFill>
+                        <a:srgbClr val="CBD5E1"/>
+                      </a:solidFill>
+                      <a:prstDash val="solid"/>
+                      <a:round/>
+                      <a:headEnd type="none" w="med" len="med"/>
+                      <a:tailEnd type="none" w="med" len="med"/>
+                    </a:lnB>
+                    <a:solidFill>
+                      <a:srgbClr val="FFFFFF"/>
+                    </a:solidFill>
+                  </a:tcPr>
+                </a:tc>
+                <a:tc>
+                  <a:txBody>
+                    <a:bodyPr/>
+                    <a:lstStyle/>
+                    <a:p>
+                      <a:pPr algn="ctr" indent="0" marL="0">
+                        <a:buNone/>
+                      </a:pPr>
+                      <a:r>
+                        <a:rPr lang="en-US" sz="900" dirty="0">
+                          <a:solidFill>
+                            <a:srgbClr val="334155"/>
+                          </a:solidFill>
+                          <a:latin typeface="Arial" pitchFamily="34" charset="0"/>
+                          <a:ea typeface="Arial" pitchFamily="34" charset="-122"/>
+                          <a:cs typeface="Arial" pitchFamily="34" charset="-120"/>
+                        </a:rPr>
+                        <a:t>1件</a:t>
+                      </a:r>
+                      <a:endParaRPr lang="en-US" sz="900" dirty="0">
+                        <a:latin typeface="Arial" charset="0"/>
+                        <a:ea typeface="Arial" charset="0"/>
+                        <a:cs typeface="Arial" charset="0"/>
+                      </a:endParaRPr>
+                    </a:p>
+                  </a:txBody>
+                  <a:tcPr marL="91440" marR="91440" marT="45720" marB="45720">
+                    <a:lnL w="6350" cap="flat" cmpd="sng" algn="ctr">
+                      <a:solidFill>
+                        <a:srgbClr val="CBD5E1"/>
+                      </a:solidFill>
+                      <a:prstDash val="solid"/>
+                      <a:round/>
+                      <a:headEnd type="none" w="med" len="med"/>
+                      <a:tailEnd type="none" w="med" len="med"/>
+                    </a:lnL>
+                    <a:lnR w="6350" cap="flat" cmpd="sng" algn="ctr">
+                      <a:solidFill>
+                        <a:srgbClr val="CBD5E1"/>
+                      </a:solidFill>
+                      <a:prstDash val="solid"/>
+                      <a:round/>
+                      <a:headEnd type="none" w="med" len="med"/>
+                      <a:tailEnd type="none" w="med" len="med"/>
+                    </a:lnR>
+                    <a:lnT w="6350" cap="flat" cmpd="sng" algn="ctr">
+                      <a:solidFill>
+                        <a:srgbClr val="CBD5E1"/>
+                      </a:solidFill>
+                      <a:prstDash val="solid"/>
+                      <a:round/>
+                      <a:headEnd type="none" w="med" len="med"/>
+                      <a:tailEnd type="none" w="med" len="med"/>
+                    </a:lnT>
+                    <a:lnB w="6350" cap="flat" cmpd="sng" algn="ctr">
+                      <a:solidFill>
+                        <a:srgbClr val="CBD5E1"/>
+                      </a:solidFill>
+                      <a:prstDash val="solid"/>
+                      <a:round/>
+                      <a:headEnd type="none" w="med" len="med"/>
+                      <a:tailEnd type="none" w="med" len="med"/>
+                    </a:lnB>
+                    <a:solidFill>
+                      <a:srgbClr val="FFFFFF"/>
+                    </a:solidFill>
+                  </a:tcPr>
+                </a:tc>
+              </a:tr>
             </a:tbl>
           </a:graphicData>
         </a:graphic>
@@ -16325,7 +16582,7 @@
                 <a:ea typeface="Arial" pitchFamily="34" charset="-122"/>
                 <a:cs typeface="Arial" pitchFamily="34" charset="-120"/>
               </a:rPr>
-              <a:t>客室設備のアップグレード</a:t>
+              <a:t>客室リニューアル計画</a:t>
             </a:r>
             <a:endParaRPr lang="en-US" sz="1000" dirty="0"/>
           </a:p>
@@ -16368,7 +16625,7 @@
                 <a:ea typeface="Arial" pitchFamily="34" charset="-122"/>
                 <a:cs typeface="Arial" pitchFamily="34" charset="-120"/>
               </a:rPr>
-              <a:t>内装の定期的なリフレッシュ計画の策定</a:t>
+              <a:t>壁紙・カーペットの張替えによる「古さ」印象の払拭</a:t>
             </a:r>
             <a:endParaRPr lang="en-US" sz="900" dirty="0"/>
           </a:p>
@@ -16389,7 +16646,7 @@
                 <a:ea typeface="Arial" pitchFamily="34" charset="-122"/>
                 <a:cs typeface="Arial" pitchFamily="34" charset="-120"/>
               </a:rPr>
-              <a:t>照明・電源周りの設備更新</a:t>
+              <a:t>照明のLED化・調光機能の追加で客室の雰囲気向上</a:t>
             </a:r>
             <a:endParaRPr lang="en-US" sz="900" dirty="0"/>
           </a:p>
@@ -16410,7 +16667,7 @@
                 <a:ea typeface="Arial" pitchFamily="34" charset="-122"/>
                 <a:cs typeface="Arial" pitchFamily="34" charset="-120"/>
               </a:rPr>
-              <a:t>快適性向上のための設備投資計画の立案</a:t>
+              <a:t>USB充電ポート付きコンセントの設置</a:t>
             </a:r>
             <a:endParaRPr lang="en-US" sz="900" dirty="0"/>
           </a:p>

--- a/納品レポート/ホテル別レポート/comfort_era_higashikanda_口コミ分析レポート.pptx
+++ b/納品レポート/ホテル別レポート/comfort_era_higashikanda_口コミ分析レポート.pptx
@@ -2784,7 +2784,7 @@
                 <a:ea typeface="Arial" pitchFamily="34" charset="-122"/>
                 <a:cs typeface="Arial" pitchFamily="34" charset="-120"/>
               </a:rPr>
-              <a:t>作成日：2026年4月10日</a:t>
+              <a:t>作成日：2026年4月11日</a:t>
             </a:r>
             <a:endParaRPr lang="en-US" sz="1000" dirty="0"/>
           </a:p>

--- a/納品レポート/ホテル別レポート/comfort_era_higashikanda_口コミ分析レポート.pptx
+++ b/納品レポート/ホテル別レポート/comfort_era_higashikanda_口コミ分析レポート.pptx
@@ -2702,7 +2702,7 @@
                 <a:ea typeface="Arial" pitchFamily="34" charset="-122"/>
                 <a:cs typeface="Arial" pitchFamily="34" charset="-120"/>
               </a:rPr>
-              <a:t>コンフォートホテルERA東京東神田</a:t>
+              <a:t>コンフォートホテルERA東神田</a:t>
             </a:r>
             <a:endParaRPr lang="en-US" sz="1600" dirty="0"/>
           </a:p>
@@ -2784,7 +2784,7 @@
                 <a:ea typeface="Arial" pitchFamily="34" charset="-122"/>
                 <a:cs typeface="Arial" pitchFamily="34" charset="-120"/>
               </a:rPr>
-              <a:t>作成日：2026年4月11日</a:t>
+              <a:t>作成日：2026年4月13日</a:t>
             </a:r>
             <a:endParaRPr lang="en-US" sz="1000" dirty="0"/>
           </a:p>

--- a/納品レポート/ホテル別レポート/comfort_era_higashikanda_口コミ分析レポート.pptx
+++ b/納品レポート/ホテル別レポート/comfort_era_higashikanda_口コミ分析レポート.pptx
@@ -2702,7 +2702,7 @@
                 <a:ea typeface="Arial" pitchFamily="34" charset="-122"/>
                 <a:cs typeface="Arial" pitchFamily="34" charset="-120"/>
               </a:rPr>
-              <a:t>コンフォートホテルERA東神田</a:t>
+              <a:t>コンフォートホテルERA東京東神田</a:t>
             </a:r>
             <a:endParaRPr lang="en-US" sz="1600" dirty="0"/>
           </a:p>
@@ -2784,7 +2784,7 @@
                 <a:ea typeface="Arial" pitchFamily="34" charset="-122"/>
                 <a:cs typeface="Arial" pitchFamily="34" charset="-120"/>
               </a:rPr>
-              <a:t>作成日：2026年4月13日</a:t>
+              <a:t>作成日：2026年4月15日</a:t>
             </a:r>
             <a:endParaRPr lang="en-US" sz="1000" dirty="0"/>
           </a:p>

--- a/納品レポート/ホテル別レポート/comfort_era_higashikanda_口コミ分析レポート.pptx
+++ b/納品レポート/ホテル別レポート/comfort_era_higashikanda_口コミ分析レポート.pptx
@@ -2784,7 +2784,7 @@
                 <a:ea typeface="Arial" pitchFamily="34" charset="-122"/>
                 <a:cs typeface="Arial" pitchFamily="34" charset="-120"/>
               </a:rPr>
-              <a:t>作成日：2026年4月16日</a:t>
+              <a:t>作成日：2026年4月20日</a:t>
             </a:r>
             <a:endParaRPr lang="en-US" sz="1000" dirty="0"/>
           </a:p>
@@ -6150,7 +6150,7 @@
                 <a:ea typeface="Arial" pitchFamily="34" charset="-122"/>
                 <a:cs typeface="Arial" pitchFamily="34" charset="-120"/>
               </a:rPr>
-              <a:t>部屋の狭さ </a:t>
+              <a:t>防音性能 </a:t>
             </a:r>
             <a:endParaRPr lang="en-US" sz="1100" dirty="0"/>
           </a:p>
@@ -6170,7 +6170,7 @@
                 <a:ea typeface="Arial" pitchFamily="34" charset="-122"/>
                 <a:cs typeface="Arial" pitchFamily="34" charset="-120"/>
               </a:rPr>
-              <a:t>  欧米人で、アメリカのホテルのような快適さに慣れている方にとっては、特に窮屈に感じるかもしれません</a:t>
+              <a:t>  The luggage store was easy to use and convenient 最初の夜は隣室か...</a:t>
             </a:r>
             <a:endParaRPr lang="en-US" sz="1100" dirty="0"/>
           </a:p>
@@ -13131,7 +13131,7 @@
                           <a:ea typeface="Arial" pitchFamily="34" charset="-122"/>
                           <a:cs typeface="Arial" pitchFamily="34" charset="-120"/>
                         </a:rPr>
-                        <a:t>部屋の狭さ</a:t>
+                        <a:t>防音性能</a:t>
                       </a:r>
                       <a:endParaRPr lang="en-US" sz="900" dirty="0">
                         <a:latin typeface="Arial" charset="0"/>
@@ -13199,7 +13199,7 @@
                           <a:ea typeface="Arial" pitchFamily="34" charset="-122"/>
                           <a:cs typeface="Arial" pitchFamily="34" charset="-120"/>
                         </a:rPr>
-                        <a:t>欧米人で、アメリカのホテルのような快適さに慣れている方にとっては、特に窮屈に感じるかもしれません</a:t>
+                        <a:t>The luggage store was easy to use and convenient 最初の夜は隣室か...</a:t>
                       </a:r>
                       <a:endParaRPr lang="en-US" sz="900" dirty="0">
                         <a:latin typeface="Arial" charset="0"/>
@@ -13267,7 +13267,7 @@
                           <a:ea typeface="Arial" pitchFamily="34" charset="-122"/>
                           <a:cs typeface="Arial" pitchFamily="34" charset="-120"/>
                         </a:rPr>
-                        <a:t>3件</a:t>
+                        <a:t>2件</a:t>
                       </a:r>
                       <a:endParaRPr lang="en-US" sz="900" dirty="0">
                         <a:latin typeface="Arial" charset="0"/>
@@ -13405,7 +13405,7 @@
                           <a:ea typeface="Arial" pitchFamily="34" charset="-122"/>
                           <a:cs typeface="Arial" pitchFamily="34" charset="-120"/>
                         </a:rPr>
-                        <a:t>防音性能</a:t>
+                        <a:t>部屋の狭さ</a:t>
                       </a:r>
                       <a:endParaRPr lang="en-US" sz="900" dirty="0">
                         <a:latin typeface="Arial" charset="0"/>
@@ -13473,7 +13473,7 @@
                           <a:ea typeface="Arial" pitchFamily="34" charset="-122"/>
                           <a:cs typeface="Arial" pitchFamily="34" charset="-120"/>
                         </a:rPr>
-                        <a:t>The luggage store was easy to use and convenient 最初の夜は隣室か...</a:t>
+                        <a:t>The rooms are quite small (like everywhere in Japan), but...</a:t>
                       </a:r>
                       <a:endParaRPr lang="en-US" sz="900" dirty="0">
                         <a:latin typeface="Arial" charset="0"/>

--- a/納品レポート/ホテル別レポート/comfort_era_higashikanda_口コミ分析レポート.pptx
+++ b/納品レポート/ホテル別レポート/comfort_era_higashikanda_口コミ分析レポート.pptx
@@ -2702,7 +2702,7 @@
                 <a:ea typeface="Arial" pitchFamily="34" charset="-122"/>
                 <a:cs typeface="Arial" pitchFamily="34" charset="-120"/>
               </a:rPr>
-              <a:t>コンフォートホテルERA東神田</a:t>
+              <a:t>コンフォートイン東京東神田</a:t>
             </a:r>
             <a:endParaRPr lang="en-US" sz="1600" dirty="0"/>
           </a:p>
@@ -2784,7 +2784,7 @@
                 <a:ea typeface="Arial" pitchFamily="34" charset="-122"/>
                 <a:cs typeface="Arial" pitchFamily="34" charset="-120"/>
               </a:rPr>
-              <a:t>作成日：2026年4月20日</a:t>
+              <a:t>作成日：2026年4月21日</a:t>
             </a:r>
             <a:endParaRPr lang="en-US" sz="1000" dirty="0"/>
           </a:p>
@@ -6150,7 +6150,7 @@
                 <a:ea typeface="Arial" pitchFamily="34" charset="-122"/>
                 <a:cs typeface="Arial" pitchFamily="34" charset="-120"/>
               </a:rPr>
-              <a:t>防音性能 </a:t>
+              <a:t>部屋の狭さ </a:t>
             </a:r>
             <a:endParaRPr lang="en-US" sz="1100" dirty="0"/>
           </a:p>
@@ -6170,7 +6170,7 @@
                 <a:ea typeface="Arial" pitchFamily="34" charset="-122"/>
                 <a:cs typeface="Arial" pitchFamily="34" charset="-120"/>
               </a:rPr>
-              <a:t>  The luggage store was easy to use and convenient 最初の夜は隣室か...</a:t>
+              <a:t>  欧米人で、アメリカのホテルのような快適さに慣れている方にとっては、特に窮屈に感じるかもしれません</a:t>
             </a:r>
             <a:endParaRPr lang="en-US" sz="1100" dirty="0"/>
           </a:p>
@@ -13131,7 +13131,7 @@
                           <a:ea typeface="Arial" pitchFamily="34" charset="-122"/>
                           <a:cs typeface="Arial" pitchFamily="34" charset="-120"/>
                         </a:rPr>
-                        <a:t>防音性能</a:t>
+                        <a:t>部屋の狭さ</a:t>
                       </a:r>
                       <a:endParaRPr lang="en-US" sz="900" dirty="0">
                         <a:latin typeface="Arial" charset="0"/>
@@ -13199,7 +13199,7 @@
                           <a:ea typeface="Arial" pitchFamily="34" charset="-122"/>
                           <a:cs typeface="Arial" pitchFamily="34" charset="-120"/>
                         </a:rPr>
-                        <a:t>The luggage store was easy to use and convenient 最初の夜は隣室か...</a:t>
+                        <a:t>欧米人で、アメリカのホテルのような快適さに慣れている方にとっては、特に窮屈に感じるかもしれません</a:t>
                       </a:r>
                       <a:endParaRPr lang="en-US" sz="900" dirty="0">
                         <a:latin typeface="Arial" charset="0"/>
@@ -13267,7 +13267,7 @@
                           <a:ea typeface="Arial" pitchFamily="34" charset="-122"/>
                           <a:cs typeface="Arial" pitchFamily="34" charset="-120"/>
                         </a:rPr>
-                        <a:t>2件</a:t>
+                        <a:t>3件</a:t>
                       </a:r>
                       <a:endParaRPr lang="en-US" sz="900" dirty="0">
                         <a:latin typeface="Arial" charset="0"/>
@@ -13405,7 +13405,7 @@
                           <a:ea typeface="Arial" pitchFamily="34" charset="-122"/>
                           <a:cs typeface="Arial" pitchFamily="34" charset="-120"/>
                         </a:rPr>
-                        <a:t>部屋の狭さ</a:t>
+                        <a:t>防音性能</a:t>
                       </a:r>
                       <a:endParaRPr lang="en-US" sz="900" dirty="0">
                         <a:latin typeface="Arial" charset="0"/>
@@ -13473,7 +13473,7 @@
                           <a:ea typeface="Arial" pitchFamily="34" charset="-122"/>
                           <a:cs typeface="Arial" pitchFamily="34" charset="-120"/>
                         </a:rPr>
-                        <a:t>The rooms are quite small (like everywhere in Japan), but...</a:t>
+                        <a:t>The luggage store was easy to use and convenient 最初の夜は隣室か...</a:t>
                       </a:r>
                       <a:endParaRPr lang="en-US" sz="900" dirty="0">
                         <a:latin typeface="Arial" charset="0"/>

--- a/納品レポート/ホテル別レポート/comfort_era_higashikanda_口コミ分析レポート.pptx
+++ b/納品レポート/ホテル別レポート/comfort_era_higashikanda_口コミ分析レポート.pptx
@@ -2702,7 +2702,7 @@
                 <a:ea typeface="Arial" pitchFamily="34" charset="-122"/>
                 <a:cs typeface="Arial" pitchFamily="34" charset="-120"/>
               </a:rPr>
-              <a:t>コンフォートイン東京東神田</a:t>
+              <a:t>コンフォートホテルERA東京東神田</a:t>
             </a:r>
             <a:endParaRPr lang="en-US" sz="1600" dirty="0"/>
           </a:p>
@@ -2784,7 +2784,7 @@
                 <a:ea typeface="Arial" pitchFamily="34" charset="-122"/>
                 <a:cs typeface="Arial" pitchFamily="34" charset="-120"/>
               </a:rPr>
-              <a:t>作成日：2026年4月21日</a:t>
+              <a:t>作成日：2026年4月22日</a:t>
             </a:r>
             <a:endParaRPr lang="en-US" sz="1000" dirty="0"/>
           </a:p>
